--- a/Data/Presentation_Hackathon_Damage_Intelligence_EN.pptx
+++ b/Data/Presentation_Hackathon_Damage_Intelligence_EN.pptx
@@ -1,1664 +1,132 @@
 
 <file path=ppt/presentation.xml><?xml version="1.0" encoding="utf-8"?>
-<p:presentation xmlns:p="http://schemas.openxmlformats.org/presentationml/2006/main">
+<p:presentation xmlns:a="http://schemas.openxmlformats.org/drawingml/2006/main" xmlns:r="http://schemas.openxmlformats.org/officeDocument/2006/relationships" xmlns:p="http://schemas.openxmlformats.org/presentationml/2006/main">
   <p:sldMasterIdLst>
-    <p:sldMasterId xmlns:r="http://schemas.openxmlformats.org/officeDocument/2006/relationships" id="2147483648" r:id="Rb62f042f380a4b10"/>
+    <p:sldMasterId id="2147483648" r:id="rId1"/>
   </p:sldMasterIdLst>
   <p:notesMasterIdLst>
-    <p:notesMasterId xmlns:r="http://schemas.openxmlformats.org/officeDocument/2006/relationships" r:id="R4dc70833060c4c86"/>
+    <p:notesMasterId r:id="rId10"/>
   </p:notesMasterIdLst>
   <p:sldIdLst>
-    <p:sldId xmlns:r="http://schemas.openxmlformats.org/officeDocument/2006/relationships" id="256" r:id="Ra66d0d730ea24327"/>
-    <p:sldId xmlns:r="http://schemas.openxmlformats.org/officeDocument/2006/relationships" id="257" r:id="Rbf19d94dd2384a15"/>
-    <p:sldId xmlns:r="http://schemas.openxmlformats.org/officeDocument/2006/relationships" id="258" r:id="Rcb25b37d0f7e4aa0"/>
-    <p:sldId xmlns:r="http://schemas.openxmlformats.org/officeDocument/2006/relationships" id="259" r:id="R017f590cc80c4e71"/>
-    <p:sldId xmlns:r="http://schemas.openxmlformats.org/officeDocument/2006/relationships" id="260" r:id="R466bfb9265ba4faf"/>
-    <p:sldId xmlns:r="http://schemas.openxmlformats.org/officeDocument/2006/relationships" id="261" r:id="R7927b5e920404afc"/>
-    <p:sldId xmlns:r="http://schemas.openxmlformats.org/officeDocument/2006/relationships" id="262" r:id="R44cc01346e924b0f"/>
-    <p:sldId xmlns:r="http://schemas.openxmlformats.org/officeDocument/2006/relationships" id="263" r:id="Rd91497ad6919457f"/>
+    <p:sldId id="256" r:id="rId2"/>
+    <p:sldId id="257" r:id="rId3"/>
+    <p:sldId id="258" r:id="rId4"/>
+    <p:sldId id="259" r:id="rId5"/>
+    <p:sldId id="260" r:id="rId6"/>
+    <p:sldId id="261" r:id="rId7"/>
+    <p:sldId id="262" r:id="rId8"/>
+    <p:sldId id="263" r:id="rId9"/>
   </p:sldIdLst>
   <p:sldSz cx="12192000" cy="6858000"/>
   <p:notesSz cx="6858000" cy="9144000"/>
+  <p:defaultTextStyle>
+    <a:defPPr>
+      <a:defRPr lang="en-US"/>
+    </a:defPPr>
+    <a:lvl1pPr marL="0" algn="l" defTabSz="914400" rtl="0" eaLnBrk="1" latinLnBrk="0" hangingPunct="1">
+      <a:defRPr sz="1800" kern="1200">
+        <a:solidFill>
+          <a:schemeClr val="tx1"/>
+        </a:solidFill>
+        <a:latin typeface="+mn-lt"/>
+        <a:ea typeface="+mn-ea"/>
+        <a:cs typeface="+mn-cs"/>
+      </a:defRPr>
+    </a:lvl1pPr>
+    <a:lvl2pPr marL="457200" algn="l" defTabSz="914400" rtl="0" eaLnBrk="1" latinLnBrk="0" hangingPunct="1">
+      <a:defRPr sz="1800" kern="1200">
+        <a:solidFill>
+          <a:schemeClr val="tx1"/>
+        </a:solidFill>
+        <a:latin typeface="+mn-lt"/>
+        <a:ea typeface="+mn-ea"/>
+        <a:cs typeface="+mn-cs"/>
+      </a:defRPr>
+    </a:lvl2pPr>
+    <a:lvl3pPr marL="914400" algn="l" defTabSz="914400" rtl="0" eaLnBrk="1" latinLnBrk="0" hangingPunct="1">
+      <a:defRPr sz="1800" kern="1200">
+        <a:solidFill>
+          <a:schemeClr val="tx1"/>
+        </a:solidFill>
+        <a:latin typeface="+mn-lt"/>
+        <a:ea typeface="+mn-ea"/>
+        <a:cs typeface="+mn-cs"/>
+      </a:defRPr>
+    </a:lvl3pPr>
+    <a:lvl4pPr marL="1371600" algn="l" defTabSz="914400" rtl="0" eaLnBrk="1" latinLnBrk="0" hangingPunct="1">
+      <a:defRPr sz="1800" kern="1200">
+        <a:solidFill>
+          <a:schemeClr val="tx1"/>
+        </a:solidFill>
+        <a:latin typeface="+mn-lt"/>
+        <a:ea typeface="+mn-ea"/>
+        <a:cs typeface="+mn-cs"/>
+      </a:defRPr>
+    </a:lvl4pPr>
+    <a:lvl5pPr marL="1828800" algn="l" defTabSz="914400" rtl="0" eaLnBrk="1" latinLnBrk="0" hangingPunct="1">
+      <a:defRPr sz="1800" kern="1200">
+        <a:solidFill>
+          <a:schemeClr val="tx1"/>
+        </a:solidFill>
+        <a:latin typeface="+mn-lt"/>
+        <a:ea typeface="+mn-ea"/>
+        <a:cs typeface="+mn-cs"/>
+      </a:defRPr>
+    </a:lvl5pPr>
+    <a:lvl6pPr marL="2286000" algn="l" defTabSz="914400" rtl="0" eaLnBrk="1" latinLnBrk="0" hangingPunct="1">
+      <a:defRPr sz="1800" kern="1200">
+        <a:solidFill>
+          <a:schemeClr val="tx1"/>
+        </a:solidFill>
+        <a:latin typeface="+mn-lt"/>
+        <a:ea typeface="+mn-ea"/>
+        <a:cs typeface="+mn-cs"/>
+      </a:defRPr>
+    </a:lvl6pPr>
+    <a:lvl7pPr marL="2743200" algn="l" defTabSz="914400" rtl="0" eaLnBrk="1" latinLnBrk="0" hangingPunct="1">
+      <a:defRPr sz="1800" kern="1200">
+        <a:solidFill>
+          <a:schemeClr val="tx1"/>
+        </a:solidFill>
+        <a:latin typeface="+mn-lt"/>
+        <a:ea typeface="+mn-ea"/>
+        <a:cs typeface="+mn-cs"/>
+      </a:defRPr>
+    </a:lvl7pPr>
+    <a:lvl8pPr marL="3200400" algn="l" defTabSz="914400" rtl="0" eaLnBrk="1" latinLnBrk="0" hangingPunct="1">
+      <a:defRPr sz="1800" kern="1200">
+        <a:solidFill>
+          <a:schemeClr val="tx1"/>
+        </a:solidFill>
+        <a:latin typeface="+mn-lt"/>
+        <a:ea typeface="+mn-ea"/>
+        <a:cs typeface="+mn-cs"/>
+      </a:defRPr>
+    </a:lvl8pPr>
+    <a:lvl9pPr marL="3657600" algn="l" defTabSz="914400" rtl="0" eaLnBrk="1" latinLnBrk="0" hangingPunct="1">
+      <a:defRPr sz="1800" kern="1200">
+        <a:solidFill>
+          <a:schemeClr val="tx1"/>
+        </a:solidFill>
+        <a:latin typeface="+mn-lt"/>
+        <a:ea typeface="+mn-ea"/>
+        <a:cs typeface="+mn-cs"/>
+      </a:defRPr>
+    </a:lvl9pPr>
+  </p:defaultTextStyle>
 </p:presentation>
 </file>
 
-<file path=ppt/notesMasters/notesMaster1.xml><?xml version="1.0" encoding="utf-8"?>
-<p:notesMaster xmlns:p="http://schemas.openxmlformats.org/presentationml/2006/main">
-  <p:cSld>
-    <p:bg>
-      <p:bgRef idx="1001">
-        <a:schemeClr xmlns:a="http://schemas.openxmlformats.org/drawingml/2006/main" val="bg1"/>
-      </p:bgRef>
-    </p:bg>
-    <p:spTree>
-      <p:nvGrpSpPr>
-        <p:cNvPr id="1" name=""/>
-        <p:cNvGrpSpPr/>
-        <p:nvPr/>
-      </p:nvGrpSpPr>
-      <p:grpSpPr>
-        <a:xfrm xmlns:a="http://schemas.openxmlformats.org/drawingml/2006/main"/>
-      </p:grpSpPr>
-      <p:sp>
-        <p:nvSpPr>
-          <p:cNvPr id="2" name="Header Placeholder"/>
-          <p:cNvSpPr/>
-          <p:nvPr>
-            <p:ph type="hdr" sz="quarter"/>
-          </p:nvPr>
-        </p:nvSpPr>
-        <p:spPr>
-          <a:prstGeom xmlns:a="http://schemas.openxmlformats.org/drawingml/2006/main" prst="rect">
-            <a:avLst/>
-          </a:prstGeom>
-        </p:spPr>
-        <p:txBody>
-          <a:bodyPr xmlns:a="http://schemas.openxmlformats.org/drawingml/2006/main"/>
-          <a:lstStyle xmlns:a="http://schemas.openxmlformats.org/drawingml/2006/main"/>
-          <a:p xmlns:a="http://schemas.openxmlformats.org/drawingml/2006/main"/>
-        </p:txBody>
-      </p:sp>
-      <p:sp>
-        <p:nvSpPr>
-          <p:cNvPr id="3" name="Date Placeholder"/>
-          <p:cNvSpPr/>
-          <p:nvPr>
-            <p:ph type="dt" sz="quarter" idx="1"/>
-          </p:nvPr>
-        </p:nvSpPr>
-        <p:spPr>
-          <a:prstGeom xmlns:a="http://schemas.openxmlformats.org/drawingml/2006/main" prst="rect">
-            <a:avLst/>
-          </a:prstGeom>
-        </p:spPr>
-        <p:txBody>
-          <a:bodyPr xmlns:a="http://schemas.openxmlformats.org/drawingml/2006/main"/>
-          <a:lstStyle xmlns:a="http://schemas.openxmlformats.org/drawingml/2006/main"/>
-          <a:p xmlns:a="http://schemas.openxmlformats.org/drawingml/2006/main"/>
-        </p:txBody>
-      </p:sp>
-      <p:sp>
-        <p:nvSpPr>
-          <p:cNvPr id="4" name="Slide Image Placeholder"/>
-          <p:cNvSpPr/>
-          <p:nvPr>
-            <p:ph type="sldImg" idx="2"/>
-          </p:nvPr>
-        </p:nvSpPr>
-        <p:spPr>
-          <a:prstGeom xmlns:a="http://schemas.openxmlformats.org/drawingml/2006/main" prst="rect">
-            <a:avLst/>
-          </a:prstGeom>
-        </p:spPr>
-        <p:txBody>
-          <a:bodyPr xmlns:a="http://schemas.openxmlformats.org/drawingml/2006/main"/>
-          <a:lstStyle xmlns:a="http://schemas.openxmlformats.org/drawingml/2006/main"/>
-          <a:p xmlns:a="http://schemas.openxmlformats.org/drawingml/2006/main"/>
-        </p:txBody>
-      </p:sp>
-      <p:sp>
-        <p:nvSpPr>
-          <p:cNvPr id="5" name="Notes Placeholder"/>
-          <p:cNvSpPr/>
-          <p:nvPr>
-            <p:ph type="body" sz="quarter" idx="3"/>
-          </p:nvPr>
-        </p:nvSpPr>
-        <p:spPr>
-          <a:prstGeom xmlns:a="http://schemas.openxmlformats.org/drawingml/2006/main" prst="rect">
-            <a:avLst/>
-          </a:prstGeom>
-        </p:spPr>
-        <p:txBody>
-          <a:bodyPr xmlns:a="http://schemas.openxmlformats.org/drawingml/2006/main"/>
-          <a:lstStyle xmlns:a="http://schemas.openxmlformats.org/drawingml/2006/main"/>
-          <a:p xmlns:a="http://schemas.openxmlformats.org/drawingml/2006/main"/>
-        </p:txBody>
-      </p:sp>
-      <p:sp>
-        <p:nvSpPr>
-          <p:cNvPr id="6" name="Footer Placeholder"/>
-          <p:cNvSpPr/>
-          <p:nvPr>
-            <p:ph type="ftr" sz="quarter" idx="4"/>
-          </p:nvPr>
-        </p:nvSpPr>
-        <p:spPr>
-          <a:prstGeom xmlns:a="http://schemas.openxmlformats.org/drawingml/2006/main" prst="rect">
-            <a:avLst/>
-          </a:prstGeom>
-        </p:spPr>
-        <p:txBody>
-          <a:bodyPr xmlns:a="http://schemas.openxmlformats.org/drawingml/2006/main"/>
-          <a:lstStyle xmlns:a="http://schemas.openxmlformats.org/drawingml/2006/main"/>
-          <a:p xmlns:a="http://schemas.openxmlformats.org/drawingml/2006/main"/>
-        </p:txBody>
-      </p:sp>
-      <p:sp>
-        <p:nvSpPr>
-          <p:cNvPr id="7" name="Slide Number Placeholder"/>
-          <p:cNvSpPr/>
-          <p:nvPr>
-            <p:ph type="sldNum" sz="quarter" idx="5"/>
-          </p:nvPr>
-        </p:nvSpPr>
-        <p:spPr>
-          <a:prstGeom xmlns:a="http://schemas.openxmlformats.org/drawingml/2006/main" prst="rect">
-            <a:avLst/>
-          </a:prstGeom>
-        </p:spPr>
-        <p:txBody>
-          <a:bodyPr xmlns:a="http://schemas.openxmlformats.org/drawingml/2006/main"/>
-          <a:lstStyle xmlns:a="http://schemas.openxmlformats.org/drawingml/2006/main"/>
-          <a:p xmlns:a="http://schemas.openxmlformats.org/drawingml/2006/main"/>
-        </p:txBody>
-      </p:sp>
-    </p:spTree>
-  </p:cSld>
-  <p:clrMap bg1="lt1" tx1="dk1" bg2="lt2" tx2="dk2" accent1="accent1" accent2="accent2" accent3="accent3" accent4="accent4" accent5="accent5" accent6="accent6" hlink="hlink" folHlink="folHlink"/>
-  <p:notesStyle>
-    <a:lvl1pPr xmlns:a="http://schemas.openxmlformats.org/drawingml/2006/main" marL="0" algn="l" defTabSz="914400" rtl="0" eaLnBrk="1" latinLnBrk="0" hangingPunct="1">
-      <a:defRPr sz="1200" kern="1200"/>
-    </a:lvl1pPr>
-  </p:notesStyle>
-</p:notesMaster>
-</file>
-
-<file path=ppt/notesMasters/theme/theme3.xml><?xml version="1.0" encoding="utf-8"?>
-<a:theme xmlns:a="http://schemas.openxmlformats.org/drawingml/2006/main" name="ChatGPT">
-  <a:themeElements>
-    <a:clrScheme name="ChatGPT">
-      <a:dk1>
-        <a:srgbClr val="000000"/>
-      </a:dk1>
-      <a:lt1>
-        <a:srgbClr val="FFFFFF"/>
-      </a:lt1>
-      <a:dk2>
-        <a:srgbClr val="0E2841"/>
-      </a:dk2>
-      <a:lt2>
-        <a:srgbClr val="E8E8E8"/>
-      </a:lt2>
-      <a:accent1>
-        <a:srgbClr val="156082"/>
-      </a:accent1>
-      <a:accent2>
-        <a:srgbClr val="E97132"/>
-      </a:accent2>
-      <a:accent3>
-        <a:srgbClr val="196B24"/>
-      </a:accent3>
-      <a:accent4>
-        <a:srgbClr val="0F9ED5"/>
-      </a:accent4>
-      <a:accent5>
-        <a:srgbClr val="A02B93"/>
-      </a:accent5>
-      <a:accent6>
-        <a:srgbClr val="4EA72E"/>
-      </a:accent6>
-      <a:hlink>
-        <a:srgbClr val="467886"/>
-      </a:hlink>
-      <a:folHlink>
-        <a:srgbClr val="96607D"/>
-      </a:folHlink>
-    </a:clrScheme>
-    <a:fontScheme name="Office">
-      <a:majorFont>
-        <a:latin typeface="Calibri Light"/>
-        <a:ea typeface="Calibri Light"/>
-        <a:cs typeface="Calibri Light"/>
-      </a:majorFont>
-      <a:minorFont>
-        <a:latin typeface="Calibri"/>
-        <a:ea typeface="Calibri"/>
-        <a:cs typeface="Calibri"/>
-      </a:minorFont>
-    </a:fontScheme>
-    <a:fmtScheme name="ChatGPT">
-      <a:fillStyleLst>
-        <a:solidFill>
-          <a:schemeClr val="phClr"/>
-        </a:solidFill>
-        <a:gradFill>
-          <a:gsLst>
-            <a:gs pos="0">
-              <a:schemeClr val="phClr">
-                <a:tint val="67000"/>
-                <a:lumMod val="110000"/>
-                <a:satMod val="105000"/>
-              </a:schemeClr>
-            </a:gs>
-            <a:gs pos="50000">
-              <a:schemeClr val="phClr">
-                <a:tint val="73000"/>
-                <a:lumMod val="105000"/>
-                <a:satMod val="103000"/>
-              </a:schemeClr>
-            </a:gs>
-            <a:gs pos="100000">
-              <a:schemeClr val="phClr">
-                <a:tint val="81000"/>
-                <a:lumMod val="105000"/>
-                <a:satMod val="109000"/>
-              </a:schemeClr>
-            </a:gs>
-          </a:gsLst>
-          <a:lin ang="5400000" scaled="0"/>
-        </a:gradFill>
-        <a:gradFill>
-          <a:gsLst>
-            <a:gs pos="0">
-              <a:schemeClr val="phClr">
-                <a:tint val="94000"/>
-                <a:lumMod val="102000"/>
-                <a:satMod val="103000"/>
-              </a:schemeClr>
-            </a:gs>
-            <a:gs pos="50000">
-              <a:schemeClr val="phClr">
-                <a:shade val="100000"/>
-                <a:lumMod val="100000"/>
-                <a:satMod val="110000"/>
-              </a:schemeClr>
-            </a:gs>
-            <a:gs pos="100000">
-              <a:schemeClr val="phClr">
-                <a:shade val="78000"/>
-                <a:lumMod val="99000"/>
-                <a:satMod val="120000"/>
-              </a:schemeClr>
-            </a:gs>
-          </a:gsLst>
-          <a:lin ang="5400000" scaled="0"/>
-        </a:gradFill>
-      </a:fillStyleLst>
-      <a:lnStyleLst>
-        <a:ln w="12700">
-          <a:solidFill>
-            <a:schemeClr val="phClr"/>
-          </a:solidFill>
-          <a:prstDash val="solid"/>
-        </a:ln>
-        <a:ln w="19050">
-          <a:solidFill>
-            <a:schemeClr val="phClr"/>
-          </a:solidFill>
-          <a:prstDash val="solid"/>
-        </a:ln>
-        <a:ln w="25400">
-          <a:solidFill>
-            <a:schemeClr val="phClr"/>
-          </a:solidFill>
-          <a:prstDash val="solid"/>
-        </a:ln>
-      </a:lnStyleLst>
-      <a:effectStyleLst>
-        <a:effectStyle>
-          <a:effectLst/>
-        </a:effectStyle>
-        <a:effectStyle>
-          <a:effectLst/>
-        </a:effectStyle>
-        <a:effectStyle>
-          <a:effectLst>
-            <a:outerShdw blurRad="57150" dist="19050" dir="5400000">
-              <a:srgbClr val="000000">
-                <a:alpha val="16000"/>
-              </a:srgbClr>
-            </a:outerShdw>
-          </a:effectLst>
-        </a:effectStyle>
-        <a:effectStyle>
-          <a:effectLst>
-            <a:outerShdw blurRad="19050" dist="9525" dir="5400000">
-              <a:srgbClr val="000000">
-                <a:alpha val="6000"/>
-              </a:srgbClr>
-            </a:outerShdw>
-          </a:effectLst>
-        </a:effectStyle>
-        <a:effectStyle>
-          <a:effectLst>
-            <a:outerShdw blurRad="28575" dist="9525" dir="5400000">
-              <a:srgbClr val="000000">
-                <a:alpha val="8000"/>
-              </a:srgbClr>
-            </a:outerShdw>
-          </a:effectLst>
-        </a:effectStyle>
-        <a:effectStyle>
-          <a:effectLst>
-            <a:outerShdw blurRad="57150" dist="19050" dir="5400000">
-              <a:srgbClr val="000000">
-                <a:alpha val="10000"/>
-              </a:srgbClr>
-            </a:outerShdw>
-          </a:effectLst>
-        </a:effectStyle>
-        <a:effectStyle>
-          <a:effectLst>
-            <a:outerShdw blurRad="114300" dist="38100" dir="5400000">
-              <a:srgbClr val="000000">
-                <a:alpha val="12000"/>
-              </a:srgbClr>
-            </a:outerShdw>
-          </a:effectLst>
-        </a:effectStyle>
-        <a:effectStyle>
-          <a:effectLst>
-            <a:outerShdw blurRad="171450" dist="57150" dir="5400000">
-              <a:srgbClr val="000000">
-                <a:alpha val="16000"/>
-              </a:srgbClr>
-            </a:outerShdw>
-          </a:effectLst>
-        </a:effectStyle>
-        <a:effectStyle>
-          <a:effectLst>
-            <a:outerShdw blurRad="266700" dist="95250" dir="5400000">
-              <a:srgbClr val="000000">
-                <a:alpha val="24000"/>
-              </a:srgbClr>
-            </a:outerShdw>
-          </a:effectLst>
-        </a:effectStyle>
-      </a:effectStyleLst>
-      <a:bgFillStyleLst>
-        <a:solidFill>
-          <a:schemeClr val="phClr"/>
-        </a:solidFill>
-        <a:solidFill>
-          <a:schemeClr val="phClr">
-            <a:tint val="95000"/>
-            <a:satMod val="170000"/>
-          </a:schemeClr>
-        </a:solidFill>
-        <a:gradFill>
-          <a:gsLst>
-            <a:gs pos="0">
-              <a:schemeClr val="phClr">
-                <a:tint val="93000"/>
-                <a:shade val="98000"/>
-                <a:lumMod val="102000"/>
-                <a:satMod val="150000"/>
-              </a:schemeClr>
-            </a:gs>
-            <a:gs pos="50000">
-              <a:schemeClr val="phClr">
-                <a:tint val="98000"/>
-                <a:shade val="90000"/>
-                <a:lumMod val="103000"/>
-                <a:satMod val="130000"/>
-              </a:schemeClr>
-            </a:gs>
-            <a:gs pos="100000">
-              <a:schemeClr val="phClr">
-                <a:shade val="63000"/>
-                <a:satMod val="120000"/>
-              </a:schemeClr>
-            </a:gs>
-          </a:gsLst>
-          <a:lin ang="5400000" scaled="0"/>
-        </a:gradFill>
-      </a:bgFillStyleLst>
-    </a:fmtScheme>
-  </a:themeElements>
-</a:theme>
-</file>
-
-<file path=ppt/notesSlides/notesSlide1.xml><?xml version="1.0" encoding="utf-8"?>
-<p:notes xmlns:p="http://schemas.openxmlformats.org/presentationml/2006/main">
-  <p:cSld>
-    <p:spTree>
-      <p:nvGrpSpPr>
-        <p:cNvPr id="1" name=""/>
-        <p:cNvGrpSpPr/>
-        <p:nvPr/>
-      </p:nvGrpSpPr>
-      <p:grpSpPr>
-        <a:xfrm xmlns:a="http://schemas.openxmlformats.org/drawingml/2006/main"/>
-      </p:grpSpPr>
-      <p:sp>
-        <p:nvSpPr>
-          <p:cNvPr id="2" name="Slide Image Placeholder 1"/>
-          <p:cNvSpPr>
-            <a:spLocks xmlns:a="http://schemas.openxmlformats.org/drawingml/2006/main" noGrp="1"/>
-          </p:cNvSpPr>
-          <p:nvPr>
-            <p:ph type="sldImg" idx="0"/>
-          </p:nvPr>
-        </p:nvSpPr>
-        <p:spPr/>
-      </p:sp>
-      <p:sp>
-        <p:nvSpPr>
-          <p:cNvPr id="3" name="Notes Placeholder 2"/>
-          <p:cNvSpPr>
-            <a:spLocks xmlns:a="http://schemas.openxmlformats.org/drawingml/2006/main" noGrp="1"/>
-          </p:cNvSpPr>
-          <p:nvPr>
-            <p:ph type="body" idx="1"/>
-          </p:nvPr>
-        </p:nvSpPr>
-        <p:spPr/>
-        <p:txBody>
-          <a:bodyPr xmlns:a="http://schemas.openxmlformats.org/drawingml/2006/main"/>
-          <a:lstStyle xmlns:a="http://schemas.openxmlformats.org/drawingml/2006/main"/>
-          <a:p xmlns:a="http://schemas.openxmlformats.org/drawingml/2006/main">
-            <a:r>
-              <a:t>Before we dive in, here's the live link to the dashboard so you can follow along: wolf-day-damage.vercel.app/dashboard. I'll walk you through what we built, then we'll review the dashboard together — it's designed for the workshop mechanic.</a:t>
-            </a:r>
-          </a:p>
-        </p:txBody>
-      </p:sp>
-      <p:sp>
-        <p:nvSpPr>
-          <p:cNvPr id="4" name="Slide Number Placeholder 3"/>
-          <p:cNvSpPr>
-            <a:spLocks xmlns:a="http://schemas.openxmlformats.org/drawingml/2006/main" noGrp="1"/>
-          </p:cNvSpPr>
-          <p:nvPr>
-            <p:ph type="sldNum" idx="5"/>
-          </p:nvPr>
-        </p:nvSpPr>
-        <p:spPr/>
-        <p:txBody>
-          <a:bodyPr xmlns:a="http://schemas.openxmlformats.org/drawingml/2006/main"/>
-          <a:lstStyle xmlns:a="http://schemas.openxmlformats.org/drawingml/2006/main"/>
-          <a:p xmlns:a="http://schemas.openxmlformats.org/drawingml/2006/main"/>
-        </p:txBody>
-      </p:sp>
-    </p:spTree>
-  </p:cSld>
-  <p:clrMapOvr>
-    <a:masterClrMapping xmlns:a="http://schemas.openxmlformats.org/drawingml/2006/main"/>
-  </p:clrMapOvr>
-</p:notes>
-</file>
-
-<file path=ppt/notesSlides/notesSlide2.xml><?xml version="1.0" encoding="utf-8"?>
-<p:notes xmlns:p="http://schemas.openxmlformats.org/presentationml/2006/main">
-  <p:cSld>
-    <p:spTree>
-      <p:nvGrpSpPr>
-        <p:cNvPr id="1" name=""/>
-        <p:cNvGrpSpPr/>
-        <p:nvPr/>
-      </p:nvGrpSpPr>
-      <p:grpSpPr>
-        <a:xfrm xmlns:a="http://schemas.openxmlformats.org/drawingml/2006/main"/>
-      </p:grpSpPr>
-      <p:sp>
-        <p:nvSpPr>
-          <p:cNvPr id="2" name="Slide Image Placeholder 1"/>
-          <p:cNvSpPr>
-            <a:spLocks xmlns:a="http://schemas.openxmlformats.org/drawingml/2006/main" noGrp="1"/>
-          </p:cNvSpPr>
-          <p:nvPr>
-            <p:ph type="sldImg" idx="0"/>
-          </p:nvPr>
-        </p:nvSpPr>
-        <p:spPr/>
-      </p:sp>
-      <p:sp>
-        <p:nvSpPr>
-          <p:cNvPr id="3" name="Notes Placeholder 2"/>
-          <p:cNvSpPr>
-            <a:spLocks xmlns:a="http://schemas.openxmlformats.org/drawingml/2006/main" noGrp="1"/>
-          </p:cNvSpPr>
-          <p:nvPr>
-            <p:ph type="body" idx="1"/>
-          </p:nvPr>
-        </p:nvSpPr>
-        <p:spPr/>
-        <p:txBody>
-          <a:bodyPr xmlns:a="http://schemas.openxmlformats.org/drawingml/2006/main"/>
-          <a:lstStyle xmlns:a="http://schemas.openxmlformats.org/drawingml/2006/main"/>
-          <a:p xmlns:a="http://schemas.openxmlformats.org/drawingml/2006/main">
-            <a:r>
-              <a:t>We start with 1,000 synthetic German workshop cases: 550 service cases and 450 damage cases. The damage information is locked inside messy, free-text German notes. Extracting it reliably is the challenge.</a:t>
-            </a:r>
-          </a:p>
-          <a:p xmlns:a="http://schemas.openxmlformats.org/drawingml/2006/main">
-            <a:r>
-              <a:t/>
-            </a:r>
-          </a:p>
-          <a:p xmlns:a="http://schemas.openxmlformats.org/drawingml/2006/main">
-            <a:r>
-              <a:t>One extraction feeds both deliverables. A German note goes to DeepSeek, which fills a strict Pydantic form with a closed vocabulary and explicit part-plus-side fields. Deterministic repair rules then produce the vehicle sheet and corpus analytics. The LLM only reads; deterministic code decides. German stays German.</a:t>
-            </a:r>
-          </a:p>
-        </p:txBody>
-      </p:sp>
-      <p:sp>
-        <p:nvSpPr>
-          <p:cNvPr id="4" name="Slide Number Placeholder 3"/>
-          <p:cNvSpPr>
-            <a:spLocks xmlns:a="http://schemas.openxmlformats.org/drawingml/2006/main" noGrp="1"/>
-          </p:cNvSpPr>
-          <p:nvPr>
-            <p:ph type="sldNum" idx="5"/>
-          </p:nvPr>
-        </p:nvSpPr>
-        <p:spPr/>
-        <p:txBody>
-          <a:bodyPr xmlns:a="http://schemas.openxmlformats.org/drawingml/2006/main"/>
-          <a:lstStyle xmlns:a="http://schemas.openxmlformats.org/drawingml/2006/main"/>
-          <a:p xmlns:a="http://schemas.openxmlformats.org/drawingml/2006/main"/>
-        </p:txBody>
-      </p:sp>
-    </p:spTree>
-  </p:cSld>
-  <p:clrMapOvr>
-    <a:masterClrMapping xmlns:a="http://schemas.openxmlformats.org/drawingml/2006/main"/>
-  </p:clrMapOvr>
-</p:notes>
-</file>
-
-<file path=ppt/notesSlides/notesSlide3.xml><?xml version="1.0" encoding="utf-8"?>
-<p:notes xmlns:p="http://schemas.openxmlformats.org/presentationml/2006/main">
-  <p:cSld>
-    <p:spTree>
-      <p:nvGrpSpPr>
-        <p:cNvPr id="1" name=""/>
-        <p:cNvGrpSpPr/>
-        <p:nvPr/>
-      </p:nvGrpSpPr>
-      <p:grpSpPr>
-        <a:xfrm xmlns:a="http://schemas.openxmlformats.org/drawingml/2006/main"/>
-      </p:grpSpPr>
-      <p:sp>
-        <p:nvSpPr>
-          <p:cNvPr id="2" name="Slide Image Placeholder 1"/>
-          <p:cNvSpPr>
-            <a:spLocks xmlns:a="http://schemas.openxmlformats.org/drawingml/2006/main" noGrp="1"/>
-          </p:cNvSpPr>
-          <p:nvPr>
-            <p:ph type="sldImg" idx="0"/>
-          </p:nvPr>
-        </p:nvSpPr>
-        <p:spPr/>
-      </p:sp>
-      <p:sp>
-        <p:nvSpPr>
-          <p:cNvPr id="3" name="Notes Placeholder 2"/>
-          <p:cNvSpPr>
-            <a:spLocks xmlns:a="http://schemas.openxmlformats.org/drawingml/2006/main" noGrp="1"/>
-          </p:cNvSpPr>
-          <p:nvPr>
-            <p:ph type="body" idx="1"/>
-          </p:nvPr>
-        </p:nvSpPr>
-        <p:spPr/>
-        <p:txBody>
-          <a:bodyPr xmlns:a="http://schemas.openxmlformats.org/drawingml/2006/main"/>
-          <a:lstStyle xmlns:a="http://schemas.openxmlformats.org/drawingml/2006/main"/>
-          <a:p xmlns:a="http://schemas.openxmlformats.org/drawingml/2006/main">
-            <a:r>
-              <a:t>This is case 820002. We retain the original German note and highlight the exact sentence that justifies the damage: “Steinschlag Windschutzscheibe im Sichtfeld Fahrer, Reparatur nicht möglich, Austausch nötig.”</a:t>
-            </a:r>
-          </a:p>
-          <a:p xmlns:a="http://schemas.openxmlformats.org/drawingml/2006/main">
-            <a:r>
-              <a:t/>
-            </a:r>
-          </a:p>
-          <a:p xmlns:a="http://schemas.openxmlformats.org/drawingml/2006/main">
-            <a:r>
-              <a:t>The windscreen must be replaced because replacement is stated in the note. The trim/plate is marked for remove-and-install by the adjacency rule. Every coloured region traces back to the verbatim German quote, directly for the damage or through the deterministic adjacency rule for R&amp;I. A blue R&amp;I region does not mean a second damage.</a:t>
-            </a:r>
-          </a:p>
-        </p:txBody>
-      </p:sp>
-      <p:sp>
-        <p:nvSpPr>
-          <p:cNvPr id="4" name="Slide Number Placeholder 3"/>
-          <p:cNvSpPr>
-            <a:spLocks xmlns:a="http://schemas.openxmlformats.org/drawingml/2006/main" noGrp="1"/>
-          </p:cNvSpPr>
-          <p:nvPr>
-            <p:ph type="sldNum" idx="5"/>
-          </p:nvPr>
-        </p:nvSpPr>
-        <p:spPr/>
-        <p:txBody>
-          <a:bodyPr xmlns:a="http://schemas.openxmlformats.org/drawingml/2006/main"/>
-          <a:lstStyle xmlns:a="http://schemas.openxmlformats.org/drawingml/2006/main"/>
-          <a:p xmlns:a="http://schemas.openxmlformats.org/drawingml/2006/main"/>
-        </p:txBody>
-      </p:sp>
-    </p:spTree>
-  </p:cSld>
-  <p:clrMapOvr>
-    <a:masterClrMapping xmlns:a="http://schemas.openxmlformats.org/drawingml/2006/main"/>
-  </p:clrMapOvr>
-</p:notes>
-</file>
-
-<file path=ppt/notesSlides/notesSlide4.xml><?xml version="1.0" encoding="utf-8"?>
-<p:notes xmlns:p="http://schemas.openxmlformats.org/presentationml/2006/main">
-  <p:cSld>
-    <p:spTree>
-      <p:nvGrpSpPr>
-        <p:cNvPr id="1" name=""/>
-        <p:cNvGrpSpPr/>
-        <p:nvPr/>
-      </p:nvGrpSpPr>
-      <p:grpSpPr>
-        <a:xfrm xmlns:a="http://schemas.openxmlformats.org/drawingml/2006/main"/>
-      </p:grpSpPr>
-      <p:sp>
-        <p:nvSpPr>
-          <p:cNvPr id="2" name="Slide Image Placeholder 1"/>
-          <p:cNvSpPr>
-            <a:spLocks xmlns:a="http://schemas.openxmlformats.org/drawingml/2006/main" noGrp="1"/>
-          </p:cNvSpPr>
-          <p:nvPr>
-            <p:ph type="sldImg" idx="0"/>
-          </p:nvPr>
-        </p:nvSpPr>
-        <p:spPr/>
-      </p:sp>
-      <p:sp>
-        <p:nvSpPr>
-          <p:cNvPr id="3" name="Notes Placeholder 2"/>
-          <p:cNvSpPr>
-            <a:spLocks xmlns:a="http://schemas.openxmlformats.org/drawingml/2006/main" noGrp="1"/>
-          </p:cNvSpPr>
-          <p:nvPr>
-            <p:ph type="body" idx="1"/>
-          </p:nvPr>
-        </p:nvSpPr>
-        <p:spPr/>
-        <p:txBody>
-          <a:bodyPr xmlns:a="http://schemas.openxmlformats.org/drawingml/2006/main"/>
-          <a:lstStyle xmlns:a="http://schemas.openxmlformats.org/drawingml/2006/main"/>
-          <a:p xmlns:a="http://schemas.openxmlformats.org/drawingml/2006/main">
-            <a:r>
-              <a:t>These are measured results on 977 held-out cases. Damage-zone F1 is 99.9%. Case kind and insurance accuracy are each 100%. Evidence quotes are verbatim in 100% of cases, and no cases are lost. Unmapped terms are flagged, never dropped.</a:t>
-            </a:r>
-          </a:p>
-          <a:p xmlns:a="http://schemas.openxmlformats.org/drawingml/2006/main">
-            <a:r>
-              <a:t/>
-            </a:r>
-          </a:p>
-          <a:p xmlns:a="http://schemas.openxmlformats.org/drawingml/2006/main">
-            <a:r>
-              <a:t>The full 1,000-case corpus runs in about 11 minutes, with per-case caching and back-off. A regex baseline ties on zones because the synthetic corpus has a closed vocabulary. However, that baseline scores 0% on severity and 76% on insurance.</a:t>
-            </a:r>
-          </a:p>
-        </p:txBody>
-      </p:sp>
-      <p:sp>
-        <p:nvSpPr>
-          <p:cNvPr id="4" name="Slide Number Placeholder 3"/>
-          <p:cNvSpPr>
-            <a:spLocks xmlns:a="http://schemas.openxmlformats.org/drawingml/2006/main" noGrp="1"/>
-          </p:cNvSpPr>
-          <p:nvPr>
-            <p:ph type="sldNum" idx="5"/>
-          </p:nvPr>
-        </p:nvSpPr>
-        <p:spPr/>
-        <p:txBody>
-          <a:bodyPr xmlns:a="http://schemas.openxmlformats.org/drawingml/2006/main"/>
-          <a:lstStyle xmlns:a="http://schemas.openxmlformats.org/drawingml/2006/main"/>
-          <a:p xmlns:a="http://schemas.openxmlformats.org/drawingml/2006/main"/>
-        </p:txBody>
-      </p:sp>
-    </p:spTree>
-  </p:cSld>
-  <p:clrMapOvr>
-    <a:masterClrMapping xmlns:a="http://schemas.openxmlformats.org/drawingml/2006/main"/>
-  </p:clrMapOvr>
-</p:notes>
-</file>
-
-<file path=ppt/notesSlides/notesSlide5.xml><?xml version="1.0" encoding="utf-8"?>
-<p:notes xmlns:p="http://schemas.openxmlformats.org/presentationml/2006/main">
-  <p:cSld>
-    <p:spTree>
-      <p:nvGrpSpPr>
-        <p:cNvPr id="1" name=""/>
-        <p:cNvGrpSpPr/>
-        <p:nvPr/>
-      </p:nvGrpSpPr>
-      <p:grpSpPr>
-        <a:xfrm xmlns:a="http://schemas.openxmlformats.org/drawingml/2006/main"/>
-      </p:grpSpPr>
-      <p:sp>
-        <p:nvSpPr>
-          <p:cNvPr id="2" name="Slide Image Placeholder 1"/>
-          <p:cNvSpPr>
-            <a:spLocks xmlns:a="http://schemas.openxmlformats.org/drawingml/2006/main" noGrp="1"/>
-          </p:cNvSpPr>
-          <p:nvPr>
-            <p:ph type="sldImg" idx="0"/>
-          </p:nvPr>
-        </p:nvSpPr>
-        <p:spPr/>
-      </p:sp>
-      <p:sp>
-        <p:nvSpPr>
-          <p:cNvPr id="3" name="Notes Placeholder 2"/>
-          <p:cNvSpPr>
-            <a:spLocks xmlns:a="http://schemas.openxmlformats.org/drawingml/2006/main" noGrp="1"/>
-          </p:cNvSpPr>
-          <p:nvPr>
-            <p:ph type="body" idx="1"/>
-          </p:nvPr>
-        </p:nvSpPr>
-        <p:spPr/>
-        <p:txBody>
-          <a:bodyPr xmlns:a="http://schemas.openxmlformats.org/drawingml/2006/main"/>
-          <a:lstStyle xmlns:a="http://schemas.openxmlformats.org/drawingml/2006/main"/>
-          <a:p xmlns:a="http://schemas.openxmlformats.org/drawingml/2006/main">
-            <a:r>
-              <a:t>Severity is never written explicitly; it must be inferred from the wording. On the same 977 held-out cases, DeepSeek reaches 68.7%, compared with the reported 79.5% data ceiling: about 86% of the extractable signal. That ceiling comes from a majority-label lookup over damage-wording fingerprints. It describes this analysis of the data, not a universal bound for every model or test split.</a:t>
-            </a:r>
-          </a:p>
-          <a:p xmlns:a="http://schemas.openxmlformats.org/drawingml/2006/main">
-            <a:r>
-              <a:t/>
-            </a:r>
-          </a:p>
-          <a:p xmlns:a="http://schemas.openxmlformats.org/drawingml/2006/main">
-            <a:r>
-              <a:t>The generator partly decorrelates severity from the text. The identical sentence appears labelled light, medium and severe in different cases. This creates a data limit.</a:t>
-            </a:r>
-          </a:p>
-          <a:p xmlns:a="http://schemas.openxmlformats.org/drawingml/2006/main">
-            <a:r>
-              <a:t/>
-            </a:r>
-          </a:p>
-          <a:p xmlns:a="http://schemas.openxmlformats.org/drawingml/2006/main">
-            <a:r>
-              <a:t>We also benchmarked models on a common 150-case severity test: LightGBM 65.3%, DeepSeek 72.7%, LogReg 73.3%, gbert — a fine-tuned German BERT on GPU — 78.7%, and XGBoost 82.0%. Do not compare the XGBoost result on this test directly with the ceiling on the other evaluation scope.</a:t>
-            </a:r>
-          </a:p>
-          <a:p xmlns:a="http://schemas.openxmlformats.org/drawingml/2006/main">
-            <a:r>
-              <a:t/>
-            </a:r>
-          </a:p>
-          <a:p xmlns:a="http://schemas.openxmlformats.org/drawingml/2006/main">
-            <a:r>
-              <a:t>The approximately 17-point spread between the two boosting models raises an overfitting concern: models may memorise the synthetic phrase library rather than learn severity. The highest synthetic score is therefore not, by itself, evidence of better real-world generalisation. This spread alone does not prove overfitting. The product ships DeepSeek severity; generalisation to real production notes is the next validation, not an established result.</a:t>
-            </a:r>
-          </a:p>
-        </p:txBody>
-      </p:sp>
-      <p:sp>
-        <p:nvSpPr>
-          <p:cNvPr id="4" name="Slide Number Placeholder 3"/>
-          <p:cNvSpPr>
-            <a:spLocks xmlns:a="http://schemas.openxmlformats.org/drawingml/2006/main" noGrp="1"/>
-          </p:cNvSpPr>
-          <p:nvPr>
-            <p:ph type="sldNum" idx="5"/>
-          </p:nvPr>
-        </p:nvSpPr>
-        <p:spPr/>
-        <p:txBody>
-          <a:bodyPr xmlns:a="http://schemas.openxmlformats.org/drawingml/2006/main"/>
-          <a:lstStyle xmlns:a="http://schemas.openxmlformats.org/drawingml/2006/main"/>
-          <a:p xmlns:a="http://schemas.openxmlformats.org/drawingml/2006/main"/>
-        </p:txBody>
-      </p:sp>
-    </p:spTree>
-  </p:cSld>
-  <p:clrMapOvr>
-    <a:masterClrMapping xmlns:a="http://schemas.openxmlformats.org/drawingml/2006/main"/>
-  </p:clrMapOvr>
-</p:notes>
-</file>
-
-<file path=ppt/notesSlides/notesSlide6.xml><?xml version="1.0" encoding="utf-8"?>
-<p:notes xmlns:p="http://schemas.openxmlformats.org/presentationml/2006/main">
-  <p:cSld>
-    <p:spTree>
-      <p:nvGrpSpPr>
-        <p:cNvPr id="1" name=""/>
-        <p:cNvGrpSpPr/>
-        <p:nvPr/>
-      </p:nvGrpSpPr>
-      <p:grpSpPr>
-        <a:xfrm xmlns:a="http://schemas.openxmlformats.org/drawingml/2006/main"/>
-      </p:grpSpPr>
-      <p:sp>
-        <p:nvSpPr>
-          <p:cNvPr id="2" name="Slide Image Placeholder 1"/>
-          <p:cNvSpPr>
-            <a:spLocks xmlns:a="http://schemas.openxmlformats.org/drawingml/2006/main" noGrp="1"/>
-          </p:cNvSpPr>
-          <p:nvPr>
-            <p:ph type="sldImg" idx="0"/>
-          </p:nvPr>
-        </p:nvSpPr>
-        <p:spPr/>
-      </p:sp>
-      <p:sp>
-        <p:nvSpPr>
-          <p:cNvPr id="3" name="Notes Placeholder 2"/>
-          <p:cNvSpPr>
-            <a:spLocks xmlns:a="http://schemas.openxmlformats.org/drawingml/2006/main" noGrp="1"/>
-          </p:cNvSpPr>
-          <p:nvPr>
-            <p:ph type="body" idx="1"/>
-          </p:nvPr>
-        </p:nvSpPr>
-        <p:spPr/>
-        <p:txBody>
-          <a:bodyPr xmlns:a="http://schemas.openxmlformats.org/drawingml/2006/main"/>
-          <a:lstStyle xmlns:a="http://schemas.openxmlformats.org/drawingml/2006/main"/>
-          <a:p xmlns:a="http://schemas.openxmlformats.org/drawingml/2006/main">
-            <a:r>
-              <a:t>These are actionable observations from our extraction of the 450 damage cases. Parking or manoeuvring accounts for 41.3%, or 186 out of 450: low-severity, high-volume bodywork to review with the dealership.</a:t>
-            </a:r>
-          </a:p>
-          <a:p xmlns:a="http://schemas.openxmlformats.org/drawingml/2006/main">
-            <a:r>
-              <a:t/>
-            </a:r>
-          </a:p>
-          <a:p xmlns:a="http://schemas.openxmlformats.org/drawingml/2006/main">
-            <a:r>
-              <a:t>Across the corpus, 668 cases are still open, with a median age of 150 days. This is a queue to review with the shop. Age since creation is not the same as repair duration.</a:t>
-            </a:r>
-          </a:p>
-          <a:p xmlns:a="http://schemas.openxmlformats.org/drawingml/2006/main">
-            <a:r>
-              <a:t/>
-            </a:r>
-          </a:p>
-          <a:p xmlns:a="http://schemas.openxmlformats.org/drawingml/2006/main">
-            <a:r>
-              <a:t>There are 216 replacements, which trigger 389 remove-and-install operations. This is potentially billable work that is invisible in the raw note. The R&amp;I count is generated by our expert rules and has not been verified against operation ground truth.</a:t>
-            </a:r>
-          </a:p>
-        </p:txBody>
-      </p:sp>
-      <p:sp>
-        <p:nvSpPr>
-          <p:cNvPr id="4" name="Slide Number Placeholder 3"/>
-          <p:cNvSpPr>
-            <a:spLocks xmlns:a="http://schemas.openxmlformats.org/drawingml/2006/main" noGrp="1"/>
-          </p:cNvSpPr>
-          <p:nvPr>
-            <p:ph type="sldNum" idx="5"/>
-          </p:nvPr>
-        </p:nvSpPr>
-        <p:spPr/>
-        <p:txBody>
-          <a:bodyPr xmlns:a="http://schemas.openxmlformats.org/drawingml/2006/main"/>
-          <a:lstStyle xmlns:a="http://schemas.openxmlformats.org/drawingml/2006/main"/>
-          <a:p xmlns:a="http://schemas.openxmlformats.org/drawingml/2006/main"/>
-        </p:txBody>
-      </p:sp>
-    </p:spTree>
-  </p:cSld>
-  <p:clrMapOvr>
-    <a:masterClrMapping xmlns:a="http://schemas.openxmlformats.org/drawingml/2006/main"/>
-  </p:clrMapOvr>
-</p:notes>
-</file>
-
-<file path=ppt/notesSlides/notesSlide7.xml><?xml version="1.0" encoding="utf-8"?>
-<p:notes xmlns:p="http://schemas.openxmlformats.org/presentationml/2006/main">
-  <p:cSld>
-    <p:spTree>
-      <p:nvGrpSpPr>
-        <p:cNvPr id="1" name=""/>
-        <p:cNvGrpSpPr/>
-        <p:nvPr/>
-      </p:nvGrpSpPr>
-      <p:grpSpPr>
-        <a:xfrm xmlns:a="http://schemas.openxmlformats.org/drawingml/2006/main"/>
-      </p:grpSpPr>
-      <p:sp>
-        <p:nvSpPr>
-          <p:cNvPr id="2" name="Slide Image Placeholder 1"/>
-          <p:cNvSpPr>
-            <a:spLocks xmlns:a="http://schemas.openxmlformats.org/drawingml/2006/main" noGrp="1"/>
-          </p:cNvSpPr>
-          <p:nvPr>
-            <p:ph type="sldImg" idx="0"/>
-          </p:nvPr>
-        </p:nvSpPr>
-        <p:spPr/>
-      </p:sp>
-      <p:sp>
-        <p:nvSpPr>
-          <p:cNvPr id="3" name="Notes Placeholder 2"/>
-          <p:cNvSpPr>
-            <a:spLocks xmlns:a="http://schemas.openxmlformats.org/drawingml/2006/main" noGrp="1"/>
-          </p:cNvSpPr>
-          <p:nvPr>
-            <p:ph type="body" idx="1"/>
-          </p:nvPr>
-        </p:nvSpPr>
-        <p:spPr/>
-        <p:txBody>
-          <a:bodyPr xmlns:a="http://schemas.openxmlformats.org/drawingml/2006/main"/>
-          <a:lstStyle xmlns:a="http://schemas.openxmlformats.org/drawingml/2006/main"/>
-          <a:p xmlns:a="http://schemas.openxmlformats.org/drawingml/2006/main">
-            <a:r>
-              <a:t>Say this explicitly: “How do we know which parts to remove in order to repair another one?”</a:t>
-            </a:r>
-          </a:p>
-          <a:p xmlns:a="http://schemas.openxmlformats.org/drawingml/2006/main">
-            <a:r>
-              <a:t/>
-            </a:r>
-          </a:p>
-          <a:p xmlns:a="http://schemas.openxmlformats.org/drawingml/2006/main">
-            <a:r>
-              <a:t>Today, the answer comes from a hand-reviewed adjacency table for bodywork only. It does not come from the data. The dataset contains no parts, removal or operation labels at all. Ground truth covers zones, severity, kind, insurance and stage only. The remove-and-install logic is therefore expert-rule-based and unverified against ground truth. Mechanical R&amp;I — for example, removing wheels to work on brake pads — is out of scope.</a:t>
-            </a:r>
-          </a:p>
-          <a:p xmlns:a="http://schemas.openxmlformats.org/drawingml/2006/main">
-            <a:r>
-              <a:t/>
-            </a:r>
-          </a:p>
-          <a:p xmlns:a="http://schemas.openxmlformats.org/drawingml/2006/main">
-            <a:r>
-              <a:t>The next step is to validate these adjacency rules with the workshop and, ideally, learn them from real repair-order histories.</a:t>
-            </a:r>
-          </a:p>
-          <a:p xmlns:a="http://schemas.openxmlformats.org/drawingml/2006/main">
-            <a:r>
-              <a:t/>
-            </a:r>
-          </a:p>
-          <a:p xmlns:a="http://schemas.openxmlformats.org/drawingml/2006/main">
-            <a:r>
-              <a:t>Other limits: this is a synthetic corpus built from a phrase library, which makes regex look artificially strong. The severity ceiling is a data limitation. There are only 2 unmapped terms in the whole corpus: they are flagged, never dropped.</a:t>
-            </a:r>
-          </a:p>
-        </p:txBody>
-      </p:sp>
-      <p:sp>
-        <p:nvSpPr>
-          <p:cNvPr id="4" name="Slide Number Placeholder 3"/>
-          <p:cNvSpPr>
-            <a:spLocks xmlns:a="http://schemas.openxmlformats.org/drawingml/2006/main" noGrp="1"/>
-          </p:cNvSpPr>
-          <p:nvPr>
-            <p:ph type="sldNum" idx="5"/>
-          </p:nvPr>
-        </p:nvSpPr>
-        <p:spPr/>
-        <p:txBody>
-          <a:bodyPr xmlns:a="http://schemas.openxmlformats.org/drawingml/2006/main"/>
-          <a:lstStyle xmlns:a="http://schemas.openxmlformats.org/drawingml/2006/main"/>
-          <a:p xmlns:a="http://schemas.openxmlformats.org/drawingml/2006/main"/>
-        </p:txBody>
-      </p:sp>
-    </p:spTree>
-  </p:cSld>
-  <p:clrMapOvr>
-    <a:masterClrMapping xmlns:a="http://schemas.openxmlformats.org/drawingml/2006/main"/>
-  </p:clrMapOvr>
-</p:notes>
-</file>
-
-<file path=ppt/notesSlides/notesSlide8.xml><?xml version="1.0" encoding="utf-8"?>
-<p:notes xmlns:p="http://schemas.openxmlformats.org/presentationml/2006/main">
-  <p:cSld>
-    <p:spTree>
-      <p:nvGrpSpPr>
-        <p:cNvPr id="1" name=""/>
-        <p:cNvGrpSpPr/>
-        <p:nvPr/>
-      </p:nvGrpSpPr>
-      <p:grpSpPr>
-        <a:xfrm xmlns:a="http://schemas.openxmlformats.org/drawingml/2006/main"/>
-      </p:grpSpPr>
-      <p:sp>
-        <p:nvSpPr>
-          <p:cNvPr id="2" name="Slide Image Placeholder 1"/>
-          <p:cNvSpPr>
-            <a:spLocks xmlns:a="http://schemas.openxmlformats.org/drawingml/2006/main" noGrp="1"/>
-          </p:cNvSpPr>
-          <p:nvPr>
-            <p:ph type="sldImg" idx="0"/>
-          </p:nvPr>
-        </p:nvSpPr>
-        <p:spPr/>
-      </p:sp>
-      <p:sp>
-        <p:nvSpPr>
-          <p:cNvPr id="3" name="Notes Placeholder 2"/>
-          <p:cNvSpPr>
-            <a:spLocks xmlns:a="http://schemas.openxmlformats.org/drawingml/2006/main" noGrp="1"/>
-          </p:cNvSpPr>
-          <p:nvPr>
-            <p:ph type="body" idx="1"/>
-          </p:nvPr>
-        </p:nvSpPr>
-        <p:spPr/>
-        <p:txBody>
-          <a:bodyPr xmlns:a="http://schemas.openxmlformats.org/drawingml/2006/main"/>
-          <a:lstStyle xmlns:a="http://schemas.openxmlformats.org/drawingml/2006/main"/>
-          <a:p xmlns:a="http://schemas.openxmlformats.org/drawingml/2006/main">
-            <a:r>
-              <a:t>The dashboard is live and public: https://wolf-day-damage.vercel.app/dashboard. It includes the dashboard, the 2D/3D per-vehicle sheet and the Model Lab.</a:t>
-            </a:r>
-          </a:p>
-          <a:p xmlns:a="http://schemas.openxmlformats.org/drawingml/2006/main">
-            <a:r>
-              <a:t/>
-            </a:r>
-          </a:p>
-          <a:p xmlns:a="http://schemas.openxmlformats.org/drawingml/2006/main">
-            <a:r>
-              <a:t>Next: validate extraction on real production notes, add live technician extraction, and learn the remove-and-install table from repair histories. Let’s review the dashboard together, from the workshop mechanic’s perspective.</a:t>
-            </a:r>
-          </a:p>
-        </p:txBody>
-      </p:sp>
-      <p:sp>
-        <p:nvSpPr>
-          <p:cNvPr id="4" name="Slide Number Placeholder 3"/>
-          <p:cNvSpPr>
-            <a:spLocks xmlns:a="http://schemas.openxmlformats.org/drawingml/2006/main" noGrp="1"/>
-          </p:cNvSpPr>
-          <p:nvPr>
-            <p:ph type="sldNum" idx="5"/>
-          </p:nvPr>
-        </p:nvSpPr>
-        <p:spPr/>
-        <p:txBody>
-          <a:bodyPr xmlns:a="http://schemas.openxmlformats.org/drawingml/2006/main"/>
-          <a:lstStyle xmlns:a="http://schemas.openxmlformats.org/drawingml/2006/main"/>
-          <a:p xmlns:a="http://schemas.openxmlformats.org/drawingml/2006/main"/>
-        </p:txBody>
-      </p:sp>
-    </p:spTree>
-  </p:cSld>
-  <p:clrMapOvr>
-    <a:masterClrMapping xmlns:a="http://schemas.openxmlformats.org/drawingml/2006/main"/>
-  </p:clrMapOvr>
-</p:notes>
-</file>
-
-<file path=ppt/slideLayouts/slideLayout1.xml><?xml version="1.0" encoding="utf-8"?>
-<p:sldLayout xmlns:p="http://schemas.openxmlformats.org/presentationml/2006/main" type="title">
-  <p:cSld name="Title Slide">
-    <p:spTree>
-      <p:nvGrpSpPr>
-        <p:cNvPr id="1" name=""/>
-        <p:cNvGrpSpPr/>
-        <p:nvPr/>
-      </p:nvGrpSpPr>
-      <p:grpSpPr>
-        <a:xfrm xmlns:a="http://schemas.openxmlformats.org/drawingml/2006/main"/>
-      </p:grpSpPr>
-    </p:spTree>
-  </p:cSld>
-</p:sldLayout>
-</file>
-
-<file path=ppt/slideMasters/slideMaster1.xml><?xml version="1.0" encoding="utf-8"?>
-<p:sldMaster xmlns:p="http://schemas.openxmlformats.org/presentationml/2006/main">
-  <p:cSld name="Master">
-    <p:bg>
-      <p:bgRef idx="1001">
-        <a:schemeClr xmlns:a="http://schemas.openxmlformats.org/drawingml/2006/main" val="bg1"/>
-      </p:bgRef>
-    </p:bg>
-    <p:spTree>
-      <p:nvGrpSpPr>
-        <p:cNvPr id="1" name=""/>
-        <p:cNvGrpSpPr/>
-        <p:nvPr/>
-      </p:nvGrpSpPr>
-      <p:grpSpPr>
-        <a:xfrm xmlns:a="http://schemas.openxmlformats.org/drawingml/2006/main"/>
-      </p:grpSpPr>
-    </p:spTree>
-  </p:cSld>
-  <p:clrMap bg1="lt1" tx1="dk1" bg2="lt2" tx2="dk2" accent1="accent1" accent2="accent2" accent3="accent3" accent4="accent4" accent5="accent5" accent6="accent6" hlink="hlink" folHlink="folHlink"/>
-  <p:sldLayoutIdLst>
-    <p:sldLayoutId xmlns:r="http://schemas.openxmlformats.org/officeDocument/2006/relationships" id="2147483649" r:id="Rd5a1263136164c74"/>
-  </p:sldLayoutIdLst>
-  <p:txStyles>
-    <p:titleStyle>
-      <a:lvl1pPr xmlns:a="http://schemas.openxmlformats.org/drawingml/2006/main" algn="l">
-        <a:lnSpc>
-          <a:spcPct val="90000"/>
-        </a:lnSpc>
-        <a:spcBef>
-          <a:spcPts val="0"/>
-        </a:spcBef>
-        <a:buNone/>
-        <a:defRPr sz="4400">
-          <a:solidFill>
-            <a:schemeClr val="tx1"/>
-          </a:solidFill>
-          <a:latin typeface="+mj-lt"/>
-          <a:ea typeface="+mj-lt"/>
-          <a:cs typeface="+mj-lt"/>
-        </a:defRPr>
-      </a:lvl1pPr>
-    </p:titleStyle>
-    <p:bodyStyle>
-      <a:lvl1pPr xmlns:a="http://schemas.openxmlformats.org/drawingml/2006/main" marL="228600" indent="-228600" algn="l">
-        <a:lnSpc>
-          <a:spcPct val="90000"/>
-        </a:lnSpc>
-        <a:spcBef>
-          <a:spcPts val="1000"/>
-        </a:spcBef>
-        <a:buChar char="•"/>
-        <a:defRPr sz="2800">
-          <a:solidFill>
-            <a:schemeClr val="tx1"/>
-          </a:solidFill>
-          <a:latin typeface="+mn-lt"/>
-          <a:ea typeface="+mn-lt"/>
-          <a:cs typeface="+mn-lt"/>
-        </a:defRPr>
-      </a:lvl1pPr>
-      <a:lvl2pPr xmlns:a="http://schemas.openxmlformats.org/drawingml/2006/main" marL="685800" indent="-228600" algn="l">
-        <a:lnSpc>
-          <a:spcPct val="90000"/>
-        </a:lnSpc>
-        <a:spcBef>
-          <a:spcPts val="500"/>
-        </a:spcBef>
-        <a:buChar char="•"/>
-        <a:defRPr sz="2400">
-          <a:solidFill>
-            <a:schemeClr val="tx1"/>
-          </a:solidFill>
-          <a:latin typeface="+mn-lt"/>
-          <a:ea typeface="+mn-lt"/>
-          <a:cs typeface="+mn-lt"/>
-        </a:defRPr>
-      </a:lvl2pPr>
-      <a:lvl3pPr xmlns:a="http://schemas.openxmlformats.org/drawingml/2006/main" marL="1143000" indent="-228600" algn="l">
-        <a:lnSpc>
-          <a:spcPct val="90000"/>
-        </a:lnSpc>
-        <a:spcBef>
-          <a:spcPts val="500"/>
-        </a:spcBef>
-        <a:buChar char="•"/>
-        <a:defRPr sz="2000">
-          <a:solidFill>
-            <a:schemeClr val="tx1"/>
-          </a:solidFill>
-          <a:latin typeface="+mn-lt"/>
-          <a:ea typeface="+mn-lt"/>
-          <a:cs typeface="+mn-lt"/>
-        </a:defRPr>
-      </a:lvl3pPr>
-      <a:lvl4pPr xmlns:a="http://schemas.openxmlformats.org/drawingml/2006/main" marL="1600200" indent="-228600" algn="l">
-        <a:lnSpc>
-          <a:spcPct val="90000"/>
-        </a:lnSpc>
-        <a:spcBef>
-          <a:spcPts val="500"/>
-        </a:spcBef>
-        <a:buChar char="•"/>
-        <a:defRPr sz="1800">
-          <a:solidFill>
-            <a:schemeClr val="tx1"/>
-          </a:solidFill>
-          <a:latin typeface="+mn-lt"/>
-          <a:ea typeface="+mn-lt"/>
-          <a:cs typeface="+mn-lt"/>
-        </a:defRPr>
-      </a:lvl4pPr>
-      <a:lvl5pPr xmlns:a="http://schemas.openxmlformats.org/drawingml/2006/main" marL="2057400" indent="-228600" algn="l">
-        <a:lnSpc>
-          <a:spcPct val="90000"/>
-        </a:lnSpc>
-        <a:spcBef>
-          <a:spcPts val="500"/>
-        </a:spcBef>
-        <a:buChar char="•"/>
-        <a:defRPr sz="1800">
-          <a:solidFill>
-            <a:schemeClr val="tx1"/>
-          </a:solidFill>
-          <a:latin typeface="+mn-lt"/>
-          <a:ea typeface="+mn-lt"/>
-          <a:cs typeface="+mn-lt"/>
-        </a:defRPr>
-      </a:lvl5pPr>
-      <a:lvl6pPr xmlns:a="http://schemas.openxmlformats.org/drawingml/2006/main" marL="2514600" indent="-228600" algn="l">
-        <a:lnSpc>
-          <a:spcPct val="90000"/>
-        </a:lnSpc>
-        <a:spcBef>
-          <a:spcPts val="500"/>
-        </a:spcBef>
-        <a:buChar char="•"/>
-        <a:defRPr sz="1800">
-          <a:solidFill>
-            <a:schemeClr val="tx1"/>
-          </a:solidFill>
-          <a:latin typeface="+mn-lt"/>
-          <a:ea typeface="+mn-lt"/>
-          <a:cs typeface="+mn-lt"/>
-        </a:defRPr>
-      </a:lvl6pPr>
-      <a:lvl7pPr xmlns:a="http://schemas.openxmlformats.org/drawingml/2006/main" marL="2971800" indent="-228600" algn="l">
-        <a:lnSpc>
-          <a:spcPct val="90000"/>
-        </a:lnSpc>
-        <a:spcBef>
-          <a:spcPts val="500"/>
-        </a:spcBef>
-        <a:buChar char="•"/>
-        <a:defRPr sz="1800">
-          <a:solidFill>
-            <a:schemeClr val="tx1"/>
-          </a:solidFill>
-          <a:latin typeface="+mn-lt"/>
-          <a:ea typeface="+mn-lt"/>
-          <a:cs typeface="+mn-lt"/>
-        </a:defRPr>
-      </a:lvl7pPr>
-      <a:lvl8pPr xmlns:a="http://schemas.openxmlformats.org/drawingml/2006/main" marL="3429000" indent="-228600" algn="l">
-        <a:lnSpc>
-          <a:spcPct val="90000"/>
-        </a:lnSpc>
-        <a:spcBef>
-          <a:spcPts val="500"/>
-        </a:spcBef>
-        <a:buChar char="•"/>
-        <a:defRPr sz="1800">
-          <a:solidFill>
-            <a:schemeClr val="tx1"/>
-          </a:solidFill>
-          <a:latin typeface="+mn-lt"/>
-          <a:ea typeface="+mn-lt"/>
-          <a:cs typeface="+mn-lt"/>
-        </a:defRPr>
-      </a:lvl8pPr>
-      <a:lvl9pPr xmlns:a="http://schemas.openxmlformats.org/drawingml/2006/main" marL="3886200" indent="-228600" algn="l">
-        <a:lnSpc>
-          <a:spcPct val="90000"/>
-        </a:lnSpc>
-        <a:spcBef>
-          <a:spcPts val="500"/>
-        </a:spcBef>
-        <a:buChar char="•"/>
-        <a:defRPr sz="1800">
-          <a:solidFill>
-            <a:schemeClr val="tx1"/>
-          </a:solidFill>
-          <a:latin typeface="+mn-lt"/>
-          <a:ea typeface="+mn-lt"/>
-          <a:cs typeface="+mn-lt"/>
-        </a:defRPr>
-      </a:lvl9pPr>
-    </p:bodyStyle>
-    <p:otherStyle>
-      <a:lvl1pPr xmlns:a="http://schemas.openxmlformats.org/drawingml/2006/main" marL="0" algn="l">
-        <a:buNone/>
-        <a:defRPr sz="1800">
-          <a:solidFill>
-            <a:schemeClr val="tx1"/>
-          </a:solidFill>
-          <a:latin typeface="+mn-lt"/>
-          <a:ea typeface="+mn-lt"/>
-          <a:cs typeface="+mn-lt"/>
-        </a:defRPr>
-      </a:lvl1pPr>
-      <a:lvl2pPr xmlns:a="http://schemas.openxmlformats.org/drawingml/2006/main" marL="457200" algn="l">
-        <a:buNone/>
-        <a:defRPr sz="1800">
-          <a:solidFill>
-            <a:schemeClr val="tx1"/>
-          </a:solidFill>
-          <a:latin typeface="+mn-lt"/>
-          <a:ea typeface="+mn-lt"/>
-          <a:cs typeface="+mn-lt"/>
-        </a:defRPr>
-      </a:lvl2pPr>
-      <a:lvl3pPr xmlns:a="http://schemas.openxmlformats.org/drawingml/2006/main" marL="914400" algn="l">
-        <a:buNone/>
-        <a:defRPr sz="1800">
-          <a:solidFill>
-            <a:schemeClr val="tx1"/>
-          </a:solidFill>
-          <a:latin typeface="+mn-lt"/>
-          <a:ea typeface="+mn-lt"/>
-          <a:cs typeface="+mn-lt"/>
-        </a:defRPr>
-      </a:lvl3pPr>
-      <a:lvl4pPr xmlns:a="http://schemas.openxmlformats.org/drawingml/2006/main" marL="1371600" algn="l">
-        <a:buNone/>
-        <a:defRPr sz="1800">
-          <a:solidFill>
-            <a:schemeClr val="tx1"/>
-          </a:solidFill>
-          <a:latin typeface="+mn-lt"/>
-          <a:ea typeface="+mn-lt"/>
-          <a:cs typeface="+mn-lt"/>
-        </a:defRPr>
-      </a:lvl4pPr>
-      <a:lvl5pPr xmlns:a="http://schemas.openxmlformats.org/drawingml/2006/main" marL="1828800" algn="l">
-        <a:buNone/>
-        <a:defRPr sz="1800">
-          <a:solidFill>
-            <a:schemeClr val="tx1"/>
-          </a:solidFill>
-          <a:latin typeface="+mn-lt"/>
-          <a:ea typeface="+mn-lt"/>
-          <a:cs typeface="+mn-lt"/>
-        </a:defRPr>
-      </a:lvl5pPr>
-      <a:lvl6pPr xmlns:a="http://schemas.openxmlformats.org/drawingml/2006/main" marL="2286000" algn="l">
-        <a:buNone/>
-        <a:defRPr sz="1800">
-          <a:solidFill>
-            <a:schemeClr val="tx1"/>
-          </a:solidFill>
-          <a:latin typeface="+mn-lt"/>
-          <a:ea typeface="+mn-lt"/>
-          <a:cs typeface="+mn-lt"/>
-        </a:defRPr>
-      </a:lvl6pPr>
-      <a:lvl7pPr xmlns:a="http://schemas.openxmlformats.org/drawingml/2006/main" marL="2743200" algn="l">
-        <a:buNone/>
-        <a:defRPr sz="1800">
-          <a:solidFill>
-            <a:schemeClr val="tx1"/>
-          </a:solidFill>
-          <a:latin typeface="+mn-lt"/>
-          <a:ea typeface="+mn-lt"/>
-          <a:cs typeface="+mn-lt"/>
-        </a:defRPr>
-      </a:lvl7pPr>
-      <a:lvl8pPr xmlns:a="http://schemas.openxmlformats.org/drawingml/2006/main" marL="3200400" algn="l">
-        <a:buNone/>
-        <a:defRPr sz="1800">
-          <a:solidFill>
-            <a:schemeClr val="tx1"/>
-          </a:solidFill>
-          <a:latin typeface="+mn-lt"/>
-          <a:ea typeface="+mn-lt"/>
-          <a:cs typeface="+mn-lt"/>
-        </a:defRPr>
-      </a:lvl8pPr>
-      <a:lvl9pPr xmlns:a="http://schemas.openxmlformats.org/drawingml/2006/main" marL="3657600" algn="l">
-        <a:buNone/>
-        <a:defRPr sz="1800">
-          <a:solidFill>
-            <a:schemeClr val="tx1"/>
-          </a:solidFill>
-          <a:latin typeface="+mn-lt"/>
-          <a:ea typeface="+mn-lt"/>
-          <a:cs typeface="+mn-lt"/>
-        </a:defRPr>
-      </a:lvl9pPr>
-    </p:otherStyle>
-  </p:txStyles>
-</p:sldMaster>
-</file>
-
-<file path=ppt/slideMasters/theme/theme2.xml><?xml version="1.0" encoding="utf-8"?>
-<a:theme xmlns:a="http://schemas.openxmlformats.org/drawingml/2006/main" name="ChatGPT">
-  <a:themeElements>
-    <a:clrScheme name="ChatGPT">
-      <a:dk1>
-        <a:srgbClr val="000000"/>
-      </a:dk1>
-      <a:lt1>
-        <a:srgbClr val="FFFFFF"/>
-      </a:lt1>
-      <a:dk2>
-        <a:srgbClr val="0E2841"/>
-      </a:dk2>
-      <a:lt2>
-        <a:srgbClr val="E8E8E8"/>
-      </a:lt2>
-      <a:accent1>
-        <a:srgbClr val="156082"/>
-      </a:accent1>
-      <a:accent2>
-        <a:srgbClr val="E97132"/>
-      </a:accent2>
-      <a:accent3>
-        <a:srgbClr val="196B24"/>
-      </a:accent3>
-      <a:accent4>
-        <a:srgbClr val="0F9ED5"/>
-      </a:accent4>
-      <a:accent5>
-        <a:srgbClr val="A02B93"/>
-      </a:accent5>
-      <a:accent6>
-        <a:srgbClr val="4EA72E"/>
-      </a:accent6>
-      <a:hlink>
-        <a:srgbClr val="467886"/>
-      </a:hlink>
-      <a:folHlink>
-        <a:srgbClr val="96607D"/>
-      </a:folHlink>
-    </a:clrScheme>
-    <a:fontScheme name="Office">
-      <a:majorFont>
-        <a:latin typeface="Calibri Light"/>
-        <a:ea typeface="Calibri Light"/>
-        <a:cs typeface="Calibri Light"/>
-      </a:majorFont>
-      <a:minorFont>
-        <a:latin typeface="Calibri"/>
-        <a:ea typeface="Calibri"/>
-        <a:cs typeface="Calibri"/>
-      </a:minorFont>
-    </a:fontScheme>
-    <a:fmtScheme name="ChatGPT">
-      <a:fillStyleLst>
-        <a:solidFill>
-          <a:schemeClr val="phClr"/>
-        </a:solidFill>
-        <a:gradFill>
-          <a:gsLst>
-            <a:gs pos="0">
-              <a:schemeClr val="phClr">
-                <a:tint val="67000"/>
-                <a:lumMod val="110000"/>
-                <a:satMod val="105000"/>
-              </a:schemeClr>
-            </a:gs>
-            <a:gs pos="50000">
-              <a:schemeClr val="phClr">
-                <a:tint val="73000"/>
-                <a:lumMod val="105000"/>
-                <a:satMod val="103000"/>
-              </a:schemeClr>
-            </a:gs>
-            <a:gs pos="100000">
-              <a:schemeClr val="phClr">
-                <a:tint val="81000"/>
-                <a:lumMod val="105000"/>
-                <a:satMod val="109000"/>
-              </a:schemeClr>
-            </a:gs>
-          </a:gsLst>
-          <a:lin ang="5400000" scaled="0"/>
-        </a:gradFill>
-        <a:gradFill>
-          <a:gsLst>
-            <a:gs pos="0">
-              <a:schemeClr val="phClr">
-                <a:tint val="94000"/>
-                <a:lumMod val="102000"/>
-                <a:satMod val="103000"/>
-              </a:schemeClr>
-            </a:gs>
-            <a:gs pos="50000">
-              <a:schemeClr val="phClr">
-                <a:shade val="100000"/>
-                <a:lumMod val="100000"/>
-                <a:satMod val="110000"/>
-              </a:schemeClr>
-            </a:gs>
-            <a:gs pos="100000">
-              <a:schemeClr val="phClr">
-                <a:shade val="78000"/>
-                <a:lumMod val="99000"/>
-                <a:satMod val="120000"/>
-              </a:schemeClr>
-            </a:gs>
-          </a:gsLst>
-          <a:lin ang="5400000" scaled="0"/>
-        </a:gradFill>
-      </a:fillStyleLst>
-      <a:lnStyleLst>
-        <a:ln w="12700">
-          <a:solidFill>
-            <a:schemeClr val="phClr"/>
-          </a:solidFill>
-          <a:prstDash val="solid"/>
-        </a:ln>
-        <a:ln w="19050">
-          <a:solidFill>
-            <a:schemeClr val="phClr"/>
-          </a:solidFill>
-          <a:prstDash val="solid"/>
-        </a:ln>
-        <a:ln w="25400">
-          <a:solidFill>
-            <a:schemeClr val="phClr"/>
-          </a:solidFill>
-          <a:prstDash val="solid"/>
-        </a:ln>
-      </a:lnStyleLst>
-      <a:effectStyleLst>
-        <a:effectStyle>
-          <a:effectLst/>
-        </a:effectStyle>
-        <a:effectStyle>
-          <a:effectLst/>
-        </a:effectStyle>
-        <a:effectStyle>
-          <a:effectLst>
-            <a:outerShdw blurRad="57150" dist="19050" dir="5400000">
-              <a:srgbClr val="000000">
-                <a:alpha val="16000"/>
-              </a:srgbClr>
-            </a:outerShdw>
-          </a:effectLst>
-        </a:effectStyle>
-        <a:effectStyle>
-          <a:effectLst>
-            <a:outerShdw blurRad="19050" dist="9525" dir="5400000">
-              <a:srgbClr val="000000">
-                <a:alpha val="6000"/>
-              </a:srgbClr>
-            </a:outerShdw>
-          </a:effectLst>
-        </a:effectStyle>
-        <a:effectStyle>
-          <a:effectLst>
-            <a:outerShdw blurRad="28575" dist="9525" dir="5400000">
-              <a:srgbClr val="000000">
-                <a:alpha val="8000"/>
-              </a:srgbClr>
-            </a:outerShdw>
-          </a:effectLst>
-        </a:effectStyle>
-        <a:effectStyle>
-          <a:effectLst>
-            <a:outerShdw blurRad="57150" dist="19050" dir="5400000">
-              <a:srgbClr val="000000">
-                <a:alpha val="10000"/>
-              </a:srgbClr>
-            </a:outerShdw>
-          </a:effectLst>
-        </a:effectStyle>
-        <a:effectStyle>
-          <a:effectLst>
-            <a:outerShdw blurRad="114300" dist="38100" dir="5400000">
-              <a:srgbClr val="000000">
-                <a:alpha val="12000"/>
-              </a:srgbClr>
-            </a:outerShdw>
-          </a:effectLst>
-        </a:effectStyle>
-        <a:effectStyle>
-          <a:effectLst>
-            <a:outerShdw blurRad="171450" dist="57150" dir="5400000">
-              <a:srgbClr val="000000">
-                <a:alpha val="16000"/>
-              </a:srgbClr>
-            </a:outerShdw>
-          </a:effectLst>
-        </a:effectStyle>
-        <a:effectStyle>
-          <a:effectLst>
-            <a:outerShdw blurRad="266700" dist="95250" dir="5400000">
-              <a:srgbClr val="000000">
-                <a:alpha val="24000"/>
-              </a:srgbClr>
-            </a:outerShdw>
-          </a:effectLst>
-        </a:effectStyle>
-      </a:effectStyleLst>
-      <a:bgFillStyleLst>
-        <a:solidFill>
-          <a:schemeClr val="phClr"/>
-        </a:solidFill>
-        <a:solidFill>
-          <a:schemeClr val="phClr">
-            <a:tint val="95000"/>
-            <a:satMod val="170000"/>
-          </a:schemeClr>
-        </a:solidFill>
-        <a:gradFill>
-          <a:gsLst>
-            <a:gs pos="0">
-              <a:schemeClr val="phClr">
-                <a:tint val="93000"/>
-                <a:shade val="98000"/>
-                <a:lumMod val="102000"/>
-                <a:satMod val="150000"/>
-              </a:schemeClr>
-            </a:gs>
-            <a:gs pos="50000">
-              <a:schemeClr val="phClr">
-                <a:tint val="98000"/>
-                <a:shade val="90000"/>
-                <a:lumMod val="103000"/>
-                <a:satMod val="130000"/>
-              </a:schemeClr>
-            </a:gs>
-            <a:gs pos="100000">
-              <a:schemeClr val="phClr">
-                <a:shade val="63000"/>
-                <a:satMod val="120000"/>
-              </a:schemeClr>
-            </a:gs>
-          </a:gsLst>
-          <a:lin ang="5400000" scaled="0"/>
-        </a:gradFill>
-      </a:bgFillStyleLst>
-    </a:fmtScheme>
-  </a:themeElements>
-</a:theme>
-</file>
-
-<file path=ppt/slides/charts/chart1.xml><?xml version="1.0" encoding="utf-8"?>
-<c:chartSpace xmlns:c="http://schemas.openxmlformats.org/drawingml/2006/chart" xmlns:r="http://schemas.openxmlformats.org/officeDocument/2006/relationships">
-  <c:lang val="en-US"/>
+<file path=ppt/charts/chart1.xml><?xml version="1.0" encoding="utf-8"?>
+<c:chartSpace xmlns:c="http://schemas.openxmlformats.org/drawingml/2006/chart" xmlns:a="http://schemas.openxmlformats.org/drawingml/2006/main" xmlns:r="http://schemas.openxmlformats.org/officeDocument/2006/relationships" xmlns:c16r2="http://schemas.microsoft.com/office/drawing/2015/06/chart">
+  <c:date1904 val="1"/>
+  <c:lang val="fr-FR"/>
+  <c:roundedCorners val="1"/>
+  <c:style val="2"/>
   <c:chart>
+    <c:autoTitleDeleted val="1"/>
     <c:plotArea>
+      <c:layout/>
       <c:barChart>
         <c:barDir val="bar"/>
         <c:grouping val="clustered"/>
@@ -1670,10 +138,50 @@
             <c:v>Operations</c:v>
           </c:tx>
           <c:spPr>
-            <a:solidFill xmlns:a="http://schemas.openxmlformats.org/drawingml/2006/main">
+            <a:solidFill>
               <a:srgbClr val="007F75"/>
             </a:solidFill>
           </c:spPr>
+          <c:invertIfNegative val="1"/>
+          <c:dLbls>
+            <c:spPr>
+              <a:noFill/>
+              <a:ln>
+                <a:noFill/>
+              </a:ln>
+              <a:effectLst/>
+            </c:spPr>
+            <c:txPr>
+              <a:bodyPr anchorCtr="1"/>
+              <a:lstStyle/>
+              <a:p>
+                <a:pPr>
+                  <a:defRPr sz="1650">
+                    <a:solidFill>
+                      <a:srgbClr val="102C36"/>
+                    </a:solidFill>
+                    <a:latin typeface="Arial"/>
+                    <a:ea typeface="Arial"/>
+                    <a:cs typeface="Arial"/>
+                  </a:defRPr>
+                </a:pPr>
+                <a:endParaRPr lang="en-US"/>
+              </a:p>
+            </c:txPr>
+            <c:dLblPos val="outEnd"/>
+            <c:showLegendKey val="0"/>
+            <c:showVal val="1"/>
+            <c:showCatName val="0"/>
+            <c:showSerName val="0"/>
+            <c:showPercent val="0"/>
+            <c:showBubbleSize val="0"/>
+            <c:showLeaderLines val="0"/>
+            <c:extLst>
+              <c:ext xmlns:c15="http://schemas.microsoft.com/office/drawing/2012/chart" uri="{CE6537A1-D6FC-4f65-9D91-7224C49458BB}">
+                <c15:showLeaderLines val="0"/>
+              </c:ext>
+            </c:extLst>
+          </c:dLbls>
           <c:cat>
             <c:strRef>
               <c:f>'Chart Data'!$A$2:$A$3</c:f>
@@ -1703,24 +211,22 @@
               </c:numCache>
             </c:numRef>
           </c:val>
+          <c:extLst>
+            <c:ext xmlns:c14="http://schemas.microsoft.com/office/drawing/2007/8/2/chart" uri="{6F2FDCE9-48DA-4B69-8628-5D25D57E5C99}">
+              <c14:invertSolidFillFmt>
+                <c14:spPr xmlns:c14="http://schemas.microsoft.com/office/drawing/2007/8/2/chart">
+                  <a:solidFill>
+                    <a:srgbClr val="FFFFFF"/>
+                  </a:solidFill>
+                </c14:spPr>
+              </c14:invertSolidFillFmt>
+            </c:ext>
+            <c:ext xmlns:c16="http://schemas.microsoft.com/office/drawing/2014/chart" uri="{C3380CC4-5D6E-409C-BE32-E72D297353CC}">
+              <c16:uniqueId val="{00000000-C39C-4A3F-AB34-AF52916524ED}"/>
+            </c:ext>
+          </c:extLst>
         </c:ser>
         <c:dLbls>
-          <c:txPr>
-            <a:bodyPr xmlns:a="http://schemas.openxmlformats.org/drawingml/2006/main" anchorCtr="1"/>
-            <a:lstStyle xmlns:a="http://schemas.openxmlformats.org/drawingml/2006/main"/>
-            <a:p xmlns:a="http://schemas.openxmlformats.org/drawingml/2006/main">
-              <a:pPr>
-                <a:defRPr sz="1650">
-                  <a:solidFill>
-                    <a:srgbClr val="102C36"/>
-                  </a:solidFill>
-                  <a:latin typeface="Arial"/>
-                  <a:ea typeface="Arial"/>
-                  <a:cs typeface="Arial"/>
-                </a:defRPr>
-              </a:pPr>
-            </a:p>
-          </c:txPr>
           <c:dLblPos val="outEnd"/>
           <c:showLegendKey val="0"/>
           <c:showVal val="1"/>
@@ -1728,7 +234,6 @@
           <c:showSerName val="0"/>
           <c:showPercent val="0"/>
           <c:showBubbleSize val="0"/>
-          <c:showLeaderLines val="0"/>
         </c:dLbls>
         <c:gapWidth val="65"/>
         <c:axId val="48650112"/>
@@ -1741,11 +246,12 @@
         </c:scaling>
         <c:delete val="0"/>
         <c:axPos val="l"/>
-        <c:numFmt formatCode="General"/>
+        <c:numFmt formatCode="General" sourceLinked="1"/>
         <c:majorTickMark val="none"/>
         <c:minorTickMark val="none"/>
+        <c:tickLblPos val="nextTo"/>
         <c:spPr>
-          <a:ln xmlns:a="http://schemas.openxmlformats.org/drawingml/2006/main" w="9525">
+          <a:ln w="9525">
             <a:solidFill>
               <a:srgbClr val="D4D4D4"/>
             </a:solidFill>
@@ -1753,9 +259,9 @@
           </a:ln>
         </c:spPr>
         <c:txPr>
-          <a:bodyPr xmlns:a="http://schemas.openxmlformats.org/drawingml/2006/main" anchorCtr="1"/>
-          <a:lstStyle xmlns:a="http://schemas.openxmlformats.org/drawingml/2006/main"/>
-          <a:p xmlns:a="http://schemas.openxmlformats.org/drawingml/2006/main">
+          <a:bodyPr anchorCtr="1"/>
+          <a:lstStyle/>
+          <a:p>
             <a:pPr>
               <a:defRPr sz="1650">
                 <a:solidFill>
@@ -1766,9 +272,15 @@
                 <a:cs typeface="Arial"/>
               </a:defRPr>
             </a:pPr>
+            <a:endParaRPr lang="en-US"/>
           </a:p>
         </c:txPr>
         <c:crossAx val="48672768"/>
+        <c:crosses val="autoZero"/>
+        <c:auto val="1"/>
+        <c:lblAlgn val="ctr"/>
+        <c:lblOffset val="100"/>
+        <c:noMultiLvlLbl val="1"/>
       </c:catAx>
       <c:valAx>
         <c:axId val="48672768"/>
@@ -1781,18 +293,19 @@
         <c:axPos val="b"/>
         <c:majorGridlines>
           <c:spPr>
-            <a:ln xmlns:a="http://schemas.openxmlformats.org/drawingml/2006/main" w="9525">
+            <a:ln w="9525">
               <a:solidFill>
                 <a:srgbClr val="DEE6E2"/>
               </a:solidFill>
             </a:ln>
           </c:spPr>
         </c:majorGridlines>
-        <c:numFmt formatCode="0"/>
+        <c:numFmt formatCode="0" sourceLinked="1"/>
         <c:majorTickMark val="none"/>
         <c:minorTickMark val="none"/>
+        <c:tickLblPos val="nextTo"/>
         <c:spPr>
-          <a:ln xmlns:a="http://schemas.openxmlformats.org/drawingml/2006/main" w="9525">
+          <a:ln w="9525">
             <a:solidFill>
               <a:srgbClr val="D4D4D4"/>
             </a:solidFill>
@@ -1800,9 +313,9 @@
           </a:ln>
         </c:spPr>
         <c:txPr>
-          <a:bodyPr xmlns:a="http://schemas.openxmlformats.org/drawingml/2006/main" anchorCtr="1"/>
-          <a:lstStyle xmlns:a="http://schemas.openxmlformats.org/drawingml/2006/main"/>
-          <a:p xmlns:a="http://schemas.openxmlformats.org/drawingml/2006/main">
+          <a:bodyPr anchorCtr="1"/>
+          <a:lstStyle/>
+          <a:p>
             <a:pPr>
               <a:defRPr sz="1350">
                 <a:solidFill>
@@ -1813,39 +326,1289 @@
                 <a:cs typeface="Arial"/>
               </a:defRPr>
             </a:pPr>
+            <a:endParaRPr lang="en-US"/>
           </a:p>
         </c:txPr>
         <c:crossAx val="48650112"/>
+        <c:crosses val="autoZero"/>
         <c:crossBetween val="between"/>
         <c:majorUnit val="150"/>
       </c:valAx>
       <c:spPr>
-        <a:solidFill xmlns:a="http://schemas.openxmlformats.org/drawingml/2006/main">
+        <a:solidFill>
           <a:srgbClr val="F5F4EF"/>
         </a:solidFill>
       </c:spPr>
     </c:plotArea>
     <c:plotVisOnly val="1"/>
+    <c:dispBlanksAs val="zero"/>
+    <c:showDLblsOverMax val="1"/>
   </c:chart>
   <c:spPr>
-    <a:solidFill xmlns:a="http://schemas.openxmlformats.org/drawingml/2006/main">
+    <a:solidFill>
       <a:srgbClr val="F5F4EF"/>
     </a:solidFill>
   </c:spPr>
-  <c:externalData r:id="rIdChartSnapshot1">
+  <c:externalData r:id="rId1">
     <c:autoUpdate val="0"/>
   </c:externalData>
 </c:chartSpace>
 </file>
 
+<file path=ppt/notesMasters/notesMaster1.xml><?xml version="1.0" encoding="utf-8"?>
+<p:notesMaster xmlns:a="http://schemas.openxmlformats.org/drawingml/2006/main" xmlns:r="http://schemas.openxmlformats.org/officeDocument/2006/relationships" xmlns:p="http://schemas.openxmlformats.org/presentationml/2006/main">
+  <p:cSld>
+    <p:bg>
+      <p:bgRef idx="1001">
+        <a:schemeClr val="bg1"/>
+      </p:bgRef>
+    </p:bg>
+    <p:spTree>
+      <p:nvGrpSpPr>
+        <p:cNvPr id="1" name=""/>
+        <p:cNvGrpSpPr/>
+        <p:nvPr/>
+      </p:nvGrpSpPr>
+      <p:grpSpPr>
+        <a:xfrm>
+          <a:off x="0" y="0"/>
+          <a:ext cx="0" cy="0"/>
+          <a:chOff x="0" y="0"/>
+          <a:chExt cx="0" cy="0"/>
+        </a:xfrm>
+      </p:grpSpPr>
+      <p:sp>
+        <p:nvSpPr>
+          <p:cNvPr id="2" name="Header Placeholder"/>
+          <p:cNvSpPr>
+            <a:spLocks noGrp="1"/>
+          </p:cNvSpPr>
+          <p:nvPr>
+            <p:ph type="hdr" sz="quarter"/>
+          </p:nvPr>
+        </p:nvSpPr>
+        <p:spPr>
+          <a:prstGeom prst="rect">
+            <a:avLst/>
+          </a:prstGeom>
+        </p:spPr>
+        <p:txBody>
+          <a:bodyPr/>
+          <a:lstStyle/>
+          <a:p>
+            <a:endParaRPr/>
+          </a:p>
+        </p:txBody>
+      </p:sp>
+      <p:sp>
+        <p:nvSpPr>
+          <p:cNvPr id="3" name="Date Placeholder"/>
+          <p:cNvSpPr>
+            <a:spLocks noGrp="1"/>
+          </p:cNvSpPr>
+          <p:nvPr>
+            <p:ph type="dt" sz="quarter" idx="1"/>
+          </p:nvPr>
+        </p:nvSpPr>
+        <p:spPr>
+          <a:prstGeom prst="rect">
+            <a:avLst/>
+          </a:prstGeom>
+        </p:spPr>
+        <p:txBody>
+          <a:bodyPr/>
+          <a:lstStyle/>
+          <a:p>
+            <a:endParaRPr/>
+          </a:p>
+        </p:txBody>
+      </p:sp>
+      <p:sp>
+        <p:nvSpPr>
+          <p:cNvPr id="4" name="Slide Image Placeholder"/>
+          <p:cNvSpPr>
+            <a:spLocks noGrp="1" noRot="1" noChangeAspect="1"/>
+          </p:cNvSpPr>
+          <p:nvPr>
+            <p:ph type="sldImg" idx="2"/>
+          </p:nvPr>
+        </p:nvSpPr>
+        <p:spPr>
+          <a:prstGeom prst="rect">
+            <a:avLst/>
+          </a:prstGeom>
+        </p:spPr>
+        <p:txBody>
+          <a:bodyPr/>
+          <a:lstStyle/>
+          <a:p>
+            <a:endParaRPr/>
+          </a:p>
+        </p:txBody>
+      </p:sp>
+      <p:sp>
+        <p:nvSpPr>
+          <p:cNvPr id="5" name="Notes Placeholder"/>
+          <p:cNvSpPr>
+            <a:spLocks noGrp="1"/>
+          </p:cNvSpPr>
+          <p:nvPr>
+            <p:ph type="body" sz="quarter" idx="3"/>
+          </p:nvPr>
+        </p:nvSpPr>
+        <p:spPr>
+          <a:prstGeom prst="rect">
+            <a:avLst/>
+          </a:prstGeom>
+        </p:spPr>
+        <p:txBody>
+          <a:bodyPr/>
+          <a:lstStyle/>
+          <a:p>
+            <a:endParaRPr/>
+          </a:p>
+        </p:txBody>
+      </p:sp>
+      <p:sp>
+        <p:nvSpPr>
+          <p:cNvPr id="6" name="Footer Placeholder"/>
+          <p:cNvSpPr>
+            <a:spLocks noGrp="1"/>
+          </p:cNvSpPr>
+          <p:nvPr>
+            <p:ph type="ftr" sz="quarter" idx="4"/>
+          </p:nvPr>
+        </p:nvSpPr>
+        <p:spPr>
+          <a:prstGeom prst="rect">
+            <a:avLst/>
+          </a:prstGeom>
+        </p:spPr>
+        <p:txBody>
+          <a:bodyPr/>
+          <a:lstStyle/>
+          <a:p>
+            <a:endParaRPr/>
+          </a:p>
+        </p:txBody>
+      </p:sp>
+      <p:sp>
+        <p:nvSpPr>
+          <p:cNvPr id="7" name="Slide Number Placeholder"/>
+          <p:cNvSpPr>
+            <a:spLocks noGrp="1"/>
+          </p:cNvSpPr>
+          <p:nvPr>
+            <p:ph type="sldNum" sz="quarter" idx="5"/>
+          </p:nvPr>
+        </p:nvSpPr>
+        <p:spPr>
+          <a:prstGeom prst="rect">
+            <a:avLst/>
+          </a:prstGeom>
+        </p:spPr>
+        <p:txBody>
+          <a:bodyPr/>
+          <a:lstStyle/>
+          <a:p>
+            <a:endParaRPr/>
+          </a:p>
+        </p:txBody>
+      </p:sp>
+    </p:spTree>
+  </p:cSld>
+  <p:clrMap bg1="lt1" tx1="dk1" bg2="lt2" tx2="dk2" accent1="accent1" accent2="accent2" accent3="accent3" accent4="accent4" accent5="accent5" accent6="accent6" hlink="hlink" folHlink="folHlink"/>
+  <p:notesStyle>
+    <a:lvl1pPr marL="0" algn="l" defTabSz="914400" rtl="0" eaLnBrk="1" latinLnBrk="0" hangingPunct="1">
+      <a:defRPr sz="1200" kern="1200"/>
+    </a:lvl1pPr>
+  </p:notesStyle>
+</p:notesMaster>
+</file>
+
+<file path=ppt/notesSlides/notesSlide1.xml><?xml version="1.0" encoding="utf-8"?>
+<p:notes xmlns:a="http://schemas.openxmlformats.org/drawingml/2006/main" xmlns:r="http://schemas.openxmlformats.org/officeDocument/2006/relationships" xmlns:p="http://schemas.openxmlformats.org/presentationml/2006/main">
+  <p:cSld>
+    <p:spTree>
+      <p:nvGrpSpPr>
+        <p:cNvPr id="1" name=""/>
+        <p:cNvGrpSpPr/>
+        <p:nvPr/>
+      </p:nvGrpSpPr>
+      <p:grpSpPr>
+        <a:xfrm>
+          <a:off x="0" y="0"/>
+          <a:ext cx="0" cy="0"/>
+          <a:chOff x="0" y="0"/>
+          <a:chExt cx="0" cy="0"/>
+        </a:xfrm>
+      </p:grpSpPr>
+      <p:sp>
+        <p:nvSpPr>
+          <p:cNvPr id="2" name="Slide Image Placeholder 1"/>
+          <p:cNvSpPr>
+            <a:spLocks noGrp="1" noRot="1" noChangeAspect="1"/>
+          </p:cNvSpPr>
+          <p:nvPr>
+            <p:ph type="sldImg"/>
+          </p:nvPr>
+        </p:nvSpPr>
+        <p:spPr/>
+      </p:sp>
+      <p:sp>
+        <p:nvSpPr>
+          <p:cNvPr id="3" name="Notes Placeholder 2"/>
+          <p:cNvSpPr>
+            <a:spLocks noGrp="1"/>
+          </p:cNvSpPr>
+          <p:nvPr>
+            <p:ph type="body" idx="1"/>
+          </p:nvPr>
+        </p:nvSpPr>
+        <p:spPr/>
+        <p:txBody>
+          <a:bodyPr/>
+          <a:lstStyle/>
+          <a:p>
+            <a:r>
+              <a:rPr dirty="0"/>
+              <a:t>Before we dive in, here's the live link to the dashboard so you can follow along: wolf-day-</a:t>
+            </a:r>
+            <a:r>
+              <a:rPr dirty="0" err="1"/>
+              <a:t>damage.vercel.app</a:t>
+            </a:r>
+            <a:r>
+              <a:rPr dirty="0"/>
+              <a:t>/dashboard. I'll walk you through what we built, then we'll review the dashboard together — it's designed for the workshop mechanic.</a:t>
+            </a:r>
+          </a:p>
+        </p:txBody>
+      </p:sp>
+      <p:sp>
+        <p:nvSpPr>
+          <p:cNvPr id="4" name="Slide Number Placeholder 3"/>
+          <p:cNvSpPr>
+            <a:spLocks noGrp="1"/>
+          </p:cNvSpPr>
+          <p:nvPr>
+            <p:ph type="sldNum" idx="5"/>
+          </p:nvPr>
+        </p:nvSpPr>
+        <p:spPr/>
+        <p:txBody>
+          <a:bodyPr/>
+          <a:lstStyle/>
+          <a:p>
+            <a:endParaRPr/>
+          </a:p>
+        </p:txBody>
+      </p:sp>
+    </p:spTree>
+  </p:cSld>
+  <p:clrMapOvr>
+    <a:masterClrMapping/>
+  </p:clrMapOvr>
+</p:notes>
+</file>
+
+<file path=ppt/notesSlides/notesSlide2.xml><?xml version="1.0" encoding="utf-8"?>
+<p:notes xmlns:a="http://schemas.openxmlformats.org/drawingml/2006/main" xmlns:r="http://schemas.openxmlformats.org/officeDocument/2006/relationships" xmlns:p="http://schemas.openxmlformats.org/presentationml/2006/main">
+  <p:cSld>
+    <p:spTree>
+      <p:nvGrpSpPr>
+        <p:cNvPr id="1" name=""/>
+        <p:cNvGrpSpPr/>
+        <p:nvPr/>
+      </p:nvGrpSpPr>
+      <p:grpSpPr>
+        <a:xfrm>
+          <a:off x="0" y="0"/>
+          <a:ext cx="0" cy="0"/>
+          <a:chOff x="0" y="0"/>
+          <a:chExt cx="0" cy="0"/>
+        </a:xfrm>
+      </p:grpSpPr>
+      <p:sp>
+        <p:nvSpPr>
+          <p:cNvPr id="2" name="Slide Image Placeholder 1"/>
+          <p:cNvSpPr>
+            <a:spLocks noGrp="1" noRot="1" noChangeAspect="1"/>
+          </p:cNvSpPr>
+          <p:nvPr>
+            <p:ph type="sldImg"/>
+          </p:nvPr>
+        </p:nvSpPr>
+        <p:spPr/>
+      </p:sp>
+      <p:sp>
+        <p:nvSpPr>
+          <p:cNvPr id="3" name="Notes Placeholder 2"/>
+          <p:cNvSpPr>
+            <a:spLocks noGrp="1"/>
+          </p:cNvSpPr>
+          <p:nvPr>
+            <p:ph type="body" idx="1"/>
+          </p:nvPr>
+        </p:nvSpPr>
+        <p:spPr/>
+        <p:txBody>
+          <a:bodyPr/>
+          <a:lstStyle/>
+          <a:p>
+            <a:r>
+              <a:rPr dirty="0"/>
+              <a:t>We start with 1,000 synthetic German workshop cases: 550 service cases and 450 damage cases. The damage information is locked inside messy, free-text German notes. Extracting it reliably is the challenge.</a:t>
+            </a:r>
+          </a:p>
+          <a:p>
+            <a:endParaRPr dirty="0"/>
+          </a:p>
+          <a:p>
+            <a:r>
+              <a:rPr dirty="0"/>
+              <a:t>One extraction feeds both deliverables. A German note goes to </a:t>
+            </a:r>
+            <a:r>
+              <a:rPr dirty="0" err="1"/>
+              <a:t>DeepSeek</a:t>
+            </a:r>
+            <a:r>
+              <a:rPr dirty="0"/>
+              <a:t>, which fills a strict </a:t>
+            </a:r>
+            <a:r>
+              <a:rPr dirty="0" err="1"/>
+              <a:t>Pydantic</a:t>
+            </a:r>
+            <a:r>
+              <a:rPr dirty="0"/>
+              <a:t> form with a closed vocabulary and explicit part-plus-side fields. Deterministic repair rules then produce the vehicle sheet and corpus analytics. The LLM only reads; deterministic code decides. German stays German.</a:t>
+            </a:r>
+          </a:p>
+        </p:txBody>
+      </p:sp>
+      <p:sp>
+        <p:nvSpPr>
+          <p:cNvPr id="4" name="Slide Number Placeholder 3"/>
+          <p:cNvSpPr>
+            <a:spLocks noGrp="1"/>
+          </p:cNvSpPr>
+          <p:nvPr>
+            <p:ph type="sldNum" idx="5"/>
+          </p:nvPr>
+        </p:nvSpPr>
+        <p:spPr/>
+        <p:txBody>
+          <a:bodyPr/>
+          <a:lstStyle/>
+          <a:p>
+            <a:endParaRPr/>
+          </a:p>
+        </p:txBody>
+      </p:sp>
+    </p:spTree>
+  </p:cSld>
+  <p:clrMapOvr>
+    <a:masterClrMapping/>
+  </p:clrMapOvr>
+</p:notes>
+</file>
+
+<file path=ppt/notesSlides/notesSlide3.xml><?xml version="1.0" encoding="utf-8"?>
+<p:notes xmlns:a="http://schemas.openxmlformats.org/drawingml/2006/main" xmlns:r="http://schemas.openxmlformats.org/officeDocument/2006/relationships" xmlns:p="http://schemas.openxmlformats.org/presentationml/2006/main">
+  <p:cSld>
+    <p:spTree>
+      <p:nvGrpSpPr>
+        <p:cNvPr id="1" name=""/>
+        <p:cNvGrpSpPr/>
+        <p:nvPr/>
+      </p:nvGrpSpPr>
+      <p:grpSpPr>
+        <a:xfrm>
+          <a:off x="0" y="0"/>
+          <a:ext cx="0" cy="0"/>
+          <a:chOff x="0" y="0"/>
+          <a:chExt cx="0" cy="0"/>
+        </a:xfrm>
+      </p:grpSpPr>
+      <p:sp>
+        <p:nvSpPr>
+          <p:cNvPr id="2" name="Slide Image Placeholder 1"/>
+          <p:cNvSpPr>
+            <a:spLocks noGrp="1" noRot="1" noChangeAspect="1"/>
+          </p:cNvSpPr>
+          <p:nvPr>
+            <p:ph type="sldImg"/>
+          </p:nvPr>
+        </p:nvSpPr>
+        <p:spPr/>
+      </p:sp>
+      <p:sp>
+        <p:nvSpPr>
+          <p:cNvPr id="3" name="Notes Placeholder 2"/>
+          <p:cNvSpPr>
+            <a:spLocks noGrp="1"/>
+          </p:cNvSpPr>
+          <p:nvPr>
+            <p:ph type="body" idx="1"/>
+          </p:nvPr>
+        </p:nvSpPr>
+        <p:spPr/>
+        <p:txBody>
+          <a:bodyPr/>
+          <a:lstStyle/>
+          <a:p>
+            <a:r>
+              <a:t>This is case 820002. We retain the original German note and highlight the exact sentence that justifies the damage: “Steinschlag Windschutzscheibe im Sichtfeld Fahrer, Reparatur nicht möglich, Austausch nötig.”</a:t>
+            </a:r>
+          </a:p>
+          <a:p>
+            <a:endParaRPr/>
+          </a:p>
+          <a:p>
+            <a:r>
+              <a:t>The windscreen must be replaced because replacement is stated in the note. The trim/plate is marked for remove-and-install by the adjacency rule. Every coloured region traces back to the verbatim German quote, directly for the damage or through the deterministic adjacency rule for R&amp;I. A blue R&amp;I region does not mean a second damage.</a:t>
+            </a:r>
+          </a:p>
+        </p:txBody>
+      </p:sp>
+      <p:sp>
+        <p:nvSpPr>
+          <p:cNvPr id="4" name="Slide Number Placeholder 3"/>
+          <p:cNvSpPr>
+            <a:spLocks noGrp="1"/>
+          </p:cNvSpPr>
+          <p:nvPr>
+            <p:ph type="sldNum" idx="5"/>
+          </p:nvPr>
+        </p:nvSpPr>
+        <p:spPr/>
+        <p:txBody>
+          <a:bodyPr/>
+          <a:lstStyle/>
+          <a:p>
+            <a:endParaRPr/>
+          </a:p>
+        </p:txBody>
+      </p:sp>
+    </p:spTree>
+  </p:cSld>
+  <p:clrMapOvr>
+    <a:masterClrMapping/>
+  </p:clrMapOvr>
+</p:notes>
+</file>
+
+<file path=ppt/notesSlides/notesSlide4.xml><?xml version="1.0" encoding="utf-8"?>
+<p:notes xmlns:a="http://schemas.openxmlformats.org/drawingml/2006/main" xmlns:r="http://schemas.openxmlformats.org/officeDocument/2006/relationships" xmlns:p="http://schemas.openxmlformats.org/presentationml/2006/main">
+  <p:cSld>
+    <p:spTree>
+      <p:nvGrpSpPr>
+        <p:cNvPr id="1" name=""/>
+        <p:cNvGrpSpPr/>
+        <p:nvPr/>
+      </p:nvGrpSpPr>
+      <p:grpSpPr>
+        <a:xfrm>
+          <a:off x="0" y="0"/>
+          <a:ext cx="0" cy="0"/>
+          <a:chOff x="0" y="0"/>
+          <a:chExt cx="0" cy="0"/>
+        </a:xfrm>
+      </p:grpSpPr>
+      <p:sp>
+        <p:nvSpPr>
+          <p:cNvPr id="2" name="Slide Image Placeholder 1"/>
+          <p:cNvSpPr>
+            <a:spLocks noGrp="1" noRot="1" noChangeAspect="1"/>
+          </p:cNvSpPr>
+          <p:nvPr>
+            <p:ph type="sldImg"/>
+          </p:nvPr>
+        </p:nvSpPr>
+        <p:spPr/>
+      </p:sp>
+      <p:sp>
+        <p:nvSpPr>
+          <p:cNvPr id="3" name="Notes Placeholder 2"/>
+          <p:cNvSpPr>
+            <a:spLocks noGrp="1"/>
+          </p:cNvSpPr>
+          <p:nvPr>
+            <p:ph type="body" idx="1"/>
+          </p:nvPr>
+        </p:nvSpPr>
+        <p:spPr/>
+        <p:txBody>
+          <a:bodyPr/>
+          <a:lstStyle/>
+          <a:p>
+            <a:r>
+              <a:rPr dirty="0"/>
+              <a:t>These are measured results on 977 held-out cases. Damage-zone F1 is 99.9%. Case kind and insurance accuracy are each 100%. Evidence quotes are verbatim in 100% of cases, and no cases are lost. Unmapped terms are flagged, never dropped.</a:t>
+            </a:r>
+          </a:p>
+          <a:p>
+            <a:endParaRPr dirty="0"/>
+          </a:p>
+          <a:p>
+            <a:r>
+              <a:rPr dirty="0"/>
+              <a:t>The full 1,000-case corpus runs in about 11 minutes, with per-case caching and back-off. A regex baseline ties on zones because the synthetic corpus has a closed vocabulary. However, that baseline scores 0% on severity and 76% on insurance.</a:t>
+            </a:r>
+          </a:p>
+        </p:txBody>
+      </p:sp>
+      <p:sp>
+        <p:nvSpPr>
+          <p:cNvPr id="4" name="Slide Number Placeholder 3"/>
+          <p:cNvSpPr>
+            <a:spLocks noGrp="1"/>
+          </p:cNvSpPr>
+          <p:nvPr>
+            <p:ph type="sldNum" idx="5"/>
+          </p:nvPr>
+        </p:nvSpPr>
+        <p:spPr/>
+        <p:txBody>
+          <a:bodyPr/>
+          <a:lstStyle/>
+          <a:p>
+            <a:endParaRPr/>
+          </a:p>
+        </p:txBody>
+      </p:sp>
+    </p:spTree>
+  </p:cSld>
+  <p:clrMapOvr>
+    <a:masterClrMapping/>
+  </p:clrMapOvr>
+</p:notes>
+</file>
+
+<file path=ppt/notesSlides/notesSlide5.xml><?xml version="1.0" encoding="utf-8"?>
+<p:notes xmlns:a="http://schemas.openxmlformats.org/drawingml/2006/main" xmlns:r="http://schemas.openxmlformats.org/officeDocument/2006/relationships" xmlns:p="http://schemas.openxmlformats.org/presentationml/2006/main">
+  <p:cSld>
+    <p:spTree>
+      <p:nvGrpSpPr>
+        <p:cNvPr id="1" name=""/>
+        <p:cNvGrpSpPr/>
+        <p:nvPr/>
+      </p:nvGrpSpPr>
+      <p:grpSpPr>
+        <a:xfrm>
+          <a:off x="0" y="0"/>
+          <a:ext cx="0" cy="0"/>
+          <a:chOff x="0" y="0"/>
+          <a:chExt cx="0" cy="0"/>
+        </a:xfrm>
+      </p:grpSpPr>
+      <p:sp>
+        <p:nvSpPr>
+          <p:cNvPr id="2" name="Slide Image Placeholder 1"/>
+          <p:cNvSpPr>
+            <a:spLocks noGrp="1" noRot="1" noChangeAspect="1"/>
+          </p:cNvSpPr>
+          <p:nvPr>
+            <p:ph type="sldImg"/>
+          </p:nvPr>
+        </p:nvSpPr>
+        <p:spPr/>
+      </p:sp>
+      <p:sp>
+        <p:nvSpPr>
+          <p:cNvPr id="3" name="Notes Placeholder 2"/>
+          <p:cNvSpPr>
+            <a:spLocks noGrp="1"/>
+          </p:cNvSpPr>
+          <p:nvPr>
+            <p:ph type="body" idx="1"/>
+          </p:nvPr>
+        </p:nvSpPr>
+        <p:spPr/>
+        <p:txBody>
+          <a:bodyPr/>
+          <a:lstStyle/>
+          <a:p>
+            <a:r>
+              <a:t>Severity is never written explicitly; it must be inferred from the wording. On the same 977 held-out cases, DeepSeek reaches 68.7%, compared with the reported 79.5% data ceiling: about 86% of the extractable signal. That ceiling comes from a majority-label lookup over damage-wording fingerprints. It describes this analysis of the data, not a universal bound for every model or test split.</a:t>
+            </a:r>
+          </a:p>
+          <a:p>
+            <a:endParaRPr/>
+          </a:p>
+          <a:p>
+            <a:r>
+              <a:t>The generator partly decorrelates severity from the text. The identical sentence appears labelled light, medium and severe in different cases. This creates a data limit.</a:t>
+            </a:r>
+          </a:p>
+          <a:p>
+            <a:endParaRPr/>
+          </a:p>
+          <a:p>
+            <a:r>
+              <a:t>We also benchmarked models on a common 150-case severity test: LightGBM 65.3%, DeepSeek 72.7%, LogReg 73.3%, gbert — a fine-tuned German BERT on GPU — 78.7%, and XGBoost 82.0%. Do not compare the XGBoost result on this test directly with the ceiling on the other evaluation scope.</a:t>
+            </a:r>
+          </a:p>
+          <a:p>
+            <a:endParaRPr/>
+          </a:p>
+          <a:p>
+            <a:r>
+              <a:t>The approximately 17-point spread between the two boosting models raises an overfitting concern: models may memorise the synthetic phrase library rather than learn severity. The highest synthetic score is therefore not, by itself, evidence of better real-world generalisation. This spread alone does not prove overfitting. The product ships DeepSeek severity; generalisation to real production notes is the next validation, not an established result.</a:t>
+            </a:r>
+          </a:p>
+        </p:txBody>
+      </p:sp>
+      <p:sp>
+        <p:nvSpPr>
+          <p:cNvPr id="4" name="Slide Number Placeholder 3"/>
+          <p:cNvSpPr>
+            <a:spLocks noGrp="1"/>
+          </p:cNvSpPr>
+          <p:nvPr>
+            <p:ph type="sldNum" idx="5"/>
+          </p:nvPr>
+        </p:nvSpPr>
+        <p:spPr/>
+        <p:txBody>
+          <a:bodyPr/>
+          <a:lstStyle/>
+          <a:p>
+            <a:endParaRPr/>
+          </a:p>
+        </p:txBody>
+      </p:sp>
+    </p:spTree>
+  </p:cSld>
+  <p:clrMapOvr>
+    <a:masterClrMapping/>
+  </p:clrMapOvr>
+</p:notes>
+</file>
+
+<file path=ppt/notesSlides/notesSlide6.xml><?xml version="1.0" encoding="utf-8"?>
+<p:notes xmlns:a="http://schemas.openxmlformats.org/drawingml/2006/main" xmlns:r="http://schemas.openxmlformats.org/officeDocument/2006/relationships" xmlns:p="http://schemas.openxmlformats.org/presentationml/2006/main">
+  <p:cSld>
+    <p:spTree>
+      <p:nvGrpSpPr>
+        <p:cNvPr id="1" name=""/>
+        <p:cNvGrpSpPr/>
+        <p:nvPr/>
+      </p:nvGrpSpPr>
+      <p:grpSpPr>
+        <a:xfrm>
+          <a:off x="0" y="0"/>
+          <a:ext cx="0" cy="0"/>
+          <a:chOff x="0" y="0"/>
+          <a:chExt cx="0" cy="0"/>
+        </a:xfrm>
+      </p:grpSpPr>
+      <p:sp>
+        <p:nvSpPr>
+          <p:cNvPr id="2" name="Slide Image Placeholder 1"/>
+          <p:cNvSpPr>
+            <a:spLocks noGrp="1" noRot="1" noChangeAspect="1"/>
+          </p:cNvSpPr>
+          <p:nvPr>
+            <p:ph type="sldImg"/>
+          </p:nvPr>
+        </p:nvSpPr>
+        <p:spPr/>
+      </p:sp>
+      <p:sp>
+        <p:nvSpPr>
+          <p:cNvPr id="3" name="Notes Placeholder 2"/>
+          <p:cNvSpPr>
+            <a:spLocks noGrp="1"/>
+          </p:cNvSpPr>
+          <p:nvPr>
+            <p:ph type="body" idx="1"/>
+          </p:nvPr>
+        </p:nvSpPr>
+        <p:spPr/>
+        <p:txBody>
+          <a:bodyPr/>
+          <a:lstStyle/>
+          <a:p>
+            <a:r>
+              <a:t>These are actionable observations from our extraction of the 450 damage cases. Parking or manoeuvring accounts for 41.3%, or 186 out of 450: low-severity, high-volume bodywork to review with the dealership.</a:t>
+            </a:r>
+          </a:p>
+          <a:p>
+            <a:endParaRPr/>
+          </a:p>
+          <a:p>
+            <a:r>
+              <a:t>Across the corpus, 668 cases are still open, with a median age of 150 days. This is a queue to review with the shop. Age since creation is not the same as repair duration.</a:t>
+            </a:r>
+          </a:p>
+          <a:p>
+            <a:endParaRPr/>
+          </a:p>
+          <a:p>
+            <a:r>
+              <a:t>There are 216 replacements, which trigger 389 remove-and-install operations. This is potentially billable work that is invisible in the raw note. The R&amp;I count is generated by our expert rules and has not been verified against operation ground truth.</a:t>
+            </a:r>
+          </a:p>
+        </p:txBody>
+      </p:sp>
+      <p:sp>
+        <p:nvSpPr>
+          <p:cNvPr id="4" name="Slide Number Placeholder 3"/>
+          <p:cNvSpPr>
+            <a:spLocks noGrp="1"/>
+          </p:cNvSpPr>
+          <p:nvPr>
+            <p:ph type="sldNum" idx="5"/>
+          </p:nvPr>
+        </p:nvSpPr>
+        <p:spPr/>
+        <p:txBody>
+          <a:bodyPr/>
+          <a:lstStyle/>
+          <a:p>
+            <a:endParaRPr/>
+          </a:p>
+        </p:txBody>
+      </p:sp>
+    </p:spTree>
+  </p:cSld>
+  <p:clrMapOvr>
+    <a:masterClrMapping/>
+  </p:clrMapOvr>
+</p:notes>
+</file>
+
+<file path=ppt/notesSlides/notesSlide7.xml><?xml version="1.0" encoding="utf-8"?>
+<p:notes xmlns:a="http://schemas.openxmlformats.org/drawingml/2006/main" xmlns:r="http://schemas.openxmlformats.org/officeDocument/2006/relationships" xmlns:p="http://schemas.openxmlformats.org/presentationml/2006/main">
+  <p:cSld>
+    <p:spTree>
+      <p:nvGrpSpPr>
+        <p:cNvPr id="1" name=""/>
+        <p:cNvGrpSpPr/>
+        <p:nvPr/>
+      </p:nvGrpSpPr>
+      <p:grpSpPr>
+        <a:xfrm>
+          <a:off x="0" y="0"/>
+          <a:ext cx="0" cy="0"/>
+          <a:chOff x="0" y="0"/>
+          <a:chExt cx="0" cy="0"/>
+        </a:xfrm>
+      </p:grpSpPr>
+      <p:sp>
+        <p:nvSpPr>
+          <p:cNvPr id="2" name="Slide Image Placeholder 1"/>
+          <p:cNvSpPr>
+            <a:spLocks noGrp="1" noRot="1" noChangeAspect="1"/>
+          </p:cNvSpPr>
+          <p:nvPr>
+            <p:ph type="sldImg"/>
+          </p:nvPr>
+        </p:nvSpPr>
+        <p:spPr/>
+      </p:sp>
+      <p:sp>
+        <p:nvSpPr>
+          <p:cNvPr id="3" name="Notes Placeholder 2"/>
+          <p:cNvSpPr>
+            <a:spLocks noGrp="1"/>
+          </p:cNvSpPr>
+          <p:nvPr>
+            <p:ph type="body" idx="1"/>
+          </p:nvPr>
+        </p:nvSpPr>
+        <p:spPr/>
+        <p:txBody>
+          <a:bodyPr/>
+          <a:lstStyle/>
+          <a:p>
+            <a:r>
+              <a:t>Say this explicitly: “How do we know which parts to remove in order to repair another one?”</a:t>
+            </a:r>
+          </a:p>
+          <a:p>
+            <a:endParaRPr/>
+          </a:p>
+          <a:p>
+            <a:r>
+              <a:t>Today, the answer comes from a hand-reviewed adjacency table for bodywork only. It does not come from the data. The dataset contains no parts, removal or operation labels at all. Ground truth covers zones, severity, kind, insurance and stage only. The remove-and-install logic is therefore expert-rule-based and unverified against ground truth. Mechanical R&amp;I — for example, removing wheels to work on brake pads — is out of scope.</a:t>
+            </a:r>
+          </a:p>
+          <a:p>
+            <a:endParaRPr/>
+          </a:p>
+          <a:p>
+            <a:r>
+              <a:t>The next step is to validate these adjacency rules with the workshop and, ideally, learn them from real repair-order histories.</a:t>
+            </a:r>
+          </a:p>
+          <a:p>
+            <a:endParaRPr/>
+          </a:p>
+          <a:p>
+            <a:r>
+              <a:t>Other limits: this is a synthetic corpus built from a phrase library, which makes regex look artificially strong. The severity ceiling is a data limitation. There are only 2 unmapped terms in the whole corpus: they are flagged, never dropped.</a:t>
+            </a:r>
+          </a:p>
+        </p:txBody>
+      </p:sp>
+      <p:sp>
+        <p:nvSpPr>
+          <p:cNvPr id="4" name="Slide Number Placeholder 3"/>
+          <p:cNvSpPr>
+            <a:spLocks noGrp="1"/>
+          </p:cNvSpPr>
+          <p:nvPr>
+            <p:ph type="sldNum" idx="5"/>
+          </p:nvPr>
+        </p:nvSpPr>
+        <p:spPr/>
+        <p:txBody>
+          <a:bodyPr/>
+          <a:lstStyle/>
+          <a:p>
+            <a:endParaRPr/>
+          </a:p>
+        </p:txBody>
+      </p:sp>
+    </p:spTree>
+  </p:cSld>
+  <p:clrMapOvr>
+    <a:masterClrMapping/>
+  </p:clrMapOvr>
+</p:notes>
+</file>
+
+<file path=ppt/notesSlides/notesSlide8.xml><?xml version="1.0" encoding="utf-8"?>
+<p:notes xmlns:a="http://schemas.openxmlformats.org/drawingml/2006/main" xmlns:r="http://schemas.openxmlformats.org/officeDocument/2006/relationships" xmlns:p="http://schemas.openxmlformats.org/presentationml/2006/main">
+  <p:cSld>
+    <p:spTree>
+      <p:nvGrpSpPr>
+        <p:cNvPr id="1" name=""/>
+        <p:cNvGrpSpPr/>
+        <p:nvPr/>
+      </p:nvGrpSpPr>
+      <p:grpSpPr>
+        <a:xfrm>
+          <a:off x="0" y="0"/>
+          <a:ext cx="0" cy="0"/>
+          <a:chOff x="0" y="0"/>
+          <a:chExt cx="0" cy="0"/>
+        </a:xfrm>
+      </p:grpSpPr>
+      <p:sp>
+        <p:nvSpPr>
+          <p:cNvPr id="2" name="Slide Image Placeholder 1"/>
+          <p:cNvSpPr>
+            <a:spLocks noGrp="1" noRot="1" noChangeAspect="1"/>
+          </p:cNvSpPr>
+          <p:nvPr>
+            <p:ph type="sldImg"/>
+          </p:nvPr>
+        </p:nvSpPr>
+        <p:spPr/>
+      </p:sp>
+      <p:sp>
+        <p:nvSpPr>
+          <p:cNvPr id="3" name="Notes Placeholder 2"/>
+          <p:cNvSpPr>
+            <a:spLocks noGrp="1"/>
+          </p:cNvSpPr>
+          <p:nvPr>
+            <p:ph type="body" idx="1"/>
+          </p:nvPr>
+        </p:nvSpPr>
+        <p:spPr/>
+        <p:txBody>
+          <a:bodyPr/>
+          <a:lstStyle/>
+          <a:p>
+            <a:r>
+              <a:t>The dashboard is live and public: https://wolf-day-damage.vercel.app/dashboard. It includes the dashboard, the 2D/3D per-vehicle sheet and the Model Lab.</a:t>
+            </a:r>
+          </a:p>
+          <a:p>
+            <a:endParaRPr/>
+          </a:p>
+          <a:p>
+            <a:r>
+              <a:t>Next: validate extraction on real production notes, add live technician extraction, and learn the remove-and-install table from repair histories. Let’s review the dashboard together, from the workshop mechanic’s perspective.</a:t>
+            </a:r>
+          </a:p>
+        </p:txBody>
+      </p:sp>
+      <p:sp>
+        <p:nvSpPr>
+          <p:cNvPr id="4" name="Slide Number Placeholder 3"/>
+          <p:cNvSpPr>
+            <a:spLocks noGrp="1"/>
+          </p:cNvSpPr>
+          <p:nvPr>
+            <p:ph type="sldNum" idx="5"/>
+          </p:nvPr>
+        </p:nvSpPr>
+        <p:spPr/>
+        <p:txBody>
+          <a:bodyPr/>
+          <a:lstStyle/>
+          <a:p>
+            <a:endParaRPr/>
+          </a:p>
+        </p:txBody>
+      </p:sp>
+    </p:spTree>
+  </p:cSld>
+  <p:clrMapOvr>
+    <a:masterClrMapping/>
+  </p:clrMapOvr>
+</p:notes>
+</file>
+
+<file path=ppt/slideLayouts/slideLayout1.xml><?xml version="1.0" encoding="utf-8"?>
+<p:sldLayout xmlns:a="http://schemas.openxmlformats.org/drawingml/2006/main" xmlns:r="http://schemas.openxmlformats.org/officeDocument/2006/relationships" xmlns:p="http://schemas.openxmlformats.org/presentationml/2006/main" type="title">
+  <p:cSld name="Title Slide">
+    <p:spTree>
+      <p:nvGrpSpPr>
+        <p:cNvPr id="1" name=""/>
+        <p:cNvGrpSpPr/>
+        <p:nvPr/>
+      </p:nvGrpSpPr>
+      <p:grpSpPr>
+        <a:xfrm>
+          <a:off x="0" y="0"/>
+          <a:ext cx="0" cy="0"/>
+          <a:chOff x="0" y="0"/>
+          <a:chExt cx="0" cy="0"/>
+        </a:xfrm>
+      </p:grpSpPr>
+    </p:spTree>
+  </p:cSld>
+  <p:clrMapOvr>
+    <a:masterClrMapping/>
+  </p:clrMapOvr>
+</p:sldLayout>
+</file>
+
+<file path=ppt/slideMasters/slideMaster1.xml><?xml version="1.0" encoding="utf-8"?>
+<p:sldMaster xmlns:a="http://schemas.openxmlformats.org/drawingml/2006/main" xmlns:r="http://schemas.openxmlformats.org/officeDocument/2006/relationships" xmlns:p="http://schemas.openxmlformats.org/presentationml/2006/main">
+  <p:cSld name="Master">
+    <p:bg>
+      <p:bgRef idx="1001">
+        <a:schemeClr val="bg1"/>
+      </p:bgRef>
+    </p:bg>
+    <p:spTree>
+      <p:nvGrpSpPr>
+        <p:cNvPr id="1" name=""/>
+        <p:cNvGrpSpPr/>
+        <p:nvPr/>
+      </p:nvGrpSpPr>
+      <p:grpSpPr>
+        <a:xfrm>
+          <a:off x="0" y="0"/>
+          <a:ext cx="0" cy="0"/>
+          <a:chOff x="0" y="0"/>
+          <a:chExt cx="0" cy="0"/>
+        </a:xfrm>
+      </p:grpSpPr>
+    </p:spTree>
+  </p:cSld>
+  <p:clrMap bg1="lt1" tx1="dk1" bg2="lt2" tx2="dk2" accent1="accent1" accent2="accent2" accent3="accent3" accent4="accent4" accent5="accent5" accent6="accent6" hlink="hlink" folHlink="folHlink"/>
+  <p:sldLayoutIdLst>
+    <p:sldLayoutId id="2147483649" r:id="rId1"/>
+  </p:sldLayoutIdLst>
+  <p:txStyles>
+    <p:titleStyle>
+      <a:lvl1pPr algn="l">
+        <a:lnSpc>
+          <a:spcPct val="90000"/>
+        </a:lnSpc>
+        <a:spcBef>
+          <a:spcPts val="0"/>
+        </a:spcBef>
+        <a:buNone/>
+        <a:defRPr sz="4400">
+          <a:solidFill>
+            <a:schemeClr val="tx1"/>
+          </a:solidFill>
+          <a:latin typeface="+mj-lt"/>
+          <a:ea typeface="+mj-lt"/>
+          <a:cs typeface="+mj-lt"/>
+        </a:defRPr>
+      </a:lvl1pPr>
+    </p:titleStyle>
+    <p:bodyStyle>
+      <a:lvl1pPr marL="228600" indent="-228600" algn="l">
+        <a:lnSpc>
+          <a:spcPct val="90000"/>
+        </a:lnSpc>
+        <a:spcBef>
+          <a:spcPts val="1000"/>
+        </a:spcBef>
+        <a:buChar char="•"/>
+        <a:defRPr sz="2800">
+          <a:solidFill>
+            <a:schemeClr val="tx1"/>
+          </a:solidFill>
+          <a:latin typeface="+mn-lt"/>
+          <a:ea typeface="+mn-lt"/>
+          <a:cs typeface="+mn-lt"/>
+        </a:defRPr>
+      </a:lvl1pPr>
+      <a:lvl2pPr marL="685800" indent="-228600" algn="l">
+        <a:lnSpc>
+          <a:spcPct val="90000"/>
+        </a:lnSpc>
+        <a:spcBef>
+          <a:spcPts val="500"/>
+        </a:spcBef>
+        <a:buChar char="•"/>
+        <a:defRPr sz="2400">
+          <a:solidFill>
+            <a:schemeClr val="tx1"/>
+          </a:solidFill>
+          <a:latin typeface="+mn-lt"/>
+          <a:ea typeface="+mn-lt"/>
+          <a:cs typeface="+mn-lt"/>
+        </a:defRPr>
+      </a:lvl2pPr>
+      <a:lvl3pPr marL="1143000" indent="-228600" algn="l">
+        <a:lnSpc>
+          <a:spcPct val="90000"/>
+        </a:lnSpc>
+        <a:spcBef>
+          <a:spcPts val="500"/>
+        </a:spcBef>
+        <a:buChar char="•"/>
+        <a:defRPr sz="2000">
+          <a:solidFill>
+            <a:schemeClr val="tx1"/>
+          </a:solidFill>
+          <a:latin typeface="+mn-lt"/>
+          <a:ea typeface="+mn-lt"/>
+          <a:cs typeface="+mn-lt"/>
+        </a:defRPr>
+      </a:lvl3pPr>
+      <a:lvl4pPr marL="1600200" indent="-228600" algn="l">
+        <a:lnSpc>
+          <a:spcPct val="90000"/>
+        </a:lnSpc>
+        <a:spcBef>
+          <a:spcPts val="500"/>
+        </a:spcBef>
+        <a:buChar char="•"/>
+        <a:defRPr sz="1800">
+          <a:solidFill>
+            <a:schemeClr val="tx1"/>
+          </a:solidFill>
+          <a:latin typeface="+mn-lt"/>
+          <a:ea typeface="+mn-lt"/>
+          <a:cs typeface="+mn-lt"/>
+        </a:defRPr>
+      </a:lvl4pPr>
+      <a:lvl5pPr marL="2057400" indent="-228600" algn="l">
+        <a:lnSpc>
+          <a:spcPct val="90000"/>
+        </a:lnSpc>
+        <a:spcBef>
+          <a:spcPts val="500"/>
+        </a:spcBef>
+        <a:buChar char="•"/>
+        <a:defRPr sz="1800">
+          <a:solidFill>
+            <a:schemeClr val="tx1"/>
+          </a:solidFill>
+          <a:latin typeface="+mn-lt"/>
+          <a:ea typeface="+mn-lt"/>
+          <a:cs typeface="+mn-lt"/>
+        </a:defRPr>
+      </a:lvl5pPr>
+      <a:lvl6pPr marL="2514600" indent="-228600" algn="l">
+        <a:lnSpc>
+          <a:spcPct val="90000"/>
+        </a:lnSpc>
+        <a:spcBef>
+          <a:spcPts val="500"/>
+        </a:spcBef>
+        <a:buChar char="•"/>
+        <a:defRPr sz="1800">
+          <a:solidFill>
+            <a:schemeClr val="tx1"/>
+          </a:solidFill>
+          <a:latin typeface="+mn-lt"/>
+          <a:ea typeface="+mn-lt"/>
+          <a:cs typeface="+mn-lt"/>
+        </a:defRPr>
+      </a:lvl6pPr>
+      <a:lvl7pPr marL="2971800" indent="-228600" algn="l">
+        <a:lnSpc>
+          <a:spcPct val="90000"/>
+        </a:lnSpc>
+        <a:spcBef>
+          <a:spcPts val="500"/>
+        </a:spcBef>
+        <a:buChar char="•"/>
+        <a:defRPr sz="1800">
+          <a:solidFill>
+            <a:schemeClr val="tx1"/>
+          </a:solidFill>
+          <a:latin typeface="+mn-lt"/>
+          <a:ea typeface="+mn-lt"/>
+          <a:cs typeface="+mn-lt"/>
+        </a:defRPr>
+      </a:lvl7pPr>
+      <a:lvl8pPr marL="3429000" indent="-228600" algn="l">
+        <a:lnSpc>
+          <a:spcPct val="90000"/>
+        </a:lnSpc>
+        <a:spcBef>
+          <a:spcPts val="500"/>
+        </a:spcBef>
+        <a:buChar char="•"/>
+        <a:defRPr sz="1800">
+          <a:solidFill>
+            <a:schemeClr val="tx1"/>
+          </a:solidFill>
+          <a:latin typeface="+mn-lt"/>
+          <a:ea typeface="+mn-lt"/>
+          <a:cs typeface="+mn-lt"/>
+        </a:defRPr>
+      </a:lvl8pPr>
+      <a:lvl9pPr marL="3886200" indent="-228600" algn="l">
+        <a:lnSpc>
+          <a:spcPct val="90000"/>
+        </a:lnSpc>
+        <a:spcBef>
+          <a:spcPts val="500"/>
+        </a:spcBef>
+        <a:buChar char="•"/>
+        <a:defRPr sz="1800">
+          <a:solidFill>
+            <a:schemeClr val="tx1"/>
+          </a:solidFill>
+          <a:latin typeface="+mn-lt"/>
+          <a:ea typeface="+mn-lt"/>
+          <a:cs typeface="+mn-lt"/>
+        </a:defRPr>
+      </a:lvl9pPr>
+    </p:bodyStyle>
+    <p:otherStyle>
+      <a:lvl1pPr marL="0" algn="l">
+        <a:buNone/>
+        <a:defRPr sz="1800">
+          <a:solidFill>
+            <a:schemeClr val="tx1"/>
+          </a:solidFill>
+          <a:latin typeface="+mn-lt"/>
+          <a:ea typeface="+mn-lt"/>
+          <a:cs typeface="+mn-lt"/>
+        </a:defRPr>
+      </a:lvl1pPr>
+      <a:lvl2pPr marL="457200" algn="l">
+        <a:buNone/>
+        <a:defRPr sz="1800">
+          <a:solidFill>
+            <a:schemeClr val="tx1"/>
+          </a:solidFill>
+          <a:latin typeface="+mn-lt"/>
+          <a:ea typeface="+mn-lt"/>
+          <a:cs typeface="+mn-lt"/>
+        </a:defRPr>
+      </a:lvl2pPr>
+      <a:lvl3pPr marL="914400" algn="l">
+        <a:buNone/>
+        <a:defRPr sz="1800">
+          <a:solidFill>
+            <a:schemeClr val="tx1"/>
+          </a:solidFill>
+          <a:latin typeface="+mn-lt"/>
+          <a:ea typeface="+mn-lt"/>
+          <a:cs typeface="+mn-lt"/>
+        </a:defRPr>
+      </a:lvl3pPr>
+      <a:lvl4pPr marL="1371600" algn="l">
+        <a:buNone/>
+        <a:defRPr sz="1800">
+          <a:solidFill>
+            <a:schemeClr val="tx1"/>
+          </a:solidFill>
+          <a:latin typeface="+mn-lt"/>
+          <a:ea typeface="+mn-lt"/>
+          <a:cs typeface="+mn-lt"/>
+        </a:defRPr>
+      </a:lvl4pPr>
+      <a:lvl5pPr marL="1828800" algn="l">
+        <a:buNone/>
+        <a:defRPr sz="1800">
+          <a:solidFill>
+            <a:schemeClr val="tx1"/>
+          </a:solidFill>
+          <a:latin typeface="+mn-lt"/>
+          <a:ea typeface="+mn-lt"/>
+          <a:cs typeface="+mn-lt"/>
+        </a:defRPr>
+      </a:lvl5pPr>
+      <a:lvl6pPr marL="2286000" algn="l">
+        <a:buNone/>
+        <a:defRPr sz="1800">
+          <a:solidFill>
+            <a:schemeClr val="tx1"/>
+          </a:solidFill>
+          <a:latin typeface="+mn-lt"/>
+          <a:ea typeface="+mn-lt"/>
+          <a:cs typeface="+mn-lt"/>
+        </a:defRPr>
+      </a:lvl6pPr>
+      <a:lvl7pPr marL="2743200" algn="l">
+        <a:buNone/>
+        <a:defRPr sz="1800">
+          <a:solidFill>
+            <a:schemeClr val="tx1"/>
+          </a:solidFill>
+          <a:latin typeface="+mn-lt"/>
+          <a:ea typeface="+mn-lt"/>
+          <a:cs typeface="+mn-lt"/>
+        </a:defRPr>
+      </a:lvl7pPr>
+      <a:lvl8pPr marL="3200400" algn="l">
+        <a:buNone/>
+        <a:defRPr sz="1800">
+          <a:solidFill>
+            <a:schemeClr val="tx1"/>
+          </a:solidFill>
+          <a:latin typeface="+mn-lt"/>
+          <a:ea typeface="+mn-lt"/>
+          <a:cs typeface="+mn-lt"/>
+        </a:defRPr>
+      </a:lvl8pPr>
+      <a:lvl9pPr marL="3657600" algn="l">
+        <a:buNone/>
+        <a:defRPr sz="1800">
+          <a:solidFill>
+            <a:schemeClr val="tx1"/>
+          </a:solidFill>
+          <a:latin typeface="+mn-lt"/>
+          <a:ea typeface="+mn-lt"/>
+          <a:cs typeface="+mn-lt"/>
+        </a:defRPr>
+      </a:lvl9pPr>
+    </p:otherStyle>
+  </p:txStyles>
+</p:sldMaster>
+</file>
+
 <file path=ppt/slides/slide1.xml><?xml version="1.0" encoding="utf-8"?>
-<p:sld xmlns:p="http://schemas.openxmlformats.org/presentationml/2006/main">
+<p:sld xmlns:a="http://schemas.openxmlformats.org/drawingml/2006/main" xmlns:r="http://schemas.openxmlformats.org/officeDocument/2006/relationships" xmlns:p="http://schemas.openxmlformats.org/presentationml/2006/main">
   <p:cSld>
     <p:bg>
       <p:bgPr>
-        <a:solidFill xmlns:a="http://schemas.openxmlformats.org/drawingml/2006/main">
+        <a:solidFill>
           <a:srgbClr val="102C36"/>
         </a:solidFill>
+        <a:effectLst/>
       </p:bgPr>
     </p:bg>
     <p:spTree>
@@ -1855,405 +1618,338 @@
         <p:nvPr/>
       </p:nvGrpSpPr>
       <p:grpSpPr>
-        <a:xfrm xmlns:a="http://schemas.openxmlformats.org/drawingml/2006/main"/>
+        <a:xfrm>
+          <a:off x="0" y="0"/>
+          <a:ext cx="0" cy="0"/>
+          <a:chOff x="0" y="0"/>
+          <a:chExt cx="0" cy="0"/>
+        </a:xfrm>
       </p:grpSpPr>
       <p:sp>
         <p:nvSpPr>
-          <p:cNvPr id="7" name="">
-            <a:extLst xmlns:a="http://schemas.openxmlformats.org/drawingml/2006/main">
+          <p:cNvPr id="2" name="Rectangle 1">
+            <a:extLst>
               <a:ext uri="{FF2B5EF4-FFF2-40B4-BE49-F238E27FC236}">
-                <a16:creationId xmlns:a16="http://schemas.microsoft.com/office/drawing/2014/main" id="{DB672F4F-FC53-4090-86C4-98E4434BC7BD}"/>
+                <a16:creationId xmlns:a16="http://schemas.microsoft.com/office/drawing/2014/main" id="{E90DD583-8423-4710-BBD5-3C5879F001DD}"/>
               </a:ext>
             </a:extLst>
           </p:cNvPr>
           <p:cNvSpPr>
-            <a:spLocks xmlns:a="http://schemas.openxmlformats.org/drawingml/2006/main" noGrp="1"/>
-          </p:cNvSpPr>
-          <p:nvPr/>
-        </p:nvSpPr>
-        <p:spPr>
-          <a:xfrm xmlns:a="http://schemas.openxmlformats.org/drawingml/2006/main">
-            <a:off x="609600" y="409575"/>
-            <a:ext cx="10953750" cy="714375"/>
-          </a:xfrm>
-          <a:prstGeom xmlns:a="http://schemas.openxmlformats.org/drawingml/2006/main" prst="rect">
-            <a:avLst/>
-          </a:prstGeom>
-          <a:noFill xmlns:a="http://schemas.openxmlformats.org/drawingml/2006/main"/>
-          <a:ln xmlns:a="http://schemas.openxmlformats.org/drawingml/2006/main" w="0">
+            <a:spLocks noGrp="1"/>
+          </p:cNvSpPr>
+          <p:nvPr/>
+        </p:nvSpPr>
+        <p:spPr>
+          <a:xfrm>
+            <a:off x="11144250" y="6324600"/>
+            <a:ext cx="476250" cy="285750"/>
+          </a:xfrm>
+          <a:prstGeom prst="rect">
+            <a:avLst/>
+          </a:prstGeom>
+          <a:noFill/>
+          <a:ln w="0">
             <a:noFill/>
           </a:ln>
         </p:spPr>
         <p:txBody>
-          <a:bodyPr xmlns:a="http://schemas.openxmlformats.org/drawingml/2006/main">
+          <a:bodyPr>
             <a:noAutofit/>
           </a:bodyPr>
-          <a:lstStyle xmlns:a="http://schemas.openxmlformats.org/drawingml/2006/main"/>
-          <a:p xmlns:a="http://schemas.openxmlformats.org/drawingml/2006/main">
-            <a:pPr>
-              <a:buNone/>
-              <a:defRPr sz="4800" b="1">
-                <a:solidFill>
-                  <a:srgbClr val="FFFFFF"/>
-                </a:solidFill>
-                <a:latin typeface="Arial"/>
-                <a:ea typeface="Arial"/>
-                <a:cs typeface="Arial"/>
-              </a:defRPr>
-            </a:pPr>
-            <a:r>
-              <a:rPr sz="4800" b="1">
-                <a:solidFill>
-                  <a:srgbClr val="FFFFFF"/>
-                </a:solidFill>
-                <a:latin typeface="Arial"/>
-                <a:ea typeface="Arial"/>
-                <a:cs typeface="Arial"/>
-              </a:rPr>
-              <a:t>Before we dive in</a:t>
-            </a:r>
-          </a:p>
-        </p:txBody>
-      </p:sp>
-      <p:sp>
-        <p:nvSpPr>
-          <p:cNvPr id="2" name="">
-            <a:extLst xmlns:a="http://schemas.openxmlformats.org/drawingml/2006/main">
+          <a:lstStyle/>
+          <a:p>
+            <a:pPr>
+              <a:buNone/>
+              <a:defRPr sz="1350" b="0">
+                <a:solidFill>
+                  <a:srgbClr val="547078"/>
+                </a:solidFill>
+                <a:latin typeface="Arial"/>
+                <a:ea typeface="Arial"/>
+                <a:cs typeface="Arial"/>
+              </a:defRPr>
+            </a:pPr>
+            <a:r>
+              <a:rPr sz="1350" b="0">
+                <a:solidFill>
+                  <a:srgbClr val="547078"/>
+                </a:solidFill>
+                <a:latin typeface="Arial"/>
+                <a:ea typeface="Arial"/>
+                <a:cs typeface="Arial"/>
+              </a:rPr>
+              <a:t>00</a:t>
+            </a:r>
+          </a:p>
+        </p:txBody>
+      </p:sp>
+      <p:sp>
+        <p:nvSpPr>
+          <p:cNvPr id="3" name="Rectangle 2">
+            <a:extLst>
               <a:ext uri="{FF2B5EF4-FFF2-40B4-BE49-F238E27FC236}">
-                <a16:creationId xmlns:a16="http://schemas.microsoft.com/office/drawing/2014/main" id="{E90DD583-8423-4710-BBD5-3C5879F001DD}"/>
+                <a16:creationId xmlns:a16="http://schemas.microsoft.com/office/drawing/2014/main" id="{EC670042-1743-4526-83E4-614F385CA364}"/>
               </a:ext>
             </a:extLst>
           </p:cNvPr>
           <p:cNvSpPr>
-            <a:spLocks xmlns:a="http://schemas.openxmlformats.org/drawingml/2006/main" noGrp="1"/>
-          </p:cNvSpPr>
-          <p:nvPr/>
-        </p:nvSpPr>
-        <p:spPr>
-          <a:xfrm xmlns:a="http://schemas.openxmlformats.org/drawingml/2006/main">
-            <a:off x="11144250" y="6324600"/>
-            <a:ext cx="476250" cy="285750"/>
-          </a:xfrm>
-          <a:prstGeom xmlns:a="http://schemas.openxmlformats.org/drawingml/2006/main" prst="rect">
-            <a:avLst/>
-          </a:prstGeom>
-          <a:noFill xmlns:a="http://schemas.openxmlformats.org/drawingml/2006/main"/>
-          <a:ln xmlns:a="http://schemas.openxmlformats.org/drawingml/2006/main" w="0">
+            <a:spLocks noGrp="1"/>
+          </p:cNvSpPr>
+          <p:nvPr/>
+        </p:nvSpPr>
+        <p:spPr>
+          <a:xfrm>
+            <a:off x="851770" y="833436"/>
+            <a:ext cx="4676385" cy="1485900"/>
+          </a:xfrm>
+          <a:prstGeom prst="rect">
+            <a:avLst/>
+          </a:prstGeom>
+          <a:noFill/>
+          <a:ln w="0">
             <a:noFill/>
           </a:ln>
         </p:spPr>
         <p:txBody>
-          <a:bodyPr xmlns:a="http://schemas.openxmlformats.org/drawingml/2006/main">
+          <a:bodyPr>
             <a:noAutofit/>
           </a:bodyPr>
-          <a:lstStyle xmlns:a="http://schemas.openxmlformats.org/drawingml/2006/main"/>
-          <a:p xmlns:a="http://schemas.openxmlformats.org/drawingml/2006/main">
-            <a:pPr>
-              <a:buNone/>
-              <a:defRPr sz="1350" b="0">
-                <a:solidFill>
-                  <a:srgbClr val="547078"/>
-                </a:solidFill>
-                <a:latin typeface="Arial"/>
-                <a:ea typeface="Arial"/>
-                <a:cs typeface="Arial"/>
-              </a:defRPr>
-            </a:pPr>
-            <a:r>
-              <a:rPr sz="1350" b="0">
-                <a:solidFill>
-                  <a:srgbClr val="547078"/>
-                </a:solidFill>
-                <a:latin typeface="Arial"/>
-                <a:ea typeface="Arial"/>
-                <a:cs typeface="Arial"/>
-              </a:rPr>
-              <a:t>00</a:t>
-            </a:r>
-          </a:p>
-        </p:txBody>
-      </p:sp>
-      <p:sp>
-        <p:nvSpPr>
-          <p:cNvPr id="3" name="">
-            <a:extLst xmlns:a="http://schemas.openxmlformats.org/drawingml/2006/main">
+          <a:lstStyle/>
+          <a:p>
+            <a:pPr>
+              <a:buNone/>
+              <a:defRPr sz="3600" b="1">
+                <a:solidFill>
+                  <a:srgbClr val="FFFFFF"/>
+                </a:solidFill>
+                <a:latin typeface="Arial"/>
+                <a:ea typeface="Arial"/>
+                <a:cs typeface="Arial"/>
+              </a:defRPr>
+            </a:pPr>
+            <a:r>
+              <a:rPr lang="en-US" sz="3600" b="1" dirty="0">
+                <a:solidFill>
+                  <a:srgbClr val="FFFFFF"/>
+                </a:solidFill>
+                <a:latin typeface="Arial"/>
+                <a:ea typeface="Arial"/>
+                <a:cs typeface="Arial"/>
+              </a:rPr>
+              <a:t>Prefer the product to the pipeline? </a:t>
+            </a:r>
+          </a:p>
+          <a:p>
+            <a:pPr>
+              <a:buNone/>
+              <a:defRPr sz="3600" b="1">
+                <a:solidFill>
+                  <a:srgbClr val="FFFFFF"/>
+                </a:solidFill>
+                <a:latin typeface="Arial"/>
+                <a:ea typeface="Arial"/>
+                <a:cs typeface="Arial"/>
+              </a:defRPr>
+            </a:pPr>
+            <a:r>
+              <a:rPr lang="en-US" sz="3600" b="1" dirty="0">
+                <a:solidFill>
+                  <a:srgbClr val="FFFFFF"/>
+                </a:solidFill>
+                <a:latin typeface="Arial"/>
+                <a:ea typeface="Arial"/>
+                <a:cs typeface="Arial"/>
+              </a:rPr>
+              <a:t>Follow along on the live dashboard.</a:t>
+            </a:r>
+          </a:p>
+        </p:txBody>
+      </p:sp>
+      <p:sp>
+        <p:nvSpPr>
+          <p:cNvPr id="4" name="Rectangle 3">
+            <a:extLst>
               <a:ext uri="{FF2B5EF4-FFF2-40B4-BE49-F238E27FC236}">
-                <a16:creationId xmlns:a16="http://schemas.microsoft.com/office/drawing/2014/main" id="{EC670042-1743-4526-83E4-614F385CA364}"/>
+                <a16:creationId xmlns:a16="http://schemas.microsoft.com/office/drawing/2014/main" id="{C7BEB761-EA07-4F19-8B4C-76BCE8485B99}"/>
               </a:ext>
             </a:extLst>
           </p:cNvPr>
           <p:cNvSpPr>
-            <a:spLocks xmlns:a="http://schemas.openxmlformats.org/drawingml/2006/main" noGrp="1"/>
-          </p:cNvSpPr>
-          <p:nvPr/>
-        </p:nvSpPr>
-        <p:spPr>
-          <a:xfrm xmlns:a="http://schemas.openxmlformats.org/drawingml/2006/main">
-            <a:off x="609600" y="1885950"/>
-            <a:ext cx="10477500" cy="1485900"/>
-          </a:xfrm>
-          <a:prstGeom xmlns:a="http://schemas.openxmlformats.org/drawingml/2006/main" prst="rect">
-            <a:avLst/>
-          </a:prstGeom>
-          <a:noFill xmlns:a="http://schemas.openxmlformats.org/drawingml/2006/main"/>
-          <a:ln xmlns:a="http://schemas.openxmlformats.org/drawingml/2006/main" w="0">
+            <a:spLocks noGrp="1"/>
+          </p:cNvSpPr>
+          <p:nvPr/>
+        </p:nvSpPr>
+        <p:spPr>
+          <a:xfrm>
+            <a:off x="609601" y="3557587"/>
+            <a:ext cx="5052164" cy="952500"/>
+          </a:xfrm>
+          <a:prstGeom prst="rect">
+            <a:avLst/>
+          </a:prstGeom>
+          <a:noFill/>
+          <a:ln w="0">
             <a:noFill/>
           </a:ln>
         </p:spPr>
         <p:txBody>
-          <a:bodyPr xmlns:a="http://schemas.openxmlformats.org/drawingml/2006/main">
+          <a:bodyPr>
             <a:noAutofit/>
           </a:bodyPr>
-          <a:lstStyle xmlns:a="http://schemas.openxmlformats.org/drawingml/2006/main"/>
-          <a:p xmlns:a="http://schemas.openxmlformats.org/drawingml/2006/main">
-            <a:pPr>
-              <a:buNone/>
-              <a:defRPr sz="3600" b="1">
-                <a:solidFill>
-                  <a:srgbClr val="FFFFFF"/>
-                </a:solidFill>
-                <a:latin typeface="Arial"/>
-                <a:ea typeface="Arial"/>
-                <a:cs typeface="Arial"/>
-              </a:defRPr>
-            </a:pPr>
-            <a:r>
-              <a:rPr sz="3600" b="1">
-                <a:solidFill>
-                  <a:srgbClr val="FFFFFF"/>
-                </a:solidFill>
-                <a:latin typeface="Arial"/>
-                <a:ea typeface="Arial"/>
-                <a:cs typeface="Arial"/>
-              </a:rPr>
-              <a:t>Here’s the live dashboard</a:t>
-            </a:r>
-          </a:p>
-          <a:p xmlns:a="http://schemas.openxmlformats.org/drawingml/2006/main">
-            <a:pPr>
-              <a:buNone/>
-              <a:defRPr sz="3600" b="1">
-                <a:solidFill>
-                  <a:srgbClr val="FFFFFF"/>
-                </a:solidFill>
-                <a:latin typeface="Arial"/>
-                <a:ea typeface="Arial"/>
-                <a:cs typeface="Arial"/>
-              </a:defRPr>
-            </a:pPr>
-            <a:r>
-              <a:rPr sz="3600" b="1">
-                <a:solidFill>
-                  <a:srgbClr val="FFFFFF"/>
-                </a:solidFill>
-                <a:latin typeface="Arial"/>
-                <a:ea typeface="Arial"/>
-                <a:cs typeface="Arial"/>
-              </a:rPr>
-              <a:t>so you can follow along</a:t>
-            </a:r>
-          </a:p>
-        </p:txBody>
-      </p:sp>
-      <p:sp>
-        <p:nvSpPr>
-          <p:cNvPr id="4" name="">
-            <a:extLst xmlns:a="http://schemas.openxmlformats.org/drawingml/2006/main">
+          <a:lstStyle/>
+          <a:p>
+            <a:pPr algn="ctr">
+              <a:buNone/>
+              <a:defRPr sz="2325" b="0">
+                <a:solidFill>
+                  <a:srgbClr val="B9D7D4"/>
+                </a:solidFill>
+                <a:latin typeface="Arial"/>
+                <a:ea typeface="Arial"/>
+                <a:cs typeface="Arial"/>
+              </a:defRPr>
+            </a:pPr>
+            <a:r>
+              <a:rPr lang="en-US" sz="2325" b="0" dirty="0">
+                <a:solidFill>
+                  <a:srgbClr val="B9D7D4"/>
+                </a:solidFill>
+                <a:latin typeface="Arial"/>
+                <a:ea typeface="Arial"/>
+                <a:cs typeface="Arial"/>
+              </a:rPr>
+              <a:t>Mechanics write messy German notes; our app turns them into a clear per-car dashboard damage, severity, who pays, parts to replace.</a:t>
+            </a:r>
+            <a:endParaRPr sz="2325" b="0" dirty="0">
+              <a:solidFill>
+                <a:srgbClr val="B9D7D4"/>
+              </a:solidFill>
+              <a:latin typeface="Arial"/>
+              <a:ea typeface="Arial"/>
+              <a:cs typeface="Arial"/>
+            </a:endParaRPr>
+          </a:p>
+        </p:txBody>
+      </p:sp>
+      <p:sp>
+        <p:nvSpPr>
+          <p:cNvPr id="5" name="Rectangle 4">
+            <a:extLst>
               <a:ext uri="{FF2B5EF4-FFF2-40B4-BE49-F238E27FC236}">
-                <a16:creationId xmlns:a16="http://schemas.microsoft.com/office/drawing/2014/main" id="{C7BEB761-EA07-4F19-8B4C-76BCE8485B99}"/>
+                <a16:creationId xmlns:a16="http://schemas.microsoft.com/office/drawing/2014/main" id="{A559B5E8-9CB7-41EA-AFE7-B2B2EEE9E7E2}"/>
               </a:ext>
             </a:extLst>
           </p:cNvPr>
           <p:cNvSpPr>
-            <a:spLocks xmlns:a="http://schemas.openxmlformats.org/drawingml/2006/main" noGrp="1"/>
-          </p:cNvSpPr>
-          <p:nvPr/>
-        </p:nvSpPr>
-        <p:spPr>
-          <a:xfrm xmlns:a="http://schemas.openxmlformats.org/drawingml/2006/main">
-            <a:off x="609600" y="3705225"/>
-            <a:ext cx="10001250" cy="952500"/>
-          </a:xfrm>
-          <a:prstGeom xmlns:a="http://schemas.openxmlformats.org/drawingml/2006/main" prst="rect">
-            <a:avLst/>
-          </a:prstGeom>
-          <a:noFill xmlns:a="http://schemas.openxmlformats.org/drawingml/2006/main"/>
-          <a:ln xmlns:a="http://schemas.openxmlformats.org/drawingml/2006/main" w="0">
+            <a:spLocks noGrp="1"/>
+          </p:cNvSpPr>
+          <p:nvPr/>
+        </p:nvSpPr>
+        <p:spPr>
+          <a:xfrm>
+            <a:off x="321501" y="5748338"/>
+            <a:ext cx="8572500" cy="457200"/>
+          </a:xfrm>
+          <a:prstGeom prst="rect">
+            <a:avLst/>
+          </a:prstGeom>
+          <a:noFill/>
+          <a:ln w="0">
             <a:noFill/>
           </a:ln>
         </p:spPr>
         <p:txBody>
-          <a:bodyPr xmlns:a="http://schemas.openxmlformats.org/drawingml/2006/main">
+          <a:bodyPr>
             <a:noAutofit/>
           </a:bodyPr>
-          <a:lstStyle xmlns:a="http://schemas.openxmlformats.org/drawingml/2006/main"/>
-          <a:p xmlns:a="http://schemas.openxmlformats.org/drawingml/2006/main">
-            <a:pPr>
-              <a:buNone/>
-              <a:defRPr sz="2325" b="0">
-                <a:solidFill>
-                  <a:srgbClr val="B9D7D4"/>
-                </a:solidFill>
-                <a:latin typeface="Arial"/>
-                <a:ea typeface="Arial"/>
-                <a:cs typeface="Arial"/>
-              </a:defRPr>
-            </a:pPr>
-            <a:r>
-              <a:rPr sz="2325" b="0">
-                <a:solidFill>
-                  <a:srgbClr val="B9D7D4"/>
-                </a:solidFill>
-                <a:latin typeface="Arial"/>
-                <a:ea typeface="Arial"/>
-                <a:cs typeface="Arial"/>
-              </a:rPr>
-              <a:t>I’ll walk you through what we built, then we’ll</a:t>
-            </a:r>
-          </a:p>
-          <a:p xmlns:a="http://schemas.openxmlformats.org/drawingml/2006/main">
-            <a:pPr>
-              <a:buNone/>
-              <a:defRPr sz="2325" b="0">
-                <a:solidFill>
-                  <a:srgbClr val="B9D7D4"/>
-                </a:solidFill>
-                <a:latin typeface="Arial"/>
-                <a:ea typeface="Arial"/>
-                <a:cs typeface="Arial"/>
-              </a:defRPr>
-            </a:pPr>
-            <a:r>
-              <a:rPr sz="2325" b="0">
-                <a:solidFill>
-                  <a:srgbClr val="B9D7D4"/>
-                </a:solidFill>
-                <a:latin typeface="Arial"/>
-                <a:ea typeface="Arial"/>
-                <a:cs typeface="Arial"/>
-              </a:rPr>
-              <a:t>review the dashboard together.</a:t>
-            </a:r>
-          </a:p>
-        </p:txBody>
-      </p:sp>
-      <p:sp>
-        <p:nvSpPr>
-          <p:cNvPr id="5" name="">
-            <a:extLst xmlns:a="http://schemas.openxmlformats.org/drawingml/2006/main">
+          <a:lstStyle/>
+          <a:p>
+            <a:pPr>
+              <a:buNone/>
+              <a:defRPr sz="2550" b="1">
+                <a:solidFill>
+                  <a:srgbClr val="64D4BF"/>
+                </a:solidFill>
+                <a:latin typeface="Arial"/>
+                <a:ea typeface="Arial"/>
+                <a:cs typeface="Arial"/>
+              </a:defRPr>
+            </a:pPr>
+            <a:r>
+              <a:rPr sz="2550" b="1" dirty="0">
+                <a:solidFill>
+                  <a:srgbClr val="64D4BF"/>
+                </a:solidFill>
+                <a:latin typeface="Arial"/>
+                <a:ea typeface="Arial"/>
+                <a:cs typeface="Arial"/>
+                <a:hlinkClick r:id="rId3"/>
+              </a:rPr>
+              <a:t>wolf-day-</a:t>
+            </a:r>
+            <a:r>
+              <a:rPr sz="2550" b="1" dirty="0" err="1">
+                <a:solidFill>
+                  <a:srgbClr val="64D4BF"/>
+                </a:solidFill>
+                <a:latin typeface="Arial"/>
+                <a:ea typeface="Arial"/>
+                <a:cs typeface="Arial"/>
+                <a:hlinkClick r:id="rId3"/>
+              </a:rPr>
+              <a:t>damage.vercel.app</a:t>
+            </a:r>
+            <a:r>
+              <a:rPr sz="2550" b="1" dirty="0">
+                <a:solidFill>
+                  <a:srgbClr val="64D4BF"/>
+                </a:solidFill>
+                <a:latin typeface="Arial"/>
+                <a:ea typeface="Arial"/>
+                <a:cs typeface="Arial"/>
+                <a:hlinkClick r:id="rId3"/>
+              </a:rPr>
+              <a:t>/dashboard</a:t>
+            </a:r>
+          </a:p>
+        </p:txBody>
+      </p:sp>
+      <p:pic>
+        <p:nvPicPr>
+          <p:cNvPr id="9" name="Image 8">
+            <a:extLst>
               <a:ext uri="{FF2B5EF4-FFF2-40B4-BE49-F238E27FC236}">
-                <a16:creationId xmlns:a16="http://schemas.microsoft.com/office/drawing/2014/main" id="{A559B5E8-9CB7-41EA-AFE7-B2B2EEE9E7E2}"/>
+                <a16:creationId xmlns:a16="http://schemas.microsoft.com/office/drawing/2014/main" id="{C870A611-56BB-4C85-998A-9CAC46D983A2}"/>
               </a:ext>
             </a:extLst>
           </p:cNvPr>
-          <p:cNvSpPr>
-            <a:spLocks xmlns:a="http://schemas.openxmlformats.org/drawingml/2006/main" noGrp="1"/>
-          </p:cNvSpPr>
-          <p:nvPr/>
-        </p:nvSpPr>
-        <p:spPr>
-          <a:xfrm xmlns:a="http://schemas.openxmlformats.org/drawingml/2006/main">
-            <a:off x="609600" y="5267325"/>
-            <a:ext cx="8572500" cy="457200"/>
-          </a:xfrm>
-          <a:prstGeom xmlns:a="http://schemas.openxmlformats.org/drawingml/2006/main" prst="rect">
-            <a:avLst/>
-          </a:prstGeom>
-          <a:noFill xmlns:a="http://schemas.openxmlformats.org/drawingml/2006/main"/>
-          <a:ln xmlns:a="http://schemas.openxmlformats.org/drawingml/2006/main" w="0">
-            <a:noFill/>
-          </a:ln>
-        </p:spPr>
-        <p:txBody>
-          <a:bodyPr xmlns:a="http://schemas.openxmlformats.org/drawingml/2006/main">
-            <a:noAutofit/>
-          </a:bodyPr>
-          <a:lstStyle xmlns:a="http://schemas.openxmlformats.org/drawingml/2006/main"/>
-          <a:p xmlns:a="http://schemas.openxmlformats.org/drawingml/2006/main">
-            <a:pPr>
-              <a:buNone/>
-              <a:defRPr sz="2550" b="1">
-                <a:solidFill>
-                  <a:srgbClr val="64D4BF"/>
-                </a:solidFill>
-                <a:latin typeface="Arial"/>
-                <a:ea typeface="Arial"/>
-                <a:cs typeface="Arial"/>
-              </a:defRPr>
-            </a:pPr>
-            <a:r>
-              <a:rPr sz="2550" b="1">
-                <a:solidFill>
-                  <a:srgbClr val="64D4BF"/>
-                </a:solidFill>
-                <a:latin typeface="Arial"/>
-                <a:ea typeface="Arial"/>
-                <a:cs typeface="Arial"/>
-                <a:hlinkClick xmlns:r="http://schemas.openxmlformats.org/officeDocument/2006/relationships" r:id="R55d34e3b1d094b45"/>
-              </a:rPr>
-              <a:t>wolf-day-damage.vercel.app/dashboard</a:t>
-            </a:r>
-          </a:p>
-        </p:txBody>
-      </p:sp>
-      <p:sp>
-        <p:nvSpPr>
-          <p:cNvPr id="6" name="">
-            <a:extLst xmlns:a="http://schemas.openxmlformats.org/drawingml/2006/main">
-              <a:ext uri="{FF2B5EF4-FFF2-40B4-BE49-F238E27FC236}">
-                <a16:creationId xmlns:a16="http://schemas.microsoft.com/office/drawing/2014/main" id="{48B40988-B505-4F64-8226-EBD18CC71F5E}"/>
-              </a:ext>
-            </a:extLst>
-          </p:cNvPr>
-          <p:cNvSpPr>
-            <a:spLocks xmlns:a="http://schemas.openxmlformats.org/drawingml/2006/main" noGrp="1"/>
-          </p:cNvSpPr>
-          <p:nvPr/>
-        </p:nvSpPr>
-        <p:spPr>
-          <a:xfrm xmlns:a="http://schemas.openxmlformats.org/drawingml/2006/main">
-            <a:off x="609600" y="5981700"/>
-            <a:ext cx="10001250" cy="333375"/>
-          </a:xfrm>
-          <a:prstGeom xmlns:a="http://schemas.openxmlformats.org/drawingml/2006/main" prst="rect">
-            <a:avLst/>
-          </a:prstGeom>
-          <a:noFill xmlns:a="http://schemas.openxmlformats.org/drawingml/2006/main"/>
-          <a:ln xmlns:a="http://schemas.openxmlformats.org/drawingml/2006/main" w="0">
-            <a:noFill/>
-          </a:ln>
-        </p:spPr>
-        <p:txBody>
-          <a:bodyPr xmlns:a="http://schemas.openxmlformats.org/drawingml/2006/main">
-            <a:noAutofit/>
-          </a:bodyPr>
-          <a:lstStyle xmlns:a="http://schemas.openxmlformats.org/drawingml/2006/main"/>
-          <a:p xmlns:a="http://schemas.openxmlformats.org/drawingml/2006/main">
-            <a:pPr>
-              <a:buNone/>
-              <a:defRPr sz="1650" b="0">
-                <a:solidFill>
-                  <a:srgbClr val="B9D7D4"/>
-                </a:solidFill>
-                <a:latin typeface="Arial"/>
-                <a:ea typeface="Arial"/>
-                <a:cs typeface="Arial"/>
-              </a:defRPr>
-            </a:pPr>
-            <a:r>
-              <a:rPr sz="1650" b="0">
-                <a:solidFill>
-                  <a:srgbClr val="B9D7D4"/>
-                </a:solidFill>
-                <a:latin typeface="Arial"/>
-                <a:ea typeface="Arial"/>
-                <a:cs typeface="Arial"/>
-              </a:rPr>
-              <a:t>Designed for the workshop mechanic</a:t>
-            </a:r>
-          </a:p>
-        </p:txBody>
-      </p:sp>
+          <p:cNvPicPr>
+            <a:picLocks noChangeAspect="1"/>
+          </p:cNvPicPr>
+          <p:nvPr/>
+        </p:nvPicPr>
+        <p:blipFill>
+          <a:blip r:embed="rId4">
+            <a:extLst>
+              <a:ext uri="{28A0092B-C50C-407E-A947-70E740481C1C}">
+                <a14:useLocalDpi xmlns:a14="http://schemas.microsoft.com/office/drawing/2010/main" val="0"/>
+              </a:ext>
+            </a:extLst>
+          </a:blip>
+          <a:stretch>
+            <a:fillRect/>
+          </a:stretch>
+        </p:blipFill>
+        <p:spPr>
+          <a:xfrm>
+            <a:off x="6509359" y="428952"/>
+            <a:ext cx="5206652" cy="5206652"/>
+          </a:xfrm>
+          <a:prstGeom prst="rect">
+            <a:avLst/>
+          </a:prstGeom>
+        </p:spPr>
+      </p:pic>
     </p:spTree>
     <p:extLst>
       <p:ext uri="{BB962C8B-B14F-4D97-AF65-F5344CB8AC3E}">
@@ -2261,17 +1957,21 @@
       </p:ext>
     </p:extLst>
   </p:cSld>
+  <p:clrMapOvr>
+    <a:masterClrMapping/>
+  </p:clrMapOvr>
 </p:sld>
 </file>
 
 <file path=ppt/slides/slide2.xml><?xml version="1.0" encoding="utf-8"?>
-<p:sld xmlns:p="http://schemas.openxmlformats.org/presentationml/2006/main">
+<p:sld xmlns:a="http://schemas.openxmlformats.org/drawingml/2006/main" xmlns:r="http://schemas.openxmlformats.org/officeDocument/2006/relationships" xmlns:p="http://schemas.openxmlformats.org/presentationml/2006/main">
   <p:cSld>
     <p:bg>
       <p:bgPr>
-        <a:solidFill xmlns:a="http://schemas.openxmlformats.org/drawingml/2006/main">
+        <a:solidFill>
           <a:srgbClr val="F5F4EF"/>
         </a:solidFill>
+        <a:effectLst/>
       </p:bgPr>
     </p:bg>
     <p:spTree>
@@ -2281,41 +1981,46 @@
         <p:nvPr/>
       </p:nvGrpSpPr>
       <p:grpSpPr>
-        <a:xfrm xmlns:a="http://schemas.openxmlformats.org/drawingml/2006/main"/>
+        <a:xfrm>
+          <a:off x="0" y="0"/>
+          <a:ext cx="0" cy="0"/>
+          <a:chOff x="0" y="0"/>
+          <a:chExt cx="0" cy="0"/>
+        </a:xfrm>
       </p:grpSpPr>
       <p:sp>
         <p:nvSpPr>
-          <p:cNvPr id="16" name="">
-            <a:extLst xmlns:a="http://schemas.openxmlformats.org/drawingml/2006/main">
+          <p:cNvPr id="16" name="Rectangle 15">
+            <a:extLst>
               <a:ext uri="{FF2B5EF4-FFF2-40B4-BE49-F238E27FC236}">
                 <a16:creationId xmlns:a16="http://schemas.microsoft.com/office/drawing/2014/main" id="{7BDACD64-46C6-49A3-A770-9769CE4D17FE}"/>
               </a:ext>
             </a:extLst>
           </p:cNvPr>
           <p:cNvSpPr>
-            <a:spLocks xmlns:a="http://schemas.openxmlformats.org/drawingml/2006/main" noGrp="1"/>
-          </p:cNvSpPr>
-          <p:nvPr/>
-        </p:nvSpPr>
-        <p:spPr>
-          <a:xfrm xmlns:a="http://schemas.openxmlformats.org/drawingml/2006/main">
+            <a:spLocks noGrp="1"/>
+          </p:cNvSpPr>
+          <p:nvPr/>
+        </p:nvSpPr>
+        <p:spPr>
+          <a:xfrm>
             <a:off x="609600" y="409575"/>
             <a:ext cx="10953750" cy="714375"/>
           </a:xfrm>
-          <a:prstGeom xmlns:a="http://schemas.openxmlformats.org/drawingml/2006/main" prst="rect">
-            <a:avLst/>
-          </a:prstGeom>
-          <a:noFill xmlns:a="http://schemas.openxmlformats.org/drawingml/2006/main"/>
-          <a:ln xmlns:a="http://schemas.openxmlformats.org/drawingml/2006/main" w="0">
+          <a:prstGeom prst="rect">
+            <a:avLst/>
+          </a:prstGeom>
+          <a:noFill/>
+          <a:ln w="0">
             <a:noFill/>
           </a:ln>
         </p:spPr>
         <p:txBody>
-          <a:bodyPr xmlns:a="http://schemas.openxmlformats.org/drawingml/2006/main">
+          <a:bodyPr>
             <a:noAutofit/>
           </a:bodyPr>
-          <a:lstStyle xmlns:a="http://schemas.openxmlformats.org/drawingml/2006/main"/>
-          <a:p xmlns:a="http://schemas.openxmlformats.org/drawingml/2006/main">
+          <a:lstStyle/>
+          <a:p>
             <a:pPr>
               <a:buNone/>
               <a:defRPr sz="3225" b="1">
@@ -2343,37 +2048,37 @@
       </p:sp>
       <p:sp>
         <p:nvSpPr>
-          <p:cNvPr id="2" name="">
-            <a:extLst xmlns:a="http://schemas.openxmlformats.org/drawingml/2006/main">
+          <p:cNvPr id="2" name="Rectangle 1">
+            <a:extLst>
               <a:ext uri="{FF2B5EF4-FFF2-40B4-BE49-F238E27FC236}">
                 <a16:creationId xmlns:a16="http://schemas.microsoft.com/office/drawing/2014/main" id="{3EA85EF9-7674-495A-ACED-C3C810E7EB39}"/>
               </a:ext>
             </a:extLst>
           </p:cNvPr>
           <p:cNvSpPr>
-            <a:spLocks xmlns:a="http://schemas.openxmlformats.org/drawingml/2006/main" noGrp="1"/>
-          </p:cNvSpPr>
-          <p:nvPr/>
-        </p:nvSpPr>
-        <p:spPr>
-          <a:xfrm xmlns:a="http://schemas.openxmlformats.org/drawingml/2006/main">
+            <a:spLocks noGrp="1"/>
+          </p:cNvSpPr>
+          <p:nvPr/>
+        </p:nvSpPr>
+        <p:spPr>
+          <a:xfrm>
             <a:off x="11144250" y="6324600"/>
             <a:ext cx="476250" cy="285750"/>
           </a:xfrm>
-          <a:prstGeom xmlns:a="http://schemas.openxmlformats.org/drawingml/2006/main" prst="rect">
-            <a:avLst/>
-          </a:prstGeom>
-          <a:noFill xmlns:a="http://schemas.openxmlformats.org/drawingml/2006/main"/>
-          <a:ln xmlns:a="http://schemas.openxmlformats.org/drawingml/2006/main" w="0">
+          <a:prstGeom prst="rect">
+            <a:avLst/>
+          </a:prstGeom>
+          <a:noFill/>
+          <a:ln w="0">
             <a:noFill/>
           </a:ln>
         </p:spPr>
         <p:txBody>
-          <a:bodyPr xmlns:a="http://schemas.openxmlformats.org/drawingml/2006/main">
+          <a:bodyPr>
             <a:noAutofit/>
           </a:bodyPr>
-          <a:lstStyle xmlns:a="http://schemas.openxmlformats.org/drawingml/2006/main"/>
-          <a:p xmlns:a="http://schemas.openxmlformats.org/drawingml/2006/main">
+          <a:lstStyle/>
+          <a:p>
             <a:pPr>
               <a:buNone/>
               <a:defRPr sz="1350" b="0">
@@ -2401,37 +2106,37 @@
       </p:sp>
       <p:sp>
         <p:nvSpPr>
-          <p:cNvPr id="3" name="">
-            <a:extLst xmlns:a="http://schemas.openxmlformats.org/drawingml/2006/main">
+          <p:cNvPr id="3" name="Rectangle 2">
+            <a:extLst>
               <a:ext uri="{FF2B5EF4-FFF2-40B4-BE49-F238E27FC236}">
                 <a16:creationId xmlns:a16="http://schemas.microsoft.com/office/drawing/2014/main" id="{AFE3D03B-DF02-4B5C-A3F5-4CC846EE9AD8}"/>
               </a:ext>
             </a:extLst>
           </p:cNvPr>
           <p:cNvSpPr>
-            <a:spLocks xmlns:a="http://schemas.openxmlformats.org/drawingml/2006/main" noGrp="1"/>
-          </p:cNvSpPr>
-          <p:nvPr/>
-        </p:nvSpPr>
-        <p:spPr>
-          <a:xfrm xmlns:a="http://schemas.openxmlformats.org/drawingml/2006/main">
+            <a:spLocks noGrp="1"/>
+          </p:cNvSpPr>
+          <p:nvPr/>
+        </p:nvSpPr>
+        <p:spPr>
+          <a:xfrm>
             <a:off x="609600" y="1524000"/>
             <a:ext cx="666750" cy="523875"/>
           </a:xfrm>
-          <a:prstGeom xmlns:a="http://schemas.openxmlformats.org/drawingml/2006/main" prst="rect">
-            <a:avLst/>
-          </a:prstGeom>
-          <a:noFill xmlns:a="http://schemas.openxmlformats.org/drawingml/2006/main"/>
-          <a:ln xmlns:a="http://schemas.openxmlformats.org/drawingml/2006/main" w="0">
+          <a:prstGeom prst="rect">
+            <a:avLst/>
+          </a:prstGeom>
+          <a:noFill/>
+          <a:ln w="0">
             <a:noFill/>
           </a:ln>
         </p:spPr>
         <p:txBody>
-          <a:bodyPr xmlns:a="http://schemas.openxmlformats.org/drawingml/2006/main">
+          <a:bodyPr>
             <a:noAutofit/>
           </a:bodyPr>
-          <a:lstStyle xmlns:a="http://schemas.openxmlformats.org/drawingml/2006/main"/>
-          <a:p xmlns:a="http://schemas.openxmlformats.org/drawingml/2006/main">
+          <a:lstStyle/>
+          <a:p>
             <a:pPr>
               <a:buNone/>
               <a:defRPr sz="2925" b="1">
@@ -2459,37 +2164,37 @@
       </p:sp>
       <p:sp>
         <p:nvSpPr>
-          <p:cNvPr id="4" name="">
-            <a:extLst xmlns:a="http://schemas.openxmlformats.org/drawingml/2006/main">
+          <p:cNvPr id="4" name="Rectangle 3">
+            <a:extLst>
               <a:ext uri="{FF2B5EF4-FFF2-40B4-BE49-F238E27FC236}">
                 <a16:creationId xmlns:a16="http://schemas.microsoft.com/office/drawing/2014/main" id="{8014000B-D2D6-4796-A1E6-1E618D136650}"/>
               </a:ext>
             </a:extLst>
           </p:cNvPr>
           <p:cNvSpPr>
-            <a:spLocks xmlns:a="http://schemas.openxmlformats.org/drawingml/2006/main" noGrp="1"/>
-          </p:cNvSpPr>
-          <p:nvPr/>
-        </p:nvSpPr>
-        <p:spPr>
-          <a:xfrm xmlns:a="http://schemas.openxmlformats.org/drawingml/2006/main">
+            <a:spLocks noGrp="1"/>
+          </p:cNvSpPr>
+          <p:nvPr/>
+        </p:nvSpPr>
+        <p:spPr>
+          <a:xfrm>
             <a:off x="1466850" y="1524000"/>
             <a:ext cx="4286250" cy="457200"/>
           </a:xfrm>
-          <a:prstGeom xmlns:a="http://schemas.openxmlformats.org/drawingml/2006/main" prst="rect">
-            <a:avLst/>
-          </a:prstGeom>
-          <a:noFill xmlns:a="http://schemas.openxmlformats.org/drawingml/2006/main"/>
-          <a:ln xmlns:a="http://schemas.openxmlformats.org/drawingml/2006/main" w="0">
+          <a:prstGeom prst="rect">
+            <a:avLst/>
+          </a:prstGeom>
+          <a:noFill/>
+          <a:ln w="0">
             <a:noFill/>
           </a:ln>
         </p:spPr>
         <p:txBody>
-          <a:bodyPr xmlns:a="http://schemas.openxmlformats.org/drawingml/2006/main">
+          <a:bodyPr>
             <a:noAutofit/>
           </a:bodyPr>
-          <a:lstStyle xmlns:a="http://schemas.openxmlformats.org/drawingml/2006/main"/>
-          <a:p xmlns:a="http://schemas.openxmlformats.org/drawingml/2006/main">
+          <a:lstStyle/>
+          <a:p>
             <a:pPr>
               <a:buNone/>
               <a:defRPr sz="2175" b="1">
@@ -2517,37 +2222,37 @@
       </p:sp>
       <p:sp>
         <p:nvSpPr>
-          <p:cNvPr id="5" name="">
-            <a:extLst xmlns:a="http://schemas.openxmlformats.org/drawingml/2006/main">
+          <p:cNvPr id="5" name="Rectangle 4">
+            <a:extLst>
               <a:ext uri="{FF2B5EF4-FFF2-40B4-BE49-F238E27FC236}">
                 <a16:creationId xmlns:a16="http://schemas.microsoft.com/office/drawing/2014/main" id="{F586B2EF-AE83-4759-A5FD-D7F0B078C278}"/>
               </a:ext>
             </a:extLst>
           </p:cNvPr>
           <p:cNvSpPr>
-            <a:spLocks xmlns:a="http://schemas.openxmlformats.org/drawingml/2006/main" noGrp="1"/>
-          </p:cNvSpPr>
-          <p:nvPr/>
-        </p:nvSpPr>
-        <p:spPr>
-          <a:xfrm xmlns:a="http://schemas.openxmlformats.org/drawingml/2006/main">
+            <a:spLocks noGrp="1"/>
+          </p:cNvSpPr>
+          <p:nvPr/>
+        </p:nvSpPr>
+        <p:spPr>
+          <a:xfrm>
             <a:off x="1466850" y="1981200"/>
             <a:ext cx="9620250" cy="457200"/>
           </a:xfrm>
-          <a:prstGeom xmlns:a="http://schemas.openxmlformats.org/drawingml/2006/main" prst="rect">
-            <a:avLst/>
-          </a:prstGeom>
-          <a:noFill xmlns:a="http://schemas.openxmlformats.org/drawingml/2006/main"/>
-          <a:ln xmlns:a="http://schemas.openxmlformats.org/drawingml/2006/main" w="0">
+          <a:prstGeom prst="rect">
+            <a:avLst/>
+          </a:prstGeom>
+          <a:noFill/>
+          <a:ln w="0">
             <a:noFill/>
           </a:ln>
         </p:spPr>
         <p:txBody>
-          <a:bodyPr xmlns:a="http://schemas.openxmlformats.org/drawingml/2006/main">
+          <a:bodyPr>
             <a:noAutofit/>
           </a:bodyPr>
-          <a:lstStyle xmlns:a="http://schemas.openxmlformats.org/drawingml/2006/main"/>
-          <a:p xmlns:a="http://schemas.openxmlformats.org/drawingml/2006/main">
+          <a:lstStyle/>
+          <a:p>
             <a:pPr>
               <a:buNone/>
               <a:defRPr sz="1875" b="0">
@@ -2575,37 +2280,37 @@
       </p:sp>
       <p:sp>
         <p:nvSpPr>
-          <p:cNvPr id="6" name="">
-            <a:extLst xmlns:a="http://schemas.openxmlformats.org/drawingml/2006/main">
+          <p:cNvPr id="6" name="Rectangle 5">
+            <a:extLst>
               <a:ext uri="{FF2B5EF4-FFF2-40B4-BE49-F238E27FC236}">
                 <a16:creationId xmlns:a16="http://schemas.microsoft.com/office/drawing/2014/main" id="{9D4244CA-27DC-40D6-8AFA-08C4F3B00560}"/>
               </a:ext>
             </a:extLst>
           </p:cNvPr>
           <p:cNvSpPr>
-            <a:spLocks xmlns:a="http://schemas.openxmlformats.org/drawingml/2006/main" noGrp="1"/>
-          </p:cNvSpPr>
-          <p:nvPr/>
-        </p:nvSpPr>
-        <p:spPr>
-          <a:xfrm xmlns:a="http://schemas.openxmlformats.org/drawingml/2006/main">
+            <a:spLocks noGrp="1"/>
+          </p:cNvSpPr>
+          <p:nvPr/>
+        </p:nvSpPr>
+        <p:spPr>
+          <a:xfrm>
             <a:off x="609600" y="2571750"/>
             <a:ext cx="666750" cy="523875"/>
           </a:xfrm>
-          <a:prstGeom xmlns:a="http://schemas.openxmlformats.org/drawingml/2006/main" prst="rect">
-            <a:avLst/>
-          </a:prstGeom>
-          <a:noFill xmlns:a="http://schemas.openxmlformats.org/drawingml/2006/main"/>
-          <a:ln xmlns:a="http://schemas.openxmlformats.org/drawingml/2006/main" w="0">
+          <a:prstGeom prst="rect">
+            <a:avLst/>
+          </a:prstGeom>
+          <a:noFill/>
+          <a:ln w="0">
             <a:noFill/>
           </a:ln>
         </p:spPr>
         <p:txBody>
-          <a:bodyPr xmlns:a="http://schemas.openxmlformats.org/drawingml/2006/main">
+          <a:bodyPr>
             <a:noAutofit/>
           </a:bodyPr>
-          <a:lstStyle xmlns:a="http://schemas.openxmlformats.org/drawingml/2006/main"/>
-          <a:p xmlns:a="http://schemas.openxmlformats.org/drawingml/2006/main">
+          <a:lstStyle/>
+          <a:p>
             <a:pPr>
               <a:buNone/>
               <a:defRPr sz="2925" b="1">
@@ -2633,37 +2338,37 @@
       </p:sp>
       <p:sp>
         <p:nvSpPr>
-          <p:cNvPr id="7" name="">
-            <a:extLst xmlns:a="http://schemas.openxmlformats.org/drawingml/2006/main">
+          <p:cNvPr id="7" name="Rectangle 6">
+            <a:extLst>
               <a:ext uri="{FF2B5EF4-FFF2-40B4-BE49-F238E27FC236}">
                 <a16:creationId xmlns:a16="http://schemas.microsoft.com/office/drawing/2014/main" id="{FD7984A3-654D-4EEF-B0A6-A9F86F939C77}"/>
               </a:ext>
             </a:extLst>
           </p:cNvPr>
           <p:cNvSpPr>
-            <a:spLocks xmlns:a="http://schemas.openxmlformats.org/drawingml/2006/main" noGrp="1"/>
-          </p:cNvSpPr>
-          <p:nvPr/>
-        </p:nvSpPr>
-        <p:spPr>
-          <a:xfrm xmlns:a="http://schemas.openxmlformats.org/drawingml/2006/main">
+            <a:spLocks noGrp="1"/>
+          </p:cNvSpPr>
+          <p:nvPr/>
+        </p:nvSpPr>
+        <p:spPr>
+          <a:xfrm>
             <a:off x="1466850" y="2571750"/>
             <a:ext cx="4286250" cy="457200"/>
           </a:xfrm>
-          <a:prstGeom xmlns:a="http://schemas.openxmlformats.org/drawingml/2006/main" prst="rect">
-            <a:avLst/>
-          </a:prstGeom>
-          <a:noFill xmlns:a="http://schemas.openxmlformats.org/drawingml/2006/main"/>
-          <a:ln xmlns:a="http://schemas.openxmlformats.org/drawingml/2006/main" w="0">
+          <a:prstGeom prst="rect">
+            <a:avLst/>
+          </a:prstGeom>
+          <a:noFill/>
+          <a:ln w="0">
             <a:noFill/>
           </a:ln>
         </p:spPr>
         <p:txBody>
-          <a:bodyPr xmlns:a="http://schemas.openxmlformats.org/drawingml/2006/main">
+          <a:bodyPr>
             <a:noAutofit/>
           </a:bodyPr>
-          <a:lstStyle xmlns:a="http://schemas.openxmlformats.org/drawingml/2006/main"/>
-          <a:p xmlns:a="http://schemas.openxmlformats.org/drawingml/2006/main">
+          <a:lstStyle/>
+          <a:p>
             <a:pPr>
               <a:buNone/>
               <a:defRPr sz="2175" b="1">
@@ -2691,37 +2396,37 @@
       </p:sp>
       <p:sp>
         <p:nvSpPr>
-          <p:cNvPr id="8" name="">
-            <a:extLst xmlns:a="http://schemas.openxmlformats.org/drawingml/2006/main">
+          <p:cNvPr id="8" name="Rectangle 7">
+            <a:extLst>
               <a:ext uri="{FF2B5EF4-FFF2-40B4-BE49-F238E27FC236}">
                 <a16:creationId xmlns:a16="http://schemas.microsoft.com/office/drawing/2014/main" id="{BA85B0F8-E75F-48ED-867C-D45A8B045F24}"/>
               </a:ext>
             </a:extLst>
           </p:cNvPr>
           <p:cNvSpPr>
-            <a:spLocks xmlns:a="http://schemas.openxmlformats.org/drawingml/2006/main" noGrp="1"/>
-          </p:cNvSpPr>
-          <p:nvPr/>
-        </p:nvSpPr>
-        <p:spPr>
-          <a:xfrm xmlns:a="http://schemas.openxmlformats.org/drawingml/2006/main">
+            <a:spLocks noGrp="1"/>
+          </p:cNvSpPr>
+          <p:nvPr/>
+        </p:nvSpPr>
+        <p:spPr>
+          <a:xfrm>
             <a:off x="1466850" y="3028950"/>
             <a:ext cx="9620250" cy="457200"/>
           </a:xfrm>
-          <a:prstGeom xmlns:a="http://schemas.openxmlformats.org/drawingml/2006/main" prst="rect">
-            <a:avLst/>
-          </a:prstGeom>
-          <a:noFill xmlns:a="http://schemas.openxmlformats.org/drawingml/2006/main"/>
-          <a:ln xmlns:a="http://schemas.openxmlformats.org/drawingml/2006/main" w="0">
+          <a:prstGeom prst="rect">
+            <a:avLst/>
+          </a:prstGeom>
+          <a:noFill/>
+          <a:ln w="0">
             <a:noFill/>
           </a:ln>
         </p:spPr>
         <p:txBody>
-          <a:bodyPr xmlns:a="http://schemas.openxmlformats.org/drawingml/2006/main">
+          <a:bodyPr>
             <a:noAutofit/>
           </a:bodyPr>
-          <a:lstStyle xmlns:a="http://schemas.openxmlformats.org/drawingml/2006/main"/>
-          <a:p xmlns:a="http://schemas.openxmlformats.org/drawingml/2006/main">
+          <a:lstStyle/>
+          <a:p>
             <a:pPr>
               <a:buNone/>
               <a:defRPr sz="1875" b="0">
@@ -2749,37 +2454,37 @@
       </p:sp>
       <p:sp>
         <p:nvSpPr>
-          <p:cNvPr id="9" name="">
-            <a:extLst xmlns:a="http://schemas.openxmlformats.org/drawingml/2006/main">
+          <p:cNvPr id="9" name="Rectangle 8">
+            <a:extLst>
               <a:ext uri="{FF2B5EF4-FFF2-40B4-BE49-F238E27FC236}">
                 <a16:creationId xmlns:a16="http://schemas.microsoft.com/office/drawing/2014/main" id="{5F9CFACF-D445-4E2E-B7B1-B02A24E597D2}"/>
               </a:ext>
             </a:extLst>
           </p:cNvPr>
           <p:cNvSpPr>
-            <a:spLocks xmlns:a="http://schemas.openxmlformats.org/drawingml/2006/main" noGrp="1"/>
-          </p:cNvSpPr>
-          <p:nvPr/>
-        </p:nvSpPr>
-        <p:spPr>
-          <a:xfrm xmlns:a="http://schemas.openxmlformats.org/drawingml/2006/main">
+            <a:spLocks noGrp="1"/>
+          </p:cNvSpPr>
+          <p:nvPr/>
+        </p:nvSpPr>
+        <p:spPr>
+          <a:xfrm>
             <a:off x="609600" y="3619500"/>
             <a:ext cx="666750" cy="523875"/>
           </a:xfrm>
-          <a:prstGeom xmlns:a="http://schemas.openxmlformats.org/drawingml/2006/main" prst="rect">
-            <a:avLst/>
-          </a:prstGeom>
-          <a:noFill xmlns:a="http://schemas.openxmlformats.org/drawingml/2006/main"/>
-          <a:ln xmlns:a="http://schemas.openxmlformats.org/drawingml/2006/main" w="0">
+          <a:prstGeom prst="rect">
+            <a:avLst/>
+          </a:prstGeom>
+          <a:noFill/>
+          <a:ln w="0">
             <a:noFill/>
           </a:ln>
         </p:spPr>
         <p:txBody>
-          <a:bodyPr xmlns:a="http://schemas.openxmlformats.org/drawingml/2006/main">
+          <a:bodyPr>
             <a:noAutofit/>
           </a:bodyPr>
-          <a:lstStyle xmlns:a="http://schemas.openxmlformats.org/drawingml/2006/main"/>
-          <a:p xmlns:a="http://schemas.openxmlformats.org/drawingml/2006/main">
+          <a:lstStyle/>
+          <a:p>
             <a:pPr>
               <a:buNone/>
               <a:defRPr sz="2925" b="1">
@@ -2807,37 +2512,37 @@
       </p:sp>
       <p:sp>
         <p:nvSpPr>
-          <p:cNvPr id="10" name="">
-            <a:extLst xmlns:a="http://schemas.openxmlformats.org/drawingml/2006/main">
+          <p:cNvPr id="10" name="Rectangle 9">
+            <a:extLst>
               <a:ext uri="{FF2B5EF4-FFF2-40B4-BE49-F238E27FC236}">
                 <a16:creationId xmlns:a16="http://schemas.microsoft.com/office/drawing/2014/main" id="{E97C1399-AA0E-44C0-85F5-49CD917E0E6F}"/>
               </a:ext>
             </a:extLst>
           </p:cNvPr>
           <p:cNvSpPr>
-            <a:spLocks xmlns:a="http://schemas.openxmlformats.org/drawingml/2006/main" noGrp="1"/>
-          </p:cNvSpPr>
-          <p:nvPr/>
-        </p:nvSpPr>
-        <p:spPr>
-          <a:xfrm xmlns:a="http://schemas.openxmlformats.org/drawingml/2006/main">
+            <a:spLocks noGrp="1"/>
+          </p:cNvSpPr>
+          <p:nvPr/>
+        </p:nvSpPr>
+        <p:spPr>
+          <a:xfrm>
             <a:off x="1466850" y="3619500"/>
             <a:ext cx="4286250" cy="457200"/>
           </a:xfrm>
-          <a:prstGeom xmlns:a="http://schemas.openxmlformats.org/drawingml/2006/main" prst="rect">
-            <a:avLst/>
-          </a:prstGeom>
-          <a:noFill xmlns:a="http://schemas.openxmlformats.org/drawingml/2006/main"/>
-          <a:ln xmlns:a="http://schemas.openxmlformats.org/drawingml/2006/main" w="0">
+          <a:prstGeom prst="rect">
+            <a:avLst/>
+          </a:prstGeom>
+          <a:noFill/>
+          <a:ln w="0">
             <a:noFill/>
           </a:ln>
         </p:spPr>
         <p:txBody>
-          <a:bodyPr xmlns:a="http://schemas.openxmlformats.org/drawingml/2006/main">
+          <a:bodyPr>
             <a:noAutofit/>
           </a:bodyPr>
-          <a:lstStyle xmlns:a="http://schemas.openxmlformats.org/drawingml/2006/main"/>
-          <a:p xmlns:a="http://schemas.openxmlformats.org/drawingml/2006/main">
+          <a:lstStyle/>
+          <a:p>
             <a:pPr>
               <a:buNone/>
               <a:defRPr sz="2175" b="1">
@@ -2865,37 +2570,37 @@
       </p:sp>
       <p:sp>
         <p:nvSpPr>
-          <p:cNvPr id="11" name="">
-            <a:extLst xmlns:a="http://schemas.openxmlformats.org/drawingml/2006/main">
+          <p:cNvPr id="11" name="Rectangle 10">
+            <a:extLst>
               <a:ext uri="{FF2B5EF4-FFF2-40B4-BE49-F238E27FC236}">
                 <a16:creationId xmlns:a16="http://schemas.microsoft.com/office/drawing/2014/main" id="{3ACE9503-9C91-4AE4-8F2E-EA959FB41D72}"/>
               </a:ext>
             </a:extLst>
           </p:cNvPr>
           <p:cNvSpPr>
-            <a:spLocks xmlns:a="http://schemas.openxmlformats.org/drawingml/2006/main" noGrp="1"/>
-          </p:cNvSpPr>
-          <p:nvPr/>
-        </p:nvSpPr>
-        <p:spPr>
-          <a:xfrm xmlns:a="http://schemas.openxmlformats.org/drawingml/2006/main">
+            <a:spLocks noGrp="1"/>
+          </p:cNvSpPr>
+          <p:nvPr/>
+        </p:nvSpPr>
+        <p:spPr>
+          <a:xfrm>
             <a:off x="1466850" y="4076700"/>
             <a:ext cx="9620250" cy="457200"/>
           </a:xfrm>
-          <a:prstGeom xmlns:a="http://schemas.openxmlformats.org/drawingml/2006/main" prst="rect">
-            <a:avLst/>
-          </a:prstGeom>
-          <a:noFill xmlns:a="http://schemas.openxmlformats.org/drawingml/2006/main"/>
-          <a:ln xmlns:a="http://schemas.openxmlformats.org/drawingml/2006/main" w="0">
+          <a:prstGeom prst="rect">
+            <a:avLst/>
+          </a:prstGeom>
+          <a:noFill/>
+          <a:ln w="0">
             <a:noFill/>
           </a:ln>
         </p:spPr>
         <p:txBody>
-          <a:bodyPr xmlns:a="http://schemas.openxmlformats.org/drawingml/2006/main">
+          <a:bodyPr>
             <a:noAutofit/>
           </a:bodyPr>
-          <a:lstStyle xmlns:a="http://schemas.openxmlformats.org/drawingml/2006/main"/>
-          <a:p xmlns:a="http://schemas.openxmlformats.org/drawingml/2006/main">
+          <a:lstStyle/>
+          <a:p>
             <a:pPr>
               <a:buNone/>
               <a:defRPr sz="1875" b="0">
@@ -2923,37 +2628,37 @@
       </p:sp>
       <p:sp>
         <p:nvSpPr>
-          <p:cNvPr id="12" name="">
-            <a:extLst xmlns:a="http://schemas.openxmlformats.org/drawingml/2006/main">
+          <p:cNvPr id="12" name="Rectangle 11">
+            <a:extLst>
               <a:ext uri="{FF2B5EF4-FFF2-40B4-BE49-F238E27FC236}">
                 <a16:creationId xmlns:a16="http://schemas.microsoft.com/office/drawing/2014/main" id="{14A9B9E9-62E4-4237-AC2C-EB440953CEEC}"/>
               </a:ext>
             </a:extLst>
           </p:cNvPr>
           <p:cNvSpPr>
-            <a:spLocks xmlns:a="http://schemas.openxmlformats.org/drawingml/2006/main" noGrp="1"/>
-          </p:cNvSpPr>
-          <p:nvPr/>
-        </p:nvSpPr>
-        <p:spPr>
-          <a:xfrm xmlns:a="http://schemas.openxmlformats.org/drawingml/2006/main">
+            <a:spLocks noGrp="1"/>
+          </p:cNvSpPr>
+          <p:nvPr/>
+        </p:nvSpPr>
+        <p:spPr>
+          <a:xfrm>
             <a:off x="609600" y="4667250"/>
             <a:ext cx="666750" cy="523875"/>
           </a:xfrm>
-          <a:prstGeom xmlns:a="http://schemas.openxmlformats.org/drawingml/2006/main" prst="rect">
-            <a:avLst/>
-          </a:prstGeom>
-          <a:noFill xmlns:a="http://schemas.openxmlformats.org/drawingml/2006/main"/>
-          <a:ln xmlns:a="http://schemas.openxmlformats.org/drawingml/2006/main" w="0">
+          <a:prstGeom prst="rect">
+            <a:avLst/>
+          </a:prstGeom>
+          <a:noFill/>
+          <a:ln w="0">
             <a:noFill/>
           </a:ln>
         </p:spPr>
         <p:txBody>
-          <a:bodyPr xmlns:a="http://schemas.openxmlformats.org/drawingml/2006/main">
+          <a:bodyPr>
             <a:noAutofit/>
           </a:bodyPr>
-          <a:lstStyle xmlns:a="http://schemas.openxmlformats.org/drawingml/2006/main"/>
-          <a:p xmlns:a="http://schemas.openxmlformats.org/drawingml/2006/main">
+          <a:lstStyle/>
+          <a:p>
             <a:pPr>
               <a:buNone/>
               <a:defRPr sz="2925" b="1">
@@ -2981,37 +2686,37 @@
       </p:sp>
       <p:sp>
         <p:nvSpPr>
-          <p:cNvPr id="13" name="">
-            <a:extLst xmlns:a="http://schemas.openxmlformats.org/drawingml/2006/main">
+          <p:cNvPr id="13" name="Rectangle 12">
+            <a:extLst>
               <a:ext uri="{FF2B5EF4-FFF2-40B4-BE49-F238E27FC236}">
                 <a16:creationId xmlns:a16="http://schemas.microsoft.com/office/drawing/2014/main" id="{55C9C11F-4FE3-4733-AC8B-E6C178E5A9EE}"/>
               </a:ext>
             </a:extLst>
           </p:cNvPr>
           <p:cNvSpPr>
-            <a:spLocks xmlns:a="http://schemas.openxmlformats.org/drawingml/2006/main" noGrp="1"/>
-          </p:cNvSpPr>
-          <p:nvPr/>
-        </p:nvSpPr>
-        <p:spPr>
-          <a:xfrm xmlns:a="http://schemas.openxmlformats.org/drawingml/2006/main">
+            <a:spLocks noGrp="1"/>
+          </p:cNvSpPr>
+          <p:nvPr/>
+        </p:nvSpPr>
+        <p:spPr>
+          <a:xfrm>
             <a:off x="1466850" y="4667250"/>
             <a:ext cx="4286250" cy="457200"/>
           </a:xfrm>
-          <a:prstGeom xmlns:a="http://schemas.openxmlformats.org/drawingml/2006/main" prst="rect">
-            <a:avLst/>
-          </a:prstGeom>
-          <a:noFill xmlns:a="http://schemas.openxmlformats.org/drawingml/2006/main"/>
-          <a:ln xmlns:a="http://schemas.openxmlformats.org/drawingml/2006/main" w="0">
+          <a:prstGeom prst="rect">
+            <a:avLst/>
+          </a:prstGeom>
+          <a:noFill/>
+          <a:ln w="0">
             <a:noFill/>
           </a:ln>
         </p:spPr>
         <p:txBody>
-          <a:bodyPr xmlns:a="http://schemas.openxmlformats.org/drawingml/2006/main">
+          <a:bodyPr>
             <a:noAutofit/>
           </a:bodyPr>
-          <a:lstStyle xmlns:a="http://schemas.openxmlformats.org/drawingml/2006/main"/>
-          <a:p xmlns:a="http://schemas.openxmlformats.org/drawingml/2006/main">
+          <a:lstStyle/>
+          <a:p>
             <a:pPr>
               <a:buNone/>
               <a:defRPr sz="2175" b="1">
@@ -3039,37 +2744,37 @@
       </p:sp>
       <p:sp>
         <p:nvSpPr>
-          <p:cNvPr id="14" name="">
-            <a:extLst xmlns:a="http://schemas.openxmlformats.org/drawingml/2006/main">
+          <p:cNvPr id="14" name="Rectangle 13">
+            <a:extLst>
               <a:ext uri="{FF2B5EF4-FFF2-40B4-BE49-F238E27FC236}">
                 <a16:creationId xmlns:a16="http://schemas.microsoft.com/office/drawing/2014/main" id="{B0697E6F-1CD9-41D3-AA7C-CD67BA9365FB}"/>
               </a:ext>
             </a:extLst>
           </p:cNvPr>
           <p:cNvSpPr>
-            <a:spLocks xmlns:a="http://schemas.openxmlformats.org/drawingml/2006/main" noGrp="1"/>
-          </p:cNvSpPr>
-          <p:nvPr/>
-        </p:nvSpPr>
-        <p:spPr>
-          <a:xfrm xmlns:a="http://schemas.openxmlformats.org/drawingml/2006/main">
+            <a:spLocks noGrp="1"/>
+          </p:cNvSpPr>
+          <p:nvPr/>
+        </p:nvSpPr>
+        <p:spPr>
+          <a:xfrm>
             <a:off x="1466850" y="5124450"/>
             <a:ext cx="9620250" cy="457200"/>
           </a:xfrm>
-          <a:prstGeom xmlns:a="http://schemas.openxmlformats.org/drawingml/2006/main" prst="rect">
-            <a:avLst/>
-          </a:prstGeom>
-          <a:noFill xmlns:a="http://schemas.openxmlformats.org/drawingml/2006/main"/>
-          <a:ln xmlns:a="http://schemas.openxmlformats.org/drawingml/2006/main" w="0">
+          <a:prstGeom prst="rect">
+            <a:avLst/>
+          </a:prstGeom>
+          <a:noFill/>
+          <a:ln w="0">
             <a:noFill/>
           </a:ln>
         </p:spPr>
         <p:txBody>
-          <a:bodyPr xmlns:a="http://schemas.openxmlformats.org/drawingml/2006/main">
+          <a:bodyPr>
             <a:noAutofit/>
           </a:bodyPr>
-          <a:lstStyle xmlns:a="http://schemas.openxmlformats.org/drawingml/2006/main"/>
-          <a:p xmlns:a="http://schemas.openxmlformats.org/drawingml/2006/main">
+          <a:lstStyle/>
+          <a:p>
             <a:pPr>
               <a:buNone/>
               <a:defRPr sz="1875" b="0">
@@ -3097,37 +2802,37 @@
       </p:sp>
       <p:sp>
         <p:nvSpPr>
-          <p:cNvPr id="15" name="">
-            <a:extLst xmlns:a="http://schemas.openxmlformats.org/drawingml/2006/main">
+          <p:cNvPr id="15" name="Rectangle 14">
+            <a:extLst>
               <a:ext uri="{FF2B5EF4-FFF2-40B4-BE49-F238E27FC236}">
                 <a16:creationId xmlns:a16="http://schemas.microsoft.com/office/drawing/2014/main" id="{D9BE8FF7-76ED-4858-92BF-9A111C2B89FE}"/>
               </a:ext>
             </a:extLst>
           </p:cNvPr>
           <p:cNvSpPr>
-            <a:spLocks xmlns:a="http://schemas.openxmlformats.org/drawingml/2006/main" noGrp="1"/>
-          </p:cNvSpPr>
-          <p:nvPr/>
-        </p:nvSpPr>
-        <p:spPr>
-          <a:xfrm xmlns:a="http://schemas.openxmlformats.org/drawingml/2006/main">
+            <a:spLocks noGrp="1"/>
+          </p:cNvSpPr>
+          <p:nvPr/>
+        </p:nvSpPr>
+        <p:spPr>
+          <a:xfrm>
             <a:off x="609600" y="6000750"/>
             <a:ext cx="10668000" cy="342900"/>
           </a:xfrm>
-          <a:prstGeom xmlns:a="http://schemas.openxmlformats.org/drawingml/2006/main" prst="rect">
-            <a:avLst/>
-          </a:prstGeom>
-          <a:noFill xmlns:a="http://schemas.openxmlformats.org/drawingml/2006/main"/>
-          <a:ln xmlns:a="http://schemas.openxmlformats.org/drawingml/2006/main" w="0">
+          <a:prstGeom prst="rect">
+            <a:avLst/>
+          </a:prstGeom>
+          <a:noFill/>
+          <a:ln w="0">
             <a:noFill/>
           </a:ln>
         </p:spPr>
         <p:txBody>
-          <a:bodyPr xmlns:a="http://schemas.openxmlformats.org/drawingml/2006/main">
+          <a:bodyPr>
             <a:noAutofit/>
           </a:bodyPr>
-          <a:lstStyle xmlns:a="http://schemas.openxmlformats.org/drawingml/2006/main"/>
-          <a:p xmlns:a="http://schemas.openxmlformats.org/drawingml/2006/main">
+          <a:lstStyle/>
+          <a:p>
             <a:pPr>
               <a:buNone/>
               <a:defRPr sz="1650" b="0">
@@ -3160,17 +2865,21 @@
       </p:ext>
     </p:extLst>
   </p:cSld>
+  <p:clrMapOvr>
+    <a:masterClrMapping/>
+  </p:clrMapOvr>
 </p:sld>
 </file>
 
 <file path=ppt/slides/slide3.xml><?xml version="1.0" encoding="utf-8"?>
-<p:sld xmlns:p="http://schemas.openxmlformats.org/presentationml/2006/main">
+<p:sld xmlns:a="http://schemas.openxmlformats.org/drawingml/2006/main" xmlns:r="http://schemas.openxmlformats.org/officeDocument/2006/relationships" xmlns:p="http://schemas.openxmlformats.org/presentationml/2006/main">
   <p:cSld>
     <p:bg>
       <p:bgPr>
-        <a:solidFill xmlns:a="http://schemas.openxmlformats.org/drawingml/2006/main">
+        <a:solidFill>
           <a:srgbClr val="F5F4EF"/>
         </a:solidFill>
+        <a:effectLst/>
       </p:bgPr>
     </p:bg>
     <p:spTree>
@@ -3180,41 +2889,46 @@
         <p:nvPr/>
       </p:nvGrpSpPr>
       <p:grpSpPr>
-        <a:xfrm xmlns:a="http://schemas.openxmlformats.org/drawingml/2006/main"/>
+        <a:xfrm>
+          <a:off x="0" y="0"/>
+          <a:ext cx="0" cy="0"/>
+          <a:chOff x="0" y="0"/>
+          <a:chExt cx="0" cy="0"/>
+        </a:xfrm>
       </p:grpSpPr>
       <p:sp>
         <p:nvSpPr>
-          <p:cNvPr id="11" name="">
-            <a:extLst xmlns:a="http://schemas.openxmlformats.org/drawingml/2006/main">
+          <p:cNvPr id="11" name="Rectangle 10">
+            <a:extLst>
               <a:ext uri="{FF2B5EF4-FFF2-40B4-BE49-F238E27FC236}">
                 <a16:creationId xmlns:a16="http://schemas.microsoft.com/office/drawing/2014/main" id="{59343C8F-C72F-4E26-98A3-29E9CF0EEE4A}"/>
               </a:ext>
             </a:extLst>
           </p:cNvPr>
           <p:cNvSpPr>
-            <a:spLocks xmlns:a="http://schemas.openxmlformats.org/drawingml/2006/main" noGrp="1"/>
-          </p:cNvSpPr>
-          <p:nvPr/>
-        </p:nvSpPr>
-        <p:spPr>
-          <a:xfrm xmlns:a="http://schemas.openxmlformats.org/drawingml/2006/main">
+            <a:spLocks noGrp="1"/>
+          </p:cNvSpPr>
+          <p:nvPr/>
+        </p:nvSpPr>
+        <p:spPr>
+          <a:xfrm>
             <a:off x="609600" y="409575"/>
             <a:ext cx="10953750" cy="714375"/>
           </a:xfrm>
-          <a:prstGeom xmlns:a="http://schemas.openxmlformats.org/drawingml/2006/main" prst="rect">
-            <a:avLst/>
-          </a:prstGeom>
-          <a:noFill xmlns:a="http://schemas.openxmlformats.org/drawingml/2006/main"/>
-          <a:ln xmlns:a="http://schemas.openxmlformats.org/drawingml/2006/main" w="0">
+          <a:prstGeom prst="rect">
+            <a:avLst/>
+          </a:prstGeom>
+          <a:noFill/>
+          <a:ln w="0">
             <a:noFill/>
           </a:ln>
         </p:spPr>
         <p:txBody>
-          <a:bodyPr xmlns:a="http://schemas.openxmlformats.org/drawingml/2006/main">
+          <a:bodyPr>
             <a:noAutofit/>
           </a:bodyPr>
-          <a:lstStyle xmlns:a="http://schemas.openxmlformats.org/drawingml/2006/main"/>
-          <a:p xmlns:a="http://schemas.openxmlformats.org/drawingml/2006/main">
+          <a:lstStyle/>
+          <a:p>
             <a:pPr>
               <a:buNone/>
               <a:defRPr sz="3225" b="1">
@@ -3242,37 +2956,37 @@
       </p:sp>
       <p:sp>
         <p:nvSpPr>
-          <p:cNvPr id="2" name="">
-            <a:extLst xmlns:a="http://schemas.openxmlformats.org/drawingml/2006/main">
+          <p:cNvPr id="2" name="Rectangle 1">
+            <a:extLst>
               <a:ext uri="{FF2B5EF4-FFF2-40B4-BE49-F238E27FC236}">
                 <a16:creationId xmlns:a16="http://schemas.microsoft.com/office/drawing/2014/main" id="{9C7512A1-E156-4F74-A433-F181D6C45214}"/>
               </a:ext>
             </a:extLst>
           </p:cNvPr>
           <p:cNvSpPr>
-            <a:spLocks xmlns:a="http://schemas.openxmlformats.org/drawingml/2006/main" noGrp="1"/>
-          </p:cNvSpPr>
-          <p:nvPr/>
-        </p:nvSpPr>
-        <p:spPr>
-          <a:xfrm xmlns:a="http://schemas.openxmlformats.org/drawingml/2006/main">
+            <a:spLocks noGrp="1"/>
+          </p:cNvSpPr>
+          <p:nvPr/>
+        </p:nvSpPr>
+        <p:spPr>
+          <a:xfrm>
             <a:off x="11144250" y="6324600"/>
             <a:ext cx="476250" cy="285750"/>
           </a:xfrm>
-          <a:prstGeom xmlns:a="http://schemas.openxmlformats.org/drawingml/2006/main" prst="rect">
-            <a:avLst/>
-          </a:prstGeom>
-          <a:noFill xmlns:a="http://schemas.openxmlformats.org/drawingml/2006/main"/>
-          <a:ln xmlns:a="http://schemas.openxmlformats.org/drawingml/2006/main" w="0">
+          <a:prstGeom prst="rect">
+            <a:avLst/>
+          </a:prstGeom>
+          <a:noFill/>
+          <a:ln w="0">
             <a:noFill/>
           </a:ln>
         </p:spPr>
         <p:txBody>
-          <a:bodyPr xmlns:a="http://schemas.openxmlformats.org/drawingml/2006/main">
+          <a:bodyPr>
             <a:noAutofit/>
           </a:bodyPr>
-          <a:lstStyle xmlns:a="http://schemas.openxmlformats.org/drawingml/2006/main"/>
-          <a:p xmlns:a="http://schemas.openxmlformats.org/drawingml/2006/main">
+          <a:lstStyle/>
+          <a:p>
             <a:pPr>
               <a:buNone/>
               <a:defRPr sz="1350" b="0">
@@ -3300,59 +3014,59 @@
       </p:sp>
       <p:pic>
         <p:nvPicPr>
-          <p:cNvPr id="15" name=""/>
+          <p:cNvPr id="15" name="Image 14"/>
           <p:cNvPicPr>
-            <a:picLocks xmlns:a="http://schemas.openxmlformats.org/drawingml/2006/main" noChangeAspect="1"/>
+            <a:picLocks noChangeAspect="1"/>
           </p:cNvPicPr>
           <p:nvPr/>
         </p:nvPicPr>
         <p:blipFill>
-          <a:blip xmlns:r="http://schemas.openxmlformats.org/officeDocument/2006/relationships" xmlns:a="http://schemas.openxmlformats.org/drawingml/2006/main" r:embed="R5fe1da47078c4b43"/>
-          <a:stretch xmlns:a="http://schemas.openxmlformats.org/drawingml/2006/main"/>
+          <a:blip r:embed="rId3"/>
+          <a:stretch/>
         </p:blipFill>
         <p:spPr>
-          <a:xfrm xmlns:a="http://schemas.openxmlformats.org/drawingml/2006/main">
+          <a:xfrm>
             <a:off x="803659" y="1495425"/>
             <a:ext cx="3279006" cy="4267200"/>
           </a:xfrm>
-          <a:prstGeom xmlns:a="http://schemas.openxmlformats.org/drawingml/2006/main" prst="rect">
+          <a:prstGeom prst="rect">
             <a:avLst/>
           </a:prstGeom>
         </p:spPr>
       </p:pic>
       <p:sp>
         <p:nvSpPr>
-          <p:cNvPr id="4" name="">
-            <a:extLst xmlns:a="http://schemas.openxmlformats.org/drawingml/2006/main">
+          <p:cNvPr id="4" name="Rectangle 3">
+            <a:extLst>
               <a:ext uri="{FF2B5EF4-FFF2-40B4-BE49-F238E27FC236}">
                 <a16:creationId xmlns:a16="http://schemas.microsoft.com/office/drawing/2014/main" id="{7F8B9516-A0A7-48AF-AA02-72325DBFF296}"/>
               </a:ext>
             </a:extLst>
           </p:cNvPr>
           <p:cNvSpPr>
-            <a:spLocks xmlns:a="http://schemas.openxmlformats.org/drawingml/2006/main" noGrp="1"/>
-          </p:cNvSpPr>
-          <p:nvPr/>
-        </p:nvSpPr>
-        <p:spPr>
-          <a:xfrm xmlns:a="http://schemas.openxmlformats.org/drawingml/2006/main">
+            <a:spLocks noGrp="1"/>
+          </p:cNvSpPr>
+          <p:nvPr/>
+        </p:nvSpPr>
+        <p:spPr>
+          <a:xfrm>
             <a:off x="4752975" y="1438275"/>
             <a:ext cx="6762750" cy="381000"/>
           </a:xfrm>
-          <a:prstGeom xmlns:a="http://schemas.openxmlformats.org/drawingml/2006/main" prst="rect">
-            <a:avLst/>
-          </a:prstGeom>
-          <a:noFill xmlns:a="http://schemas.openxmlformats.org/drawingml/2006/main"/>
-          <a:ln xmlns:a="http://schemas.openxmlformats.org/drawingml/2006/main" w="0">
+          <a:prstGeom prst="rect">
+            <a:avLst/>
+          </a:prstGeom>
+          <a:noFill/>
+          <a:ln w="0">
             <a:noFill/>
           </a:ln>
         </p:spPr>
         <p:txBody>
-          <a:bodyPr xmlns:a="http://schemas.openxmlformats.org/drawingml/2006/main">
+          <a:bodyPr>
             <a:noAutofit/>
           </a:bodyPr>
-          <a:lstStyle xmlns:a="http://schemas.openxmlformats.org/drawingml/2006/main"/>
-          <a:p xmlns:a="http://schemas.openxmlformats.org/drawingml/2006/main">
+          <a:lstStyle/>
+          <a:p>
             <a:pPr>
               <a:buNone/>
               <a:defRPr sz="1800" b="0">
@@ -3380,37 +3094,37 @@
       </p:sp>
       <p:sp>
         <p:nvSpPr>
-          <p:cNvPr id="5" name="">
-            <a:extLst xmlns:a="http://schemas.openxmlformats.org/drawingml/2006/main">
+          <p:cNvPr id="5" name="Rectangle 4">
+            <a:extLst>
               <a:ext uri="{FF2B5EF4-FFF2-40B4-BE49-F238E27FC236}">
                 <a16:creationId xmlns:a16="http://schemas.microsoft.com/office/drawing/2014/main" id="{A8E82463-8164-459A-A467-8190536EA681}"/>
               </a:ext>
             </a:extLst>
           </p:cNvPr>
           <p:cNvSpPr>
-            <a:spLocks xmlns:a="http://schemas.openxmlformats.org/drawingml/2006/main" noGrp="1"/>
-          </p:cNvSpPr>
-          <p:nvPr/>
-        </p:nvSpPr>
-        <p:spPr>
-          <a:xfrm xmlns:a="http://schemas.openxmlformats.org/drawingml/2006/main">
+            <a:spLocks noGrp="1"/>
+          </p:cNvSpPr>
+          <p:nvPr/>
+        </p:nvSpPr>
+        <p:spPr>
+          <a:xfrm>
             <a:off x="4752975" y="1952625"/>
             <a:ext cx="6619875" cy="1409700"/>
           </a:xfrm>
-          <a:prstGeom xmlns:a="http://schemas.openxmlformats.org/drawingml/2006/main" prst="rect">
-            <a:avLst/>
-          </a:prstGeom>
-          <a:noFill xmlns:a="http://schemas.openxmlformats.org/drawingml/2006/main"/>
-          <a:ln xmlns:a="http://schemas.openxmlformats.org/drawingml/2006/main" w="0">
+          <a:prstGeom prst="rect">
+            <a:avLst/>
+          </a:prstGeom>
+          <a:noFill/>
+          <a:ln w="0">
             <a:noFill/>
           </a:ln>
         </p:spPr>
         <p:txBody>
-          <a:bodyPr xmlns:a="http://schemas.openxmlformats.org/drawingml/2006/main">
+          <a:bodyPr>
             <a:noAutofit/>
           </a:bodyPr>
-          <a:lstStyle xmlns:a="http://schemas.openxmlformats.org/drawingml/2006/main"/>
-          <a:p xmlns:a="http://schemas.openxmlformats.org/drawingml/2006/main">
+          <a:lstStyle/>
+          <a:p>
             <a:pPr>
               <a:buNone/>
               <a:defRPr sz="2325" b="1">
@@ -3438,37 +3152,37 @@
       </p:sp>
       <p:sp>
         <p:nvSpPr>
-          <p:cNvPr id="6" name="">
-            <a:extLst xmlns:a="http://schemas.openxmlformats.org/drawingml/2006/main">
+          <p:cNvPr id="6" name="Rectangle 5">
+            <a:extLst>
               <a:ext uri="{FF2B5EF4-FFF2-40B4-BE49-F238E27FC236}">
                 <a16:creationId xmlns:a16="http://schemas.microsoft.com/office/drawing/2014/main" id="{2D7890BD-BBDB-44A7-9228-E205246E8691}"/>
               </a:ext>
             </a:extLst>
           </p:cNvPr>
           <p:cNvSpPr>
-            <a:spLocks xmlns:a="http://schemas.openxmlformats.org/drawingml/2006/main" noGrp="1"/>
-          </p:cNvSpPr>
-          <p:nvPr/>
-        </p:nvSpPr>
-        <p:spPr>
-          <a:xfrm xmlns:a="http://schemas.openxmlformats.org/drawingml/2006/main">
+            <a:spLocks noGrp="1"/>
+          </p:cNvSpPr>
+          <p:nvPr/>
+        </p:nvSpPr>
+        <p:spPr>
+          <a:xfrm>
             <a:off x="4752975" y="3714750"/>
             <a:ext cx="6667500" cy="438150"/>
           </a:xfrm>
-          <a:prstGeom xmlns:a="http://schemas.openxmlformats.org/drawingml/2006/main" prst="rect">
-            <a:avLst/>
-          </a:prstGeom>
-          <a:noFill xmlns:a="http://schemas.openxmlformats.org/drawingml/2006/main"/>
-          <a:ln xmlns:a="http://schemas.openxmlformats.org/drawingml/2006/main" w="0">
+          <a:prstGeom prst="rect">
+            <a:avLst/>
+          </a:prstGeom>
+          <a:noFill/>
+          <a:ln w="0">
             <a:noFill/>
           </a:ln>
         </p:spPr>
         <p:txBody>
-          <a:bodyPr xmlns:a="http://schemas.openxmlformats.org/drawingml/2006/main">
+          <a:bodyPr>
             <a:noAutofit/>
           </a:bodyPr>
-          <a:lstStyle xmlns:a="http://schemas.openxmlformats.org/drawingml/2006/main"/>
-          <a:p xmlns:a="http://schemas.openxmlformats.org/drawingml/2006/main">
+          <a:lstStyle/>
+          <a:p>
             <a:pPr>
               <a:buNone/>
               <a:defRPr sz="2250" b="1">
@@ -3496,37 +3210,37 @@
       </p:sp>
       <p:sp>
         <p:nvSpPr>
-          <p:cNvPr id="7" name="">
-            <a:extLst xmlns:a="http://schemas.openxmlformats.org/drawingml/2006/main">
+          <p:cNvPr id="7" name="Rectangle 6">
+            <a:extLst>
               <a:ext uri="{FF2B5EF4-FFF2-40B4-BE49-F238E27FC236}">
                 <a16:creationId xmlns:a16="http://schemas.microsoft.com/office/drawing/2014/main" id="{7E7D4C20-20CD-4F28-8EE6-FE33C8EEEBD3}"/>
               </a:ext>
             </a:extLst>
           </p:cNvPr>
           <p:cNvSpPr>
-            <a:spLocks xmlns:a="http://schemas.openxmlformats.org/drawingml/2006/main" noGrp="1"/>
-          </p:cNvSpPr>
-          <p:nvPr/>
-        </p:nvSpPr>
-        <p:spPr>
-          <a:xfrm xmlns:a="http://schemas.openxmlformats.org/drawingml/2006/main">
+            <a:spLocks noGrp="1"/>
+          </p:cNvSpPr>
+          <p:nvPr/>
+        </p:nvSpPr>
+        <p:spPr>
+          <a:xfrm>
             <a:off x="4752975" y="4181475"/>
             <a:ext cx="6667500" cy="400050"/>
           </a:xfrm>
-          <a:prstGeom xmlns:a="http://schemas.openxmlformats.org/drawingml/2006/main" prst="rect">
-            <a:avLst/>
-          </a:prstGeom>
-          <a:noFill xmlns:a="http://schemas.openxmlformats.org/drawingml/2006/main"/>
-          <a:ln xmlns:a="http://schemas.openxmlformats.org/drawingml/2006/main" w="0">
+          <a:prstGeom prst="rect">
+            <a:avLst/>
+          </a:prstGeom>
+          <a:noFill/>
+          <a:ln w="0">
             <a:noFill/>
           </a:ln>
         </p:spPr>
         <p:txBody>
-          <a:bodyPr xmlns:a="http://schemas.openxmlformats.org/drawingml/2006/main">
+          <a:bodyPr>
             <a:noAutofit/>
           </a:bodyPr>
-          <a:lstStyle xmlns:a="http://schemas.openxmlformats.org/drawingml/2006/main"/>
-          <a:p xmlns:a="http://schemas.openxmlformats.org/drawingml/2006/main">
+          <a:lstStyle/>
+          <a:p>
             <a:pPr>
               <a:buNone/>
               <a:defRPr sz="1725" b="0">
@@ -3554,37 +3268,37 @@
       </p:sp>
       <p:sp>
         <p:nvSpPr>
-          <p:cNvPr id="8" name="">
-            <a:extLst xmlns:a="http://schemas.openxmlformats.org/drawingml/2006/main">
+          <p:cNvPr id="8" name="Rectangle 7">
+            <a:extLst>
               <a:ext uri="{FF2B5EF4-FFF2-40B4-BE49-F238E27FC236}">
                 <a16:creationId xmlns:a16="http://schemas.microsoft.com/office/drawing/2014/main" id="{EA8B30F0-31F1-46E0-AE5C-E3104BBCFA2D}"/>
               </a:ext>
             </a:extLst>
           </p:cNvPr>
           <p:cNvSpPr>
-            <a:spLocks xmlns:a="http://schemas.openxmlformats.org/drawingml/2006/main" noGrp="1"/>
-          </p:cNvSpPr>
-          <p:nvPr/>
-        </p:nvSpPr>
-        <p:spPr>
-          <a:xfrm xmlns:a="http://schemas.openxmlformats.org/drawingml/2006/main">
+            <a:spLocks noGrp="1"/>
+          </p:cNvSpPr>
+          <p:nvPr/>
+        </p:nvSpPr>
+        <p:spPr>
+          <a:xfrm>
             <a:off x="4752975" y="4810125"/>
             <a:ext cx="6667500" cy="438150"/>
           </a:xfrm>
-          <a:prstGeom xmlns:a="http://schemas.openxmlformats.org/drawingml/2006/main" prst="rect">
-            <a:avLst/>
-          </a:prstGeom>
-          <a:noFill xmlns:a="http://schemas.openxmlformats.org/drawingml/2006/main"/>
-          <a:ln xmlns:a="http://schemas.openxmlformats.org/drawingml/2006/main" w="0">
+          <a:prstGeom prst="rect">
+            <a:avLst/>
+          </a:prstGeom>
+          <a:noFill/>
+          <a:ln w="0">
             <a:noFill/>
           </a:ln>
         </p:spPr>
         <p:txBody>
-          <a:bodyPr xmlns:a="http://schemas.openxmlformats.org/drawingml/2006/main">
+          <a:bodyPr>
             <a:noAutofit/>
           </a:bodyPr>
-          <a:lstStyle xmlns:a="http://schemas.openxmlformats.org/drawingml/2006/main"/>
-          <a:p xmlns:a="http://schemas.openxmlformats.org/drawingml/2006/main">
+          <a:lstStyle/>
+          <a:p>
             <a:pPr>
               <a:buNone/>
               <a:defRPr sz="2250" b="1">
@@ -3612,37 +3326,37 @@
       </p:sp>
       <p:sp>
         <p:nvSpPr>
-          <p:cNvPr id="9" name="">
-            <a:extLst xmlns:a="http://schemas.openxmlformats.org/drawingml/2006/main">
+          <p:cNvPr id="9" name="Rectangle 8">
+            <a:extLst>
               <a:ext uri="{FF2B5EF4-FFF2-40B4-BE49-F238E27FC236}">
                 <a16:creationId xmlns:a16="http://schemas.microsoft.com/office/drawing/2014/main" id="{D4D9FFF9-F3B1-4C6B-B46F-9707F7DA2075}"/>
               </a:ext>
             </a:extLst>
           </p:cNvPr>
           <p:cNvSpPr>
-            <a:spLocks xmlns:a="http://schemas.openxmlformats.org/drawingml/2006/main" noGrp="1"/>
-          </p:cNvSpPr>
-          <p:nvPr/>
-        </p:nvSpPr>
-        <p:spPr>
-          <a:xfrm xmlns:a="http://schemas.openxmlformats.org/drawingml/2006/main">
+            <a:spLocks noGrp="1"/>
+          </p:cNvSpPr>
+          <p:nvPr/>
+        </p:nvSpPr>
+        <p:spPr>
+          <a:xfrm>
             <a:off x="4752975" y="5276850"/>
             <a:ext cx="6667500" cy="400050"/>
           </a:xfrm>
-          <a:prstGeom xmlns:a="http://schemas.openxmlformats.org/drawingml/2006/main" prst="rect">
-            <a:avLst/>
-          </a:prstGeom>
-          <a:noFill xmlns:a="http://schemas.openxmlformats.org/drawingml/2006/main"/>
-          <a:ln xmlns:a="http://schemas.openxmlformats.org/drawingml/2006/main" w="0">
+          <a:prstGeom prst="rect">
+            <a:avLst/>
+          </a:prstGeom>
+          <a:noFill/>
+          <a:ln w="0">
             <a:noFill/>
           </a:ln>
         </p:spPr>
         <p:txBody>
-          <a:bodyPr xmlns:a="http://schemas.openxmlformats.org/drawingml/2006/main">
+          <a:bodyPr>
             <a:noAutofit/>
           </a:bodyPr>
-          <a:lstStyle xmlns:a="http://schemas.openxmlformats.org/drawingml/2006/main"/>
-          <a:p xmlns:a="http://schemas.openxmlformats.org/drawingml/2006/main">
+          <a:lstStyle/>
+          <a:p>
             <a:pPr>
               <a:buNone/>
               <a:defRPr sz="1725" b="0">
@@ -3670,37 +3384,37 @@
       </p:sp>
       <p:sp>
         <p:nvSpPr>
-          <p:cNvPr id="10" name="">
-            <a:extLst xmlns:a="http://schemas.openxmlformats.org/drawingml/2006/main">
+          <p:cNvPr id="10" name="Rectangle 9">
+            <a:extLst>
               <a:ext uri="{FF2B5EF4-FFF2-40B4-BE49-F238E27FC236}">
                 <a16:creationId xmlns:a16="http://schemas.microsoft.com/office/drawing/2014/main" id="{FF9E7BB0-FA91-4AED-9E53-92FB47A31E2D}"/>
               </a:ext>
             </a:extLst>
           </p:cNvPr>
           <p:cNvSpPr>
-            <a:spLocks xmlns:a="http://schemas.openxmlformats.org/drawingml/2006/main" noGrp="1"/>
-          </p:cNvSpPr>
-          <p:nvPr/>
-        </p:nvSpPr>
-        <p:spPr>
-          <a:xfrm xmlns:a="http://schemas.openxmlformats.org/drawingml/2006/main">
+            <a:spLocks noGrp="1"/>
+          </p:cNvSpPr>
+          <p:nvPr/>
+        </p:nvSpPr>
+        <p:spPr>
+          <a:xfrm>
             <a:off x="609600" y="6000750"/>
             <a:ext cx="10763250" cy="333375"/>
           </a:xfrm>
-          <a:prstGeom xmlns:a="http://schemas.openxmlformats.org/drawingml/2006/main" prst="rect">
-            <a:avLst/>
-          </a:prstGeom>
-          <a:noFill xmlns:a="http://schemas.openxmlformats.org/drawingml/2006/main"/>
-          <a:ln xmlns:a="http://schemas.openxmlformats.org/drawingml/2006/main" w="0">
+          <a:prstGeom prst="rect">
+            <a:avLst/>
+          </a:prstGeom>
+          <a:noFill/>
+          <a:ln w="0">
             <a:noFill/>
           </a:ln>
         </p:spPr>
         <p:txBody>
-          <a:bodyPr xmlns:a="http://schemas.openxmlformats.org/drawingml/2006/main">
+          <a:bodyPr>
             <a:noAutofit/>
           </a:bodyPr>
-          <a:lstStyle xmlns:a="http://schemas.openxmlformats.org/drawingml/2006/main"/>
-          <a:p xmlns:a="http://schemas.openxmlformats.org/drawingml/2006/main">
+          <a:lstStyle/>
+          <a:p>
             <a:pPr>
               <a:buNone/>
               <a:defRPr sz="1575" b="0">
@@ -3733,17 +3447,21 @@
       </p:ext>
     </p:extLst>
   </p:cSld>
+  <p:clrMapOvr>
+    <a:masterClrMapping/>
+  </p:clrMapOvr>
 </p:sld>
 </file>
 
 <file path=ppt/slides/slide4.xml><?xml version="1.0" encoding="utf-8"?>
-<p:sld xmlns:p="http://schemas.openxmlformats.org/presentationml/2006/main">
+<p:sld xmlns:a="http://schemas.openxmlformats.org/drawingml/2006/main" xmlns:r="http://schemas.openxmlformats.org/officeDocument/2006/relationships" xmlns:p="http://schemas.openxmlformats.org/presentationml/2006/main">
   <p:cSld>
     <p:bg>
       <p:bgPr>
-        <a:solidFill xmlns:a="http://schemas.openxmlformats.org/drawingml/2006/main">
+        <a:solidFill>
           <a:srgbClr val="F5F4EF"/>
         </a:solidFill>
+        <a:effectLst/>
       </p:bgPr>
     </p:bg>
     <p:spTree>
@@ -3753,41 +3471,46 @@
         <p:nvPr/>
       </p:nvGrpSpPr>
       <p:grpSpPr>
-        <a:xfrm xmlns:a="http://schemas.openxmlformats.org/drawingml/2006/main"/>
+        <a:xfrm>
+          <a:off x="0" y="0"/>
+          <a:ext cx="0" cy="0"/>
+          <a:chOff x="0" y="0"/>
+          <a:chExt cx="0" cy="0"/>
+        </a:xfrm>
       </p:grpSpPr>
       <p:sp>
         <p:nvSpPr>
-          <p:cNvPr id="13" name="">
-            <a:extLst xmlns:a="http://schemas.openxmlformats.org/drawingml/2006/main">
+          <p:cNvPr id="13" name="Rectangle 12">
+            <a:extLst>
               <a:ext uri="{FF2B5EF4-FFF2-40B4-BE49-F238E27FC236}">
                 <a16:creationId xmlns:a16="http://schemas.microsoft.com/office/drawing/2014/main" id="{2919FD4F-95A4-4AD7-A89D-74BA38963ADC}"/>
               </a:ext>
             </a:extLst>
           </p:cNvPr>
           <p:cNvSpPr>
-            <a:spLocks xmlns:a="http://schemas.openxmlformats.org/drawingml/2006/main" noGrp="1"/>
-          </p:cNvSpPr>
-          <p:nvPr/>
-        </p:nvSpPr>
-        <p:spPr>
-          <a:xfrm xmlns:a="http://schemas.openxmlformats.org/drawingml/2006/main">
+            <a:spLocks noGrp="1"/>
+          </p:cNvSpPr>
+          <p:nvPr/>
+        </p:nvSpPr>
+        <p:spPr>
+          <a:xfrm>
             <a:off x="609600" y="409575"/>
             <a:ext cx="10953750" cy="714375"/>
           </a:xfrm>
-          <a:prstGeom xmlns:a="http://schemas.openxmlformats.org/drawingml/2006/main" prst="rect">
-            <a:avLst/>
-          </a:prstGeom>
-          <a:noFill xmlns:a="http://schemas.openxmlformats.org/drawingml/2006/main"/>
-          <a:ln xmlns:a="http://schemas.openxmlformats.org/drawingml/2006/main" w="0">
+          <a:prstGeom prst="rect">
+            <a:avLst/>
+          </a:prstGeom>
+          <a:noFill/>
+          <a:ln w="0">
             <a:noFill/>
           </a:ln>
         </p:spPr>
         <p:txBody>
-          <a:bodyPr xmlns:a="http://schemas.openxmlformats.org/drawingml/2006/main">
+          <a:bodyPr>
             <a:noAutofit/>
           </a:bodyPr>
-          <a:lstStyle xmlns:a="http://schemas.openxmlformats.org/drawingml/2006/main"/>
-          <a:p xmlns:a="http://schemas.openxmlformats.org/drawingml/2006/main">
+          <a:lstStyle/>
+          <a:p>
             <a:pPr>
               <a:buNone/>
               <a:defRPr sz="3225" b="1">
@@ -3815,37 +3538,37 @@
       </p:sp>
       <p:sp>
         <p:nvSpPr>
-          <p:cNvPr id="2" name="">
-            <a:extLst xmlns:a="http://schemas.openxmlformats.org/drawingml/2006/main">
+          <p:cNvPr id="2" name="Rectangle 1">
+            <a:extLst>
               <a:ext uri="{FF2B5EF4-FFF2-40B4-BE49-F238E27FC236}">
                 <a16:creationId xmlns:a16="http://schemas.microsoft.com/office/drawing/2014/main" id="{EC40EA9D-5225-4F64-AE0C-40AE6DDC0D63}"/>
               </a:ext>
             </a:extLst>
           </p:cNvPr>
           <p:cNvSpPr>
-            <a:spLocks xmlns:a="http://schemas.openxmlformats.org/drawingml/2006/main" noGrp="1"/>
-          </p:cNvSpPr>
-          <p:nvPr/>
-        </p:nvSpPr>
-        <p:spPr>
-          <a:xfrm xmlns:a="http://schemas.openxmlformats.org/drawingml/2006/main">
+            <a:spLocks noGrp="1"/>
+          </p:cNvSpPr>
+          <p:nvPr/>
+        </p:nvSpPr>
+        <p:spPr>
+          <a:xfrm>
             <a:off x="11144250" y="6324600"/>
             <a:ext cx="476250" cy="285750"/>
           </a:xfrm>
-          <a:prstGeom xmlns:a="http://schemas.openxmlformats.org/drawingml/2006/main" prst="rect">
-            <a:avLst/>
-          </a:prstGeom>
-          <a:noFill xmlns:a="http://schemas.openxmlformats.org/drawingml/2006/main"/>
-          <a:ln xmlns:a="http://schemas.openxmlformats.org/drawingml/2006/main" w="0">
+          <a:prstGeom prst="rect">
+            <a:avLst/>
+          </a:prstGeom>
+          <a:noFill/>
+          <a:ln w="0">
             <a:noFill/>
           </a:ln>
         </p:spPr>
         <p:txBody>
-          <a:bodyPr xmlns:a="http://schemas.openxmlformats.org/drawingml/2006/main">
+          <a:bodyPr>
             <a:noAutofit/>
           </a:bodyPr>
-          <a:lstStyle xmlns:a="http://schemas.openxmlformats.org/drawingml/2006/main"/>
-          <a:p xmlns:a="http://schemas.openxmlformats.org/drawingml/2006/main">
+          <a:lstStyle/>
+          <a:p>
             <a:pPr>
               <a:buNone/>
               <a:defRPr sz="1350" b="0">
@@ -3873,37 +3596,37 @@
       </p:sp>
       <p:sp>
         <p:nvSpPr>
-          <p:cNvPr id="3" name="">
-            <a:extLst xmlns:a="http://schemas.openxmlformats.org/drawingml/2006/main">
+          <p:cNvPr id="3" name="Rectangle 2">
+            <a:extLst>
               <a:ext uri="{FF2B5EF4-FFF2-40B4-BE49-F238E27FC236}">
                 <a16:creationId xmlns:a16="http://schemas.microsoft.com/office/drawing/2014/main" id="{61FB158A-2BF9-4B8F-8C37-9F5CF4DD267B}"/>
               </a:ext>
             </a:extLst>
           </p:cNvPr>
           <p:cNvSpPr>
-            <a:spLocks xmlns:a="http://schemas.openxmlformats.org/drawingml/2006/main" noGrp="1"/>
-          </p:cNvSpPr>
-          <p:nvPr/>
-        </p:nvSpPr>
-        <p:spPr>
-          <a:xfrm xmlns:a="http://schemas.openxmlformats.org/drawingml/2006/main">
+            <a:spLocks noGrp="1"/>
+          </p:cNvSpPr>
+          <p:nvPr/>
+        </p:nvSpPr>
+        <p:spPr>
+          <a:xfrm>
             <a:off x="609600" y="1428750"/>
             <a:ext cx="4953000" cy="428625"/>
           </a:xfrm>
-          <a:prstGeom xmlns:a="http://schemas.openxmlformats.org/drawingml/2006/main" prst="rect">
-            <a:avLst/>
-          </a:prstGeom>
-          <a:noFill xmlns:a="http://schemas.openxmlformats.org/drawingml/2006/main"/>
-          <a:ln xmlns:a="http://schemas.openxmlformats.org/drawingml/2006/main" w="0">
+          <a:prstGeom prst="rect">
+            <a:avLst/>
+          </a:prstGeom>
+          <a:noFill/>
+          <a:ln w="0">
             <a:noFill/>
           </a:ln>
         </p:spPr>
         <p:txBody>
-          <a:bodyPr xmlns:a="http://schemas.openxmlformats.org/drawingml/2006/main">
+          <a:bodyPr>
             <a:noAutofit/>
           </a:bodyPr>
-          <a:lstStyle xmlns:a="http://schemas.openxmlformats.org/drawingml/2006/main"/>
-          <a:p xmlns:a="http://schemas.openxmlformats.org/drawingml/2006/main">
+          <a:lstStyle/>
+          <a:p>
             <a:pPr>
               <a:buNone/>
               <a:defRPr sz="2175" b="1">
@@ -3931,37 +3654,37 @@
       </p:sp>
       <p:sp>
         <p:nvSpPr>
-          <p:cNvPr id="4" name="">
-            <a:extLst xmlns:a="http://schemas.openxmlformats.org/drawingml/2006/main">
+          <p:cNvPr id="4" name="Rectangle 3">
+            <a:extLst>
               <a:ext uri="{FF2B5EF4-FFF2-40B4-BE49-F238E27FC236}">
                 <a16:creationId xmlns:a16="http://schemas.microsoft.com/office/drawing/2014/main" id="{ED27CB0E-249E-4788-8C0C-14911A92CB50}"/>
               </a:ext>
             </a:extLst>
           </p:cNvPr>
           <p:cNvSpPr>
-            <a:spLocks xmlns:a="http://schemas.openxmlformats.org/drawingml/2006/main" noGrp="1"/>
-          </p:cNvSpPr>
-          <p:nvPr/>
-        </p:nvSpPr>
-        <p:spPr>
-          <a:xfrm xmlns:a="http://schemas.openxmlformats.org/drawingml/2006/main">
+            <a:spLocks noGrp="1"/>
+          </p:cNvSpPr>
+          <p:nvPr/>
+        </p:nvSpPr>
+        <p:spPr>
+          <a:xfrm>
             <a:off x="609600" y="1924050"/>
             <a:ext cx="4953000" cy="333375"/>
           </a:xfrm>
-          <a:prstGeom xmlns:a="http://schemas.openxmlformats.org/drawingml/2006/main" prst="rect">
-            <a:avLst/>
-          </a:prstGeom>
-          <a:noFill xmlns:a="http://schemas.openxmlformats.org/drawingml/2006/main"/>
-          <a:ln xmlns:a="http://schemas.openxmlformats.org/drawingml/2006/main" w="0">
+          <a:prstGeom prst="rect">
+            <a:avLst/>
+          </a:prstGeom>
+          <a:noFill/>
+          <a:ln w="0">
             <a:noFill/>
           </a:ln>
         </p:spPr>
         <p:txBody>
-          <a:bodyPr xmlns:a="http://schemas.openxmlformats.org/drawingml/2006/main">
+          <a:bodyPr>
             <a:noAutofit/>
           </a:bodyPr>
-          <a:lstStyle xmlns:a="http://schemas.openxmlformats.org/drawingml/2006/main"/>
-          <a:p xmlns:a="http://schemas.openxmlformats.org/drawingml/2006/main">
+          <a:lstStyle/>
+          <a:p>
             <a:pPr>
               <a:buNone/>
               <a:defRPr sz="1725" b="0">
@@ -3989,37 +3712,37 @@
       </p:sp>
       <p:sp>
         <p:nvSpPr>
-          <p:cNvPr id="5" name="">
-            <a:extLst xmlns:a="http://schemas.openxmlformats.org/drawingml/2006/main">
+          <p:cNvPr id="5" name="Rectangle 4">
+            <a:extLst>
               <a:ext uri="{FF2B5EF4-FFF2-40B4-BE49-F238E27FC236}">
                 <a16:creationId xmlns:a16="http://schemas.microsoft.com/office/drawing/2014/main" id="{45C1711F-AF88-48F5-A53C-43345F02B493}"/>
               </a:ext>
             </a:extLst>
           </p:cNvPr>
           <p:cNvSpPr>
-            <a:spLocks xmlns:a="http://schemas.openxmlformats.org/drawingml/2006/main" noGrp="1"/>
-          </p:cNvSpPr>
-          <p:nvPr/>
-        </p:nvSpPr>
-        <p:spPr>
-          <a:xfrm xmlns:a="http://schemas.openxmlformats.org/drawingml/2006/main">
+            <a:spLocks noGrp="1"/>
+          </p:cNvSpPr>
+          <p:nvPr/>
+        </p:nvSpPr>
+        <p:spPr>
+          <a:xfrm>
             <a:off x="609600" y="2619375"/>
             <a:ext cx="2381250" cy="714375"/>
           </a:xfrm>
-          <a:prstGeom xmlns:a="http://schemas.openxmlformats.org/drawingml/2006/main" prst="rect">
-            <a:avLst/>
-          </a:prstGeom>
-          <a:noFill xmlns:a="http://schemas.openxmlformats.org/drawingml/2006/main"/>
-          <a:ln xmlns:a="http://schemas.openxmlformats.org/drawingml/2006/main" w="0">
+          <a:prstGeom prst="rect">
+            <a:avLst/>
+          </a:prstGeom>
+          <a:noFill/>
+          <a:ln w="0">
             <a:noFill/>
           </a:ln>
         </p:spPr>
         <p:txBody>
-          <a:bodyPr xmlns:a="http://schemas.openxmlformats.org/drawingml/2006/main">
+          <a:bodyPr>
             <a:noAutofit/>
           </a:bodyPr>
-          <a:lstStyle xmlns:a="http://schemas.openxmlformats.org/drawingml/2006/main"/>
-          <a:p xmlns:a="http://schemas.openxmlformats.org/drawingml/2006/main">
+          <a:lstStyle/>
+          <a:p>
             <a:pPr>
               <a:buNone/>
               <a:defRPr sz="4275" b="1">
@@ -4047,37 +3770,37 @@
       </p:sp>
       <p:sp>
         <p:nvSpPr>
-          <p:cNvPr id="6" name="">
-            <a:extLst xmlns:a="http://schemas.openxmlformats.org/drawingml/2006/main">
+          <p:cNvPr id="6" name="Rectangle 5">
+            <a:extLst>
               <a:ext uri="{FF2B5EF4-FFF2-40B4-BE49-F238E27FC236}">
                 <a16:creationId xmlns:a16="http://schemas.microsoft.com/office/drawing/2014/main" id="{E8E3E4AB-9A30-41F9-9AF3-BAE400140A35}"/>
               </a:ext>
             </a:extLst>
           </p:cNvPr>
           <p:cNvSpPr>
-            <a:spLocks xmlns:a="http://schemas.openxmlformats.org/drawingml/2006/main" noGrp="1"/>
-          </p:cNvSpPr>
-          <p:nvPr/>
-        </p:nvSpPr>
-        <p:spPr>
-          <a:xfrm xmlns:a="http://schemas.openxmlformats.org/drawingml/2006/main">
+            <a:spLocks noGrp="1"/>
+          </p:cNvSpPr>
+          <p:nvPr/>
+        </p:nvSpPr>
+        <p:spPr>
+          <a:xfrm>
             <a:off x="609600" y="3343275"/>
             <a:ext cx="4857750" cy="409575"/>
           </a:xfrm>
-          <a:prstGeom xmlns:a="http://schemas.openxmlformats.org/drawingml/2006/main" prst="rect">
-            <a:avLst/>
-          </a:prstGeom>
-          <a:noFill xmlns:a="http://schemas.openxmlformats.org/drawingml/2006/main"/>
-          <a:ln xmlns:a="http://schemas.openxmlformats.org/drawingml/2006/main" w="0">
+          <a:prstGeom prst="rect">
+            <a:avLst/>
+          </a:prstGeom>
+          <a:noFill/>
+          <a:ln w="0">
             <a:noFill/>
           </a:ln>
         </p:spPr>
         <p:txBody>
-          <a:bodyPr xmlns:a="http://schemas.openxmlformats.org/drawingml/2006/main">
+          <a:bodyPr>
             <a:noAutofit/>
           </a:bodyPr>
-          <a:lstStyle xmlns:a="http://schemas.openxmlformats.org/drawingml/2006/main"/>
-          <a:p xmlns:a="http://schemas.openxmlformats.org/drawingml/2006/main">
+          <a:lstStyle/>
+          <a:p>
             <a:pPr>
               <a:buNone/>
               <a:defRPr sz="1950" b="0">
@@ -4105,37 +3828,37 @@
       </p:sp>
       <p:sp>
         <p:nvSpPr>
-          <p:cNvPr id="7" name="">
-            <a:extLst xmlns:a="http://schemas.openxmlformats.org/drawingml/2006/main">
+          <p:cNvPr id="7" name="Rectangle 6">
+            <a:extLst>
               <a:ext uri="{FF2B5EF4-FFF2-40B4-BE49-F238E27FC236}">
                 <a16:creationId xmlns:a16="http://schemas.microsoft.com/office/drawing/2014/main" id="{CC76E1AC-89FF-497E-B3D5-6B266C2C3536}"/>
               </a:ext>
             </a:extLst>
           </p:cNvPr>
           <p:cNvSpPr>
-            <a:spLocks xmlns:a="http://schemas.openxmlformats.org/drawingml/2006/main" noGrp="1"/>
-          </p:cNvSpPr>
-          <p:nvPr/>
-        </p:nvSpPr>
-        <p:spPr>
-          <a:xfrm xmlns:a="http://schemas.openxmlformats.org/drawingml/2006/main">
+            <a:spLocks noGrp="1"/>
+          </p:cNvSpPr>
+          <p:nvPr/>
+        </p:nvSpPr>
+        <p:spPr>
+          <a:xfrm>
             <a:off x="609600" y="4095750"/>
             <a:ext cx="2381250" cy="695325"/>
           </a:xfrm>
-          <a:prstGeom xmlns:a="http://schemas.openxmlformats.org/drawingml/2006/main" prst="rect">
-            <a:avLst/>
-          </a:prstGeom>
-          <a:noFill xmlns:a="http://schemas.openxmlformats.org/drawingml/2006/main"/>
-          <a:ln xmlns:a="http://schemas.openxmlformats.org/drawingml/2006/main" w="0">
+          <a:prstGeom prst="rect">
+            <a:avLst/>
+          </a:prstGeom>
+          <a:noFill/>
+          <a:ln w="0">
             <a:noFill/>
           </a:ln>
         </p:spPr>
         <p:txBody>
-          <a:bodyPr xmlns:a="http://schemas.openxmlformats.org/drawingml/2006/main">
+          <a:bodyPr>
             <a:noAutofit/>
           </a:bodyPr>
-          <a:lstStyle xmlns:a="http://schemas.openxmlformats.org/drawingml/2006/main"/>
-          <a:p xmlns:a="http://schemas.openxmlformats.org/drawingml/2006/main">
+          <a:lstStyle/>
+          <a:p>
             <a:pPr>
               <a:buNone/>
               <a:defRPr sz="3975" b="1">
@@ -4163,37 +3886,37 @@
       </p:sp>
       <p:sp>
         <p:nvSpPr>
-          <p:cNvPr id="8" name="">
-            <a:extLst xmlns:a="http://schemas.openxmlformats.org/drawingml/2006/main">
+          <p:cNvPr id="8" name="Rectangle 7">
+            <a:extLst>
               <a:ext uri="{FF2B5EF4-FFF2-40B4-BE49-F238E27FC236}">
                 <a16:creationId xmlns:a16="http://schemas.microsoft.com/office/drawing/2014/main" id="{42DE4D00-D6F0-42B5-A59A-291785F1DBE2}"/>
               </a:ext>
             </a:extLst>
           </p:cNvPr>
           <p:cNvSpPr>
-            <a:spLocks xmlns:a="http://schemas.openxmlformats.org/drawingml/2006/main" noGrp="1"/>
-          </p:cNvSpPr>
-          <p:nvPr/>
-        </p:nvSpPr>
-        <p:spPr>
-          <a:xfrm xmlns:a="http://schemas.openxmlformats.org/drawingml/2006/main">
+            <a:spLocks noGrp="1"/>
+          </p:cNvSpPr>
+          <p:nvPr/>
+        </p:nvSpPr>
+        <p:spPr>
+          <a:xfrm>
             <a:off x="609600" y="4838700"/>
             <a:ext cx="4857750" cy="733425"/>
           </a:xfrm>
-          <a:prstGeom xmlns:a="http://schemas.openxmlformats.org/drawingml/2006/main" prst="rect">
-            <a:avLst/>
-          </a:prstGeom>
-          <a:noFill xmlns:a="http://schemas.openxmlformats.org/drawingml/2006/main"/>
-          <a:ln xmlns:a="http://schemas.openxmlformats.org/drawingml/2006/main" w="0">
+          <a:prstGeom prst="rect">
+            <a:avLst/>
+          </a:prstGeom>
+          <a:noFill/>
+          <a:ln w="0">
             <a:noFill/>
           </a:ln>
         </p:spPr>
         <p:txBody>
-          <a:bodyPr xmlns:a="http://schemas.openxmlformats.org/drawingml/2006/main">
+          <a:bodyPr>
             <a:noAutofit/>
           </a:bodyPr>
-          <a:lstStyle xmlns:a="http://schemas.openxmlformats.org/drawingml/2006/main"/>
-          <a:p xmlns:a="http://schemas.openxmlformats.org/drawingml/2006/main">
+          <a:lstStyle/>
+          <a:p>
             <a:pPr>
               <a:buNone/>
               <a:defRPr sz="1950" b="0">
@@ -4217,7 +3940,7 @@
               <a:t>Case kind accuracy</a:t>
             </a:r>
           </a:p>
-          <a:p xmlns:a="http://schemas.openxmlformats.org/drawingml/2006/main">
+          <a:p>
             <a:pPr>
               <a:buNone/>
               <a:defRPr sz="1950" b="0">
@@ -4245,37 +3968,37 @@
       </p:sp>
       <p:sp>
         <p:nvSpPr>
-          <p:cNvPr id="9" name="">
-            <a:extLst xmlns:a="http://schemas.openxmlformats.org/drawingml/2006/main">
+          <p:cNvPr id="9" name="Rectangle 8">
+            <a:extLst>
               <a:ext uri="{FF2B5EF4-FFF2-40B4-BE49-F238E27FC236}">
                 <a16:creationId xmlns:a16="http://schemas.microsoft.com/office/drawing/2014/main" id="{C0F99FCF-EDE9-4F21-A1CA-30393B17D845}"/>
               </a:ext>
             </a:extLst>
           </p:cNvPr>
           <p:cNvSpPr>
-            <a:spLocks xmlns:a="http://schemas.openxmlformats.org/drawingml/2006/main" noGrp="1"/>
-          </p:cNvSpPr>
-          <p:nvPr/>
-        </p:nvSpPr>
-        <p:spPr>
-          <a:xfrm xmlns:a="http://schemas.openxmlformats.org/drawingml/2006/main">
+            <a:spLocks noGrp="1"/>
+          </p:cNvSpPr>
+          <p:nvPr/>
+        </p:nvSpPr>
+        <p:spPr>
+          <a:xfrm>
             <a:off x="5838825" y="1428750"/>
             <a:ext cx="5810250" cy="428625"/>
           </a:xfrm>
-          <a:prstGeom xmlns:a="http://schemas.openxmlformats.org/drawingml/2006/main" prst="rect">
-            <a:avLst/>
-          </a:prstGeom>
-          <a:noFill xmlns:a="http://schemas.openxmlformats.org/drawingml/2006/main"/>
-          <a:ln xmlns:a="http://schemas.openxmlformats.org/drawingml/2006/main" w="0">
+          <a:prstGeom prst="rect">
+            <a:avLst/>
+          </a:prstGeom>
+          <a:noFill/>
+          <a:ln w="0">
             <a:noFill/>
           </a:ln>
         </p:spPr>
         <p:txBody>
-          <a:bodyPr xmlns:a="http://schemas.openxmlformats.org/drawingml/2006/main">
+          <a:bodyPr>
             <a:noAutofit/>
           </a:bodyPr>
-          <a:lstStyle xmlns:a="http://schemas.openxmlformats.org/drawingml/2006/main"/>
-          <a:p xmlns:a="http://schemas.openxmlformats.org/drawingml/2006/main">
+          <a:lstStyle/>
+          <a:p>
             <a:pPr>
               <a:buNone/>
               <a:defRPr sz="2100" b="1">
@@ -4303,37 +4026,37 @@
       </p:sp>
       <p:sp>
         <p:nvSpPr>
-          <p:cNvPr id="10" name="">
-            <a:extLst xmlns:a="http://schemas.openxmlformats.org/drawingml/2006/main">
+          <p:cNvPr id="10" name="Rectangle 9">
+            <a:extLst>
               <a:ext uri="{FF2B5EF4-FFF2-40B4-BE49-F238E27FC236}">
                 <a16:creationId xmlns:a16="http://schemas.microsoft.com/office/drawing/2014/main" id="{A3104A55-52D7-4274-8694-F124332AF5F2}"/>
               </a:ext>
             </a:extLst>
           </p:cNvPr>
           <p:cNvSpPr>
-            <a:spLocks xmlns:a="http://schemas.openxmlformats.org/drawingml/2006/main" noGrp="1"/>
-          </p:cNvSpPr>
-          <p:nvPr/>
-        </p:nvSpPr>
-        <p:spPr>
-          <a:xfrm xmlns:a="http://schemas.openxmlformats.org/drawingml/2006/main">
+            <a:spLocks noGrp="1"/>
+          </p:cNvSpPr>
+          <p:nvPr/>
+        </p:nvSpPr>
+        <p:spPr>
+          <a:xfrm>
             <a:off x="5838825" y="1924050"/>
             <a:ext cx="5810250" cy="333375"/>
           </a:xfrm>
-          <a:prstGeom xmlns:a="http://schemas.openxmlformats.org/drawingml/2006/main" prst="rect">
-            <a:avLst/>
-          </a:prstGeom>
-          <a:noFill xmlns:a="http://schemas.openxmlformats.org/drawingml/2006/main"/>
-          <a:ln xmlns:a="http://schemas.openxmlformats.org/drawingml/2006/main" w="0">
+          <a:prstGeom prst="rect">
+            <a:avLst/>
+          </a:prstGeom>
+          <a:noFill/>
+          <a:ln w="0">
             <a:noFill/>
           </a:ln>
         </p:spPr>
         <p:txBody>
-          <a:bodyPr xmlns:a="http://schemas.openxmlformats.org/drawingml/2006/main">
+          <a:bodyPr>
             <a:noAutofit/>
           </a:bodyPr>
-          <a:lstStyle xmlns:a="http://schemas.openxmlformats.org/drawingml/2006/main"/>
-          <a:p xmlns:a="http://schemas.openxmlformats.org/drawingml/2006/main">
+          <a:lstStyle/>
+          <a:p>
             <a:pPr>
               <a:buNone/>
               <a:defRPr sz="1725" b="0">
@@ -4361,21 +4084,33 @@
       </p:sp>
       <p:graphicFrame>
         <p:nvGraphicFramePr>
-          <p:cNvPr id="25" name=""/>
+          <p:cNvPr id="25" name="Tableau 24"/>
           <p:cNvGraphicFramePr/>
           <p:nvPr/>
         </p:nvGraphicFramePr>
         <p:xfrm>
-          <a:off xmlns:a="http://schemas.openxmlformats.org/drawingml/2006/main" x="5829300" y="2466975"/>
-          <a:ext xmlns:a="http://schemas.openxmlformats.org/drawingml/2006/main" cx="5715000" cy="3000375"/>
+          <a:off x="5829300" y="2466975"/>
+          <a:ext cx="5715000" cy="3000378"/>
         </p:xfrm>
-        <a:graphic xmlns:a="http://schemas.openxmlformats.org/drawingml/2006/main">
+        <a:graphic>
           <a:graphicData uri="http://schemas.openxmlformats.org/drawingml/2006/table">
             <a:tbl>
               <a:tblPr/>
               <a:tblGrid>
-                <a:gridCol w="3952875"/>
-                <a:gridCol w="1762125"/>
+                <a:gridCol w="3952875">
+                  <a:extLst>
+                    <a:ext uri="{9D8B030D-6E8A-4147-A177-3AD203B41FA5}">
+                      <a16:colId xmlns:a16="http://schemas.microsoft.com/office/drawing/2014/main" val="20000"/>
+                    </a:ext>
+                  </a:extLst>
+                </a:gridCol>
+                <a:gridCol w="1762125">
+                  <a:extLst>
+                    <a:ext uri="{9D8B030D-6E8A-4147-A177-3AD203B41FA5}">
+                      <a16:colId xmlns:a16="http://schemas.microsoft.com/office/drawing/2014/main" val="20001"/>
+                    </a:ext>
+                  </a:extLst>
+                </a:gridCol>
               </a:tblGrid>
               <a:tr h="500063">
                 <a:tc>
@@ -4396,7 +4131,7 @@
                       </a:r>
                     </a:p>
                   </a:txBody>
-                  <a:tcPr marL="91440" marR="91440" marT="45720" marB="45720">
+                  <a:tcPr>
                     <a:solidFill>
                       <a:srgbClr val="102C36"/>
                     </a:solidFill>
@@ -4420,12 +4155,17 @@
                       </a:r>
                     </a:p>
                   </a:txBody>
-                  <a:tcPr marL="91440" marR="91440" marT="45720" marB="45720">
+                  <a:tcPr>
                     <a:solidFill>
                       <a:srgbClr val="102C36"/>
                     </a:solidFill>
                   </a:tcPr>
                 </a:tc>
+                <a:extLst>
+                  <a:ext uri="{0D108BD9-81ED-4DB2-BD59-A6C34878D82A}">
+                    <a16:rowId xmlns:a16="http://schemas.microsoft.com/office/drawing/2014/main" val="10000"/>
+                  </a:ext>
+                </a:extLst>
               </a:tr>
               <a:tr h="500063">
                 <a:tc>
@@ -4446,7 +4186,7 @@
                       </a:r>
                     </a:p>
                   </a:txBody>
-                  <a:tcPr marL="91440" marR="91440" marT="45720" marB="45720">
+                  <a:tcPr>
                     <a:solidFill>
                       <a:srgbClr val="DFEDE7"/>
                     </a:solidFill>
@@ -4470,12 +4210,17 @@
                       </a:r>
                     </a:p>
                   </a:txBody>
-                  <a:tcPr marL="91440" marR="91440" marT="45720" marB="45720">
+                  <a:tcPr>
                     <a:solidFill>
                       <a:srgbClr val="DFEDE7"/>
                     </a:solidFill>
                   </a:tcPr>
                 </a:tc>
+                <a:extLst>
+                  <a:ext uri="{0D108BD9-81ED-4DB2-BD59-A6C34878D82A}">
+                    <a16:rowId xmlns:a16="http://schemas.microsoft.com/office/drawing/2014/main" val="10001"/>
+                  </a:ext>
+                </a:extLst>
               </a:tr>
               <a:tr h="500063">
                 <a:tc>
@@ -4496,7 +4241,7 @@
                       </a:r>
                     </a:p>
                   </a:txBody>
-                  <a:tcPr marL="91440" marR="91440" marT="45720" marB="45720">
+                  <a:tcPr>
                     <a:solidFill>
                       <a:srgbClr val="F5F4EF"/>
                     </a:solidFill>
@@ -4520,12 +4265,17 @@
                       </a:r>
                     </a:p>
                   </a:txBody>
-                  <a:tcPr marL="91440" marR="91440" marT="45720" marB="45720">
+                  <a:tcPr>
                     <a:solidFill>
                       <a:srgbClr val="F5F4EF"/>
                     </a:solidFill>
                   </a:tcPr>
                 </a:tc>
+                <a:extLst>
+                  <a:ext uri="{0D108BD9-81ED-4DB2-BD59-A6C34878D82A}">
+                    <a16:rowId xmlns:a16="http://schemas.microsoft.com/office/drawing/2014/main" val="10002"/>
+                  </a:ext>
+                </a:extLst>
               </a:tr>
               <a:tr h="500063">
                 <a:tc>
@@ -4546,7 +4296,7 @@
                       </a:r>
                     </a:p>
                   </a:txBody>
-                  <a:tcPr marL="91440" marR="91440" marT="45720" marB="45720">
+                  <a:tcPr>
                     <a:solidFill>
                       <a:srgbClr val="F5F4EF"/>
                     </a:solidFill>
@@ -4570,12 +4320,17 @@
                       </a:r>
                     </a:p>
                   </a:txBody>
-                  <a:tcPr marL="91440" marR="91440" marT="45720" marB="45720">
+                  <a:tcPr>
                     <a:solidFill>
                       <a:srgbClr val="F5F4EF"/>
                     </a:solidFill>
                   </a:tcPr>
                 </a:tc>
+                <a:extLst>
+                  <a:ext uri="{0D108BD9-81ED-4DB2-BD59-A6C34878D82A}">
+                    <a16:rowId xmlns:a16="http://schemas.microsoft.com/office/drawing/2014/main" val="10003"/>
+                  </a:ext>
+                </a:extLst>
               </a:tr>
               <a:tr h="500063">
                 <a:tc>
@@ -4596,7 +4351,7 @@
                       </a:r>
                     </a:p>
                   </a:txBody>
-                  <a:tcPr marL="91440" marR="91440" marT="45720" marB="45720">
+                  <a:tcPr>
                     <a:solidFill>
                       <a:srgbClr val="F5F4EF"/>
                     </a:solidFill>
@@ -4620,12 +4375,17 @@
                       </a:r>
                     </a:p>
                   </a:txBody>
-                  <a:tcPr marL="91440" marR="91440" marT="45720" marB="45720">
+                  <a:tcPr>
                     <a:solidFill>
                       <a:srgbClr val="F5F4EF"/>
                     </a:solidFill>
                   </a:tcPr>
                 </a:tc>
+                <a:extLst>
+                  <a:ext uri="{0D108BD9-81ED-4DB2-BD59-A6C34878D82A}">
+                    <a16:rowId xmlns:a16="http://schemas.microsoft.com/office/drawing/2014/main" val="10004"/>
+                  </a:ext>
+                </a:extLst>
               </a:tr>
               <a:tr h="500063">
                 <a:tc>
@@ -4646,7 +4406,7 @@
                       </a:r>
                     </a:p>
                   </a:txBody>
-                  <a:tcPr marL="91440" marR="91440" marT="45720" marB="45720">
+                  <a:tcPr>
                     <a:solidFill>
                       <a:srgbClr val="F5F4EF"/>
                     </a:solidFill>
@@ -4670,12 +4430,17 @@
                       </a:r>
                     </a:p>
                   </a:txBody>
-                  <a:tcPr marL="91440" marR="91440" marT="45720" marB="45720">
+                  <a:tcPr>
                     <a:solidFill>
                       <a:srgbClr val="F5F4EF"/>
                     </a:solidFill>
                   </a:tcPr>
                 </a:tc>
+                <a:extLst>
+                  <a:ext uri="{0D108BD9-81ED-4DB2-BD59-A6C34878D82A}">
+                    <a16:rowId xmlns:a16="http://schemas.microsoft.com/office/drawing/2014/main" val="10005"/>
+                  </a:ext>
+                </a:extLst>
               </a:tr>
             </a:tbl>
           </a:graphicData>
@@ -4683,37 +4448,37 @@
       </p:graphicFrame>
       <p:sp>
         <p:nvSpPr>
-          <p:cNvPr id="12" name="">
-            <a:extLst xmlns:a="http://schemas.openxmlformats.org/drawingml/2006/main">
+          <p:cNvPr id="12" name="Rectangle 11">
+            <a:extLst>
               <a:ext uri="{FF2B5EF4-FFF2-40B4-BE49-F238E27FC236}">
                 <a16:creationId xmlns:a16="http://schemas.microsoft.com/office/drawing/2014/main" id="{53E3152F-9ACB-4845-AA41-2553BF79334F}"/>
               </a:ext>
             </a:extLst>
           </p:cNvPr>
           <p:cNvSpPr>
-            <a:spLocks xmlns:a="http://schemas.openxmlformats.org/drawingml/2006/main" noGrp="1"/>
-          </p:cNvSpPr>
-          <p:nvPr/>
-        </p:nvSpPr>
-        <p:spPr>
-          <a:xfrm xmlns:a="http://schemas.openxmlformats.org/drawingml/2006/main">
+            <a:spLocks noGrp="1"/>
+          </p:cNvSpPr>
+          <p:nvPr/>
+        </p:nvSpPr>
+        <p:spPr>
+          <a:xfrm>
             <a:off x="609600" y="5934075"/>
             <a:ext cx="10858500" cy="495300"/>
           </a:xfrm>
-          <a:prstGeom xmlns:a="http://schemas.openxmlformats.org/drawingml/2006/main" prst="rect">
-            <a:avLst/>
-          </a:prstGeom>
-          <a:noFill xmlns:a="http://schemas.openxmlformats.org/drawingml/2006/main"/>
-          <a:ln xmlns:a="http://schemas.openxmlformats.org/drawingml/2006/main" w="0">
+          <a:prstGeom prst="rect">
+            <a:avLst/>
+          </a:prstGeom>
+          <a:noFill/>
+          <a:ln w="0">
             <a:noFill/>
           </a:ln>
         </p:spPr>
         <p:txBody>
-          <a:bodyPr xmlns:a="http://schemas.openxmlformats.org/drawingml/2006/main">
+          <a:bodyPr>
             <a:noAutofit/>
           </a:bodyPr>
-          <a:lstStyle xmlns:a="http://schemas.openxmlformats.org/drawingml/2006/main"/>
-          <a:p xmlns:a="http://schemas.openxmlformats.org/drawingml/2006/main">
+          <a:lstStyle/>
+          <a:p>
             <a:pPr>
               <a:buNone/>
               <a:defRPr sz="1500" b="0">
@@ -4746,17 +4511,21 @@
       </p:ext>
     </p:extLst>
   </p:cSld>
+  <p:clrMapOvr>
+    <a:masterClrMapping/>
+  </p:clrMapOvr>
 </p:sld>
 </file>
 
 <file path=ppt/slides/slide5.xml><?xml version="1.0" encoding="utf-8"?>
-<p:sld xmlns:p="http://schemas.openxmlformats.org/presentationml/2006/main">
+<p:sld xmlns:a="http://schemas.openxmlformats.org/drawingml/2006/main" xmlns:r="http://schemas.openxmlformats.org/officeDocument/2006/relationships" xmlns:p="http://schemas.openxmlformats.org/presentationml/2006/main">
   <p:cSld>
     <p:bg>
       <p:bgPr>
-        <a:solidFill xmlns:a="http://schemas.openxmlformats.org/drawingml/2006/main">
+        <a:solidFill>
           <a:srgbClr val="F5F4EF"/>
         </a:solidFill>
+        <a:effectLst/>
       </p:bgPr>
     </p:bg>
     <p:spTree>
@@ -4766,41 +4535,46 @@
         <p:nvPr/>
       </p:nvGrpSpPr>
       <p:grpSpPr>
-        <a:xfrm xmlns:a="http://schemas.openxmlformats.org/drawingml/2006/main"/>
+        <a:xfrm>
+          <a:off x="0" y="0"/>
+          <a:ext cx="0" cy="0"/>
+          <a:chOff x="0" y="0"/>
+          <a:chExt cx="0" cy="0"/>
+        </a:xfrm>
       </p:grpSpPr>
       <p:sp>
         <p:nvSpPr>
-          <p:cNvPr id="13" name="">
-            <a:extLst xmlns:a="http://schemas.openxmlformats.org/drawingml/2006/main">
+          <p:cNvPr id="13" name="Rectangle 12">
+            <a:extLst>
               <a:ext uri="{FF2B5EF4-FFF2-40B4-BE49-F238E27FC236}">
                 <a16:creationId xmlns:a16="http://schemas.microsoft.com/office/drawing/2014/main" id="{2919FD4F-95A4-4AD7-A89D-74BA38963ADC}"/>
               </a:ext>
             </a:extLst>
           </p:cNvPr>
           <p:cNvSpPr>
-            <a:spLocks xmlns:a="http://schemas.openxmlformats.org/drawingml/2006/main" noGrp="1"/>
-          </p:cNvSpPr>
-          <p:nvPr/>
-        </p:nvSpPr>
-        <p:spPr>
-          <a:xfrm xmlns:a="http://schemas.openxmlformats.org/drawingml/2006/main">
+            <a:spLocks noGrp="1"/>
+          </p:cNvSpPr>
+          <p:nvPr/>
+        </p:nvSpPr>
+        <p:spPr>
+          <a:xfrm>
             <a:off x="609600" y="409575"/>
             <a:ext cx="10953750" cy="714375"/>
           </a:xfrm>
-          <a:prstGeom xmlns:a="http://schemas.openxmlformats.org/drawingml/2006/main" prst="rect">
-            <a:avLst/>
-          </a:prstGeom>
-          <a:noFill xmlns:a="http://schemas.openxmlformats.org/drawingml/2006/main"/>
-          <a:ln xmlns:a="http://schemas.openxmlformats.org/drawingml/2006/main" w="0">
+          <a:prstGeom prst="rect">
+            <a:avLst/>
+          </a:prstGeom>
+          <a:noFill/>
+          <a:ln w="0">
             <a:noFill/>
           </a:ln>
         </p:spPr>
         <p:txBody>
-          <a:bodyPr xmlns:a="http://schemas.openxmlformats.org/drawingml/2006/main">
+          <a:bodyPr>
             <a:noAutofit/>
           </a:bodyPr>
-          <a:lstStyle xmlns:a="http://schemas.openxmlformats.org/drawingml/2006/main"/>
-          <a:p xmlns:a="http://schemas.openxmlformats.org/drawingml/2006/main">
+          <a:lstStyle/>
+          <a:p>
             <a:pPr>
               <a:buNone/>
               <a:defRPr sz="3225" b="1">
@@ -4828,37 +4602,37 @@
       </p:sp>
       <p:sp>
         <p:nvSpPr>
-          <p:cNvPr id="2" name="">
-            <a:extLst xmlns:a="http://schemas.openxmlformats.org/drawingml/2006/main">
+          <p:cNvPr id="2" name="Rectangle 1">
+            <a:extLst>
               <a:ext uri="{FF2B5EF4-FFF2-40B4-BE49-F238E27FC236}">
                 <a16:creationId xmlns:a16="http://schemas.microsoft.com/office/drawing/2014/main" id="{EC40EA9D-5225-4F64-AE0C-40AE6DDC0D63}"/>
               </a:ext>
             </a:extLst>
           </p:cNvPr>
           <p:cNvSpPr>
-            <a:spLocks xmlns:a="http://schemas.openxmlformats.org/drawingml/2006/main" noGrp="1"/>
-          </p:cNvSpPr>
-          <p:nvPr/>
-        </p:nvSpPr>
-        <p:spPr>
-          <a:xfrm xmlns:a="http://schemas.openxmlformats.org/drawingml/2006/main">
+            <a:spLocks noGrp="1"/>
+          </p:cNvSpPr>
+          <p:nvPr/>
+        </p:nvSpPr>
+        <p:spPr>
+          <a:xfrm>
             <a:off x="11144250" y="6324600"/>
             <a:ext cx="476250" cy="285750"/>
           </a:xfrm>
-          <a:prstGeom xmlns:a="http://schemas.openxmlformats.org/drawingml/2006/main" prst="rect">
-            <a:avLst/>
-          </a:prstGeom>
-          <a:noFill xmlns:a="http://schemas.openxmlformats.org/drawingml/2006/main"/>
-          <a:ln xmlns:a="http://schemas.openxmlformats.org/drawingml/2006/main" w="0">
+          <a:prstGeom prst="rect">
+            <a:avLst/>
+          </a:prstGeom>
+          <a:noFill/>
+          <a:ln w="0">
             <a:noFill/>
           </a:ln>
         </p:spPr>
         <p:txBody>
-          <a:bodyPr xmlns:a="http://schemas.openxmlformats.org/drawingml/2006/main">
+          <a:bodyPr>
             <a:noAutofit/>
           </a:bodyPr>
-          <a:lstStyle xmlns:a="http://schemas.openxmlformats.org/drawingml/2006/main"/>
-          <a:p xmlns:a="http://schemas.openxmlformats.org/drawingml/2006/main">
+          <a:lstStyle/>
+          <a:p>
             <a:pPr>
               <a:buNone/>
               <a:defRPr sz="1350" b="0">
@@ -4886,37 +4660,37 @@
       </p:sp>
       <p:sp>
         <p:nvSpPr>
-          <p:cNvPr id="3" name="">
-            <a:extLst xmlns:a="http://schemas.openxmlformats.org/drawingml/2006/main">
+          <p:cNvPr id="3" name="Rectangle 2">
+            <a:extLst>
               <a:ext uri="{FF2B5EF4-FFF2-40B4-BE49-F238E27FC236}">
                 <a16:creationId xmlns:a16="http://schemas.microsoft.com/office/drawing/2014/main" id="{61FB158A-2BF9-4B8F-8C37-9F5CF4DD267B}"/>
               </a:ext>
             </a:extLst>
           </p:cNvPr>
           <p:cNvSpPr>
-            <a:spLocks xmlns:a="http://schemas.openxmlformats.org/drawingml/2006/main" noGrp="1"/>
-          </p:cNvSpPr>
-          <p:nvPr/>
-        </p:nvSpPr>
-        <p:spPr>
-          <a:xfrm xmlns:a="http://schemas.openxmlformats.org/drawingml/2006/main">
+            <a:spLocks noGrp="1"/>
+          </p:cNvSpPr>
+          <p:nvPr/>
+        </p:nvSpPr>
+        <p:spPr>
+          <a:xfrm>
             <a:off x="609600" y="1428750"/>
             <a:ext cx="4953000" cy="428625"/>
           </a:xfrm>
-          <a:prstGeom xmlns:a="http://schemas.openxmlformats.org/drawingml/2006/main" prst="rect">
-            <a:avLst/>
-          </a:prstGeom>
-          <a:noFill xmlns:a="http://schemas.openxmlformats.org/drawingml/2006/main"/>
-          <a:ln xmlns:a="http://schemas.openxmlformats.org/drawingml/2006/main" w="0">
+          <a:prstGeom prst="rect">
+            <a:avLst/>
+          </a:prstGeom>
+          <a:noFill/>
+          <a:ln w="0">
             <a:noFill/>
           </a:ln>
         </p:spPr>
         <p:txBody>
-          <a:bodyPr xmlns:a="http://schemas.openxmlformats.org/drawingml/2006/main">
+          <a:bodyPr>
             <a:noAutofit/>
           </a:bodyPr>
-          <a:lstStyle xmlns:a="http://schemas.openxmlformats.org/drawingml/2006/main"/>
-          <a:p xmlns:a="http://schemas.openxmlformats.org/drawingml/2006/main">
+          <a:lstStyle/>
+          <a:p>
             <a:pPr>
               <a:buNone/>
               <a:defRPr sz="2175" b="1">
@@ -4944,37 +4718,37 @@
       </p:sp>
       <p:sp>
         <p:nvSpPr>
-          <p:cNvPr id="4" name="">
-            <a:extLst xmlns:a="http://schemas.openxmlformats.org/drawingml/2006/main">
+          <p:cNvPr id="4" name="Rectangle 3">
+            <a:extLst>
               <a:ext uri="{FF2B5EF4-FFF2-40B4-BE49-F238E27FC236}">
                 <a16:creationId xmlns:a16="http://schemas.microsoft.com/office/drawing/2014/main" id="{ED27CB0E-249E-4788-8C0C-14911A92CB50}"/>
               </a:ext>
             </a:extLst>
           </p:cNvPr>
           <p:cNvSpPr>
-            <a:spLocks xmlns:a="http://schemas.openxmlformats.org/drawingml/2006/main" noGrp="1"/>
-          </p:cNvSpPr>
-          <p:nvPr/>
-        </p:nvSpPr>
-        <p:spPr>
-          <a:xfrm xmlns:a="http://schemas.openxmlformats.org/drawingml/2006/main">
+            <a:spLocks noGrp="1"/>
+          </p:cNvSpPr>
+          <p:nvPr/>
+        </p:nvSpPr>
+        <p:spPr>
+          <a:xfrm>
             <a:off x="609600" y="1924050"/>
             <a:ext cx="4953000" cy="333375"/>
           </a:xfrm>
-          <a:prstGeom xmlns:a="http://schemas.openxmlformats.org/drawingml/2006/main" prst="rect">
-            <a:avLst/>
-          </a:prstGeom>
-          <a:noFill xmlns:a="http://schemas.openxmlformats.org/drawingml/2006/main"/>
-          <a:ln xmlns:a="http://schemas.openxmlformats.org/drawingml/2006/main" w="0">
+          <a:prstGeom prst="rect">
+            <a:avLst/>
+          </a:prstGeom>
+          <a:noFill/>
+          <a:ln w="0">
             <a:noFill/>
           </a:ln>
         </p:spPr>
         <p:txBody>
-          <a:bodyPr xmlns:a="http://schemas.openxmlformats.org/drawingml/2006/main">
+          <a:bodyPr>
             <a:noAutofit/>
           </a:bodyPr>
-          <a:lstStyle xmlns:a="http://schemas.openxmlformats.org/drawingml/2006/main"/>
-          <a:p xmlns:a="http://schemas.openxmlformats.org/drawingml/2006/main">
+          <a:lstStyle/>
+          <a:p>
             <a:pPr>
               <a:buNone/>
               <a:defRPr sz="1725" b="0">
@@ -5002,37 +4776,37 @@
       </p:sp>
       <p:sp>
         <p:nvSpPr>
-          <p:cNvPr id="5" name="">
-            <a:extLst xmlns:a="http://schemas.openxmlformats.org/drawingml/2006/main">
+          <p:cNvPr id="5" name="Rectangle 4">
+            <a:extLst>
               <a:ext uri="{FF2B5EF4-FFF2-40B4-BE49-F238E27FC236}">
                 <a16:creationId xmlns:a16="http://schemas.microsoft.com/office/drawing/2014/main" id="{45C1711F-AF88-48F5-A53C-43345F02B493}"/>
               </a:ext>
             </a:extLst>
           </p:cNvPr>
           <p:cNvSpPr>
-            <a:spLocks xmlns:a="http://schemas.openxmlformats.org/drawingml/2006/main" noGrp="1"/>
-          </p:cNvSpPr>
-          <p:nvPr/>
-        </p:nvSpPr>
-        <p:spPr>
-          <a:xfrm xmlns:a="http://schemas.openxmlformats.org/drawingml/2006/main">
+            <a:spLocks noGrp="1"/>
+          </p:cNvSpPr>
+          <p:nvPr/>
+        </p:nvSpPr>
+        <p:spPr>
+          <a:xfrm>
             <a:off x="609600" y="2619375"/>
             <a:ext cx="2381250" cy="714375"/>
           </a:xfrm>
-          <a:prstGeom xmlns:a="http://schemas.openxmlformats.org/drawingml/2006/main" prst="rect">
-            <a:avLst/>
-          </a:prstGeom>
-          <a:noFill xmlns:a="http://schemas.openxmlformats.org/drawingml/2006/main"/>
-          <a:ln xmlns:a="http://schemas.openxmlformats.org/drawingml/2006/main" w="0">
+          <a:prstGeom prst="rect">
+            <a:avLst/>
+          </a:prstGeom>
+          <a:noFill/>
+          <a:ln w="0">
             <a:noFill/>
           </a:ln>
         </p:spPr>
         <p:txBody>
-          <a:bodyPr xmlns:a="http://schemas.openxmlformats.org/drawingml/2006/main">
+          <a:bodyPr>
             <a:noAutofit/>
           </a:bodyPr>
-          <a:lstStyle xmlns:a="http://schemas.openxmlformats.org/drawingml/2006/main"/>
-          <a:p xmlns:a="http://schemas.openxmlformats.org/drawingml/2006/main">
+          <a:lstStyle/>
+          <a:p>
             <a:pPr>
               <a:buNone/>
               <a:defRPr sz="4275" b="1">
@@ -5060,37 +4834,37 @@
       </p:sp>
       <p:sp>
         <p:nvSpPr>
-          <p:cNvPr id="6" name="">
-            <a:extLst xmlns:a="http://schemas.openxmlformats.org/drawingml/2006/main">
+          <p:cNvPr id="6" name="Rectangle 5">
+            <a:extLst>
               <a:ext uri="{FF2B5EF4-FFF2-40B4-BE49-F238E27FC236}">
                 <a16:creationId xmlns:a16="http://schemas.microsoft.com/office/drawing/2014/main" id="{E8E3E4AB-9A30-41F9-9AF3-BAE400140A35}"/>
               </a:ext>
             </a:extLst>
           </p:cNvPr>
           <p:cNvSpPr>
-            <a:spLocks xmlns:a="http://schemas.openxmlformats.org/drawingml/2006/main" noGrp="1"/>
-          </p:cNvSpPr>
-          <p:nvPr/>
-        </p:nvSpPr>
-        <p:spPr>
-          <a:xfrm xmlns:a="http://schemas.openxmlformats.org/drawingml/2006/main">
+            <a:spLocks noGrp="1"/>
+          </p:cNvSpPr>
+          <p:nvPr/>
+        </p:nvSpPr>
+        <p:spPr>
+          <a:xfrm>
             <a:off x="609600" y="3343275"/>
             <a:ext cx="4857750" cy="409575"/>
           </a:xfrm>
-          <a:prstGeom xmlns:a="http://schemas.openxmlformats.org/drawingml/2006/main" prst="rect">
-            <a:avLst/>
-          </a:prstGeom>
-          <a:noFill xmlns:a="http://schemas.openxmlformats.org/drawingml/2006/main"/>
-          <a:ln xmlns:a="http://schemas.openxmlformats.org/drawingml/2006/main" w="0">
+          <a:prstGeom prst="rect">
+            <a:avLst/>
+          </a:prstGeom>
+          <a:noFill/>
+          <a:ln w="0">
             <a:noFill/>
           </a:ln>
         </p:spPr>
         <p:txBody>
-          <a:bodyPr xmlns:a="http://schemas.openxmlformats.org/drawingml/2006/main">
+          <a:bodyPr>
             <a:noAutofit/>
           </a:bodyPr>
-          <a:lstStyle xmlns:a="http://schemas.openxmlformats.org/drawingml/2006/main"/>
-          <a:p xmlns:a="http://schemas.openxmlformats.org/drawingml/2006/main">
+          <a:lstStyle/>
+          <a:p>
             <a:pPr>
               <a:buNone/>
               <a:defRPr sz="1950" b="0">
@@ -5118,37 +4892,37 @@
       </p:sp>
       <p:sp>
         <p:nvSpPr>
-          <p:cNvPr id="7" name="">
-            <a:extLst xmlns:a="http://schemas.openxmlformats.org/drawingml/2006/main">
+          <p:cNvPr id="7" name="Rectangle 6">
+            <a:extLst>
               <a:ext uri="{FF2B5EF4-FFF2-40B4-BE49-F238E27FC236}">
                 <a16:creationId xmlns:a16="http://schemas.microsoft.com/office/drawing/2014/main" id="{CC76E1AC-89FF-497E-B3D5-6B266C2C3536}"/>
               </a:ext>
             </a:extLst>
           </p:cNvPr>
           <p:cNvSpPr>
-            <a:spLocks xmlns:a="http://schemas.openxmlformats.org/drawingml/2006/main" noGrp="1"/>
-          </p:cNvSpPr>
-          <p:nvPr/>
-        </p:nvSpPr>
-        <p:spPr>
-          <a:xfrm xmlns:a="http://schemas.openxmlformats.org/drawingml/2006/main">
+            <a:spLocks noGrp="1"/>
+          </p:cNvSpPr>
+          <p:nvPr/>
+        </p:nvSpPr>
+        <p:spPr>
+          <a:xfrm>
             <a:off x="609600" y="4095750"/>
             <a:ext cx="2381250" cy="695325"/>
           </a:xfrm>
-          <a:prstGeom xmlns:a="http://schemas.openxmlformats.org/drawingml/2006/main" prst="rect">
-            <a:avLst/>
-          </a:prstGeom>
-          <a:noFill xmlns:a="http://schemas.openxmlformats.org/drawingml/2006/main"/>
-          <a:ln xmlns:a="http://schemas.openxmlformats.org/drawingml/2006/main" w="0">
+          <a:prstGeom prst="rect">
+            <a:avLst/>
+          </a:prstGeom>
+          <a:noFill/>
+          <a:ln w="0">
             <a:noFill/>
           </a:ln>
         </p:spPr>
         <p:txBody>
-          <a:bodyPr xmlns:a="http://schemas.openxmlformats.org/drawingml/2006/main">
+          <a:bodyPr>
             <a:noAutofit/>
           </a:bodyPr>
-          <a:lstStyle xmlns:a="http://schemas.openxmlformats.org/drawingml/2006/main"/>
-          <a:p xmlns:a="http://schemas.openxmlformats.org/drawingml/2006/main">
+          <a:lstStyle/>
+          <a:p>
             <a:pPr>
               <a:buNone/>
               <a:defRPr sz="3975" b="1">
@@ -5176,37 +4950,37 @@
       </p:sp>
       <p:sp>
         <p:nvSpPr>
-          <p:cNvPr id="8" name="">
-            <a:extLst xmlns:a="http://schemas.openxmlformats.org/drawingml/2006/main">
+          <p:cNvPr id="8" name="Rectangle 7">
+            <a:extLst>
               <a:ext uri="{FF2B5EF4-FFF2-40B4-BE49-F238E27FC236}">
                 <a16:creationId xmlns:a16="http://schemas.microsoft.com/office/drawing/2014/main" id="{42DE4D00-D6F0-42B5-A59A-291785F1DBE2}"/>
               </a:ext>
             </a:extLst>
           </p:cNvPr>
           <p:cNvSpPr>
-            <a:spLocks xmlns:a="http://schemas.openxmlformats.org/drawingml/2006/main" noGrp="1"/>
-          </p:cNvSpPr>
-          <p:nvPr/>
-        </p:nvSpPr>
-        <p:spPr>
-          <a:xfrm xmlns:a="http://schemas.openxmlformats.org/drawingml/2006/main">
+            <a:spLocks noGrp="1"/>
+          </p:cNvSpPr>
+          <p:nvPr/>
+        </p:nvSpPr>
+        <p:spPr>
+          <a:xfrm>
             <a:off x="609600" y="4838700"/>
             <a:ext cx="4857750" cy="733425"/>
           </a:xfrm>
-          <a:prstGeom xmlns:a="http://schemas.openxmlformats.org/drawingml/2006/main" prst="rect">
-            <a:avLst/>
-          </a:prstGeom>
-          <a:noFill xmlns:a="http://schemas.openxmlformats.org/drawingml/2006/main"/>
-          <a:ln xmlns:a="http://schemas.openxmlformats.org/drawingml/2006/main" w="0">
+          <a:prstGeom prst="rect">
+            <a:avLst/>
+          </a:prstGeom>
+          <a:noFill/>
+          <a:ln w="0">
             <a:noFill/>
           </a:ln>
         </p:spPr>
         <p:txBody>
-          <a:bodyPr xmlns:a="http://schemas.openxmlformats.org/drawingml/2006/main">
+          <a:bodyPr>
             <a:noAutofit/>
           </a:bodyPr>
-          <a:lstStyle xmlns:a="http://schemas.openxmlformats.org/drawingml/2006/main"/>
-          <a:p xmlns:a="http://schemas.openxmlformats.org/drawingml/2006/main">
+          <a:lstStyle/>
+          <a:p>
             <a:pPr>
               <a:buNone/>
               <a:defRPr sz="1950" b="0">
@@ -5230,7 +5004,7 @@
               <a:t>Data ceiling · 86% of the signal</a:t>
             </a:r>
           </a:p>
-          <a:p xmlns:a="http://schemas.openxmlformats.org/drawingml/2006/main">
+          <a:p>
             <a:pPr>
               <a:buNone/>
               <a:defRPr sz="1950" b="0">
@@ -5258,37 +5032,37 @@
       </p:sp>
       <p:sp>
         <p:nvSpPr>
-          <p:cNvPr id="9" name="">
-            <a:extLst xmlns:a="http://schemas.openxmlformats.org/drawingml/2006/main">
+          <p:cNvPr id="9" name="Rectangle 8">
+            <a:extLst>
               <a:ext uri="{FF2B5EF4-FFF2-40B4-BE49-F238E27FC236}">
                 <a16:creationId xmlns:a16="http://schemas.microsoft.com/office/drawing/2014/main" id="{C0F99FCF-EDE9-4F21-A1CA-30393B17D845}"/>
               </a:ext>
             </a:extLst>
           </p:cNvPr>
           <p:cNvSpPr>
-            <a:spLocks xmlns:a="http://schemas.openxmlformats.org/drawingml/2006/main" noGrp="1"/>
-          </p:cNvSpPr>
-          <p:nvPr/>
-        </p:nvSpPr>
-        <p:spPr>
-          <a:xfrm xmlns:a="http://schemas.openxmlformats.org/drawingml/2006/main">
+            <a:spLocks noGrp="1"/>
+          </p:cNvSpPr>
+          <p:nvPr/>
+        </p:nvSpPr>
+        <p:spPr>
+          <a:xfrm>
             <a:off x="5838825" y="1428750"/>
             <a:ext cx="5810250" cy="428625"/>
           </a:xfrm>
-          <a:prstGeom xmlns:a="http://schemas.openxmlformats.org/drawingml/2006/main" prst="rect">
-            <a:avLst/>
-          </a:prstGeom>
-          <a:noFill xmlns:a="http://schemas.openxmlformats.org/drawingml/2006/main"/>
-          <a:ln xmlns:a="http://schemas.openxmlformats.org/drawingml/2006/main" w="0">
+          <a:prstGeom prst="rect">
+            <a:avLst/>
+          </a:prstGeom>
+          <a:noFill/>
+          <a:ln w="0">
             <a:noFill/>
           </a:ln>
         </p:spPr>
         <p:txBody>
-          <a:bodyPr xmlns:a="http://schemas.openxmlformats.org/drawingml/2006/main">
+          <a:bodyPr>
             <a:noAutofit/>
           </a:bodyPr>
-          <a:lstStyle xmlns:a="http://schemas.openxmlformats.org/drawingml/2006/main"/>
-          <a:p xmlns:a="http://schemas.openxmlformats.org/drawingml/2006/main">
+          <a:lstStyle/>
+          <a:p>
             <a:pPr>
               <a:buNone/>
               <a:defRPr sz="2100" b="1">
@@ -5316,37 +5090,37 @@
       </p:sp>
       <p:sp>
         <p:nvSpPr>
-          <p:cNvPr id="10" name="">
-            <a:extLst xmlns:a="http://schemas.openxmlformats.org/drawingml/2006/main">
+          <p:cNvPr id="10" name="Rectangle 9">
+            <a:extLst>
               <a:ext uri="{FF2B5EF4-FFF2-40B4-BE49-F238E27FC236}">
                 <a16:creationId xmlns:a16="http://schemas.microsoft.com/office/drawing/2014/main" id="{A3104A55-52D7-4274-8694-F124332AF5F2}"/>
               </a:ext>
             </a:extLst>
           </p:cNvPr>
           <p:cNvSpPr>
-            <a:spLocks xmlns:a="http://schemas.openxmlformats.org/drawingml/2006/main" noGrp="1"/>
-          </p:cNvSpPr>
-          <p:nvPr/>
-        </p:nvSpPr>
-        <p:spPr>
-          <a:xfrm xmlns:a="http://schemas.openxmlformats.org/drawingml/2006/main">
+            <a:spLocks noGrp="1"/>
+          </p:cNvSpPr>
+          <p:nvPr/>
+        </p:nvSpPr>
+        <p:spPr>
+          <a:xfrm>
             <a:off x="5838825" y="1924050"/>
             <a:ext cx="5810250" cy="333375"/>
           </a:xfrm>
-          <a:prstGeom xmlns:a="http://schemas.openxmlformats.org/drawingml/2006/main" prst="rect">
-            <a:avLst/>
-          </a:prstGeom>
-          <a:noFill xmlns:a="http://schemas.openxmlformats.org/drawingml/2006/main"/>
-          <a:ln xmlns:a="http://schemas.openxmlformats.org/drawingml/2006/main" w="0">
+          <a:prstGeom prst="rect">
+            <a:avLst/>
+          </a:prstGeom>
+          <a:noFill/>
+          <a:ln w="0">
             <a:noFill/>
           </a:ln>
         </p:spPr>
         <p:txBody>
-          <a:bodyPr xmlns:a="http://schemas.openxmlformats.org/drawingml/2006/main">
+          <a:bodyPr>
             <a:noAutofit/>
           </a:bodyPr>
-          <a:lstStyle xmlns:a="http://schemas.openxmlformats.org/drawingml/2006/main"/>
-          <a:p xmlns:a="http://schemas.openxmlformats.org/drawingml/2006/main">
+          <a:lstStyle/>
+          <a:p>
             <a:pPr>
               <a:buNone/>
               <a:defRPr sz="1725" b="0">
@@ -5374,21 +5148,33 @@
       </p:sp>
       <p:graphicFrame>
         <p:nvGraphicFramePr>
-          <p:cNvPr id="25" name=""/>
+          <p:cNvPr id="25" name="Tableau 24"/>
           <p:cNvGraphicFramePr/>
           <p:nvPr/>
         </p:nvGraphicFramePr>
         <p:xfrm>
-          <a:off xmlns:a="http://schemas.openxmlformats.org/drawingml/2006/main" x="5829300" y="2466975"/>
-          <a:ext xmlns:a="http://schemas.openxmlformats.org/drawingml/2006/main" cx="5715000" cy="3000375"/>
+          <a:off x="5829300" y="2466975"/>
+          <a:ext cx="5715000" cy="3000378"/>
         </p:xfrm>
-        <a:graphic xmlns:a="http://schemas.openxmlformats.org/drawingml/2006/main">
+        <a:graphic>
           <a:graphicData uri="http://schemas.openxmlformats.org/drawingml/2006/table">
             <a:tbl>
               <a:tblPr/>
               <a:tblGrid>
-                <a:gridCol w="3952875"/>
-                <a:gridCol w="1762125"/>
+                <a:gridCol w="3952875">
+                  <a:extLst>
+                    <a:ext uri="{9D8B030D-6E8A-4147-A177-3AD203B41FA5}">
+                      <a16:colId xmlns:a16="http://schemas.microsoft.com/office/drawing/2014/main" val="20000"/>
+                    </a:ext>
+                  </a:extLst>
+                </a:gridCol>
+                <a:gridCol w="1762125">
+                  <a:extLst>
+                    <a:ext uri="{9D8B030D-6E8A-4147-A177-3AD203B41FA5}">
+                      <a16:colId xmlns:a16="http://schemas.microsoft.com/office/drawing/2014/main" val="20001"/>
+                    </a:ext>
+                  </a:extLst>
+                </a:gridCol>
               </a:tblGrid>
               <a:tr h="500063">
                 <a:tc>
@@ -5409,7 +5195,7 @@
                       </a:r>
                     </a:p>
                   </a:txBody>
-                  <a:tcPr marL="91440" marR="91440" marT="45720" marB="45720">
+                  <a:tcPr>
                     <a:solidFill>
                       <a:srgbClr val="102C36"/>
                     </a:solidFill>
@@ -5433,12 +5219,17 @@
                       </a:r>
                     </a:p>
                   </a:txBody>
-                  <a:tcPr marL="91440" marR="91440" marT="45720" marB="45720">
+                  <a:tcPr>
                     <a:solidFill>
                       <a:srgbClr val="102C36"/>
                     </a:solidFill>
                   </a:tcPr>
                 </a:tc>
+                <a:extLst>
+                  <a:ext uri="{0D108BD9-81ED-4DB2-BD59-A6C34878D82A}">
+                    <a16:rowId xmlns:a16="http://schemas.microsoft.com/office/drawing/2014/main" val="10000"/>
+                  </a:ext>
+                </a:extLst>
               </a:tr>
               <a:tr h="500063">
                 <a:tc>
@@ -5459,7 +5250,7 @@
                       </a:r>
                     </a:p>
                   </a:txBody>
-                  <a:tcPr marL="91440" marR="91440" marT="45720" marB="45720">
+                  <a:tcPr>
                     <a:solidFill>
                       <a:srgbClr val="DFEDE7"/>
                     </a:solidFill>
@@ -5483,12 +5274,17 @@
                       </a:r>
                     </a:p>
                   </a:txBody>
-                  <a:tcPr marL="91440" marR="91440" marT="45720" marB="45720">
+                  <a:tcPr>
                     <a:solidFill>
                       <a:srgbClr val="DFEDE7"/>
                     </a:solidFill>
                   </a:tcPr>
                 </a:tc>
+                <a:extLst>
+                  <a:ext uri="{0D108BD9-81ED-4DB2-BD59-A6C34878D82A}">
+                    <a16:rowId xmlns:a16="http://schemas.microsoft.com/office/drawing/2014/main" val="10001"/>
+                  </a:ext>
+                </a:extLst>
               </a:tr>
               <a:tr h="500063">
                 <a:tc>
@@ -5509,7 +5305,7 @@
                       </a:r>
                     </a:p>
                   </a:txBody>
-                  <a:tcPr marL="91440" marR="91440" marT="45720" marB="45720">
+                  <a:tcPr>
                     <a:solidFill>
                       <a:srgbClr val="F5F4EF"/>
                     </a:solidFill>
@@ -5533,12 +5329,17 @@
                       </a:r>
                     </a:p>
                   </a:txBody>
-                  <a:tcPr marL="91440" marR="91440" marT="45720" marB="45720">
+                  <a:tcPr>
                     <a:solidFill>
                       <a:srgbClr val="F5F4EF"/>
                     </a:solidFill>
                   </a:tcPr>
                 </a:tc>
+                <a:extLst>
+                  <a:ext uri="{0D108BD9-81ED-4DB2-BD59-A6C34878D82A}">
+                    <a16:rowId xmlns:a16="http://schemas.microsoft.com/office/drawing/2014/main" val="10002"/>
+                  </a:ext>
+                </a:extLst>
               </a:tr>
               <a:tr h="500063">
                 <a:tc>
@@ -5559,7 +5360,7 @@
                       </a:r>
                     </a:p>
                   </a:txBody>
-                  <a:tcPr marL="91440" marR="91440" marT="45720" marB="45720">
+                  <a:tcPr>
                     <a:solidFill>
                       <a:srgbClr val="F5F4EF"/>
                     </a:solidFill>
@@ -5583,12 +5384,17 @@
                       </a:r>
                     </a:p>
                   </a:txBody>
-                  <a:tcPr marL="91440" marR="91440" marT="45720" marB="45720">
+                  <a:tcPr>
                     <a:solidFill>
                       <a:srgbClr val="F5F4EF"/>
                     </a:solidFill>
                   </a:tcPr>
                 </a:tc>
+                <a:extLst>
+                  <a:ext uri="{0D108BD9-81ED-4DB2-BD59-A6C34878D82A}">
+                    <a16:rowId xmlns:a16="http://schemas.microsoft.com/office/drawing/2014/main" val="10003"/>
+                  </a:ext>
+                </a:extLst>
               </a:tr>
               <a:tr h="500063">
                 <a:tc>
@@ -5609,7 +5415,7 @@
                       </a:r>
                     </a:p>
                   </a:txBody>
-                  <a:tcPr marL="91440" marR="91440" marT="45720" marB="45720">
+                  <a:tcPr>
                     <a:solidFill>
                       <a:srgbClr val="F5F4EF"/>
                     </a:solidFill>
@@ -5633,12 +5439,17 @@
                       </a:r>
                     </a:p>
                   </a:txBody>
-                  <a:tcPr marL="91440" marR="91440" marT="45720" marB="45720">
+                  <a:tcPr>
                     <a:solidFill>
                       <a:srgbClr val="F5F4EF"/>
                     </a:solidFill>
                   </a:tcPr>
                 </a:tc>
+                <a:extLst>
+                  <a:ext uri="{0D108BD9-81ED-4DB2-BD59-A6C34878D82A}">
+                    <a16:rowId xmlns:a16="http://schemas.microsoft.com/office/drawing/2014/main" val="10004"/>
+                  </a:ext>
+                </a:extLst>
               </a:tr>
               <a:tr h="500063">
                 <a:tc>
@@ -5659,7 +5470,7 @@
                       </a:r>
                     </a:p>
                   </a:txBody>
-                  <a:tcPr marL="91440" marR="91440" marT="45720" marB="45720">
+                  <a:tcPr>
                     <a:solidFill>
                       <a:srgbClr val="F5F4EF"/>
                     </a:solidFill>
@@ -5683,12 +5494,17 @@
                       </a:r>
                     </a:p>
                   </a:txBody>
-                  <a:tcPr marL="91440" marR="91440" marT="45720" marB="45720">
+                  <a:tcPr>
                     <a:solidFill>
                       <a:srgbClr val="F5F4EF"/>
                     </a:solidFill>
                   </a:tcPr>
                 </a:tc>
+                <a:extLst>
+                  <a:ext uri="{0D108BD9-81ED-4DB2-BD59-A6C34878D82A}">
+                    <a16:rowId xmlns:a16="http://schemas.microsoft.com/office/drawing/2014/main" val="10005"/>
+                  </a:ext>
+                </a:extLst>
               </a:tr>
             </a:tbl>
           </a:graphicData>
@@ -5696,37 +5512,37 @@
       </p:graphicFrame>
       <p:sp>
         <p:nvSpPr>
-          <p:cNvPr id="12" name="">
-            <a:extLst xmlns:a="http://schemas.openxmlformats.org/drawingml/2006/main">
+          <p:cNvPr id="12" name="Rectangle 11">
+            <a:extLst>
               <a:ext uri="{FF2B5EF4-FFF2-40B4-BE49-F238E27FC236}">
                 <a16:creationId xmlns:a16="http://schemas.microsoft.com/office/drawing/2014/main" id="{53E3152F-9ACB-4845-AA41-2553BF79334F}"/>
               </a:ext>
             </a:extLst>
           </p:cNvPr>
           <p:cNvSpPr>
-            <a:spLocks xmlns:a="http://schemas.openxmlformats.org/drawingml/2006/main" noGrp="1"/>
-          </p:cNvSpPr>
-          <p:nvPr/>
-        </p:nvSpPr>
-        <p:spPr>
-          <a:xfrm xmlns:a="http://schemas.openxmlformats.org/drawingml/2006/main">
+            <a:spLocks noGrp="1"/>
+          </p:cNvSpPr>
+          <p:nvPr/>
+        </p:nvSpPr>
+        <p:spPr>
+          <a:xfrm>
             <a:off x="609600" y="5934075"/>
             <a:ext cx="10858500" cy="495300"/>
           </a:xfrm>
-          <a:prstGeom xmlns:a="http://schemas.openxmlformats.org/drawingml/2006/main" prst="rect">
-            <a:avLst/>
-          </a:prstGeom>
-          <a:noFill xmlns:a="http://schemas.openxmlformats.org/drawingml/2006/main"/>
-          <a:ln xmlns:a="http://schemas.openxmlformats.org/drawingml/2006/main" w="0">
+          <a:prstGeom prst="rect">
+            <a:avLst/>
+          </a:prstGeom>
+          <a:noFill/>
+          <a:ln w="0">
             <a:noFill/>
           </a:ln>
         </p:spPr>
         <p:txBody>
-          <a:bodyPr xmlns:a="http://schemas.openxmlformats.org/drawingml/2006/main">
+          <a:bodyPr>
             <a:noAutofit/>
           </a:bodyPr>
-          <a:lstStyle xmlns:a="http://schemas.openxmlformats.org/drawingml/2006/main"/>
-          <a:p xmlns:a="http://schemas.openxmlformats.org/drawingml/2006/main">
+          <a:lstStyle/>
+          <a:p>
             <a:pPr>
               <a:buNone/>
               <a:defRPr sz="1500" b="0">
@@ -5750,7 +5566,7 @@
               <a:t>17-point boosting spread: a phrase-library overfitting warning.</a:t>
             </a:r>
           </a:p>
-          <a:p xmlns:a="http://schemas.openxmlformats.org/drawingml/2006/main">
+          <a:p>
             <a:pPr>
               <a:buNone/>
               <a:defRPr sz="1500" b="0">
@@ -5783,17 +5599,21 @@
       </p:ext>
     </p:extLst>
   </p:cSld>
+  <p:clrMapOvr>
+    <a:masterClrMapping/>
+  </p:clrMapOvr>
 </p:sld>
 </file>
 
 <file path=ppt/slides/slide6.xml><?xml version="1.0" encoding="utf-8"?>
-<p:sld xmlns:p="http://schemas.openxmlformats.org/presentationml/2006/main">
+<p:sld xmlns:a="http://schemas.openxmlformats.org/drawingml/2006/main" xmlns:r="http://schemas.openxmlformats.org/officeDocument/2006/relationships" xmlns:p="http://schemas.openxmlformats.org/presentationml/2006/main">
   <p:cSld>
     <p:bg>
       <p:bgPr>
-        <a:solidFill xmlns:a="http://schemas.openxmlformats.org/drawingml/2006/main">
+        <a:solidFill>
           <a:srgbClr val="F5F4EF"/>
         </a:solidFill>
+        <a:effectLst/>
       </p:bgPr>
     </p:bg>
     <p:spTree>
@@ -5803,41 +5623,46 @@
         <p:nvPr/>
       </p:nvGrpSpPr>
       <p:grpSpPr>
-        <a:xfrm xmlns:a="http://schemas.openxmlformats.org/drawingml/2006/main"/>
+        <a:xfrm>
+          <a:off x="0" y="0"/>
+          <a:ext cx="0" cy="0"/>
+          <a:chOff x="0" y="0"/>
+          <a:chExt cx="0" cy="0"/>
+        </a:xfrm>
       </p:grpSpPr>
       <p:sp>
         <p:nvSpPr>
-          <p:cNvPr id="10" name="">
-            <a:extLst xmlns:a="http://schemas.openxmlformats.org/drawingml/2006/main">
+          <p:cNvPr id="10" name="Rectangle 9">
+            <a:extLst>
               <a:ext uri="{FF2B5EF4-FFF2-40B4-BE49-F238E27FC236}">
                 <a16:creationId xmlns:a16="http://schemas.microsoft.com/office/drawing/2014/main" id="{513CDD1D-DFF0-4CDA-B318-74930B76E136}"/>
               </a:ext>
             </a:extLst>
           </p:cNvPr>
           <p:cNvSpPr>
-            <a:spLocks xmlns:a="http://schemas.openxmlformats.org/drawingml/2006/main" noGrp="1"/>
-          </p:cNvSpPr>
-          <p:nvPr/>
-        </p:nvSpPr>
-        <p:spPr>
-          <a:xfrm xmlns:a="http://schemas.openxmlformats.org/drawingml/2006/main">
+            <a:spLocks noGrp="1"/>
+          </p:cNvSpPr>
+          <p:nvPr/>
+        </p:nvSpPr>
+        <p:spPr>
+          <a:xfrm>
             <a:off x="609600" y="409575"/>
             <a:ext cx="10953750" cy="714375"/>
           </a:xfrm>
-          <a:prstGeom xmlns:a="http://schemas.openxmlformats.org/drawingml/2006/main" prst="rect">
-            <a:avLst/>
-          </a:prstGeom>
-          <a:noFill xmlns:a="http://schemas.openxmlformats.org/drawingml/2006/main"/>
-          <a:ln xmlns:a="http://schemas.openxmlformats.org/drawingml/2006/main" w="0">
+          <a:prstGeom prst="rect">
+            <a:avLst/>
+          </a:prstGeom>
+          <a:noFill/>
+          <a:ln w="0">
             <a:noFill/>
           </a:ln>
         </p:spPr>
         <p:txBody>
-          <a:bodyPr xmlns:a="http://schemas.openxmlformats.org/drawingml/2006/main">
+          <a:bodyPr>
             <a:noAutofit/>
           </a:bodyPr>
-          <a:lstStyle xmlns:a="http://schemas.openxmlformats.org/drawingml/2006/main"/>
-          <a:p xmlns:a="http://schemas.openxmlformats.org/drawingml/2006/main">
+          <a:lstStyle/>
+          <a:p>
             <a:pPr>
               <a:buNone/>
               <a:defRPr sz="3225" b="1">
@@ -5865,37 +5690,37 @@
       </p:sp>
       <p:sp>
         <p:nvSpPr>
-          <p:cNvPr id="2" name="">
-            <a:extLst xmlns:a="http://schemas.openxmlformats.org/drawingml/2006/main">
+          <p:cNvPr id="2" name="Rectangle 1">
+            <a:extLst>
               <a:ext uri="{FF2B5EF4-FFF2-40B4-BE49-F238E27FC236}">
                 <a16:creationId xmlns:a16="http://schemas.microsoft.com/office/drawing/2014/main" id="{A85C8F2D-C6E1-4DC9-9E03-CFF45966A424}"/>
               </a:ext>
             </a:extLst>
           </p:cNvPr>
           <p:cNvSpPr>
-            <a:spLocks xmlns:a="http://schemas.openxmlformats.org/drawingml/2006/main" noGrp="1"/>
-          </p:cNvSpPr>
-          <p:nvPr/>
-        </p:nvSpPr>
-        <p:spPr>
-          <a:xfrm xmlns:a="http://schemas.openxmlformats.org/drawingml/2006/main">
+            <a:spLocks noGrp="1"/>
+          </p:cNvSpPr>
+          <p:nvPr/>
+        </p:nvSpPr>
+        <p:spPr>
+          <a:xfrm>
             <a:off x="11144250" y="6324600"/>
             <a:ext cx="476250" cy="285750"/>
           </a:xfrm>
-          <a:prstGeom xmlns:a="http://schemas.openxmlformats.org/drawingml/2006/main" prst="rect">
-            <a:avLst/>
-          </a:prstGeom>
-          <a:noFill xmlns:a="http://schemas.openxmlformats.org/drawingml/2006/main"/>
-          <a:ln xmlns:a="http://schemas.openxmlformats.org/drawingml/2006/main" w="0">
+          <a:prstGeom prst="rect">
+            <a:avLst/>
+          </a:prstGeom>
+          <a:noFill/>
+          <a:ln w="0">
             <a:noFill/>
           </a:ln>
         </p:spPr>
         <p:txBody>
-          <a:bodyPr xmlns:a="http://schemas.openxmlformats.org/drawingml/2006/main">
+          <a:bodyPr>
             <a:noAutofit/>
           </a:bodyPr>
-          <a:lstStyle xmlns:a="http://schemas.openxmlformats.org/drawingml/2006/main"/>
-          <a:p xmlns:a="http://schemas.openxmlformats.org/drawingml/2006/main">
+          <a:lstStyle/>
+          <a:p>
             <a:pPr>
               <a:buNone/>
               <a:defRPr sz="1350" b="0">
@@ -5923,37 +5748,37 @@
       </p:sp>
       <p:sp>
         <p:nvSpPr>
-          <p:cNvPr id="3" name="">
-            <a:extLst xmlns:a="http://schemas.openxmlformats.org/drawingml/2006/main">
+          <p:cNvPr id="3" name="Rectangle 2">
+            <a:extLst>
               <a:ext uri="{FF2B5EF4-FFF2-40B4-BE49-F238E27FC236}">
                 <a16:creationId xmlns:a16="http://schemas.microsoft.com/office/drawing/2014/main" id="{8AB64388-7E9E-4D82-BB03-4D42E09F0299}"/>
               </a:ext>
             </a:extLst>
           </p:cNvPr>
           <p:cNvSpPr>
-            <a:spLocks xmlns:a="http://schemas.openxmlformats.org/drawingml/2006/main" noGrp="1"/>
-          </p:cNvSpPr>
-          <p:nvPr/>
-        </p:nvSpPr>
-        <p:spPr>
-          <a:xfrm xmlns:a="http://schemas.openxmlformats.org/drawingml/2006/main">
+            <a:spLocks noGrp="1"/>
+          </p:cNvSpPr>
+          <p:nvPr/>
+        </p:nvSpPr>
+        <p:spPr>
+          <a:xfrm>
             <a:off x="609600" y="1390650"/>
             <a:ext cx="6715125" cy="409575"/>
           </a:xfrm>
-          <a:prstGeom xmlns:a="http://schemas.openxmlformats.org/drawingml/2006/main" prst="rect">
-            <a:avLst/>
-          </a:prstGeom>
-          <a:noFill xmlns:a="http://schemas.openxmlformats.org/drawingml/2006/main"/>
-          <a:ln xmlns:a="http://schemas.openxmlformats.org/drawingml/2006/main" w="0">
+          <a:prstGeom prst="rect">
+            <a:avLst/>
+          </a:prstGeom>
+          <a:noFill/>
+          <a:ln w="0">
             <a:noFill/>
           </a:ln>
         </p:spPr>
         <p:txBody>
-          <a:bodyPr xmlns:a="http://schemas.openxmlformats.org/drawingml/2006/main">
+          <a:bodyPr>
             <a:noAutofit/>
           </a:bodyPr>
-          <a:lstStyle xmlns:a="http://schemas.openxmlformats.org/drawingml/2006/main"/>
-          <a:p xmlns:a="http://schemas.openxmlformats.org/drawingml/2006/main">
+          <a:lstStyle/>
+          <a:p>
             <a:pPr>
               <a:buNone/>
               <a:defRPr sz="1950" b="1">
@@ -5981,37 +5806,37 @@
       </p:sp>
       <p:sp>
         <p:nvSpPr>
-          <p:cNvPr id="5" name="">
-            <a:extLst xmlns:a="http://schemas.openxmlformats.org/drawingml/2006/main">
+          <p:cNvPr id="5" name="Rectangle 4">
+            <a:extLst>
               <a:ext uri="{FF2B5EF4-FFF2-40B4-BE49-F238E27FC236}">
                 <a16:creationId xmlns:a16="http://schemas.microsoft.com/office/drawing/2014/main" id="{EBEAD060-EE55-4496-B13D-FADDFCC87683}"/>
               </a:ext>
             </a:extLst>
           </p:cNvPr>
           <p:cNvSpPr>
-            <a:spLocks xmlns:a="http://schemas.openxmlformats.org/drawingml/2006/main" noGrp="1"/>
-          </p:cNvSpPr>
-          <p:nvPr/>
-        </p:nvSpPr>
-        <p:spPr>
-          <a:xfrm xmlns:a="http://schemas.openxmlformats.org/drawingml/2006/main">
+            <a:spLocks noGrp="1"/>
+          </p:cNvSpPr>
+          <p:nvPr/>
+        </p:nvSpPr>
+        <p:spPr>
+          <a:xfrm>
             <a:off x="7924800" y="1952625"/>
             <a:ext cx="3333750" cy="790575"/>
           </a:xfrm>
-          <a:prstGeom xmlns:a="http://schemas.openxmlformats.org/drawingml/2006/main" prst="rect">
-            <a:avLst/>
-          </a:prstGeom>
-          <a:noFill xmlns:a="http://schemas.openxmlformats.org/drawingml/2006/main"/>
-          <a:ln xmlns:a="http://schemas.openxmlformats.org/drawingml/2006/main" w="0">
+          <a:prstGeom prst="rect">
+            <a:avLst/>
+          </a:prstGeom>
+          <a:noFill/>
+          <a:ln w="0">
             <a:noFill/>
           </a:ln>
         </p:spPr>
         <p:txBody>
-          <a:bodyPr xmlns:a="http://schemas.openxmlformats.org/drawingml/2006/main">
+          <a:bodyPr>
             <a:noAutofit/>
           </a:bodyPr>
-          <a:lstStyle xmlns:a="http://schemas.openxmlformats.org/drawingml/2006/main"/>
-          <a:p xmlns:a="http://schemas.openxmlformats.org/drawingml/2006/main">
+          <a:lstStyle/>
+          <a:p>
             <a:pPr>
               <a:buNone/>
               <a:defRPr sz="4500" b="1">
@@ -6039,37 +5864,37 @@
       </p:sp>
       <p:sp>
         <p:nvSpPr>
-          <p:cNvPr id="6" name="">
-            <a:extLst xmlns:a="http://schemas.openxmlformats.org/drawingml/2006/main">
+          <p:cNvPr id="6" name="Rectangle 5">
+            <a:extLst>
               <a:ext uri="{FF2B5EF4-FFF2-40B4-BE49-F238E27FC236}">
                 <a16:creationId xmlns:a16="http://schemas.microsoft.com/office/drawing/2014/main" id="{F8993B5B-F894-4BB0-95EE-611233AB2433}"/>
               </a:ext>
             </a:extLst>
           </p:cNvPr>
           <p:cNvSpPr>
-            <a:spLocks xmlns:a="http://schemas.openxmlformats.org/drawingml/2006/main" noGrp="1"/>
-          </p:cNvSpPr>
-          <p:nvPr/>
-        </p:nvSpPr>
-        <p:spPr>
-          <a:xfrm xmlns:a="http://schemas.openxmlformats.org/drawingml/2006/main">
+            <a:spLocks noGrp="1"/>
+          </p:cNvSpPr>
+          <p:nvPr/>
+        </p:nvSpPr>
+        <p:spPr>
+          <a:xfrm>
             <a:off x="7924800" y="2809875"/>
             <a:ext cx="3409950" cy="1085850"/>
           </a:xfrm>
-          <a:prstGeom xmlns:a="http://schemas.openxmlformats.org/drawingml/2006/main" prst="rect">
-            <a:avLst/>
-          </a:prstGeom>
-          <a:noFill xmlns:a="http://schemas.openxmlformats.org/drawingml/2006/main"/>
-          <a:ln xmlns:a="http://schemas.openxmlformats.org/drawingml/2006/main" w="0">
+          <a:prstGeom prst="rect">
+            <a:avLst/>
+          </a:prstGeom>
+          <a:noFill/>
+          <a:ln w="0">
             <a:noFill/>
           </a:ln>
         </p:spPr>
         <p:txBody>
-          <a:bodyPr xmlns:a="http://schemas.openxmlformats.org/drawingml/2006/main">
+          <a:bodyPr>
             <a:noAutofit/>
           </a:bodyPr>
-          <a:lstStyle xmlns:a="http://schemas.openxmlformats.org/drawingml/2006/main"/>
-          <a:p xmlns:a="http://schemas.openxmlformats.org/drawingml/2006/main">
+          <a:lstStyle/>
+          <a:p>
             <a:pPr>
               <a:buNone/>
               <a:defRPr sz="1875" b="0">
@@ -6093,7 +5918,7 @@
               <a:t>Parking / manoeuvring</a:t>
             </a:r>
           </a:p>
-          <a:p xmlns:a="http://schemas.openxmlformats.org/drawingml/2006/main">
+          <a:p>
             <a:pPr>
               <a:buNone/>
               <a:defRPr sz="1875" b="0">
@@ -6117,7 +5942,7 @@
               <a:t>186 / 450 damage cases</a:t>
             </a:r>
           </a:p>
-          <a:p xmlns:a="http://schemas.openxmlformats.org/drawingml/2006/main">
+          <a:p>
             <a:pPr>
               <a:buNone/>
               <a:defRPr sz="1875" b="0">
@@ -6145,37 +5970,37 @@
       </p:sp>
       <p:sp>
         <p:nvSpPr>
-          <p:cNvPr id="7" name="">
-            <a:extLst xmlns:a="http://schemas.openxmlformats.org/drawingml/2006/main">
+          <p:cNvPr id="7" name="Rectangle 6">
+            <a:extLst>
               <a:ext uri="{FF2B5EF4-FFF2-40B4-BE49-F238E27FC236}">
                 <a16:creationId xmlns:a16="http://schemas.microsoft.com/office/drawing/2014/main" id="{D456A6E0-94FF-46F8-9EF9-B1DD68D4F433}"/>
               </a:ext>
             </a:extLst>
           </p:cNvPr>
           <p:cNvSpPr>
-            <a:spLocks xmlns:a="http://schemas.openxmlformats.org/drawingml/2006/main" noGrp="1"/>
-          </p:cNvSpPr>
-          <p:nvPr/>
-        </p:nvSpPr>
-        <p:spPr>
-          <a:xfrm xmlns:a="http://schemas.openxmlformats.org/drawingml/2006/main">
+            <a:spLocks noGrp="1"/>
+          </p:cNvSpPr>
+          <p:nvPr/>
+        </p:nvSpPr>
+        <p:spPr>
+          <a:xfrm>
             <a:off x="7924800" y="4333875"/>
             <a:ext cx="3524250" cy="476250"/>
           </a:xfrm>
-          <a:prstGeom xmlns:a="http://schemas.openxmlformats.org/drawingml/2006/main" prst="rect">
-            <a:avLst/>
-          </a:prstGeom>
-          <a:noFill xmlns:a="http://schemas.openxmlformats.org/drawingml/2006/main"/>
-          <a:ln xmlns:a="http://schemas.openxmlformats.org/drawingml/2006/main" w="0">
+          <a:prstGeom prst="rect">
+            <a:avLst/>
+          </a:prstGeom>
+          <a:noFill/>
+          <a:ln w="0">
             <a:noFill/>
           </a:ln>
         </p:spPr>
         <p:txBody>
-          <a:bodyPr xmlns:a="http://schemas.openxmlformats.org/drawingml/2006/main">
+          <a:bodyPr>
             <a:noAutofit/>
           </a:bodyPr>
-          <a:lstStyle xmlns:a="http://schemas.openxmlformats.org/drawingml/2006/main"/>
-          <a:p xmlns:a="http://schemas.openxmlformats.org/drawingml/2006/main">
+          <a:lstStyle/>
+          <a:p>
             <a:pPr>
               <a:buNone/>
               <a:defRPr sz="2325" b="1">
@@ -6203,37 +6028,37 @@
       </p:sp>
       <p:sp>
         <p:nvSpPr>
-          <p:cNvPr id="8" name="">
-            <a:extLst xmlns:a="http://schemas.openxmlformats.org/drawingml/2006/main">
+          <p:cNvPr id="8" name="Rectangle 7">
+            <a:extLst>
               <a:ext uri="{FF2B5EF4-FFF2-40B4-BE49-F238E27FC236}">
                 <a16:creationId xmlns:a16="http://schemas.microsoft.com/office/drawing/2014/main" id="{2AE3D056-AFD2-4B1F-A634-CA2CC5EDF2F2}"/>
               </a:ext>
             </a:extLst>
           </p:cNvPr>
           <p:cNvSpPr>
-            <a:spLocks xmlns:a="http://schemas.openxmlformats.org/drawingml/2006/main" noGrp="1"/>
-          </p:cNvSpPr>
-          <p:nvPr/>
-        </p:nvSpPr>
-        <p:spPr>
-          <a:xfrm xmlns:a="http://schemas.openxmlformats.org/drawingml/2006/main">
+            <a:spLocks noGrp="1"/>
+          </p:cNvSpPr>
+          <p:nvPr/>
+        </p:nvSpPr>
+        <p:spPr>
+          <a:xfrm>
             <a:off x="7924800" y="4933950"/>
             <a:ext cx="3409950" cy="904875"/>
           </a:xfrm>
-          <a:prstGeom xmlns:a="http://schemas.openxmlformats.org/drawingml/2006/main" prst="rect">
-            <a:avLst/>
-          </a:prstGeom>
-          <a:noFill xmlns:a="http://schemas.openxmlformats.org/drawingml/2006/main"/>
-          <a:ln xmlns:a="http://schemas.openxmlformats.org/drawingml/2006/main" w="0">
+          <a:prstGeom prst="rect">
+            <a:avLst/>
+          </a:prstGeom>
+          <a:noFill/>
+          <a:ln w="0">
             <a:noFill/>
           </a:ln>
         </p:spPr>
         <p:txBody>
-          <a:bodyPr xmlns:a="http://schemas.openxmlformats.org/drawingml/2006/main">
+          <a:bodyPr>
             <a:noAutofit/>
           </a:bodyPr>
-          <a:lstStyle xmlns:a="http://schemas.openxmlformats.org/drawingml/2006/main"/>
-          <a:p xmlns:a="http://schemas.openxmlformats.org/drawingml/2006/main">
+          <a:lstStyle/>
+          <a:p>
             <a:pPr>
               <a:buNone/>
               <a:defRPr sz="1800" b="0">
@@ -6257,7 +6082,7 @@
               <a:t>Median age: 150 days</a:t>
             </a:r>
           </a:p>
-          <a:p xmlns:a="http://schemas.openxmlformats.org/drawingml/2006/main">
+          <a:p>
             <a:pPr>
               <a:buNone/>
               <a:defRPr sz="1800" b="0">
@@ -6281,7 +6106,7 @@
               <a:t>A queue to review</a:t>
             </a:r>
           </a:p>
-          <a:p xmlns:a="http://schemas.openxmlformats.org/drawingml/2006/main">
+          <a:p>
             <a:pPr>
               <a:buNone/>
               <a:defRPr sz="1800" b="0">
@@ -6309,37 +6134,37 @@
       </p:sp>
       <p:sp>
         <p:nvSpPr>
-          <p:cNvPr id="9" name="">
-            <a:extLst xmlns:a="http://schemas.openxmlformats.org/drawingml/2006/main">
+          <p:cNvPr id="9" name="Rectangle 8">
+            <a:extLst>
               <a:ext uri="{FF2B5EF4-FFF2-40B4-BE49-F238E27FC236}">
                 <a16:creationId xmlns:a16="http://schemas.microsoft.com/office/drawing/2014/main" id="{9D437113-C8BC-46D9-90CA-275F57FD0849}"/>
               </a:ext>
             </a:extLst>
           </p:cNvPr>
           <p:cNvSpPr>
-            <a:spLocks xmlns:a="http://schemas.openxmlformats.org/drawingml/2006/main" noGrp="1"/>
-          </p:cNvSpPr>
-          <p:nvPr/>
-        </p:nvSpPr>
-        <p:spPr>
-          <a:xfrm xmlns:a="http://schemas.openxmlformats.org/drawingml/2006/main">
+            <a:spLocks noGrp="1"/>
+          </p:cNvSpPr>
+          <p:nvPr/>
+        </p:nvSpPr>
+        <p:spPr>
+          <a:xfrm>
             <a:off x="609600" y="6000750"/>
             <a:ext cx="10810875" cy="361950"/>
           </a:xfrm>
-          <a:prstGeom xmlns:a="http://schemas.openxmlformats.org/drawingml/2006/main" prst="rect">
-            <a:avLst/>
-          </a:prstGeom>
-          <a:noFill xmlns:a="http://schemas.openxmlformats.org/drawingml/2006/main"/>
-          <a:ln xmlns:a="http://schemas.openxmlformats.org/drawingml/2006/main" w="0">
+          <a:prstGeom prst="rect">
+            <a:avLst/>
+          </a:prstGeom>
+          <a:noFill/>
+          <a:ln w="0">
             <a:noFill/>
           </a:ln>
         </p:spPr>
         <p:txBody>
-          <a:bodyPr xmlns:a="http://schemas.openxmlformats.org/drawingml/2006/main">
+          <a:bodyPr>
             <a:noAutofit/>
           </a:bodyPr>
-          <a:lstStyle xmlns:a="http://schemas.openxmlformats.org/drawingml/2006/main"/>
-          <a:p xmlns:a="http://schemas.openxmlformats.org/drawingml/2006/main">
+          <a:lstStyle/>
+          <a:p>
             <a:pPr>
               <a:buNone/>
               <a:defRPr sz="1575" b="0">
@@ -6372,12 +6197,12 @@
           <p:nvPr/>
         </p:nvGraphicFramePr>
         <p:xfrm>
-          <a:off xmlns:a="http://schemas.openxmlformats.org/drawingml/2006/main" x="552450" y="1990725"/>
-          <a:ext xmlns:a="http://schemas.openxmlformats.org/drawingml/2006/main" cx="6858000" cy="3705225"/>
+          <a:off x="552450" y="1990725"/>
+          <a:ext cx="6858000" cy="3705225"/>
         </p:xfrm>
-        <a:graphic xmlns:a="http://schemas.openxmlformats.org/drawingml/2006/main">
+        <a:graphic>
           <a:graphicData uri="http://schemas.openxmlformats.org/drawingml/2006/chart">
-            <c:chart xmlns:r="http://schemas.openxmlformats.org/officeDocument/2006/relationships" xmlns:c="http://schemas.openxmlformats.org/drawingml/2006/chart" r:id="R5ee4bbf46f82447e"/>
+            <c:chart xmlns:c="http://schemas.openxmlformats.org/drawingml/2006/chart" xmlns:r="http://schemas.openxmlformats.org/officeDocument/2006/relationships" r:id="rId3"/>
           </a:graphicData>
         </a:graphic>
       </p:graphicFrame>
@@ -6388,17 +6213,21 @@
       </p:ext>
     </p:extLst>
   </p:cSld>
+  <p:clrMapOvr>
+    <a:masterClrMapping/>
+  </p:clrMapOvr>
 </p:sld>
 </file>
 
 <file path=ppt/slides/slide7.xml><?xml version="1.0" encoding="utf-8"?>
-<p:sld xmlns:p="http://schemas.openxmlformats.org/presentationml/2006/main">
+<p:sld xmlns:a="http://schemas.openxmlformats.org/drawingml/2006/main" xmlns:r="http://schemas.openxmlformats.org/officeDocument/2006/relationships" xmlns:p="http://schemas.openxmlformats.org/presentationml/2006/main">
   <p:cSld>
     <p:bg>
       <p:bgPr>
-        <a:solidFill xmlns:a="http://schemas.openxmlformats.org/drawingml/2006/main">
+        <a:solidFill>
           <a:srgbClr val="F5F4EF"/>
         </a:solidFill>
+        <a:effectLst/>
       </p:bgPr>
     </p:bg>
     <p:spTree>
@@ -6408,41 +6237,46 @@
         <p:nvPr/>
       </p:nvGrpSpPr>
       <p:grpSpPr>
-        <a:xfrm xmlns:a="http://schemas.openxmlformats.org/drawingml/2006/main"/>
+        <a:xfrm>
+          <a:off x="0" y="0"/>
+          <a:ext cx="0" cy="0"/>
+          <a:chOff x="0" y="0"/>
+          <a:chExt cx="0" cy="0"/>
+        </a:xfrm>
       </p:grpSpPr>
       <p:sp>
         <p:nvSpPr>
-          <p:cNvPr id="12" name="">
-            <a:extLst xmlns:a="http://schemas.openxmlformats.org/drawingml/2006/main">
+          <p:cNvPr id="12" name="Rectangle 11">
+            <a:extLst>
               <a:ext uri="{FF2B5EF4-FFF2-40B4-BE49-F238E27FC236}">
                 <a16:creationId xmlns:a16="http://schemas.microsoft.com/office/drawing/2014/main" id="{BC389F48-7629-4AD2-B4AD-5458322DA05D}"/>
               </a:ext>
             </a:extLst>
           </p:cNvPr>
           <p:cNvSpPr>
-            <a:spLocks xmlns:a="http://schemas.openxmlformats.org/drawingml/2006/main" noGrp="1"/>
-          </p:cNvSpPr>
-          <p:nvPr/>
-        </p:nvSpPr>
-        <p:spPr>
-          <a:xfrm xmlns:a="http://schemas.openxmlformats.org/drawingml/2006/main">
+            <a:spLocks noGrp="1"/>
+          </p:cNvSpPr>
+          <p:nvPr/>
+        </p:nvSpPr>
+        <p:spPr>
+          <a:xfrm>
             <a:off x="609600" y="409575"/>
             <a:ext cx="10953750" cy="714375"/>
           </a:xfrm>
-          <a:prstGeom xmlns:a="http://schemas.openxmlformats.org/drawingml/2006/main" prst="rect">
-            <a:avLst/>
-          </a:prstGeom>
-          <a:noFill xmlns:a="http://schemas.openxmlformats.org/drawingml/2006/main"/>
-          <a:ln xmlns:a="http://schemas.openxmlformats.org/drawingml/2006/main" w="0">
+          <a:prstGeom prst="rect">
+            <a:avLst/>
+          </a:prstGeom>
+          <a:noFill/>
+          <a:ln w="0">
             <a:noFill/>
           </a:ln>
         </p:spPr>
         <p:txBody>
-          <a:bodyPr xmlns:a="http://schemas.openxmlformats.org/drawingml/2006/main">
+          <a:bodyPr>
             <a:noAutofit/>
           </a:bodyPr>
-          <a:lstStyle xmlns:a="http://schemas.openxmlformats.org/drawingml/2006/main"/>
-          <a:p xmlns:a="http://schemas.openxmlformats.org/drawingml/2006/main">
+          <a:lstStyle/>
+          <a:p>
             <a:pPr>
               <a:buNone/>
               <a:defRPr sz="3225" b="1">
@@ -6470,37 +6304,37 @@
       </p:sp>
       <p:sp>
         <p:nvSpPr>
-          <p:cNvPr id="2" name="">
-            <a:extLst xmlns:a="http://schemas.openxmlformats.org/drawingml/2006/main">
+          <p:cNvPr id="2" name="Rectangle 1">
+            <a:extLst>
               <a:ext uri="{FF2B5EF4-FFF2-40B4-BE49-F238E27FC236}">
                 <a16:creationId xmlns:a16="http://schemas.microsoft.com/office/drawing/2014/main" id="{1F279D86-D8BF-4076-A107-1F1D8EDDFB29}"/>
               </a:ext>
             </a:extLst>
           </p:cNvPr>
           <p:cNvSpPr>
-            <a:spLocks xmlns:a="http://schemas.openxmlformats.org/drawingml/2006/main" noGrp="1"/>
-          </p:cNvSpPr>
-          <p:nvPr/>
-        </p:nvSpPr>
-        <p:spPr>
-          <a:xfrm xmlns:a="http://schemas.openxmlformats.org/drawingml/2006/main">
+            <a:spLocks noGrp="1"/>
+          </p:cNvSpPr>
+          <p:nvPr/>
+        </p:nvSpPr>
+        <p:spPr>
+          <a:xfrm>
             <a:off x="11144250" y="6324600"/>
             <a:ext cx="476250" cy="285750"/>
           </a:xfrm>
-          <a:prstGeom xmlns:a="http://schemas.openxmlformats.org/drawingml/2006/main" prst="rect">
-            <a:avLst/>
-          </a:prstGeom>
-          <a:noFill xmlns:a="http://schemas.openxmlformats.org/drawingml/2006/main"/>
-          <a:ln xmlns:a="http://schemas.openxmlformats.org/drawingml/2006/main" w="0">
+          <a:prstGeom prst="rect">
+            <a:avLst/>
+          </a:prstGeom>
+          <a:noFill/>
+          <a:ln w="0">
             <a:noFill/>
           </a:ln>
         </p:spPr>
         <p:txBody>
-          <a:bodyPr xmlns:a="http://schemas.openxmlformats.org/drawingml/2006/main">
+          <a:bodyPr>
             <a:noAutofit/>
           </a:bodyPr>
-          <a:lstStyle xmlns:a="http://schemas.openxmlformats.org/drawingml/2006/main"/>
-          <a:p xmlns:a="http://schemas.openxmlformats.org/drawingml/2006/main">
+          <a:lstStyle/>
+          <a:p>
             <a:pPr>
               <a:buNone/>
               <a:defRPr sz="1350" b="0">
@@ -6528,37 +6362,37 @@
       </p:sp>
       <p:sp>
         <p:nvSpPr>
-          <p:cNvPr id="3" name="">
-            <a:extLst xmlns:a="http://schemas.openxmlformats.org/drawingml/2006/main">
+          <p:cNvPr id="3" name="Rectangle 2">
+            <a:extLst>
               <a:ext uri="{FF2B5EF4-FFF2-40B4-BE49-F238E27FC236}">
                 <a16:creationId xmlns:a16="http://schemas.microsoft.com/office/drawing/2014/main" id="{0E181C90-9565-4CBE-99B0-94615C2FE127}"/>
               </a:ext>
             </a:extLst>
           </p:cNvPr>
           <p:cNvSpPr>
-            <a:spLocks xmlns:a="http://schemas.openxmlformats.org/drawingml/2006/main" noGrp="1"/>
-          </p:cNvSpPr>
-          <p:nvPr/>
-        </p:nvSpPr>
-        <p:spPr>
-          <a:xfrm xmlns:a="http://schemas.openxmlformats.org/drawingml/2006/main">
+            <a:spLocks noGrp="1"/>
+          </p:cNvSpPr>
+          <p:nvPr/>
+        </p:nvSpPr>
+        <p:spPr>
+          <a:xfrm>
             <a:off x="609600" y="1466850"/>
             <a:ext cx="6286500" cy="447675"/>
           </a:xfrm>
-          <a:prstGeom xmlns:a="http://schemas.openxmlformats.org/drawingml/2006/main" prst="rect">
-            <a:avLst/>
-          </a:prstGeom>
-          <a:noFill xmlns:a="http://schemas.openxmlformats.org/drawingml/2006/main"/>
-          <a:ln xmlns:a="http://schemas.openxmlformats.org/drawingml/2006/main" w="0">
+          <a:prstGeom prst="rect">
+            <a:avLst/>
+          </a:prstGeom>
+          <a:noFill/>
+          <a:ln w="0">
             <a:noFill/>
           </a:ln>
         </p:spPr>
         <p:txBody>
-          <a:bodyPr xmlns:a="http://schemas.openxmlformats.org/drawingml/2006/main">
+          <a:bodyPr>
             <a:noAutofit/>
           </a:bodyPr>
-          <a:lstStyle xmlns:a="http://schemas.openxmlformats.org/drawingml/2006/main"/>
-          <a:p xmlns:a="http://schemas.openxmlformats.org/drawingml/2006/main">
+          <a:lstStyle/>
+          <a:p>
             <a:pPr>
               <a:buNone/>
               <a:defRPr sz="2250" b="1">
@@ -6586,37 +6420,37 @@
       </p:sp>
       <p:sp>
         <p:nvSpPr>
-          <p:cNvPr id="4" name="">
-            <a:extLst xmlns:a="http://schemas.openxmlformats.org/drawingml/2006/main">
+          <p:cNvPr id="4" name="Rectangle 3">
+            <a:extLst>
               <a:ext uri="{FF2B5EF4-FFF2-40B4-BE49-F238E27FC236}">
                 <a16:creationId xmlns:a16="http://schemas.microsoft.com/office/drawing/2014/main" id="{F76A8715-957D-41E5-BAD0-0B3F1591C4E3}"/>
               </a:ext>
             </a:extLst>
           </p:cNvPr>
           <p:cNvSpPr>
-            <a:spLocks xmlns:a="http://schemas.openxmlformats.org/drawingml/2006/main" noGrp="1"/>
-          </p:cNvSpPr>
-          <p:nvPr/>
-        </p:nvSpPr>
-        <p:spPr>
-          <a:xfrm xmlns:a="http://schemas.openxmlformats.org/drawingml/2006/main">
+            <a:spLocks noGrp="1"/>
+          </p:cNvSpPr>
+          <p:nvPr/>
+        </p:nvSpPr>
+        <p:spPr>
+          <a:xfrm>
             <a:off x="609600" y="2114550"/>
             <a:ext cx="6667500" cy="952500"/>
           </a:xfrm>
-          <a:prstGeom xmlns:a="http://schemas.openxmlformats.org/drawingml/2006/main" prst="rect">
-            <a:avLst/>
-          </a:prstGeom>
-          <a:noFill xmlns:a="http://schemas.openxmlformats.org/drawingml/2006/main"/>
-          <a:ln xmlns:a="http://schemas.openxmlformats.org/drawingml/2006/main" w="0">
+          <a:prstGeom prst="rect">
+            <a:avLst/>
+          </a:prstGeom>
+          <a:noFill/>
+          <a:ln w="0">
             <a:noFill/>
           </a:ln>
         </p:spPr>
         <p:txBody>
-          <a:bodyPr xmlns:a="http://schemas.openxmlformats.org/drawingml/2006/main">
+          <a:bodyPr>
             <a:noAutofit/>
           </a:bodyPr>
-          <a:lstStyle xmlns:a="http://schemas.openxmlformats.org/drawingml/2006/main"/>
-          <a:p xmlns:a="http://schemas.openxmlformats.org/drawingml/2006/main">
+          <a:lstStyle/>
+          <a:p>
             <a:pPr>
               <a:buNone/>
               <a:defRPr sz="2025" b="0">
@@ -6640,7 +6474,7 @@
               <a:t>“How do we know which parts to remove</a:t>
             </a:r>
           </a:p>
-          <a:p xmlns:a="http://schemas.openxmlformats.org/drawingml/2006/main">
+          <a:p>
             <a:pPr>
               <a:buNone/>
               <a:defRPr sz="2025" b="0">
@@ -6668,37 +6502,37 @@
       </p:sp>
       <p:sp>
         <p:nvSpPr>
-          <p:cNvPr id="5" name="">
-            <a:extLst xmlns:a="http://schemas.openxmlformats.org/drawingml/2006/main">
+          <p:cNvPr id="5" name="Rectangle 4">
+            <a:extLst>
               <a:ext uri="{FF2B5EF4-FFF2-40B4-BE49-F238E27FC236}">
                 <a16:creationId xmlns:a16="http://schemas.microsoft.com/office/drawing/2014/main" id="{B819C22A-19B2-4757-8D54-2B69F0CDC573}"/>
               </a:ext>
             </a:extLst>
           </p:cNvPr>
           <p:cNvSpPr>
-            <a:spLocks xmlns:a="http://schemas.openxmlformats.org/drawingml/2006/main" noGrp="1"/>
-          </p:cNvSpPr>
-          <p:nvPr/>
-        </p:nvSpPr>
-        <p:spPr>
-          <a:xfrm xmlns:a="http://schemas.openxmlformats.org/drawingml/2006/main">
+            <a:spLocks noGrp="1"/>
+          </p:cNvSpPr>
+          <p:nvPr/>
+        </p:nvSpPr>
+        <p:spPr>
+          <a:xfrm>
             <a:off x="609600" y="3381375"/>
             <a:ext cx="6667500" cy="857250"/>
           </a:xfrm>
-          <a:prstGeom xmlns:a="http://schemas.openxmlformats.org/drawingml/2006/main" prst="rect">
-            <a:avLst/>
-          </a:prstGeom>
-          <a:noFill xmlns:a="http://schemas.openxmlformats.org/drawingml/2006/main"/>
-          <a:ln xmlns:a="http://schemas.openxmlformats.org/drawingml/2006/main" w="0">
+          <a:prstGeom prst="rect">
+            <a:avLst/>
+          </a:prstGeom>
+          <a:noFill/>
+          <a:ln w="0">
             <a:noFill/>
           </a:ln>
         </p:spPr>
         <p:txBody>
-          <a:bodyPr xmlns:a="http://schemas.openxmlformats.org/drawingml/2006/main">
+          <a:bodyPr>
             <a:noAutofit/>
           </a:bodyPr>
-          <a:lstStyle xmlns:a="http://schemas.openxmlformats.org/drawingml/2006/main"/>
-          <a:p xmlns:a="http://schemas.openxmlformats.org/drawingml/2006/main">
+          <a:lstStyle/>
+          <a:p>
             <a:pPr>
               <a:buNone/>
               <a:defRPr sz="2025" b="0">
@@ -6722,7 +6556,7 @@
               <a:t>A hand-reviewed adjacency table, bodywork only.</a:t>
             </a:r>
           </a:p>
-          <a:p xmlns:a="http://schemas.openxmlformats.org/drawingml/2006/main">
+          <a:p>
             <a:pPr>
               <a:buNone/>
               <a:defRPr sz="2025" b="0">
@@ -6750,37 +6584,37 @@
       </p:sp>
       <p:sp>
         <p:nvSpPr>
-          <p:cNvPr id="6" name="">
-            <a:extLst xmlns:a="http://schemas.openxmlformats.org/drawingml/2006/main">
+          <p:cNvPr id="6" name="Rectangle 5">
+            <a:extLst>
               <a:ext uri="{FF2B5EF4-FFF2-40B4-BE49-F238E27FC236}">
                 <a16:creationId xmlns:a16="http://schemas.microsoft.com/office/drawing/2014/main" id="{CD561742-7960-4149-933B-C9EE70756C2D}"/>
               </a:ext>
             </a:extLst>
           </p:cNvPr>
           <p:cNvSpPr>
-            <a:spLocks xmlns:a="http://schemas.openxmlformats.org/drawingml/2006/main" noGrp="1"/>
-          </p:cNvSpPr>
-          <p:nvPr/>
-        </p:nvSpPr>
-        <p:spPr>
-          <a:xfrm xmlns:a="http://schemas.openxmlformats.org/drawingml/2006/main">
+            <a:spLocks noGrp="1"/>
+          </p:cNvSpPr>
+          <p:nvPr/>
+        </p:nvSpPr>
+        <p:spPr>
+          <a:xfrm>
             <a:off x="609600" y="4505325"/>
             <a:ext cx="6667500" cy="895350"/>
           </a:xfrm>
-          <a:prstGeom xmlns:a="http://schemas.openxmlformats.org/drawingml/2006/main" prst="rect">
-            <a:avLst/>
-          </a:prstGeom>
-          <a:noFill xmlns:a="http://schemas.openxmlformats.org/drawingml/2006/main"/>
-          <a:ln xmlns:a="http://schemas.openxmlformats.org/drawingml/2006/main" w="0">
+          <a:prstGeom prst="rect">
+            <a:avLst/>
+          </a:prstGeom>
+          <a:noFill/>
+          <a:ln w="0">
             <a:noFill/>
           </a:ln>
         </p:spPr>
         <p:txBody>
-          <a:bodyPr xmlns:a="http://schemas.openxmlformats.org/drawingml/2006/main">
+          <a:bodyPr>
             <a:noAutofit/>
           </a:bodyPr>
-          <a:lstStyle xmlns:a="http://schemas.openxmlformats.org/drawingml/2006/main"/>
-          <a:p xmlns:a="http://schemas.openxmlformats.org/drawingml/2006/main">
+          <a:lstStyle/>
+          <a:p>
             <a:pPr>
               <a:buNone/>
               <a:defRPr sz="2025" b="0">
@@ -6804,7 +6638,7 @@
               <a:t>Ground truth: zones, severity, kind, insurance, stage.</a:t>
             </a:r>
           </a:p>
-          <a:p xmlns:a="http://schemas.openxmlformats.org/drawingml/2006/main">
+          <a:p>
             <a:pPr>
               <a:buNone/>
               <a:defRPr sz="2025" b="0">
@@ -6832,37 +6666,37 @@
       </p:sp>
       <p:sp>
         <p:nvSpPr>
-          <p:cNvPr id="7" name="">
-            <a:extLst xmlns:a="http://schemas.openxmlformats.org/drawingml/2006/main">
+          <p:cNvPr id="7" name="Rectangle 6">
+            <a:extLst>
               <a:ext uri="{FF2B5EF4-FFF2-40B4-BE49-F238E27FC236}">
                 <a16:creationId xmlns:a16="http://schemas.microsoft.com/office/drawing/2014/main" id="{05C8C0DA-366F-48DC-9AED-DBFE564313CB}"/>
               </a:ext>
             </a:extLst>
           </p:cNvPr>
           <p:cNvSpPr>
-            <a:spLocks xmlns:a="http://schemas.openxmlformats.org/drawingml/2006/main" noGrp="1"/>
-          </p:cNvSpPr>
-          <p:nvPr/>
-        </p:nvSpPr>
-        <p:spPr>
-          <a:xfrm xmlns:a="http://schemas.openxmlformats.org/drawingml/2006/main">
+            <a:spLocks noGrp="1"/>
+          </p:cNvSpPr>
+          <p:nvPr/>
+        </p:nvSpPr>
+        <p:spPr>
+          <a:xfrm>
             <a:off x="7962900" y="1466850"/>
             <a:ext cx="3333750" cy="447675"/>
           </a:xfrm>
-          <a:prstGeom xmlns:a="http://schemas.openxmlformats.org/drawingml/2006/main" prst="rect">
-            <a:avLst/>
-          </a:prstGeom>
-          <a:noFill xmlns:a="http://schemas.openxmlformats.org/drawingml/2006/main"/>
-          <a:ln xmlns:a="http://schemas.openxmlformats.org/drawingml/2006/main" w="0">
+          <a:prstGeom prst="rect">
+            <a:avLst/>
+          </a:prstGeom>
+          <a:noFill/>
+          <a:ln w="0">
             <a:noFill/>
           </a:ln>
         </p:spPr>
         <p:txBody>
-          <a:bodyPr xmlns:a="http://schemas.openxmlformats.org/drawingml/2006/main">
+          <a:bodyPr>
             <a:noAutofit/>
           </a:bodyPr>
-          <a:lstStyle xmlns:a="http://schemas.openxmlformats.org/drawingml/2006/main"/>
-          <a:p xmlns:a="http://schemas.openxmlformats.org/drawingml/2006/main">
+          <a:lstStyle/>
+          <a:p>
             <a:pPr>
               <a:buNone/>
               <a:defRPr sz="2250" b="1">
@@ -6890,37 +6724,37 @@
       </p:sp>
       <p:sp>
         <p:nvSpPr>
-          <p:cNvPr id="8" name="">
-            <a:extLst xmlns:a="http://schemas.openxmlformats.org/drawingml/2006/main">
+          <p:cNvPr id="8" name="Rectangle 7">
+            <a:extLst>
               <a:ext uri="{FF2B5EF4-FFF2-40B4-BE49-F238E27FC236}">
                 <a16:creationId xmlns:a16="http://schemas.microsoft.com/office/drawing/2014/main" id="{3B75BDFE-74AA-4D75-B56B-D4D3E2FBC8FF}"/>
               </a:ext>
             </a:extLst>
           </p:cNvPr>
           <p:cNvSpPr>
-            <a:spLocks xmlns:a="http://schemas.openxmlformats.org/drawingml/2006/main" noGrp="1"/>
-          </p:cNvSpPr>
-          <p:nvPr/>
-        </p:nvSpPr>
-        <p:spPr>
-          <a:xfrm xmlns:a="http://schemas.openxmlformats.org/drawingml/2006/main">
+            <a:spLocks noGrp="1"/>
+          </p:cNvSpPr>
+          <p:nvPr/>
+        </p:nvSpPr>
+        <p:spPr>
+          <a:xfrm>
             <a:off x="7962900" y="2219325"/>
             <a:ext cx="3333750" cy="876300"/>
           </a:xfrm>
-          <a:prstGeom xmlns:a="http://schemas.openxmlformats.org/drawingml/2006/main" prst="rect">
-            <a:avLst/>
-          </a:prstGeom>
-          <a:noFill xmlns:a="http://schemas.openxmlformats.org/drawingml/2006/main"/>
-          <a:ln xmlns:a="http://schemas.openxmlformats.org/drawingml/2006/main" w="0">
+          <a:prstGeom prst="rect">
+            <a:avLst/>
+          </a:prstGeom>
+          <a:noFill/>
+          <a:ln w="0">
             <a:noFill/>
           </a:ln>
         </p:spPr>
         <p:txBody>
-          <a:bodyPr xmlns:a="http://schemas.openxmlformats.org/drawingml/2006/main">
+          <a:bodyPr>
             <a:noAutofit/>
           </a:bodyPr>
-          <a:lstStyle xmlns:a="http://schemas.openxmlformats.org/drawingml/2006/main"/>
-          <a:p xmlns:a="http://schemas.openxmlformats.org/drawingml/2006/main">
+          <a:lstStyle/>
+          <a:p>
             <a:pPr>
               <a:buNone/>
               <a:defRPr sz="1875" b="0">
@@ -6944,7 +6778,7 @@
               <a:t>Synthetic phrase library:</a:t>
             </a:r>
           </a:p>
-          <a:p xmlns:a="http://schemas.openxmlformats.org/drawingml/2006/main">
+          <a:p>
             <a:pPr>
               <a:buNone/>
               <a:defRPr sz="1875" b="0">
@@ -6972,37 +6806,37 @@
       </p:sp>
       <p:sp>
         <p:nvSpPr>
-          <p:cNvPr id="9" name="">
-            <a:extLst xmlns:a="http://schemas.openxmlformats.org/drawingml/2006/main">
+          <p:cNvPr id="9" name="Rectangle 8">
+            <a:extLst>
               <a:ext uri="{FF2B5EF4-FFF2-40B4-BE49-F238E27FC236}">
                 <a16:creationId xmlns:a16="http://schemas.microsoft.com/office/drawing/2014/main" id="{083F0F77-EC28-4E74-B2DD-1DAC3E22F23D}"/>
               </a:ext>
             </a:extLst>
           </p:cNvPr>
           <p:cNvSpPr>
-            <a:spLocks xmlns:a="http://schemas.openxmlformats.org/drawingml/2006/main" noGrp="1"/>
-          </p:cNvSpPr>
-          <p:nvPr/>
-        </p:nvSpPr>
-        <p:spPr>
-          <a:xfrm xmlns:a="http://schemas.openxmlformats.org/drawingml/2006/main">
+            <a:spLocks noGrp="1"/>
+          </p:cNvSpPr>
+          <p:nvPr/>
+        </p:nvSpPr>
+        <p:spPr>
+          <a:xfrm>
             <a:off x="7962900" y="3457575"/>
             <a:ext cx="3333750" cy="876300"/>
           </a:xfrm>
-          <a:prstGeom xmlns:a="http://schemas.openxmlformats.org/drawingml/2006/main" prst="rect">
-            <a:avLst/>
-          </a:prstGeom>
-          <a:noFill xmlns:a="http://schemas.openxmlformats.org/drawingml/2006/main"/>
-          <a:ln xmlns:a="http://schemas.openxmlformats.org/drawingml/2006/main" w="0">
+          <a:prstGeom prst="rect">
+            <a:avLst/>
+          </a:prstGeom>
+          <a:noFill/>
+          <a:ln w="0">
             <a:noFill/>
           </a:ln>
         </p:spPr>
         <p:txBody>
-          <a:bodyPr xmlns:a="http://schemas.openxmlformats.org/drawingml/2006/main">
+          <a:bodyPr>
             <a:noAutofit/>
           </a:bodyPr>
-          <a:lstStyle xmlns:a="http://schemas.openxmlformats.org/drawingml/2006/main"/>
-          <a:p xmlns:a="http://schemas.openxmlformats.org/drawingml/2006/main">
+          <a:lstStyle/>
+          <a:p>
             <a:pPr>
               <a:buNone/>
               <a:defRPr sz="1875" b="0">
@@ -7026,7 +6860,7 @@
               <a:t>Severity ceiling:</a:t>
             </a:r>
           </a:p>
-          <a:p xmlns:a="http://schemas.openxmlformats.org/drawingml/2006/main">
+          <a:p>
             <a:pPr>
               <a:buNone/>
               <a:defRPr sz="1875" b="0">
@@ -7054,37 +6888,37 @@
       </p:sp>
       <p:sp>
         <p:nvSpPr>
-          <p:cNvPr id="10" name="">
-            <a:extLst xmlns:a="http://schemas.openxmlformats.org/drawingml/2006/main">
+          <p:cNvPr id="10" name="Rectangle 9">
+            <a:extLst>
               <a:ext uri="{FF2B5EF4-FFF2-40B4-BE49-F238E27FC236}">
                 <a16:creationId xmlns:a16="http://schemas.microsoft.com/office/drawing/2014/main" id="{E7E7DBCA-9497-4FB0-A559-61AD4249BD49}"/>
               </a:ext>
             </a:extLst>
           </p:cNvPr>
           <p:cNvSpPr>
-            <a:spLocks xmlns:a="http://schemas.openxmlformats.org/drawingml/2006/main" noGrp="1"/>
-          </p:cNvSpPr>
-          <p:nvPr/>
-        </p:nvSpPr>
-        <p:spPr>
-          <a:xfrm xmlns:a="http://schemas.openxmlformats.org/drawingml/2006/main">
+            <a:spLocks noGrp="1"/>
+          </p:cNvSpPr>
+          <p:nvPr/>
+        </p:nvSpPr>
+        <p:spPr>
+          <a:xfrm>
             <a:off x="7962900" y="4695825"/>
             <a:ext cx="3333750" cy="876300"/>
           </a:xfrm>
-          <a:prstGeom xmlns:a="http://schemas.openxmlformats.org/drawingml/2006/main" prst="rect">
-            <a:avLst/>
-          </a:prstGeom>
-          <a:noFill xmlns:a="http://schemas.openxmlformats.org/drawingml/2006/main"/>
-          <a:ln xmlns:a="http://schemas.openxmlformats.org/drawingml/2006/main" w="0">
+          <a:prstGeom prst="rect">
+            <a:avLst/>
+          </a:prstGeom>
+          <a:noFill/>
+          <a:ln w="0">
             <a:noFill/>
           </a:ln>
         </p:spPr>
         <p:txBody>
-          <a:bodyPr xmlns:a="http://schemas.openxmlformats.org/drawingml/2006/main">
+          <a:bodyPr>
             <a:noAutofit/>
           </a:bodyPr>
-          <a:lstStyle xmlns:a="http://schemas.openxmlformats.org/drawingml/2006/main"/>
-          <a:p xmlns:a="http://schemas.openxmlformats.org/drawingml/2006/main">
+          <a:lstStyle/>
+          <a:p>
             <a:pPr>
               <a:buNone/>
               <a:defRPr sz="1875" b="0">
@@ -7108,7 +6942,7 @@
               <a:t>2 unmapped terms:</a:t>
             </a:r>
           </a:p>
-          <a:p xmlns:a="http://schemas.openxmlformats.org/drawingml/2006/main">
+          <a:p>
             <a:pPr>
               <a:buNone/>
               <a:defRPr sz="1875" b="0">
@@ -7136,37 +6970,37 @@
       </p:sp>
       <p:sp>
         <p:nvSpPr>
-          <p:cNvPr id="11" name="">
-            <a:extLst xmlns:a="http://schemas.openxmlformats.org/drawingml/2006/main">
+          <p:cNvPr id="11" name="Rectangle 10">
+            <a:extLst>
               <a:ext uri="{FF2B5EF4-FFF2-40B4-BE49-F238E27FC236}">
                 <a16:creationId xmlns:a16="http://schemas.microsoft.com/office/drawing/2014/main" id="{CD34A495-CE5A-4E7E-9DBF-ED860B8E05B7}"/>
               </a:ext>
             </a:extLst>
           </p:cNvPr>
           <p:cNvSpPr>
-            <a:spLocks xmlns:a="http://schemas.openxmlformats.org/drawingml/2006/main" noGrp="1"/>
-          </p:cNvSpPr>
-          <p:nvPr/>
-        </p:nvSpPr>
-        <p:spPr>
-          <a:xfrm xmlns:a="http://schemas.openxmlformats.org/drawingml/2006/main">
+            <a:spLocks noGrp="1"/>
+          </p:cNvSpPr>
+          <p:nvPr/>
+        </p:nvSpPr>
+        <p:spPr>
+          <a:xfrm>
             <a:off x="609600" y="6000750"/>
             <a:ext cx="10763250" cy="381000"/>
           </a:xfrm>
-          <a:prstGeom xmlns:a="http://schemas.openxmlformats.org/drawingml/2006/main" prst="rect">
-            <a:avLst/>
-          </a:prstGeom>
-          <a:noFill xmlns:a="http://schemas.openxmlformats.org/drawingml/2006/main"/>
-          <a:ln xmlns:a="http://schemas.openxmlformats.org/drawingml/2006/main" w="0">
+          <a:prstGeom prst="rect">
+            <a:avLst/>
+          </a:prstGeom>
+          <a:noFill/>
+          <a:ln w="0">
             <a:noFill/>
           </a:ln>
         </p:spPr>
         <p:txBody>
-          <a:bodyPr xmlns:a="http://schemas.openxmlformats.org/drawingml/2006/main">
+          <a:bodyPr>
             <a:noAutofit/>
           </a:bodyPr>
-          <a:lstStyle xmlns:a="http://schemas.openxmlformats.org/drawingml/2006/main"/>
-          <a:p xmlns:a="http://schemas.openxmlformats.org/drawingml/2006/main">
+          <a:lstStyle/>
+          <a:p>
             <a:pPr>
               <a:buNone/>
               <a:defRPr sz="1650" b="0">
@@ -7199,17 +7033,21 @@
       </p:ext>
     </p:extLst>
   </p:cSld>
+  <p:clrMapOvr>
+    <a:masterClrMapping/>
+  </p:clrMapOvr>
 </p:sld>
 </file>
 
 <file path=ppt/slides/slide8.xml><?xml version="1.0" encoding="utf-8"?>
-<p:sld xmlns:p="http://schemas.openxmlformats.org/presentationml/2006/main">
+<p:sld xmlns:a="http://schemas.openxmlformats.org/drawingml/2006/main" xmlns:r="http://schemas.openxmlformats.org/officeDocument/2006/relationships" xmlns:p="http://schemas.openxmlformats.org/presentationml/2006/main">
   <p:cSld>
     <p:bg>
       <p:bgPr>
-        <a:solidFill xmlns:a="http://schemas.openxmlformats.org/drawingml/2006/main">
+        <a:solidFill>
           <a:srgbClr val="F5F4EF"/>
         </a:solidFill>
+        <a:effectLst/>
       </p:bgPr>
     </p:bg>
     <p:spTree>
@@ -7219,41 +7057,46 @@
         <p:nvPr/>
       </p:nvGrpSpPr>
       <p:grpSpPr>
-        <a:xfrm xmlns:a="http://schemas.openxmlformats.org/drawingml/2006/main"/>
+        <a:xfrm>
+          <a:off x="0" y="0"/>
+          <a:ext cx="0" cy="0"/>
+          <a:chOff x="0" y="0"/>
+          <a:chExt cx="0" cy="0"/>
+        </a:xfrm>
       </p:grpSpPr>
       <p:sp>
         <p:nvSpPr>
-          <p:cNvPr id="16" name="">
-            <a:extLst xmlns:a="http://schemas.openxmlformats.org/drawingml/2006/main">
+          <p:cNvPr id="16" name="Rectangle 15">
+            <a:extLst>
               <a:ext uri="{FF2B5EF4-FFF2-40B4-BE49-F238E27FC236}">
                 <a16:creationId xmlns:a16="http://schemas.microsoft.com/office/drawing/2014/main" id="{7BDACD64-46C6-49A3-A770-9769CE4D17FE}"/>
               </a:ext>
             </a:extLst>
           </p:cNvPr>
           <p:cNvSpPr>
-            <a:spLocks xmlns:a="http://schemas.openxmlformats.org/drawingml/2006/main" noGrp="1"/>
-          </p:cNvSpPr>
-          <p:nvPr/>
-        </p:nvSpPr>
-        <p:spPr>
-          <a:xfrm xmlns:a="http://schemas.openxmlformats.org/drawingml/2006/main">
+            <a:spLocks noGrp="1"/>
+          </p:cNvSpPr>
+          <p:nvPr/>
+        </p:nvSpPr>
+        <p:spPr>
+          <a:xfrm>
             <a:off x="609600" y="409575"/>
             <a:ext cx="10953750" cy="714375"/>
           </a:xfrm>
-          <a:prstGeom xmlns:a="http://schemas.openxmlformats.org/drawingml/2006/main" prst="rect">
-            <a:avLst/>
-          </a:prstGeom>
-          <a:noFill xmlns:a="http://schemas.openxmlformats.org/drawingml/2006/main"/>
-          <a:ln xmlns:a="http://schemas.openxmlformats.org/drawingml/2006/main" w="0">
+          <a:prstGeom prst="rect">
+            <a:avLst/>
+          </a:prstGeom>
+          <a:noFill/>
+          <a:ln w="0">
             <a:noFill/>
           </a:ln>
         </p:spPr>
         <p:txBody>
-          <a:bodyPr xmlns:a="http://schemas.openxmlformats.org/drawingml/2006/main">
+          <a:bodyPr>
             <a:noAutofit/>
           </a:bodyPr>
-          <a:lstStyle xmlns:a="http://schemas.openxmlformats.org/drawingml/2006/main"/>
-          <a:p xmlns:a="http://schemas.openxmlformats.org/drawingml/2006/main">
+          <a:lstStyle/>
+          <a:p>
             <a:pPr>
               <a:buNone/>
               <a:defRPr sz="3225" b="1">
@@ -7281,37 +7124,37 @@
       </p:sp>
       <p:sp>
         <p:nvSpPr>
-          <p:cNvPr id="2" name="">
-            <a:extLst xmlns:a="http://schemas.openxmlformats.org/drawingml/2006/main">
+          <p:cNvPr id="2" name="Rectangle 1">
+            <a:extLst>
               <a:ext uri="{FF2B5EF4-FFF2-40B4-BE49-F238E27FC236}">
                 <a16:creationId xmlns:a16="http://schemas.microsoft.com/office/drawing/2014/main" id="{3EA85EF9-7674-495A-ACED-C3C810E7EB39}"/>
               </a:ext>
             </a:extLst>
           </p:cNvPr>
           <p:cNvSpPr>
-            <a:spLocks xmlns:a="http://schemas.openxmlformats.org/drawingml/2006/main" noGrp="1"/>
-          </p:cNvSpPr>
-          <p:nvPr/>
-        </p:nvSpPr>
-        <p:spPr>
-          <a:xfrm xmlns:a="http://schemas.openxmlformats.org/drawingml/2006/main">
+            <a:spLocks noGrp="1"/>
+          </p:cNvSpPr>
+          <p:nvPr/>
+        </p:nvSpPr>
+        <p:spPr>
+          <a:xfrm>
             <a:off x="11144250" y="6324600"/>
             <a:ext cx="476250" cy="285750"/>
           </a:xfrm>
-          <a:prstGeom xmlns:a="http://schemas.openxmlformats.org/drawingml/2006/main" prst="rect">
-            <a:avLst/>
-          </a:prstGeom>
-          <a:noFill xmlns:a="http://schemas.openxmlformats.org/drawingml/2006/main"/>
-          <a:ln xmlns:a="http://schemas.openxmlformats.org/drawingml/2006/main" w="0">
+          <a:prstGeom prst="rect">
+            <a:avLst/>
+          </a:prstGeom>
+          <a:noFill/>
+          <a:ln w="0">
             <a:noFill/>
           </a:ln>
         </p:spPr>
         <p:txBody>
-          <a:bodyPr xmlns:a="http://schemas.openxmlformats.org/drawingml/2006/main">
+          <a:bodyPr>
             <a:noAutofit/>
           </a:bodyPr>
-          <a:lstStyle xmlns:a="http://schemas.openxmlformats.org/drawingml/2006/main"/>
-          <a:p xmlns:a="http://schemas.openxmlformats.org/drawingml/2006/main">
+          <a:lstStyle/>
+          <a:p>
             <a:pPr>
               <a:buNone/>
               <a:defRPr sz="1350" b="0">
@@ -7339,37 +7182,37 @@
       </p:sp>
       <p:sp>
         <p:nvSpPr>
-          <p:cNvPr id="3" name="">
-            <a:extLst xmlns:a="http://schemas.openxmlformats.org/drawingml/2006/main">
+          <p:cNvPr id="3" name="Rectangle 2">
+            <a:extLst>
               <a:ext uri="{FF2B5EF4-FFF2-40B4-BE49-F238E27FC236}">
                 <a16:creationId xmlns:a16="http://schemas.microsoft.com/office/drawing/2014/main" id="{AFE3D03B-DF02-4B5C-A3F5-4CC846EE9AD8}"/>
               </a:ext>
             </a:extLst>
           </p:cNvPr>
           <p:cNvSpPr>
-            <a:spLocks xmlns:a="http://schemas.openxmlformats.org/drawingml/2006/main" noGrp="1"/>
-          </p:cNvSpPr>
-          <p:nvPr/>
-        </p:nvSpPr>
-        <p:spPr>
-          <a:xfrm xmlns:a="http://schemas.openxmlformats.org/drawingml/2006/main">
+            <a:spLocks noGrp="1"/>
+          </p:cNvSpPr>
+          <p:nvPr/>
+        </p:nvSpPr>
+        <p:spPr>
+          <a:xfrm>
             <a:off x="609600" y="1524000"/>
             <a:ext cx="666750" cy="523875"/>
           </a:xfrm>
-          <a:prstGeom xmlns:a="http://schemas.openxmlformats.org/drawingml/2006/main" prst="rect">
-            <a:avLst/>
-          </a:prstGeom>
-          <a:noFill xmlns:a="http://schemas.openxmlformats.org/drawingml/2006/main"/>
-          <a:ln xmlns:a="http://schemas.openxmlformats.org/drawingml/2006/main" w="0">
+          <a:prstGeom prst="rect">
+            <a:avLst/>
+          </a:prstGeom>
+          <a:noFill/>
+          <a:ln w="0">
             <a:noFill/>
           </a:ln>
         </p:spPr>
         <p:txBody>
-          <a:bodyPr xmlns:a="http://schemas.openxmlformats.org/drawingml/2006/main">
+          <a:bodyPr>
             <a:noAutofit/>
           </a:bodyPr>
-          <a:lstStyle xmlns:a="http://schemas.openxmlformats.org/drawingml/2006/main"/>
-          <a:p xmlns:a="http://schemas.openxmlformats.org/drawingml/2006/main">
+          <a:lstStyle/>
+          <a:p>
             <a:pPr>
               <a:buNone/>
               <a:defRPr sz="2925" b="1">
@@ -7397,37 +7240,37 @@
       </p:sp>
       <p:sp>
         <p:nvSpPr>
-          <p:cNvPr id="4" name="">
-            <a:extLst xmlns:a="http://schemas.openxmlformats.org/drawingml/2006/main">
+          <p:cNvPr id="4" name="Rectangle 3">
+            <a:extLst>
               <a:ext uri="{FF2B5EF4-FFF2-40B4-BE49-F238E27FC236}">
                 <a16:creationId xmlns:a16="http://schemas.microsoft.com/office/drawing/2014/main" id="{8014000B-D2D6-4796-A1E6-1E618D136650}"/>
               </a:ext>
             </a:extLst>
           </p:cNvPr>
           <p:cNvSpPr>
-            <a:spLocks xmlns:a="http://schemas.openxmlformats.org/drawingml/2006/main" noGrp="1"/>
-          </p:cNvSpPr>
-          <p:nvPr/>
-        </p:nvSpPr>
-        <p:spPr>
-          <a:xfrm xmlns:a="http://schemas.openxmlformats.org/drawingml/2006/main">
+            <a:spLocks noGrp="1"/>
+          </p:cNvSpPr>
+          <p:nvPr/>
+        </p:nvSpPr>
+        <p:spPr>
+          <a:xfrm>
             <a:off x="1466850" y="1524000"/>
             <a:ext cx="4286250" cy="457200"/>
           </a:xfrm>
-          <a:prstGeom xmlns:a="http://schemas.openxmlformats.org/drawingml/2006/main" prst="rect">
-            <a:avLst/>
-          </a:prstGeom>
-          <a:noFill xmlns:a="http://schemas.openxmlformats.org/drawingml/2006/main"/>
-          <a:ln xmlns:a="http://schemas.openxmlformats.org/drawingml/2006/main" w="0">
+          <a:prstGeom prst="rect">
+            <a:avLst/>
+          </a:prstGeom>
+          <a:noFill/>
+          <a:ln w="0">
             <a:noFill/>
           </a:ln>
         </p:spPr>
         <p:txBody>
-          <a:bodyPr xmlns:a="http://schemas.openxmlformats.org/drawingml/2006/main">
+          <a:bodyPr>
             <a:noAutofit/>
           </a:bodyPr>
-          <a:lstStyle xmlns:a="http://schemas.openxmlformats.org/drawingml/2006/main"/>
-          <a:p xmlns:a="http://schemas.openxmlformats.org/drawingml/2006/main">
+          <a:lstStyle/>
+          <a:p>
             <a:pPr>
               <a:buNone/>
               <a:defRPr sz="2175" b="1">
@@ -7455,37 +7298,37 @@
       </p:sp>
       <p:sp>
         <p:nvSpPr>
-          <p:cNvPr id="5" name="">
-            <a:extLst xmlns:a="http://schemas.openxmlformats.org/drawingml/2006/main">
+          <p:cNvPr id="5" name="Rectangle 4">
+            <a:extLst>
               <a:ext uri="{FF2B5EF4-FFF2-40B4-BE49-F238E27FC236}">
                 <a16:creationId xmlns:a16="http://schemas.microsoft.com/office/drawing/2014/main" id="{F586B2EF-AE83-4759-A5FD-D7F0B078C278}"/>
               </a:ext>
             </a:extLst>
           </p:cNvPr>
           <p:cNvSpPr>
-            <a:spLocks xmlns:a="http://schemas.openxmlformats.org/drawingml/2006/main" noGrp="1"/>
-          </p:cNvSpPr>
-          <p:nvPr/>
-        </p:nvSpPr>
-        <p:spPr>
-          <a:xfrm xmlns:a="http://schemas.openxmlformats.org/drawingml/2006/main">
+            <a:spLocks noGrp="1"/>
+          </p:cNvSpPr>
+          <p:nvPr/>
+        </p:nvSpPr>
+        <p:spPr>
+          <a:xfrm>
             <a:off x="1466850" y="1981200"/>
             <a:ext cx="9620250" cy="457200"/>
           </a:xfrm>
-          <a:prstGeom xmlns:a="http://schemas.openxmlformats.org/drawingml/2006/main" prst="rect">
-            <a:avLst/>
-          </a:prstGeom>
-          <a:noFill xmlns:a="http://schemas.openxmlformats.org/drawingml/2006/main"/>
-          <a:ln xmlns:a="http://schemas.openxmlformats.org/drawingml/2006/main" w="0">
+          <a:prstGeom prst="rect">
+            <a:avLst/>
+          </a:prstGeom>
+          <a:noFill/>
+          <a:ln w="0">
             <a:noFill/>
           </a:ln>
         </p:spPr>
         <p:txBody>
-          <a:bodyPr xmlns:a="http://schemas.openxmlformats.org/drawingml/2006/main">
+          <a:bodyPr>
             <a:noAutofit/>
           </a:bodyPr>
-          <a:lstStyle xmlns:a="http://schemas.openxmlformats.org/drawingml/2006/main"/>
-          <a:p xmlns:a="http://schemas.openxmlformats.org/drawingml/2006/main">
+          <a:lstStyle/>
+          <a:p>
             <a:pPr>
               <a:buNone/>
               <a:defRPr sz="1875" b="0">
@@ -7505,7 +7348,7 @@
                 <a:latin typeface="Arial"/>
                 <a:ea typeface="Arial"/>
                 <a:cs typeface="Arial"/>
-                <a:hlinkClick xmlns:r="http://schemas.openxmlformats.org/officeDocument/2006/relationships" r:id="Rd4b577f3b94c4ad0"/>
+                <a:hlinkClick r:id="rId3"/>
               </a:rPr>
               <a:t>wolf-day-damage.vercel.app/dashboard</a:t>
             </a:r>
@@ -7514,37 +7357,37 @@
       </p:sp>
       <p:sp>
         <p:nvSpPr>
-          <p:cNvPr id="6" name="">
-            <a:extLst xmlns:a="http://schemas.openxmlformats.org/drawingml/2006/main">
+          <p:cNvPr id="6" name="Rectangle 5">
+            <a:extLst>
               <a:ext uri="{FF2B5EF4-FFF2-40B4-BE49-F238E27FC236}">
                 <a16:creationId xmlns:a16="http://schemas.microsoft.com/office/drawing/2014/main" id="{9D4244CA-27DC-40D6-8AFA-08C4F3B00560}"/>
               </a:ext>
             </a:extLst>
           </p:cNvPr>
           <p:cNvSpPr>
-            <a:spLocks xmlns:a="http://schemas.openxmlformats.org/drawingml/2006/main" noGrp="1"/>
-          </p:cNvSpPr>
-          <p:nvPr/>
-        </p:nvSpPr>
-        <p:spPr>
-          <a:xfrm xmlns:a="http://schemas.openxmlformats.org/drawingml/2006/main">
+            <a:spLocks noGrp="1"/>
+          </p:cNvSpPr>
+          <p:nvPr/>
+        </p:nvSpPr>
+        <p:spPr>
+          <a:xfrm>
             <a:off x="609600" y="2571750"/>
             <a:ext cx="666750" cy="523875"/>
           </a:xfrm>
-          <a:prstGeom xmlns:a="http://schemas.openxmlformats.org/drawingml/2006/main" prst="rect">
-            <a:avLst/>
-          </a:prstGeom>
-          <a:noFill xmlns:a="http://schemas.openxmlformats.org/drawingml/2006/main"/>
-          <a:ln xmlns:a="http://schemas.openxmlformats.org/drawingml/2006/main" w="0">
+          <a:prstGeom prst="rect">
+            <a:avLst/>
+          </a:prstGeom>
+          <a:noFill/>
+          <a:ln w="0">
             <a:noFill/>
           </a:ln>
         </p:spPr>
         <p:txBody>
-          <a:bodyPr xmlns:a="http://schemas.openxmlformats.org/drawingml/2006/main">
+          <a:bodyPr>
             <a:noAutofit/>
           </a:bodyPr>
-          <a:lstStyle xmlns:a="http://schemas.openxmlformats.org/drawingml/2006/main"/>
-          <a:p xmlns:a="http://schemas.openxmlformats.org/drawingml/2006/main">
+          <a:lstStyle/>
+          <a:p>
             <a:pPr>
               <a:buNone/>
               <a:defRPr sz="2925" b="1">
@@ -7572,37 +7415,37 @@
       </p:sp>
       <p:sp>
         <p:nvSpPr>
-          <p:cNvPr id="7" name="">
-            <a:extLst xmlns:a="http://schemas.openxmlformats.org/drawingml/2006/main">
+          <p:cNvPr id="7" name="Rectangle 6">
+            <a:extLst>
               <a:ext uri="{FF2B5EF4-FFF2-40B4-BE49-F238E27FC236}">
                 <a16:creationId xmlns:a16="http://schemas.microsoft.com/office/drawing/2014/main" id="{FD7984A3-654D-4EEF-B0A6-A9F86F939C77}"/>
               </a:ext>
             </a:extLst>
           </p:cNvPr>
           <p:cNvSpPr>
-            <a:spLocks xmlns:a="http://schemas.openxmlformats.org/drawingml/2006/main" noGrp="1"/>
-          </p:cNvSpPr>
-          <p:nvPr/>
-        </p:nvSpPr>
-        <p:spPr>
-          <a:xfrm xmlns:a="http://schemas.openxmlformats.org/drawingml/2006/main">
+            <a:spLocks noGrp="1"/>
+          </p:cNvSpPr>
+          <p:nvPr/>
+        </p:nvSpPr>
+        <p:spPr>
+          <a:xfrm>
             <a:off x="1466850" y="2571750"/>
             <a:ext cx="4286250" cy="457200"/>
           </a:xfrm>
-          <a:prstGeom xmlns:a="http://schemas.openxmlformats.org/drawingml/2006/main" prst="rect">
-            <a:avLst/>
-          </a:prstGeom>
-          <a:noFill xmlns:a="http://schemas.openxmlformats.org/drawingml/2006/main"/>
-          <a:ln xmlns:a="http://schemas.openxmlformats.org/drawingml/2006/main" w="0">
+          <a:prstGeom prst="rect">
+            <a:avLst/>
+          </a:prstGeom>
+          <a:noFill/>
+          <a:ln w="0">
             <a:noFill/>
           </a:ln>
         </p:spPr>
         <p:txBody>
-          <a:bodyPr xmlns:a="http://schemas.openxmlformats.org/drawingml/2006/main">
+          <a:bodyPr>
             <a:noAutofit/>
           </a:bodyPr>
-          <a:lstStyle xmlns:a="http://schemas.openxmlformats.org/drawingml/2006/main"/>
-          <a:p xmlns:a="http://schemas.openxmlformats.org/drawingml/2006/main">
+          <a:lstStyle/>
+          <a:p>
             <a:pPr>
               <a:buNone/>
               <a:defRPr sz="2175" b="1">
@@ -7630,37 +7473,37 @@
       </p:sp>
       <p:sp>
         <p:nvSpPr>
-          <p:cNvPr id="8" name="">
-            <a:extLst xmlns:a="http://schemas.openxmlformats.org/drawingml/2006/main">
+          <p:cNvPr id="8" name="Rectangle 7">
+            <a:extLst>
               <a:ext uri="{FF2B5EF4-FFF2-40B4-BE49-F238E27FC236}">
                 <a16:creationId xmlns:a16="http://schemas.microsoft.com/office/drawing/2014/main" id="{BA85B0F8-E75F-48ED-867C-D45A8B045F24}"/>
               </a:ext>
             </a:extLst>
           </p:cNvPr>
           <p:cNvSpPr>
-            <a:spLocks xmlns:a="http://schemas.openxmlformats.org/drawingml/2006/main" noGrp="1"/>
-          </p:cNvSpPr>
-          <p:nvPr/>
-        </p:nvSpPr>
-        <p:spPr>
-          <a:xfrm xmlns:a="http://schemas.openxmlformats.org/drawingml/2006/main">
+            <a:spLocks noGrp="1"/>
+          </p:cNvSpPr>
+          <p:nvPr/>
+        </p:nvSpPr>
+        <p:spPr>
+          <a:xfrm>
             <a:off x="1466850" y="3028950"/>
             <a:ext cx="9620250" cy="457200"/>
           </a:xfrm>
-          <a:prstGeom xmlns:a="http://schemas.openxmlformats.org/drawingml/2006/main" prst="rect">
-            <a:avLst/>
-          </a:prstGeom>
-          <a:noFill xmlns:a="http://schemas.openxmlformats.org/drawingml/2006/main"/>
-          <a:ln xmlns:a="http://schemas.openxmlformats.org/drawingml/2006/main" w="0">
+          <a:prstGeom prst="rect">
+            <a:avLst/>
+          </a:prstGeom>
+          <a:noFill/>
+          <a:ln w="0">
             <a:noFill/>
           </a:ln>
         </p:spPr>
         <p:txBody>
-          <a:bodyPr xmlns:a="http://schemas.openxmlformats.org/drawingml/2006/main">
+          <a:bodyPr>
             <a:noAutofit/>
           </a:bodyPr>
-          <a:lstStyle xmlns:a="http://schemas.openxmlformats.org/drawingml/2006/main"/>
-          <a:p xmlns:a="http://schemas.openxmlformats.org/drawingml/2006/main">
+          <a:lstStyle/>
+          <a:p>
             <a:pPr>
               <a:buNone/>
               <a:defRPr sz="1875" b="0">
@@ -7688,37 +7531,37 @@
       </p:sp>
       <p:sp>
         <p:nvSpPr>
-          <p:cNvPr id="9" name="">
-            <a:extLst xmlns:a="http://schemas.openxmlformats.org/drawingml/2006/main">
+          <p:cNvPr id="9" name="Rectangle 8">
+            <a:extLst>
               <a:ext uri="{FF2B5EF4-FFF2-40B4-BE49-F238E27FC236}">
                 <a16:creationId xmlns:a16="http://schemas.microsoft.com/office/drawing/2014/main" id="{5F9CFACF-D445-4E2E-B7B1-B02A24E597D2}"/>
               </a:ext>
             </a:extLst>
           </p:cNvPr>
           <p:cNvSpPr>
-            <a:spLocks xmlns:a="http://schemas.openxmlformats.org/drawingml/2006/main" noGrp="1"/>
-          </p:cNvSpPr>
-          <p:nvPr/>
-        </p:nvSpPr>
-        <p:spPr>
-          <a:xfrm xmlns:a="http://schemas.openxmlformats.org/drawingml/2006/main">
+            <a:spLocks noGrp="1"/>
+          </p:cNvSpPr>
+          <p:nvPr/>
+        </p:nvSpPr>
+        <p:spPr>
+          <a:xfrm>
             <a:off x="609600" y="3619500"/>
             <a:ext cx="666750" cy="523875"/>
           </a:xfrm>
-          <a:prstGeom xmlns:a="http://schemas.openxmlformats.org/drawingml/2006/main" prst="rect">
-            <a:avLst/>
-          </a:prstGeom>
-          <a:noFill xmlns:a="http://schemas.openxmlformats.org/drawingml/2006/main"/>
-          <a:ln xmlns:a="http://schemas.openxmlformats.org/drawingml/2006/main" w="0">
+          <a:prstGeom prst="rect">
+            <a:avLst/>
+          </a:prstGeom>
+          <a:noFill/>
+          <a:ln w="0">
             <a:noFill/>
           </a:ln>
         </p:spPr>
         <p:txBody>
-          <a:bodyPr xmlns:a="http://schemas.openxmlformats.org/drawingml/2006/main">
+          <a:bodyPr>
             <a:noAutofit/>
           </a:bodyPr>
-          <a:lstStyle xmlns:a="http://schemas.openxmlformats.org/drawingml/2006/main"/>
-          <a:p xmlns:a="http://schemas.openxmlformats.org/drawingml/2006/main">
+          <a:lstStyle/>
+          <a:p>
             <a:pPr>
               <a:buNone/>
               <a:defRPr sz="2925" b="1">
@@ -7746,37 +7589,37 @@
       </p:sp>
       <p:sp>
         <p:nvSpPr>
-          <p:cNvPr id="10" name="">
-            <a:extLst xmlns:a="http://schemas.openxmlformats.org/drawingml/2006/main">
+          <p:cNvPr id="10" name="Rectangle 9">
+            <a:extLst>
               <a:ext uri="{FF2B5EF4-FFF2-40B4-BE49-F238E27FC236}">
                 <a16:creationId xmlns:a16="http://schemas.microsoft.com/office/drawing/2014/main" id="{E97C1399-AA0E-44C0-85F5-49CD917E0E6F}"/>
               </a:ext>
             </a:extLst>
           </p:cNvPr>
           <p:cNvSpPr>
-            <a:spLocks xmlns:a="http://schemas.openxmlformats.org/drawingml/2006/main" noGrp="1"/>
-          </p:cNvSpPr>
-          <p:nvPr/>
-        </p:nvSpPr>
-        <p:spPr>
-          <a:xfrm xmlns:a="http://schemas.openxmlformats.org/drawingml/2006/main">
+            <a:spLocks noGrp="1"/>
+          </p:cNvSpPr>
+          <p:nvPr/>
+        </p:nvSpPr>
+        <p:spPr>
+          <a:xfrm>
             <a:off x="1466850" y="3619500"/>
             <a:ext cx="4286250" cy="457200"/>
           </a:xfrm>
-          <a:prstGeom xmlns:a="http://schemas.openxmlformats.org/drawingml/2006/main" prst="rect">
-            <a:avLst/>
-          </a:prstGeom>
-          <a:noFill xmlns:a="http://schemas.openxmlformats.org/drawingml/2006/main"/>
-          <a:ln xmlns:a="http://schemas.openxmlformats.org/drawingml/2006/main" w="0">
+          <a:prstGeom prst="rect">
+            <a:avLst/>
+          </a:prstGeom>
+          <a:noFill/>
+          <a:ln w="0">
             <a:noFill/>
           </a:ln>
         </p:spPr>
         <p:txBody>
-          <a:bodyPr xmlns:a="http://schemas.openxmlformats.org/drawingml/2006/main">
+          <a:bodyPr>
             <a:noAutofit/>
           </a:bodyPr>
-          <a:lstStyle xmlns:a="http://schemas.openxmlformats.org/drawingml/2006/main"/>
-          <a:p xmlns:a="http://schemas.openxmlformats.org/drawingml/2006/main">
+          <a:lstStyle/>
+          <a:p>
             <a:pPr>
               <a:buNone/>
               <a:defRPr sz="2175" b="1">
@@ -7804,37 +7647,37 @@
       </p:sp>
       <p:sp>
         <p:nvSpPr>
-          <p:cNvPr id="11" name="">
-            <a:extLst xmlns:a="http://schemas.openxmlformats.org/drawingml/2006/main">
+          <p:cNvPr id="11" name="Rectangle 10">
+            <a:extLst>
               <a:ext uri="{FF2B5EF4-FFF2-40B4-BE49-F238E27FC236}">
                 <a16:creationId xmlns:a16="http://schemas.microsoft.com/office/drawing/2014/main" id="{3ACE9503-9C91-4AE4-8F2E-EA959FB41D72}"/>
               </a:ext>
             </a:extLst>
           </p:cNvPr>
           <p:cNvSpPr>
-            <a:spLocks xmlns:a="http://schemas.openxmlformats.org/drawingml/2006/main" noGrp="1"/>
-          </p:cNvSpPr>
-          <p:nvPr/>
-        </p:nvSpPr>
-        <p:spPr>
-          <a:xfrm xmlns:a="http://schemas.openxmlformats.org/drawingml/2006/main">
+            <a:spLocks noGrp="1"/>
+          </p:cNvSpPr>
+          <p:nvPr/>
+        </p:nvSpPr>
+        <p:spPr>
+          <a:xfrm>
             <a:off x="1466850" y="4076700"/>
             <a:ext cx="9620250" cy="457200"/>
           </a:xfrm>
-          <a:prstGeom xmlns:a="http://schemas.openxmlformats.org/drawingml/2006/main" prst="rect">
-            <a:avLst/>
-          </a:prstGeom>
-          <a:noFill xmlns:a="http://schemas.openxmlformats.org/drawingml/2006/main"/>
-          <a:ln xmlns:a="http://schemas.openxmlformats.org/drawingml/2006/main" w="0">
+          <a:prstGeom prst="rect">
+            <a:avLst/>
+          </a:prstGeom>
+          <a:noFill/>
+          <a:ln w="0">
             <a:noFill/>
           </a:ln>
         </p:spPr>
         <p:txBody>
-          <a:bodyPr xmlns:a="http://schemas.openxmlformats.org/drawingml/2006/main">
+          <a:bodyPr>
             <a:noAutofit/>
           </a:bodyPr>
-          <a:lstStyle xmlns:a="http://schemas.openxmlformats.org/drawingml/2006/main"/>
-          <a:p xmlns:a="http://schemas.openxmlformats.org/drawingml/2006/main">
+          <a:lstStyle/>
+          <a:p>
             <a:pPr>
               <a:buNone/>
               <a:defRPr sz="1875" b="0">
@@ -7862,37 +7705,37 @@
       </p:sp>
       <p:sp>
         <p:nvSpPr>
-          <p:cNvPr id="12" name="">
-            <a:extLst xmlns:a="http://schemas.openxmlformats.org/drawingml/2006/main">
+          <p:cNvPr id="12" name="Rectangle 11">
+            <a:extLst>
               <a:ext uri="{FF2B5EF4-FFF2-40B4-BE49-F238E27FC236}">
                 <a16:creationId xmlns:a16="http://schemas.microsoft.com/office/drawing/2014/main" id="{14A9B9E9-62E4-4237-AC2C-EB440953CEEC}"/>
               </a:ext>
             </a:extLst>
           </p:cNvPr>
           <p:cNvSpPr>
-            <a:spLocks xmlns:a="http://schemas.openxmlformats.org/drawingml/2006/main" noGrp="1"/>
-          </p:cNvSpPr>
-          <p:nvPr/>
-        </p:nvSpPr>
-        <p:spPr>
-          <a:xfrm xmlns:a="http://schemas.openxmlformats.org/drawingml/2006/main">
+            <a:spLocks noGrp="1"/>
+          </p:cNvSpPr>
+          <p:nvPr/>
+        </p:nvSpPr>
+        <p:spPr>
+          <a:xfrm>
             <a:off x="609600" y="4667250"/>
             <a:ext cx="666750" cy="523875"/>
           </a:xfrm>
-          <a:prstGeom xmlns:a="http://schemas.openxmlformats.org/drawingml/2006/main" prst="rect">
-            <a:avLst/>
-          </a:prstGeom>
-          <a:noFill xmlns:a="http://schemas.openxmlformats.org/drawingml/2006/main"/>
-          <a:ln xmlns:a="http://schemas.openxmlformats.org/drawingml/2006/main" w="0">
+          <a:prstGeom prst="rect">
+            <a:avLst/>
+          </a:prstGeom>
+          <a:noFill/>
+          <a:ln w="0">
             <a:noFill/>
           </a:ln>
         </p:spPr>
         <p:txBody>
-          <a:bodyPr xmlns:a="http://schemas.openxmlformats.org/drawingml/2006/main">
+          <a:bodyPr>
             <a:noAutofit/>
           </a:bodyPr>
-          <a:lstStyle xmlns:a="http://schemas.openxmlformats.org/drawingml/2006/main"/>
-          <a:p xmlns:a="http://schemas.openxmlformats.org/drawingml/2006/main">
+          <a:lstStyle/>
+          <a:p>
             <a:pPr>
               <a:buNone/>
               <a:defRPr sz="2925" b="1">
@@ -7920,37 +7763,37 @@
       </p:sp>
       <p:sp>
         <p:nvSpPr>
-          <p:cNvPr id="13" name="">
-            <a:extLst xmlns:a="http://schemas.openxmlformats.org/drawingml/2006/main">
+          <p:cNvPr id="13" name="Rectangle 12">
+            <a:extLst>
               <a:ext uri="{FF2B5EF4-FFF2-40B4-BE49-F238E27FC236}">
                 <a16:creationId xmlns:a16="http://schemas.microsoft.com/office/drawing/2014/main" id="{55C9C11F-4FE3-4733-AC8B-E6C178E5A9EE}"/>
               </a:ext>
             </a:extLst>
           </p:cNvPr>
           <p:cNvSpPr>
-            <a:spLocks xmlns:a="http://schemas.openxmlformats.org/drawingml/2006/main" noGrp="1"/>
-          </p:cNvSpPr>
-          <p:nvPr/>
-        </p:nvSpPr>
-        <p:spPr>
-          <a:xfrm xmlns:a="http://schemas.openxmlformats.org/drawingml/2006/main">
+            <a:spLocks noGrp="1"/>
+          </p:cNvSpPr>
+          <p:nvPr/>
+        </p:nvSpPr>
+        <p:spPr>
+          <a:xfrm>
             <a:off x="1466850" y="4667250"/>
             <a:ext cx="4286250" cy="457200"/>
           </a:xfrm>
-          <a:prstGeom xmlns:a="http://schemas.openxmlformats.org/drawingml/2006/main" prst="rect">
-            <a:avLst/>
-          </a:prstGeom>
-          <a:noFill xmlns:a="http://schemas.openxmlformats.org/drawingml/2006/main"/>
-          <a:ln xmlns:a="http://schemas.openxmlformats.org/drawingml/2006/main" w="0">
+          <a:prstGeom prst="rect">
+            <a:avLst/>
+          </a:prstGeom>
+          <a:noFill/>
+          <a:ln w="0">
             <a:noFill/>
           </a:ln>
         </p:spPr>
         <p:txBody>
-          <a:bodyPr xmlns:a="http://schemas.openxmlformats.org/drawingml/2006/main">
+          <a:bodyPr>
             <a:noAutofit/>
           </a:bodyPr>
-          <a:lstStyle xmlns:a="http://schemas.openxmlformats.org/drawingml/2006/main"/>
-          <a:p xmlns:a="http://schemas.openxmlformats.org/drawingml/2006/main">
+          <a:lstStyle/>
+          <a:p>
             <a:pPr>
               <a:buNone/>
               <a:defRPr sz="2175" b="1">
@@ -7978,37 +7821,37 @@
       </p:sp>
       <p:sp>
         <p:nvSpPr>
-          <p:cNvPr id="14" name="">
-            <a:extLst xmlns:a="http://schemas.openxmlformats.org/drawingml/2006/main">
+          <p:cNvPr id="14" name="Rectangle 13">
+            <a:extLst>
               <a:ext uri="{FF2B5EF4-FFF2-40B4-BE49-F238E27FC236}">
                 <a16:creationId xmlns:a16="http://schemas.microsoft.com/office/drawing/2014/main" id="{B0697E6F-1CD9-41D3-AA7C-CD67BA9365FB}"/>
               </a:ext>
             </a:extLst>
           </p:cNvPr>
           <p:cNvSpPr>
-            <a:spLocks xmlns:a="http://schemas.openxmlformats.org/drawingml/2006/main" noGrp="1"/>
-          </p:cNvSpPr>
-          <p:nvPr/>
-        </p:nvSpPr>
-        <p:spPr>
-          <a:xfrm xmlns:a="http://schemas.openxmlformats.org/drawingml/2006/main">
+            <a:spLocks noGrp="1"/>
+          </p:cNvSpPr>
+          <p:nvPr/>
+        </p:nvSpPr>
+        <p:spPr>
+          <a:xfrm>
             <a:off x="1466850" y="5124450"/>
             <a:ext cx="9620250" cy="457200"/>
           </a:xfrm>
-          <a:prstGeom xmlns:a="http://schemas.openxmlformats.org/drawingml/2006/main" prst="rect">
-            <a:avLst/>
-          </a:prstGeom>
-          <a:noFill xmlns:a="http://schemas.openxmlformats.org/drawingml/2006/main"/>
-          <a:ln xmlns:a="http://schemas.openxmlformats.org/drawingml/2006/main" w="0">
+          <a:prstGeom prst="rect">
+            <a:avLst/>
+          </a:prstGeom>
+          <a:noFill/>
+          <a:ln w="0">
             <a:noFill/>
           </a:ln>
         </p:spPr>
         <p:txBody>
-          <a:bodyPr xmlns:a="http://schemas.openxmlformats.org/drawingml/2006/main">
+          <a:bodyPr>
             <a:noAutofit/>
           </a:bodyPr>
-          <a:lstStyle xmlns:a="http://schemas.openxmlformats.org/drawingml/2006/main"/>
-          <a:p xmlns:a="http://schemas.openxmlformats.org/drawingml/2006/main">
+          <a:lstStyle/>
+          <a:p>
             <a:pPr>
               <a:buNone/>
               <a:defRPr sz="1875" b="0">
@@ -8036,37 +7879,37 @@
       </p:sp>
       <p:sp>
         <p:nvSpPr>
-          <p:cNvPr id="15" name="">
-            <a:extLst xmlns:a="http://schemas.openxmlformats.org/drawingml/2006/main">
+          <p:cNvPr id="15" name="Rectangle 14">
+            <a:extLst>
               <a:ext uri="{FF2B5EF4-FFF2-40B4-BE49-F238E27FC236}">
                 <a16:creationId xmlns:a16="http://schemas.microsoft.com/office/drawing/2014/main" id="{D9BE8FF7-76ED-4858-92BF-9A111C2B89FE}"/>
               </a:ext>
             </a:extLst>
           </p:cNvPr>
           <p:cNvSpPr>
-            <a:spLocks xmlns:a="http://schemas.openxmlformats.org/drawingml/2006/main" noGrp="1"/>
-          </p:cNvSpPr>
-          <p:nvPr/>
-        </p:nvSpPr>
-        <p:spPr>
-          <a:xfrm xmlns:a="http://schemas.openxmlformats.org/drawingml/2006/main">
+            <a:spLocks noGrp="1"/>
+          </p:cNvSpPr>
+          <p:nvPr/>
+        </p:nvSpPr>
+        <p:spPr>
+          <a:xfrm>
             <a:off x="609600" y="6000750"/>
             <a:ext cx="10668000" cy="342900"/>
           </a:xfrm>
-          <a:prstGeom xmlns:a="http://schemas.openxmlformats.org/drawingml/2006/main" prst="rect">
-            <a:avLst/>
-          </a:prstGeom>
-          <a:noFill xmlns:a="http://schemas.openxmlformats.org/drawingml/2006/main"/>
-          <a:ln xmlns:a="http://schemas.openxmlformats.org/drawingml/2006/main" w="0">
+          <a:prstGeom prst="rect">
+            <a:avLst/>
+          </a:prstGeom>
+          <a:noFill/>
+          <a:ln w="0">
             <a:noFill/>
           </a:ln>
         </p:spPr>
         <p:txBody>
-          <a:bodyPr xmlns:a="http://schemas.openxmlformats.org/drawingml/2006/main">
+          <a:bodyPr>
             <a:noAutofit/>
           </a:bodyPr>
-          <a:lstStyle xmlns:a="http://schemas.openxmlformats.org/drawingml/2006/main"/>
-          <a:p xmlns:a="http://schemas.openxmlformats.org/drawingml/2006/main">
+          <a:lstStyle/>
+          <a:p>
             <a:pPr>
               <a:buNone/>
               <a:defRPr sz="1650" b="0">
@@ -8099,6 +7942,9 @@
       </p:ext>
     </p:extLst>
   </p:cSld>
+  <p:clrMapOvr>
+    <a:masterClrMapping/>
+  </p:clrMapOvr>
 </p:sld>
 </file>
 
@@ -8344,5 +8190,254 @@
       </a:bgFillStyleLst>
     </a:fmtScheme>
   </a:themeElements>
+  <a:objectDefaults/>
+  <a:extraClrSchemeLst/>
+</a:theme>
+</file>
+
+<file path=ppt/theme/theme2.xml><?xml version="1.0" encoding="utf-8"?>
+<a:theme xmlns:a="http://schemas.openxmlformats.org/drawingml/2006/main" name="ChatGPT">
+  <a:themeElements>
+    <a:clrScheme name="ChatGPT">
+      <a:dk1>
+        <a:srgbClr val="000000"/>
+      </a:dk1>
+      <a:lt1>
+        <a:srgbClr val="FFFFFF"/>
+      </a:lt1>
+      <a:dk2>
+        <a:srgbClr val="0E2841"/>
+      </a:dk2>
+      <a:lt2>
+        <a:srgbClr val="E8E8E8"/>
+      </a:lt2>
+      <a:accent1>
+        <a:srgbClr val="156082"/>
+      </a:accent1>
+      <a:accent2>
+        <a:srgbClr val="E97132"/>
+      </a:accent2>
+      <a:accent3>
+        <a:srgbClr val="196B24"/>
+      </a:accent3>
+      <a:accent4>
+        <a:srgbClr val="0F9ED5"/>
+      </a:accent4>
+      <a:accent5>
+        <a:srgbClr val="A02B93"/>
+      </a:accent5>
+      <a:accent6>
+        <a:srgbClr val="4EA72E"/>
+      </a:accent6>
+      <a:hlink>
+        <a:srgbClr val="467886"/>
+      </a:hlink>
+      <a:folHlink>
+        <a:srgbClr val="96607D"/>
+      </a:folHlink>
+    </a:clrScheme>
+    <a:fontScheme name="Office">
+      <a:majorFont>
+        <a:latin typeface="Calibri Light"/>
+        <a:ea typeface="Calibri Light"/>
+        <a:cs typeface="Calibri Light"/>
+      </a:majorFont>
+      <a:minorFont>
+        <a:latin typeface="Calibri"/>
+        <a:ea typeface="Calibri"/>
+        <a:cs typeface="Calibri"/>
+      </a:minorFont>
+    </a:fontScheme>
+    <a:fmtScheme name="ChatGPT">
+      <a:fillStyleLst>
+        <a:solidFill>
+          <a:schemeClr val="phClr"/>
+        </a:solidFill>
+        <a:gradFill>
+          <a:gsLst>
+            <a:gs pos="0">
+              <a:schemeClr val="phClr">
+                <a:tint val="67000"/>
+                <a:lumMod val="110000"/>
+                <a:satMod val="105000"/>
+              </a:schemeClr>
+            </a:gs>
+            <a:gs pos="50000">
+              <a:schemeClr val="phClr">
+                <a:tint val="73000"/>
+                <a:lumMod val="105000"/>
+                <a:satMod val="103000"/>
+              </a:schemeClr>
+            </a:gs>
+            <a:gs pos="100000">
+              <a:schemeClr val="phClr">
+                <a:tint val="81000"/>
+                <a:lumMod val="105000"/>
+                <a:satMod val="109000"/>
+              </a:schemeClr>
+            </a:gs>
+          </a:gsLst>
+          <a:lin ang="5400000" scaled="0"/>
+        </a:gradFill>
+        <a:gradFill>
+          <a:gsLst>
+            <a:gs pos="0">
+              <a:schemeClr val="phClr">
+                <a:tint val="94000"/>
+                <a:lumMod val="102000"/>
+                <a:satMod val="103000"/>
+              </a:schemeClr>
+            </a:gs>
+            <a:gs pos="50000">
+              <a:schemeClr val="phClr">
+                <a:shade val="100000"/>
+                <a:lumMod val="100000"/>
+                <a:satMod val="110000"/>
+              </a:schemeClr>
+            </a:gs>
+            <a:gs pos="100000">
+              <a:schemeClr val="phClr">
+                <a:shade val="78000"/>
+                <a:lumMod val="99000"/>
+                <a:satMod val="120000"/>
+              </a:schemeClr>
+            </a:gs>
+          </a:gsLst>
+          <a:lin ang="5400000" scaled="0"/>
+        </a:gradFill>
+      </a:fillStyleLst>
+      <a:lnStyleLst>
+        <a:ln w="12700">
+          <a:solidFill>
+            <a:schemeClr val="phClr"/>
+          </a:solidFill>
+          <a:prstDash val="solid"/>
+        </a:ln>
+        <a:ln w="19050">
+          <a:solidFill>
+            <a:schemeClr val="phClr"/>
+          </a:solidFill>
+          <a:prstDash val="solid"/>
+        </a:ln>
+        <a:ln w="25400">
+          <a:solidFill>
+            <a:schemeClr val="phClr"/>
+          </a:solidFill>
+          <a:prstDash val="solid"/>
+        </a:ln>
+      </a:lnStyleLst>
+      <a:effectStyleLst>
+        <a:effectStyle>
+          <a:effectLst/>
+        </a:effectStyle>
+        <a:effectStyle>
+          <a:effectLst/>
+        </a:effectStyle>
+        <a:effectStyle>
+          <a:effectLst>
+            <a:outerShdw blurRad="57150" dist="19050" dir="5400000">
+              <a:srgbClr val="000000">
+                <a:alpha val="16000"/>
+              </a:srgbClr>
+            </a:outerShdw>
+          </a:effectLst>
+        </a:effectStyle>
+        <a:effectStyle>
+          <a:effectLst>
+            <a:outerShdw blurRad="19050" dist="9525" dir="5400000">
+              <a:srgbClr val="000000">
+                <a:alpha val="6000"/>
+              </a:srgbClr>
+            </a:outerShdw>
+          </a:effectLst>
+        </a:effectStyle>
+        <a:effectStyle>
+          <a:effectLst>
+            <a:outerShdw blurRad="28575" dist="9525" dir="5400000">
+              <a:srgbClr val="000000">
+                <a:alpha val="8000"/>
+              </a:srgbClr>
+            </a:outerShdw>
+          </a:effectLst>
+        </a:effectStyle>
+        <a:effectStyle>
+          <a:effectLst>
+            <a:outerShdw blurRad="57150" dist="19050" dir="5400000">
+              <a:srgbClr val="000000">
+                <a:alpha val="10000"/>
+              </a:srgbClr>
+            </a:outerShdw>
+          </a:effectLst>
+        </a:effectStyle>
+        <a:effectStyle>
+          <a:effectLst>
+            <a:outerShdw blurRad="114300" dist="38100" dir="5400000">
+              <a:srgbClr val="000000">
+                <a:alpha val="12000"/>
+              </a:srgbClr>
+            </a:outerShdw>
+          </a:effectLst>
+        </a:effectStyle>
+        <a:effectStyle>
+          <a:effectLst>
+            <a:outerShdw blurRad="171450" dist="57150" dir="5400000">
+              <a:srgbClr val="000000">
+                <a:alpha val="16000"/>
+              </a:srgbClr>
+            </a:outerShdw>
+          </a:effectLst>
+        </a:effectStyle>
+        <a:effectStyle>
+          <a:effectLst>
+            <a:outerShdw blurRad="266700" dist="95250" dir="5400000">
+              <a:srgbClr val="000000">
+                <a:alpha val="24000"/>
+              </a:srgbClr>
+            </a:outerShdw>
+          </a:effectLst>
+        </a:effectStyle>
+      </a:effectStyleLst>
+      <a:bgFillStyleLst>
+        <a:solidFill>
+          <a:schemeClr val="phClr"/>
+        </a:solidFill>
+        <a:solidFill>
+          <a:schemeClr val="phClr">
+            <a:tint val="95000"/>
+            <a:satMod val="170000"/>
+          </a:schemeClr>
+        </a:solidFill>
+        <a:gradFill>
+          <a:gsLst>
+            <a:gs pos="0">
+              <a:schemeClr val="phClr">
+                <a:tint val="93000"/>
+                <a:shade val="98000"/>
+                <a:lumMod val="102000"/>
+                <a:satMod val="150000"/>
+              </a:schemeClr>
+            </a:gs>
+            <a:gs pos="50000">
+              <a:schemeClr val="phClr">
+                <a:tint val="98000"/>
+                <a:shade val="90000"/>
+                <a:lumMod val="103000"/>
+                <a:satMod val="130000"/>
+              </a:schemeClr>
+            </a:gs>
+            <a:gs pos="100000">
+              <a:schemeClr val="phClr">
+                <a:shade val="63000"/>
+                <a:satMod val="120000"/>
+              </a:schemeClr>
+            </a:gs>
+          </a:gsLst>
+          <a:lin ang="5400000" scaled="0"/>
+        </a:gradFill>
+      </a:bgFillStyleLst>
+    </a:fmtScheme>
+  </a:themeElements>
+  <a:objectDefaults/>
+  <a:extraClrSchemeLst/>
 </a:theme>
 </file>